--- a/day2-deck/decks/Fixed Ops Profitability - House Style.pptx
+++ b/day2-deck/decks/Fixed Ops Profitability - House Style.pptx
@@ -197,9 +197,9 @@
           </c:marker>
           <c:cat>
             <c:multiLvlStrRef>
-              <c:f>Sheet1!$A$2:$A$10</c:f>
+              <c:f>Sheet1!$A$2:$A$13</c:f>
               <c:multiLvlStrCache>
-                <c:ptCount val="9"/>
+                <c:ptCount val="12"/>
                 <c:lvl>
                   <c:pt idx="0">
                     <c:v>Jan</c:v>
@@ -228,16 +228,25 @@
                   <c:pt idx="8">
                     <c:v>Sep</c:v>
                   </c:pt>
+                  <c:pt idx="9">
+                    <c:v>Oct</c:v>
+                  </c:pt>
+                  <c:pt idx="10">
+                    <c:v>Nov</c:v>
+                  </c:pt>
+                  <c:pt idx="11">
+                    <c:v>Dec</c:v>
+                  </c:pt>
                 </c:lvl>
               </c:multiLvlStrCache>
             </c:multiLvlStrRef>
           </c:cat>
           <c:val>
             <c:numRef>
-              <c:f>Sheet1!$B$2:$B$10</c:f>
+              <c:f>Sheet1!$B$2:$B$13</c:f>
               <c:numCache>
                 <c:formatCode>General</c:formatCode>
-                <c:ptCount val="9"/>
+                <c:ptCount val="12"/>
                 <c:pt idx="0">
                   <c:v>74.8</c:v>
                 </c:pt>
@@ -264,6 +273,15 @@
                 </c:pt>
                 <c:pt idx="8">
                   <c:v>77.6</c:v>
+                </c:pt>
+                <c:pt idx="9">
+                  <c:v/>
+                </c:pt>
+                <c:pt idx="10">
+                  <c:v/>
+                </c:pt>
+                <c:pt idx="11">
+                  <c:v/>
                 </c:pt>
               </c:numCache>
             </c:numRef>
@@ -483,9 +501,9 @@
           </c:marker>
           <c:cat>
             <c:multiLvlStrRef>
-              <c:f>Sheet1!$A$2:$A$10</c:f>
+              <c:f>Sheet1!$A$2:$A$13</c:f>
               <c:multiLvlStrCache>
-                <c:ptCount val="9"/>
+                <c:ptCount val="12"/>
                 <c:lvl>
                   <c:pt idx="0">
                     <c:v>Jan</c:v>
@@ -514,16 +532,25 @@
                   <c:pt idx="8">
                     <c:v>Sep</c:v>
                   </c:pt>
+                  <c:pt idx="9">
+                    <c:v>Oct</c:v>
+                  </c:pt>
+                  <c:pt idx="10">
+                    <c:v>Nov</c:v>
+                  </c:pt>
+                  <c:pt idx="11">
+                    <c:v>Dec</c:v>
+                  </c:pt>
                 </c:lvl>
               </c:multiLvlStrCache>
             </c:multiLvlStrRef>
           </c:cat>
           <c:val>
             <c:numRef>
-              <c:f>Sheet1!$B$2:$B$10</c:f>
+              <c:f>Sheet1!$B$2:$B$13</c:f>
               <c:numCache>
                 <c:formatCode>General</c:formatCode>
-                <c:ptCount val="9"/>
+                <c:ptCount val="12"/>
                 <c:pt idx="0">
                   <c:v>16.9</c:v>
                 </c:pt>
@@ -550,6 +577,15 @@
                 </c:pt>
                 <c:pt idx="8">
                   <c:v>13.1</c:v>
+                </c:pt>
+                <c:pt idx="9">
+                  <c:v>21.1</c:v>
+                </c:pt>
+                <c:pt idx="10">
+                  <c:v>14.4</c:v>
+                </c:pt>
+                <c:pt idx="11">
+                  <c:v>16.7</c:v>
                 </c:pt>
               </c:numCache>
             </c:numRef>
@@ -790,9 +826,9 @@
           </c:marker>
           <c:cat>
             <c:multiLvlStrRef>
-              <c:f>Sheet1!$A$2:$A$10</c:f>
+              <c:f>Sheet1!$A$2:$A$13</c:f>
               <c:multiLvlStrCache>
-                <c:ptCount val="9"/>
+                <c:ptCount val="12"/>
                 <c:lvl>
                   <c:pt idx="0">
                     <c:v>Jan</c:v>
@@ -821,16 +857,25 @@
                   <c:pt idx="8">
                     <c:v>Sep</c:v>
                   </c:pt>
+                  <c:pt idx="9">
+                    <c:v>Oct</c:v>
+                  </c:pt>
+                  <c:pt idx="10">
+                    <c:v>Nov</c:v>
+                  </c:pt>
+                  <c:pt idx="11">
+                    <c:v>Dec</c:v>
+                  </c:pt>
                 </c:lvl>
               </c:multiLvlStrCache>
             </c:multiLvlStrRef>
           </c:cat>
           <c:val>
             <c:numRef>
-              <c:f>Sheet1!$B$2:$B$10</c:f>
+              <c:f>Sheet1!$B$2:$B$13</c:f>
               <c:numCache>
                 <c:formatCode>General</c:formatCode>
-                <c:ptCount val="9"/>
+                <c:ptCount val="12"/>
                 <c:pt idx="0">
                   <c:v>33.5</c:v>
                 </c:pt>
@@ -857,6 +902,15 @@
                 </c:pt>
                 <c:pt idx="8">
                   <c:v>38.8</c:v>
+                </c:pt>
+                <c:pt idx="9">
+                  <c:v/>
+                </c:pt>
+                <c:pt idx="10">
+                  <c:v/>
+                </c:pt>
+                <c:pt idx="11">
+                  <c:v/>
                 </c:pt>
               </c:numCache>
             </c:numRef>
@@ -935,7 +989,7 @@
         <c:axId val="2094734552"/>
         <c:scaling>
           <c:orientation val="minMax"/>
-          <c:max val="45"/>
+          <c:max val="50"/>
           <c:min val="25"/>
         </c:scaling>
         <c:delete val="0"/>
@@ -1073,9 +1127,9 @@
           </c:marker>
           <c:cat>
             <c:multiLvlStrRef>
-              <c:f>Sheet1!$A$2:$A$10</c:f>
+              <c:f>Sheet1!$A$2:$A$13</c:f>
               <c:multiLvlStrCache>
-                <c:ptCount val="9"/>
+                <c:ptCount val="12"/>
                 <c:lvl>
                   <c:pt idx="0">
                     <c:v>Jan</c:v>
@@ -1104,16 +1158,25 @@
                   <c:pt idx="8">
                     <c:v>Sep</c:v>
                   </c:pt>
+                  <c:pt idx="9">
+                    <c:v>Oct</c:v>
+                  </c:pt>
+                  <c:pt idx="10">
+                    <c:v>Nov</c:v>
+                  </c:pt>
+                  <c:pt idx="11">
+                    <c:v>Dec</c:v>
+                  </c:pt>
                 </c:lvl>
               </c:multiLvlStrCache>
             </c:multiLvlStrRef>
           </c:cat>
           <c:val>
             <c:numRef>
-              <c:f>Sheet1!$B$2:$B$10</c:f>
+              <c:f>Sheet1!$B$2:$B$13</c:f>
               <c:numCache>
                 <c:formatCode>General</c:formatCode>
-                <c:ptCount val="9"/>
+                <c:ptCount val="12"/>
                 <c:pt idx="0">
                   <c:v/>
                 </c:pt>
@@ -1140,6 +1203,15 @@
                 </c:pt>
                 <c:pt idx="8">
                   <c:v>38.8</c:v>
+                </c:pt>
+                <c:pt idx="9">
+                  <c:v/>
+                </c:pt>
+                <c:pt idx="10">
+                  <c:v/>
+                </c:pt>
+                <c:pt idx="11">
+                  <c:v/>
                 </c:pt>
               </c:numCache>
             </c:numRef>
@@ -1219,7 +1291,7 @@
         <c:axId val="2094734552"/>
         <c:scaling>
           <c:orientation val="minMax"/>
-          <c:max val="45"/>
+          <c:max val="50"/>
           <c:min val="25"/>
         </c:scaling>
         <c:delete val="0"/>
@@ -1365,9 +1437,9 @@
           </c:marker>
           <c:cat>
             <c:multiLvlStrRef>
-              <c:f>Sheet1!$A$2:$A$10</c:f>
+              <c:f>Sheet1!$A$2:$A$13</c:f>
               <c:multiLvlStrCache>
-                <c:ptCount val="9"/>
+                <c:ptCount val="12"/>
                 <c:lvl>
                   <c:pt idx="0">
                     <c:v>Jan</c:v>
@@ -1396,16 +1468,25 @@
                   <c:pt idx="8">
                     <c:v>Sep</c:v>
                   </c:pt>
+                  <c:pt idx="9">
+                    <c:v>Oct</c:v>
+                  </c:pt>
+                  <c:pt idx="10">
+                    <c:v>Nov</c:v>
+                  </c:pt>
+                  <c:pt idx="11">
+                    <c:v>Dec</c:v>
+                  </c:pt>
                 </c:lvl>
               </c:multiLvlStrCache>
             </c:multiLvlStrRef>
           </c:cat>
           <c:val>
             <c:numRef>
-              <c:f>Sheet1!$B$2:$B$10</c:f>
+              <c:f>Sheet1!$B$2:$B$13</c:f>
               <c:numCache>
                 <c:formatCode>General</c:formatCode>
-                <c:ptCount val="9"/>
+                <c:ptCount val="12"/>
                 <c:pt idx="0">
                   <c:v>33.5</c:v>
                 </c:pt>
@@ -1431,6 +1512,15 @@
                   <c:v/>
                 </c:pt>
                 <c:pt idx="8">
+                  <c:v/>
+                </c:pt>
+                <c:pt idx="9">
+                  <c:v/>
+                </c:pt>
+                <c:pt idx="10">
+                  <c:v/>
+                </c:pt>
+                <c:pt idx="11">
                   <c:v/>
                 </c:pt>
               </c:numCache>
@@ -1511,7 +1601,7 @@
         <c:axId val="2094734552"/>
         <c:scaling>
           <c:orientation val="minMax"/>
-          <c:max val="45"/>
+          <c:max val="50"/>
           <c:min val="25"/>
         </c:scaling>
         <c:delete val="0"/>
@@ -1657,9 +1747,9 @@
           </c:marker>
           <c:cat>
             <c:multiLvlStrRef>
-              <c:f>Sheet1!$A$2:$A$10</c:f>
+              <c:f>Sheet1!$A$2:$A$13</c:f>
               <c:multiLvlStrCache>
-                <c:ptCount val="9"/>
+                <c:ptCount val="12"/>
                 <c:lvl>
                   <c:pt idx="0">
                     <c:v>Jan</c:v>
@@ -1688,16 +1778,25 @@
                   <c:pt idx="8">
                     <c:v>Sep</c:v>
                   </c:pt>
+                  <c:pt idx="9">
+                    <c:v>Oct</c:v>
+                  </c:pt>
+                  <c:pt idx="10">
+                    <c:v>Nov</c:v>
+                  </c:pt>
+                  <c:pt idx="11">
+                    <c:v>Dec</c:v>
+                  </c:pt>
                 </c:lvl>
               </c:multiLvlStrCache>
             </c:multiLvlStrRef>
           </c:cat>
           <c:val>
             <c:numRef>
-              <c:f>Sheet1!$B$2:$B$10</c:f>
+              <c:f>Sheet1!$B$2:$B$13</c:f>
               <c:numCache>
                 <c:formatCode>General</c:formatCode>
-                <c:ptCount val="9"/>
+                <c:ptCount val="12"/>
                 <c:pt idx="0">
                   <c:v>39.6</c:v>
                 </c:pt>
@@ -1724,6 +1823,15 @@
                 </c:pt>
                 <c:pt idx="8">
                   <c:v/>
+                </c:pt>
+                <c:pt idx="9">
+                  <c:v>42.6</c:v>
+                </c:pt>
+                <c:pt idx="10">
+                  <c:v>33.3</c:v>
+                </c:pt>
+                <c:pt idx="11">
+                  <c:v>33.8</c:v>
                 </c:pt>
               </c:numCache>
             </c:numRef>
@@ -1803,7 +1911,7 @@
         <c:axId val="2094734552"/>
         <c:scaling>
           <c:orientation val="minMax"/>
-          <c:max val="45"/>
+          <c:max val="50"/>
           <c:min val="25"/>
         </c:scaling>
         <c:delete val="0"/>
@@ -1949,9 +2057,9 @@
           </c:marker>
           <c:cat>
             <c:multiLvlStrRef>
-              <c:f>Sheet1!$A$2:$A$10</c:f>
+              <c:f>Sheet1!$A$2:$A$13</c:f>
               <c:multiLvlStrCache>
-                <c:ptCount val="9"/>
+                <c:ptCount val="12"/>
                 <c:lvl>
                   <c:pt idx="0">
                     <c:v>Jan</c:v>
@@ -1980,16 +2088,25 @@
                   <c:pt idx="8">
                     <c:v>Sep</c:v>
                   </c:pt>
+                  <c:pt idx="9">
+                    <c:v>Oct</c:v>
+                  </c:pt>
+                  <c:pt idx="10">
+                    <c:v>Nov</c:v>
+                  </c:pt>
+                  <c:pt idx="11">
+                    <c:v>Dec</c:v>
+                  </c:pt>
                 </c:lvl>
               </c:multiLvlStrCache>
             </c:multiLvlStrRef>
           </c:cat>
           <c:val>
             <c:numRef>
-              <c:f>Sheet1!$B$2:$B$10</c:f>
+              <c:f>Sheet1!$B$2:$B$13</c:f>
               <c:numCache>
                 <c:formatCode>General</c:formatCode>
-                <c:ptCount val="9"/>
+                <c:ptCount val="12"/>
                 <c:pt idx="0">
                   <c:v/>
                 </c:pt>
@@ -2016,6 +2133,15 @@
                 </c:pt>
                 <c:pt idx="8">
                   <c:v>34.8</c:v>
+                </c:pt>
+                <c:pt idx="9">
+                  <c:v/>
+                </c:pt>
+                <c:pt idx="10">
+                  <c:v/>
+                </c:pt>
+                <c:pt idx="11">
+                  <c:v/>
                 </c:pt>
               </c:numCache>
             </c:numRef>
@@ -2095,7 +2221,7 @@
         <c:axId val="2094734552"/>
         <c:scaling>
           <c:orientation val="minMax"/>
-          <c:max val="45"/>
+          <c:max val="50"/>
           <c:min val="25"/>
         </c:scaling>
         <c:delete val="0"/>
@@ -2244,9 +2370,9 @@
           </c:marker>
           <c:cat>
             <c:multiLvlStrRef>
-              <c:f>Sheet1!$A$2:$A$10</c:f>
+              <c:f>Sheet1!$A$2:$A$13</c:f>
               <c:multiLvlStrCache>
-                <c:ptCount val="9"/>
+                <c:ptCount val="12"/>
                 <c:lvl>
                   <c:pt idx="0">
                     <c:v>Jan</c:v>
@@ -2275,16 +2401,25 @@
                   <c:pt idx="8">
                     <c:v>Sep</c:v>
                   </c:pt>
+                  <c:pt idx="9">
+                    <c:v>Oct</c:v>
+                  </c:pt>
+                  <c:pt idx="10">
+                    <c:v>Nov</c:v>
+                  </c:pt>
+                  <c:pt idx="11">
+                    <c:v>Dec</c:v>
+                  </c:pt>
                 </c:lvl>
               </c:multiLvlStrCache>
             </c:multiLvlStrRef>
           </c:cat>
           <c:val>
             <c:numRef>
-              <c:f>Sheet1!$B$2:$B$10</c:f>
+              <c:f>Sheet1!$B$2:$B$13</c:f>
               <c:numCache>
                 <c:formatCode>General</c:formatCode>
-                <c:ptCount val="9"/>
+                <c:ptCount val="12"/>
                 <c:pt idx="0">
                   <c:v>39.6</c:v>
                 </c:pt>
@@ -2311,6 +2446,15 @@
                 </c:pt>
                 <c:pt idx="8">
                   <c:v>34.8</c:v>
+                </c:pt>
+                <c:pt idx="9">
+                  <c:v>42.6</c:v>
+                </c:pt>
+                <c:pt idx="10">
+                  <c:v>33.3</c:v>
+                </c:pt>
+                <c:pt idx="11">
+                  <c:v>33.8</c:v>
                 </c:pt>
               </c:numCache>
             </c:numRef>
@@ -2391,7 +2535,7 @@
         <c:axId val="2094734552"/>
         <c:scaling>
           <c:orientation val="minMax"/>
-          <c:max val="45"/>
+          <c:max val="50"/>
           <c:min val="25"/>
         </c:scaling>
         <c:delete val="0"/>
@@ -2548,9 +2692,9 @@
           </c:marker>
           <c:cat>
             <c:multiLvlStrRef>
-              <c:f>Sheet1!$A$2:$A$10</c:f>
+              <c:f>Sheet1!$A$2:$A$13</c:f>
               <c:multiLvlStrCache>
-                <c:ptCount val="9"/>
+                <c:ptCount val="12"/>
                 <c:lvl>
                   <c:pt idx="0">
                     <c:v>Jan</c:v>
@@ -2579,16 +2723,25 @@
                   <c:pt idx="8">
                     <c:v>Sep</c:v>
                   </c:pt>
+                  <c:pt idx="9">
+                    <c:v>Oct</c:v>
+                  </c:pt>
+                  <c:pt idx="10">
+                    <c:v>Nov</c:v>
+                  </c:pt>
+                  <c:pt idx="11">
+                    <c:v>Dec</c:v>
+                  </c:pt>
                 </c:lvl>
               </c:multiLvlStrCache>
             </c:multiLvlStrRef>
           </c:cat>
           <c:val>
             <c:numRef>
-              <c:f>Sheet1!$B$2:$B$10</c:f>
+              <c:f>Sheet1!$B$2:$B$13</c:f>
               <c:numCache>
                 <c:formatCode>General</c:formatCode>
-                <c:ptCount val="9"/>
+                <c:ptCount val="12"/>
                 <c:pt idx="0">
                   <c:v/>
                 </c:pt>
@@ -2615,6 +2768,15 @@
                 </c:pt>
                 <c:pt idx="8">
                   <c:v>77.6</c:v>
+                </c:pt>
+                <c:pt idx="9">
+                  <c:v/>
+                </c:pt>
+                <c:pt idx="10">
+                  <c:v/>
+                </c:pt>
+                <c:pt idx="11">
+                  <c:v/>
                 </c:pt>
               </c:numCache>
             </c:numRef>
@@ -2840,9 +3002,9 @@
           </c:marker>
           <c:cat>
             <c:multiLvlStrRef>
-              <c:f>Sheet1!$A$2:$A$10</c:f>
+              <c:f>Sheet1!$A$2:$A$13</c:f>
               <c:multiLvlStrCache>
-                <c:ptCount val="9"/>
+                <c:ptCount val="12"/>
                 <c:lvl>
                   <c:pt idx="0">
                     <c:v>Jan</c:v>
@@ -2871,16 +3033,25 @@
                   <c:pt idx="8">
                     <c:v>Sep</c:v>
                   </c:pt>
+                  <c:pt idx="9">
+                    <c:v>Oct</c:v>
+                  </c:pt>
+                  <c:pt idx="10">
+                    <c:v>Nov</c:v>
+                  </c:pt>
+                  <c:pt idx="11">
+                    <c:v>Dec</c:v>
+                  </c:pt>
                 </c:lvl>
               </c:multiLvlStrCache>
             </c:multiLvlStrRef>
           </c:cat>
           <c:val>
             <c:numRef>
-              <c:f>Sheet1!$B$2:$B$10</c:f>
+              <c:f>Sheet1!$B$2:$B$13</c:f>
               <c:numCache>
                 <c:formatCode>General</c:formatCode>
-                <c:ptCount val="9"/>
+                <c:ptCount val="12"/>
                 <c:pt idx="0">
                   <c:v>74.8</c:v>
                 </c:pt>
@@ -2906,6 +3077,15 @@
                   <c:v/>
                 </c:pt>
                 <c:pt idx="8">
+                  <c:v/>
+                </c:pt>
+                <c:pt idx="9">
+                  <c:v/>
+                </c:pt>
+                <c:pt idx="10">
+                  <c:v/>
+                </c:pt>
+                <c:pt idx="11">
                   <c:v/>
                 </c:pt>
               </c:numCache>
@@ -3132,9 +3312,9 @@
           </c:marker>
           <c:cat>
             <c:multiLvlStrRef>
-              <c:f>Sheet1!$A$2:$A$10</c:f>
+              <c:f>Sheet1!$A$2:$A$13</c:f>
               <c:multiLvlStrCache>
-                <c:ptCount val="9"/>
+                <c:ptCount val="12"/>
                 <c:lvl>
                   <c:pt idx="0">
                     <c:v>Jan</c:v>
@@ -3163,16 +3343,25 @@
                   <c:pt idx="8">
                     <c:v>Sep</c:v>
                   </c:pt>
+                  <c:pt idx="9">
+                    <c:v>Oct</c:v>
+                  </c:pt>
+                  <c:pt idx="10">
+                    <c:v>Nov</c:v>
+                  </c:pt>
+                  <c:pt idx="11">
+                    <c:v>Dec</c:v>
+                  </c:pt>
                 </c:lvl>
               </c:multiLvlStrCache>
             </c:multiLvlStrRef>
           </c:cat>
           <c:val>
             <c:numRef>
-              <c:f>Sheet1!$B$2:$B$10</c:f>
+              <c:f>Sheet1!$B$2:$B$13</c:f>
               <c:numCache>
                 <c:formatCode>General</c:formatCode>
-                <c:ptCount val="9"/>
+                <c:ptCount val="12"/>
                 <c:pt idx="0">
                   <c:v>77</c:v>
                 </c:pt>
@@ -3198,6 +3387,15 @@
                   <c:v/>
                 </c:pt>
                 <c:pt idx="8">
+                  <c:v/>
+                </c:pt>
+                <c:pt idx="9">
+                  <c:v/>
+                </c:pt>
+                <c:pt idx="10">
+                  <c:v/>
+                </c:pt>
+                <c:pt idx="11">
                   <c:v/>
                 </c:pt>
               </c:numCache>
@@ -3424,9 +3622,9 @@
           </c:marker>
           <c:cat>
             <c:multiLvlStrRef>
-              <c:f>Sheet1!$A$2:$A$10</c:f>
+              <c:f>Sheet1!$A$2:$A$13</c:f>
               <c:multiLvlStrCache>
-                <c:ptCount val="9"/>
+                <c:ptCount val="12"/>
                 <c:lvl>
                   <c:pt idx="0">
                     <c:v>Jan</c:v>
@@ -3455,16 +3653,25 @@
                   <c:pt idx="8">
                     <c:v>Sep</c:v>
                   </c:pt>
+                  <c:pt idx="9">
+                    <c:v>Oct</c:v>
+                  </c:pt>
+                  <c:pt idx="10">
+                    <c:v>Nov</c:v>
+                  </c:pt>
+                  <c:pt idx="11">
+                    <c:v>Dec</c:v>
+                  </c:pt>
                 </c:lvl>
               </c:multiLvlStrCache>
             </c:multiLvlStrRef>
           </c:cat>
           <c:val>
             <c:numRef>
-              <c:f>Sheet1!$B$2:$B$10</c:f>
+              <c:f>Sheet1!$B$2:$B$13</c:f>
               <c:numCache>
                 <c:formatCode>General</c:formatCode>
-                <c:ptCount val="9"/>
+                <c:ptCount val="12"/>
                 <c:pt idx="0">
                   <c:v/>
                 </c:pt>
@@ -3491,6 +3698,15 @@
                 </c:pt>
                 <c:pt idx="8">
                   <c:v>72.7</c:v>
+                </c:pt>
+                <c:pt idx="9">
+                  <c:v>82</c:v>
+                </c:pt>
+                <c:pt idx="10">
+                  <c:v>73.4</c:v>
+                </c:pt>
+                <c:pt idx="11">
+                  <c:v>74.6</c:v>
                 </c:pt>
               </c:numCache>
             </c:numRef>
@@ -3719,9 +3935,9 @@
           </c:marker>
           <c:cat>
             <c:multiLvlStrRef>
-              <c:f>Sheet1!$A$2:$A$10</c:f>
+              <c:f>Sheet1!$A$2:$A$13</c:f>
               <c:multiLvlStrCache>
-                <c:ptCount val="9"/>
+                <c:ptCount val="12"/>
                 <c:lvl>
                   <c:pt idx="0">
                     <c:v>Jan</c:v>
@@ -3750,16 +3966,25 @@
                   <c:pt idx="8">
                     <c:v>Sep</c:v>
                   </c:pt>
+                  <c:pt idx="9">
+                    <c:v>Oct</c:v>
+                  </c:pt>
+                  <c:pt idx="10">
+                    <c:v>Nov</c:v>
+                  </c:pt>
+                  <c:pt idx="11">
+                    <c:v>Dec</c:v>
+                  </c:pt>
                 </c:lvl>
               </c:multiLvlStrCache>
             </c:multiLvlStrRef>
           </c:cat>
           <c:val>
             <c:numRef>
-              <c:f>Sheet1!$B$2:$B$10</c:f>
+              <c:f>Sheet1!$B$2:$B$13</c:f>
               <c:numCache>
                 <c:formatCode>General</c:formatCode>
-                <c:ptCount val="9"/>
+                <c:ptCount val="12"/>
                 <c:pt idx="0">
                   <c:v>77</c:v>
                 </c:pt>
@@ -3786,6 +4011,15 @@
                 </c:pt>
                 <c:pt idx="8">
                   <c:v>72.7</c:v>
+                </c:pt>
+                <c:pt idx="9">
+                  <c:v>82</c:v>
+                </c:pt>
+                <c:pt idx="10">
+                  <c:v>73.4</c:v>
+                </c:pt>
+                <c:pt idx="11">
+                  <c:v>74.6</c:v>
                 </c:pt>
               </c:numCache>
             </c:numRef>
@@ -4026,9 +4260,9 @@
           </c:marker>
           <c:cat>
             <c:multiLvlStrRef>
-              <c:f>Sheet1!$A$2:$A$10</c:f>
+              <c:f>Sheet1!$A$2:$A$13</c:f>
               <c:multiLvlStrCache>
-                <c:ptCount val="9"/>
+                <c:ptCount val="12"/>
                 <c:lvl>
                   <c:pt idx="0">
                     <c:v>Jan</c:v>
@@ -4057,16 +4291,25 @@
                   <c:pt idx="8">
                     <c:v>Sep</c:v>
                   </c:pt>
+                  <c:pt idx="9">
+                    <c:v>Oct</c:v>
+                  </c:pt>
+                  <c:pt idx="10">
+                    <c:v>Nov</c:v>
+                  </c:pt>
+                  <c:pt idx="11">
+                    <c:v>Dec</c:v>
+                  </c:pt>
                 </c:lvl>
               </c:multiLvlStrCache>
             </c:multiLvlStrRef>
           </c:cat>
           <c:val>
             <c:numRef>
-              <c:f>Sheet1!$B$2:$B$10</c:f>
+              <c:f>Sheet1!$B$2:$B$13</c:f>
               <c:numCache>
                 <c:formatCode>General</c:formatCode>
-                <c:ptCount val="9"/>
+                <c:ptCount val="12"/>
                 <c:pt idx="0">
                   <c:v>18.1</c:v>
                 </c:pt>
@@ -4093,6 +4336,15 @@
                 </c:pt>
                 <c:pt idx="8">
                   <c:v>19.7</c:v>
+                </c:pt>
+                <c:pt idx="9">
+                  <c:v/>
+                </c:pt>
+                <c:pt idx="10">
+                  <c:v/>
+                </c:pt>
+                <c:pt idx="11">
+                  <c:v/>
                 </c:pt>
               </c:numCache>
             </c:numRef>
@@ -4309,9 +4561,9 @@
           </c:marker>
           <c:cat>
             <c:multiLvlStrRef>
-              <c:f>Sheet1!$A$2:$A$10</c:f>
+              <c:f>Sheet1!$A$2:$A$13</c:f>
               <c:multiLvlStrCache>
-                <c:ptCount val="9"/>
+                <c:ptCount val="12"/>
                 <c:lvl>
                   <c:pt idx="0">
                     <c:v>Jan</c:v>
@@ -4340,16 +4592,25 @@
                   <c:pt idx="8">
                     <c:v>Sep</c:v>
                   </c:pt>
+                  <c:pt idx="9">
+                    <c:v>Oct</c:v>
+                  </c:pt>
+                  <c:pt idx="10">
+                    <c:v>Nov</c:v>
+                  </c:pt>
+                  <c:pt idx="11">
+                    <c:v>Dec</c:v>
+                  </c:pt>
                 </c:lvl>
               </c:multiLvlStrCache>
             </c:multiLvlStrRef>
           </c:cat>
           <c:val>
             <c:numRef>
-              <c:f>Sheet1!$B$2:$B$10</c:f>
+              <c:f>Sheet1!$B$2:$B$13</c:f>
               <c:numCache>
                 <c:formatCode>General</c:formatCode>
-                <c:ptCount val="9"/>
+                <c:ptCount val="12"/>
                 <c:pt idx="0">
                   <c:v>18.1</c:v>
                 </c:pt>
@@ -4376,6 +4637,15 @@
                 </c:pt>
                 <c:pt idx="8">
                   <c:v>19.7</c:v>
+                </c:pt>
+                <c:pt idx="9">
+                  <c:v/>
+                </c:pt>
+                <c:pt idx="10">
+                  <c:v/>
+                </c:pt>
+                <c:pt idx="11">
+                  <c:v/>
                 </c:pt>
               </c:numCache>
             </c:numRef>
@@ -4601,9 +4871,9 @@
           </c:marker>
           <c:cat>
             <c:multiLvlStrRef>
-              <c:f>Sheet1!$A$2:$A$10</c:f>
+              <c:f>Sheet1!$A$2:$A$13</c:f>
               <c:multiLvlStrCache>
-                <c:ptCount val="9"/>
+                <c:ptCount val="12"/>
                 <c:lvl>
                   <c:pt idx="0">
                     <c:v>Jan</c:v>
@@ -4632,16 +4902,25 @@
                   <c:pt idx="8">
                     <c:v>Sep</c:v>
                   </c:pt>
+                  <c:pt idx="9">
+                    <c:v>Oct</c:v>
+                  </c:pt>
+                  <c:pt idx="10">
+                    <c:v>Nov</c:v>
+                  </c:pt>
+                  <c:pt idx="11">
+                    <c:v>Dec</c:v>
+                  </c:pt>
                 </c:lvl>
               </c:multiLvlStrCache>
             </c:multiLvlStrRef>
           </c:cat>
           <c:val>
             <c:numRef>
-              <c:f>Sheet1!$B$2:$B$10</c:f>
+              <c:f>Sheet1!$B$2:$B$13</c:f>
               <c:numCache>
                 <c:formatCode>General</c:formatCode>
-                <c:ptCount val="9"/>
+                <c:ptCount val="12"/>
                 <c:pt idx="0">
                   <c:v>16.9</c:v>
                 </c:pt>
@@ -4668,6 +4947,15 @@
                 </c:pt>
                 <c:pt idx="8">
                   <c:v>13.1</c:v>
+                </c:pt>
+                <c:pt idx="9">
+                  <c:v>21.1</c:v>
+                </c:pt>
+                <c:pt idx="10">
+                  <c:v>14.4</c:v>
+                </c:pt>
+                <c:pt idx="11">
+                  <c:v>16.7</c:v>
                 </c:pt>
               </c:numCache>
             </c:numRef>
@@ -5386,7 +5674,7 @@
           <a:p>
             <a:r>
               <a:rPr lang="en-US" dirty="0"/>
-              <a:t>Source: Qlik - Profit &amp; Loss. Jan-Sep. Same-store, INEOS excluded (opened 2026). P&amp;L line Fixed Ops Absorption % = Total Gross Profit - Fixed Ops / Fixed Expenses. GMC Prescott includes its body shop, as on the P&amp;L. YTD from YTD totals, not the mean of months. Store rows reconcile to the group on every input, both years.</a:t>
+              <a:t>Source: Qlik - Profit &amp; Loss. Jan-Sep. Same-store, INEOS excluded (opened 2026). P&amp;L line Fixed Ops Absorption % = Total Gross Profit - Fixed Ops / Fixed Expenses. GMC Prescott includes its body shop, as on the P&amp;L. YTD from YTD totals, not the mean of months. Store rows reconcile to the group on every input, both years. 2025 shown January-December; October-December pulled Oct 22 on the same basis (chart only).</a:t>
             </a:r>
             <a:endParaRPr lang="en-US" dirty="0"/>
           </a:p>
@@ -5650,7 +5938,7 @@
           <a:p>
             <a:r>
               <a:rPr lang="en-US" dirty="0"/>
-              <a:t>Source: Qlik - Profit &amp; Loss. Jan-Sep. Same-store, INEOS excluded (opened 2026). Mechanical department profit / mechanical department gross (P&amp;L Detail statement). Body shop is its own department and is not included. YTD from YTD totals, not the mean of months. Store rows reconcile to the group on every input, both years.</a:t>
+              <a:t>Source: Qlik - Profit &amp; Loss. Jan-Sep. Same-store, INEOS excluded (opened 2026). Mechanical department profit / mechanical department gross (P&amp;L Detail statement). Body shop is its own department and is not included. YTD from YTD totals, not the mean of months. Store rows reconcile to the group on every input, both years. 2025 shown January-December; October-December pulled Oct 22 on the same basis (chart only).</a:t>
             </a:r>
             <a:endParaRPr lang="en-US" dirty="0"/>
           </a:p>
@@ -5914,7 +6202,7 @@
           <a:p>
             <a:r>
               <a:rPr lang="en-US" dirty="0"/>
-              <a:t>Source: Qlik - Profit &amp; Loss. Jan-Sep. Same-store, INEOS excluded (opened 2026). P&amp;A department profit / P&amp;A department gross (P&amp;L Detail statement). YTD from YTD totals, not the mean of months. Store rows reconcile to the group on every input, both years.</a:t>
+              <a:t>Source: Qlik - Profit &amp; Loss. Jan-Sep. Same-store, INEOS excluded (opened 2026). P&amp;A department profit / P&amp;A department gross (P&amp;L Detail statement). YTD from YTD totals, not the mean of months. Store rows reconcile to the group on every input, both years. 2025 shown January-December; October-December pulled Oct 22 on the same basis (chart only).</a:t>
             </a:r>
             <a:endParaRPr lang="en-US" dirty="0"/>
           </a:p>

--- a/day2-deck/decks/Fixed Ops Profitability - House Style.pptx
+++ b/day2-deck/decks/Fixed Ops Profitability - House Style.pptx
@@ -368,6 +368,17 @@
         </c:scaling>
         <c:delete val="0"/>
         <c:axPos val="l"/>
+        <c:majorGridlines>
+          <c:spPr>
+            <a:ln w="9525" cap="flat">
+              <a:solidFill>
+                <a:srgbClr val="D9D9D9"/>
+              </a:solidFill>
+              <a:prstDash val="solid"/>
+              <a:round/>
+            </a:ln>
+          </c:spPr>
+        </c:majorGridlines>
         <c:numFmt formatCode="0&quot;%&quot;" sourceLinked="0"/>
         <c:majorTickMark val="out"/>
         <c:minorTickMark val="none"/>
@@ -424,6 +435,316 @@
 </file>
 
 <file path=ppt/charts/chart10.xml><?xml version="1.0" encoding="utf-8"?>
+<c:chartSpace xmlns:c="http://schemas.openxmlformats.org/drawingml/2006/chart" xmlns:a="http://schemas.openxmlformats.org/drawingml/2006/main" xmlns:r="http://schemas.openxmlformats.org/officeDocument/2006/relationships">
+  <c:date1904 val="0"/>
+  <c:roundedCorners val="1"/>
+  <c:chart>
+    <c:autoTitleDeleted val="1"/>
+    <c:plotArea>
+      <c:layout/>
+      <c:lineChart>
+        <c:varyColors val="0"/>
+        <c:ser>
+          <c:idx val="0"/>
+          <c:order val="0"/>
+          <c:tx>
+            <c:strRef>
+              <c:f>Sheet1!$B$1</c:f>
+              <c:strCache>
+                <c:ptCount val="1"/>
+                <c:pt idx="0">
+                  <c:v>2025</c:v>
+                </c:pt>
+              </c:strCache>
+            </c:strRef>
+          </c:tx>
+          <c:spPr>
+            <a:solidFill>
+              <a:srgbClr val="9AA3AD"/>
+            </a:solidFill>
+            <a:ln>
+              <a:noFill/>
+            </a:ln>
+            <a:effectLst/>
+          </c:spPr>
+          <c:invertIfNegative val="0"/>
+          <c:dLbls>
+            <c:numFmt formatCode="0.0&quot;%&quot;" sourceLinked="0"/>
+            <c:txPr>
+              <a:bodyPr/>
+              <a:lstStyle/>
+              <a:p>
+                <a:pPr>
+                  <a:defRPr b="0" i="0" strike="noStrike" sz="1400" u="none">
+                    <a:solidFill>
+                      <a:srgbClr val="1A1A1A"/>
+                    </a:solidFill>
+                    <a:latin typeface="+mn-lt"/>
+                  </a:defRPr>
+                </a:pPr>
+              </a:p>
+            </c:txPr>
+            <c:dLblPos val="b"/>
+            <c:showLegendKey val="0"/>
+            <c:showVal val="1"/>
+            <c:showCatName val="0"/>
+            <c:showSerName val="0"/>
+            <c:showPercent val="0"/>
+            <c:showBubbleSize val="0"/>
+            <c:showLeaderLines val="0"/>
+          </c:dLbls>
+          <c:marker>
+            <c:symbol val="none"/>
+            <c:size val="8"/>
+            <c:spPr>
+              <a:solidFill>
+                <a:srgbClr val="9AA3AD"/>
+              </a:solidFill>
+              <a:ln w="9525" cap="flat">
+                <a:solidFill>
+                  <a:srgbClr val="9AA3AD"/>
+                </a:solidFill>
+                <a:prstDash val="solid"/>
+                <a:round/>
+              </a:ln>
+              <a:effectLst/>
+            </c:spPr>
+          </c:marker>
+          <c:cat>
+            <c:multiLvlStrRef>
+              <c:f>Sheet1!$A$2:$A$13</c:f>
+              <c:multiLvlStrCache>
+                <c:ptCount val="12"/>
+                <c:lvl>
+                  <c:pt idx="0">
+                    <c:v>Jan</c:v>
+                  </c:pt>
+                  <c:pt idx="1">
+                    <c:v>Feb</c:v>
+                  </c:pt>
+                  <c:pt idx="2">
+                    <c:v>Mar</c:v>
+                  </c:pt>
+                  <c:pt idx="3">
+                    <c:v>Apr</c:v>
+                  </c:pt>
+                  <c:pt idx="4">
+                    <c:v>May</c:v>
+                  </c:pt>
+                  <c:pt idx="5">
+                    <c:v>Jun</c:v>
+                  </c:pt>
+                  <c:pt idx="6">
+                    <c:v>Jul</c:v>
+                  </c:pt>
+                  <c:pt idx="7">
+                    <c:v>Aug</c:v>
+                  </c:pt>
+                  <c:pt idx="8">
+                    <c:v>Sep</c:v>
+                  </c:pt>
+                  <c:pt idx="9">
+                    <c:v>Oct</c:v>
+                  </c:pt>
+                  <c:pt idx="10">
+                    <c:v>Nov</c:v>
+                  </c:pt>
+                  <c:pt idx="11">
+                    <c:v>Dec</c:v>
+                  </c:pt>
+                </c:lvl>
+              </c:multiLvlStrCache>
+            </c:multiLvlStrRef>
+          </c:cat>
+          <c:val>
+            <c:numRef>
+              <c:f>Sheet1!$B$2:$B$13</c:f>
+              <c:numCache>
+                <c:formatCode>General</c:formatCode>
+                <c:ptCount val="12"/>
+                <c:pt idx="0">
+                  <c:v>16.9</c:v>
+                </c:pt>
+                <c:pt idx="1">
+                  <c:v>16.1</c:v>
+                </c:pt>
+                <c:pt idx="2">
+                  <c:v>21.2</c:v>
+                </c:pt>
+                <c:pt idx="3">
+                  <c:v>21.2</c:v>
+                </c:pt>
+                <c:pt idx="4">
+                  <c:v>21.5</c:v>
+                </c:pt>
+                <c:pt idx="5">
+                  <c:v>19.4</c:v>
+                </c:pt>
+                <c:pt idx="6">
+                  <c:v>20.3</c:v>
+                </c:pt>
+                <c:pt idx="7">
+                  <c:v>19.6</c:v>
+                </c:pt>
+                <c:pt idx="8">
+                  <c:v>13.1</c:v>
+                </c:pt>
+                <c:pt idx="9">
+                  <c:v/>
+                </c:pt>
+                <c:pt idx="10">
+                  <c:v>14.4</c:v>
+                </c:pt>
+                <c:pt idx="11">
+                  <c:v/>
+                </c:pt>
+              </c:numCache>
+            </c:numRef>
+          </c:val>
+          <c:smooth val="0"/>
+        </c:ser>
+        <c:dLbls>
+          <c:numFmt formatCode="0.0&quot;%&quot;" sourceLinked="0"/>
+          <c:txPr>
+            <a:bodyPr/>
+            <a:lstStyle/>
+            <a:p>
+              <a:pPr>
+                <a:defRPr b="0" i="0" strike="noStrike" sz="1400" u="none">
+                  <a:solidFill>
+                    <a:srgbClr val="1A1A1A"/>
+                  </a:solidFill>
+                  <a:latin typeface="+mn-lt"/>
+                </a:defRPr>
+              </a:pPr>
+            </a:p>
+          </c:txPr>
+          <c:dLblPos val="b"/>
+          <c:showLegendKey val="0"/>
+          <c:showVal val="1"/>
+          <c:showCatName val="0"/>
+          <c:showSerName val="0"/>
+          <c:showPercent val="0"/>
+          <c:showBubbleSize val="0"/>
+          <c:showLeaderLines val="0"/>
+        </c:dLbls>
+        <c:marker val="1"/>
+        <c:axId val="2094734554"/>
+        <c:axId val="2094734552"/>
+        <c:axId val="2094734556"/>
+      </c:lineChart>
+      <c:catAx>
+        <c:axId val="2094734554"/>
+        <c:scaling>
+          <c:orientation val="minMax"/>
+        </c:scaling>
+        <c:delete val="0"/>
+        <c:axPos val="b"/>
+        <c:numFmt formatCode="General" sourceLinked="1"/>
+        <c:majorTickMark val="out"/>
+        <c:minorTickMark val="none"/>
+        <c:tickLblPos val="low"/>
+        <c:spPr>
+          <a:ln w="12700" cap="flat">
+            <a:noFill/>
+            <a:prstDash val="solid"/>
+            <a:round/>
+          </a:ln>
+        </c:spPr>
+        <c:txPr>
+          <a:bodyPr/>
+          <a:lstStyle/>
+          <a:p>
+            <a:pPr>
+              <a:defRPr sz="1400" b="0" i="0" u="none" strike="noStrike">
+                <a:solidFill>
+                  <a:srgbClr val="FFFFFF"/>
+                </a:solidFill>
+                <a:latin typeface="+mn-lt"/>
+              </a:defRPr>
+            </a:pPr>
+            <a:endParaRPr lang="en-US"/>
+          </a:p>
+        </c:txPr>
+        <c:crossAx val="2094734552"/>
+        <c:crosses val="min"/>
+        <c:auto val="1"/>
+        <c:lblAlgn val="ctr"/>
+        <c:noMultiLvlLbl val="1"/>
+      </c:catAx>
+      <c:valAx>
+        <c:axId val="2094734552"/>
+        <c:scaling>
+          <c:orientation val="minMax"/>
+          <c:max val="30"/>
+          <c:min val="5"/>
+        </c:scaling>
+        <c:delete val="0"/>
+        <c:axPos val="l"/>
+        <c:numFmt formatCode="0&quot;%&quot;" sourceLinked="0"/>
+        <c:majorTickMark val="out"/>
+        <c:minorTickMark val="none"/>
+        <c:tickLblPos val="nextTo"/>
+        <c:spPr>
+          <a:ln w="12700" cap="flat">
+            <a:noFill/>
+            <a:prstDash val="solid"/>
+            <a:round/>
+          </a:ln>
+        </c:spPr>
+        <c:txPr>
+          <a:bodyPr/>
+          <a:lstStyle/>
+          <a:p>
+            <a:pPr>
+              <a:defRPr sz="1400" b="0" i="0" u="none" strike="noStrike">
+                <a:solidFill>
+                  <a:srgbClr val="FFFFFF"/>
+                </a:solidFill>
+                <a:latin typeface="+mn-lt"/>
+              </a:defRPr>
+            </a:pPr>
+            <a:endParaRPr lang="en-US"/>
+          </a:p>
+        </c:txPr>
+        <c:crossAx val="2094734554"/>
+        <c:crosses val="autoZero"/>
+        <c:crossBetween val="between"/>
+        <c:majorUnit val="5"/>
+      </c:valAx>
+      <c:spPr>
+        <a:solidFill>
+          <a:srgbClr val="FFFFFF">
+            <a:alpha val="0"/>
+          </a:srgbClr>
+        </a:solidFill>
+        <a:ln>
+          <a:noFill/>
+        </a:ln>
+        <a:effectLst/>
+      </c:spPr>
+    </c:plotArea>
+    <c:plotVisOnly val="1"/>
+    <c:dispBlanksAs val="span"/>
+  </c:chart>
+  <c:spPr>
+    <a:solidFill>
+      <a:srgbClr val="FFFFFF">
+        <a:alpha val="0"/>
+      </a:srgbClr>
+    </a:solidFill>
+    <a:ln>
+      <a:noFill/>
+    </a:ln>
+    <a:effectLst/>
+  </c:spPr>
+  <c:externalData r:id="rId1">
+    <c:autoUpdate val="0"/>
+  </c:externalData>
+</c:chartSpace>
+</file>
+
+<file path=ppt/charts/chart11.xml><?xml version="1.0" encoding="utf-8"?>
 <c:chartSpace xmlns:c="http://schemas.openxmlformats.org/drawingml/2006/chart" xmlns:a="http://schemas.openxmlformats.org/drawingml/2006/main" xmlns:r="http://schemas.openxmlformats.org/officeDocument/2006/relationships">
   <c:date1904 val="0"/>
   <c:roundedCorners val="1"/>
@@ -674,17 +995,6 @@
         </c:scaling>
         <c:delete val="0"/>
         <c:axPos val="l"/>
-        <c:majorGridlines>
-          <c:spPr>
-            <a:ln w="9525" cap="flat">
-              <a:solidFill>
-                <a:srgbClr val="D9D9D9"/>
-              </a:solidFill>
-              <a:prstDash val="solid"/>
-              <a:round/>
-            </a:ln>
-          </c:spPr>
-        </c:majorGridlines>
         <c:numFmt formatCode="0&quot;%&quot;" sourceLinked="0"/>
         <c:majorTickMark val="out"/>
         <c:minorTickMark val="none"/>
@@ -748,7 +1058,7 @@
 </c:chartSpace>
 </file>
 
-<file path=ppt/charts/chart11.xml><?xml version="1.0" encoding="utf-8"?>
+<file path=ppt/charts/chart12.xml><?xml version="1.0" encoding="utf-8"?>
 <c:chartSpace xmlns:c="http://schemas.openxmlformats.org/drawingml/2006/chart" xmlns:a="http://schemas.openxmlformats.org/drawingml/2006/main" xmlns:r="http://schemas.openxmlformats.org/officeDocument/2006/relationships">
   <c:date1904 val="0"/>
   <c:roundedCorners val="1"/>
@@ -997,6 +1307,17 @@
         </c:scaling>
         <c:delete val="0"/>
         <c:axPos val="l"/>
+        <c:majorGridlines>
+          <c:spPr>
+            <a:ln w="9525" cap="flat">
+              <a:solidFill>
+                <a:srgbClr val="D9D9D9"/>
+              </a:solidFill>
+              <a:prstDash val="solid"/>
+              <a:round/>
+            </a:ln>
+          </c:spPr>
+        </c:majorGridlines>
         <c:numFmt formatCode="0&quot;%&quot;" sourceLinked="0"/>
         <c:majorTickMark val="out"/>
         <c:minorTickMark val="none"/>
@@ -1052,7 +1373,7 @@
 </c:chartSpace>
 </file>
 
-<file path=ppt/charts/chart12.xml><?xml version="1.0" encoding="utf-8"?>
+<file path=ppt/charts/chart13.xml><?xml version="1.0" encoding="utf-8"?>
 <c:chartSpace xmlns:c="http://schemas.openxmlformats.org/drawingml/2006/chart" xmlns:a="http://schemas.openxmlformats.org/drawingml/2006/main" xmlns:r="http://schemas.openxmlformats.org/officeDocument/2006/relationships">
   <c:date1904 val="0"/>
   <c:roundedCorners val="1"/>
@@ -1362,7 +1683,7 @@
 </c:chartSpace>
 </file>
 
-<file path=ppt/charts/chart13.xml><?xml version="1.0" encoding="utf-8"?>
+<file path=ppt/charts/chart14.xml><?xml version="1.0" encoding="utf-8"?>
 <c:chartSpace xmlns:c="http://schemas.openxmlformats.org/drawingml/2006/chart" xmlns:a="http://schemas.openxmlformats.org/drawingml/2006/main" xmlns:r="http://schemas.openxmlformats.org/officeDocument/2006/relationships">
   <c:date1904 val="0"/>
   <c:roundedCorners val="1"/>
@@ -1672,7 +1993,7 @@
 </c:chartSpace>
 </file>
 
-<file path=ppt/charts/chart14.xml><?xml version="1.0" encoding="utf-8"?>
+<file path=ppt/charts/chart15.xml><?xml version="1.0" encoding="utf-8"?>
 <c:chartSpace xmlns:c="http://schemas.openxmlformats.org/drawingml/2006/chart" xmlns:a="http://schemas.openxmlformats.org/drawingml/2006/main" xmlns:r="http://schemas.openxmlformats.org/officeDocument/2006/relationships">
   <c:date1904 val="0"/>
   <c:roundedCorners val="1"/>
@@ -1831,7 +2152,7 @@
                   <c:v>42.6</c:v>
                 </c:pt>
                 <c:pt idx="10">
-                  <c:v>33.3</c:v>
+                  <c:v/>
                 </c:pt>
                 <c:pt idx="11">
                   <c:v>33.8</c:v>
@@ -1982,7 +2303,7 @@
 </c:chartSpace>
 </file>
 
-<file path=ppt/charts/chart15.xml><?xml version="1.0" encoding="utf-8"?>
+<file path=ppt/charts/chart16.xml><?xml version="1.0" encoding="utf-8"?>
 <c:chartSpace xmlns:c="http://schemas.openxmlformats.org/drawingml/2006/chart" xmlns:a="http://schemas.openxmlformats.org/drawingml/2006/main" xmlns:r="http://schemas.openxmlformats.org/officeDocument/2006/relationships">
   <c:date1904 val="0"/>
   <c:roundedCorners val="1"/>
@@ -2141,7 +2462,7 @@
                   <c:v/>
                 </c:pt>
                 <c:pt idx="10">
-                  <c:v/>
+                  <c:v>33.3</c:v>
                 </c:pt>
                 <c:pt idx="11">
                   <c:v/>
@@ -2292,7 +2613,7 @@
 </c:chartSpace>
 </file>
 
-<file path=ppt/charts/chart16.xml><?xml version="1.0" encoding="utf-8"?>
+<file path=ppt/charts/chart17.xml><?xml version="1.0" encoding="utf-8"?>
 <c:chartSpace xmlns:c="http://schemas.openxmlformats.org/drawingml/2006/chart" xmlns:a="http://schemas.openxmlformats.org/drawingml/2006/main" xmlns:r="http://schemas.openxmlformats.org/officeDocument/2006/relationships">
   <c:date1904 val="0"/>
   <c:roundedCorners val="1"/>
@@ -2543,17 +2864,6 @@
         </c:scaling>
         <c:delete val="0"/>
         <c:axPos val="l"/>
-        <c:majorGridlines>
-          <c:spPr>
-            <a:ln w="9525" cap="flat">
-              <a:solidFill>
-                <a:srgbClr val="D9D9D9"/>
-              </a:solidFill>
-              <a:prstDash val="solid"/>
-              <a:round/>
-            </a:ln>
-          </c:spPr>
-        </c:majorGridlines>
         <c:numFmt formatCode="0&quot;%&quot;" sourceLinked="0"/>
         <c:majorTickMark val="out"/>
         <c:minorTickMark val="none"/>
@@ -3393,13 +3703,13 @@
                   <c:v/>
                 </c:pt>
                 <c:pt idx="9">
-                  <c:v/>
+                  <c:v>82</c:v>
                 </c:pt>
                 <c:pt idx="10">
                   <c:v/>
                 </c:pt>
                 <c:pt idx="11">
-                  <c:v/>
+                  <c:v>74.6</c:v>
                 </c:pt>
               </c:numCache>
             </c:numRef>
@@ -3703,13 +4013,13 @@
                   <c:v>72.7</c:v>
                 </c:pt>
                 <c:pt idx="9">
-                  <c:v>82</c:v>
+                  <c:v/>
                 </c:pt>
                 <c:pt idx="10">
                   <c:v>73.4</c:v>
                 </c:pt>
                 <c:pt idx="11">
-                  <c:v>74.6</c:v>
+                  <c:v/>
                 </c:pt>
               </c:numCache>
             </c:numRef>
@@ -4108,17 +4418,6 @@
         </c:scaling>
         <c:delete val="0"/>
         <c:axPos val="l"/>
-        <c:majorGridlines>
-          <c:spPr>
-            <a:ln w="9525" cap="flat">
-              <a:solidFill>
-                <a:srgbClr val="D9D9D9"/>
-              </a:solidFill>
-              <a:prstDash val="solid"/>
-              <a:round/>
-            </a:ln>
-          </c:spPr>
-        </c:majorGridlines>
         <c:numFmt formatCode="0&quot;%&quot;" sourceLinked="0"/>
         <c:majorTickMark val="out"/>
         <c:minorTickMark val="none"/>
@@ -4431,6 +4730,17 @@
         </c:scaling>
         <c:delete val="0"/>
         <c:axPos val="l"/>
+        <c:majorGridlines>
+          <c:spPr>
+            <a:ln w="9525" cap="flat">
+              <a:solidFill>
+                <a:srgbClr val="D9D9D9"/>
+              </a:solidFill>
+              <a:prstDash val="solid"/>
+              <a:round/>
+            </a:ln>
+          </c:spPr>
+        </c:majorGridlines>
         <c:numFmt formatCode="0&quot;%&quot;" sourceLinked="0"/>
         <c:majorTickMark val="out"/>
         <c:minorTickMark val="none"/>
@@ -4846,7 +5156,7 @@
                 </a:pPr>
               </a:p>
             </c:txPr>
-            <c:dLblPos val="b"/>
+            <c:dLblPos val="t"/>
             <c:showLegendKey val="0"/>
             <c:showVal val="1"/>
             <c:showCatName val="0"/>
@@ -4925,37 +5235,37 @@
                 <c:formatCode>General</c:formatCode>
                 <c:ptCount val="12"/>
                 <c:pt idx="0">
-                  <c:v>16.9</c:v>
+                  <c:v/>
                 </c:pt>
                 <c:pt idx="1">
-                  <c:v>16.1</c:v>
+                  <c:v/>
                 </c:pt>
                 <c:pt idx="2">
-                  <c:v>21.2</c:v>
+                  <c:v/>
                 </c:pt>
                 <c:pt idx="3">
-                  <c:v>21.2</c:v>
+                  <c:v/>
                 </c:pt>
                 <c:pt idx="4">
-                  <c:v>21.5</c:v>
+                  <c:v/>
                 </c:pt>
                 <c:pt idx="5">
-                  <c:v>19.4</c:v>
+                  <c:v/>
                 </c:pt>
                 <c:pt idx="6">
-                  <c:v>20.3</c:v>
+                  <c:v/>
                 </c:pt>
                 <c:pt idx="7">
-                  <c:v>19.6</c:v>
+                  <c:v/>
                 </c:pt>
                 <c:pt idx="8">
-                  <c:v>13.1</c:v>
+                  <c:v/>
                 </c:pt>
                 <c:pt idx="9">
                   <c:v>21.1</c:v>
                 </c:pt>
                 <c:pt idx="10">
-                  <c:v>14.4</c:v>
+                  <c:v/>
                 </c:pt>
                 <c:pt idx="11">
                   <c:v>16.7</c:v>
@@ -4981,7 +5291,7 @@
               </a:pPr>
             </a:p>
           </c:txPr>
-          <c:dLblPos val="b"/>
+          <c:dLblPos val="t"/>
           <c:showLegendKey val="0"/>
           <c:showVal val="1"/>
           <c:showCatName val="0"/>
@@ -35224,9 +35534,25 @@
           </a:graphicData>
         </a:graphic>
       </p:graphicFrame>
-      <p:sp>
-        <p:nvSpPr>
-          <p:cNvPr id="21" name="Shape 15"/>
+      <p:graphicFrame>
+        <p:nvGraphicFramePr>
+          <p:cNvPr id="21" name="Chart 4" descr=""/>
+          <p:cNvGraphicFramePr/>
+          <p:nvPr/>
+        </p:nvGraphicFramePr>
+        <p:xfrm>
+          <a:off x="621792" y="3218688"/>
+          <a:ext cx="10945368" cy="2679192"/>
+        </p:xfrm>
+        <a:graphic xmlns:a="http://schemas.openxmlformats.org/drawingml/2006/main">
+          <a:graphicData uri="http://schemas.openxmlformats.org/drawingml/2006/chart">
+            <c:chart xmlns:c="http://schemas.openxmlformats.org/drawingml/2006/chart" r:id="rId5"/>
+          </a:graphicData>
+        </a:graphic>
+      </p:graphicFrame>
+      <p:sp>
+        <p:nvSpPr>
+          <p:cNvPr id="22" name="Shape 15"/>
           <p:cNvSpPr/>
           <p:nvPr/>
         </p:nvSpPr>
@@ -35246,7 +35572,7 @@
       </p:sp>
       <p:sp>
         <p:nvSpPr>
-          <p:cNvPr id="22" name="Shape 16"/>
+          <p:cNvPr id="23" name="Shape 16"/>
           <p:cNvSpPr/>
           <p:nvPr/>
         </p:nvSpPr>
@@ -35266,7 +35592,7 @@
       </p:sp>
       <p:sp>
         <p:nvSpPr>
-          <p:cNvPr id="23" name="Text 17"/>
+          <p:cNvPr id="24" name="Text 17"/>
           <p:cNvSpPr txBox="1"/>
           <p:nvPr/>
         </p:nvSpPr>
@@ -35305,7 +35631,7 @@
       </p:sp>
       <p:sp>
         <p:nvSpPr>
-          <p:cNvPr id="24" name="Shape 18"/>
+          <p:cNvPr id="25" name="Shape 18"/>
           <p:cNvSpPr/>
           <p:nvPr/>
         </p:nvSpPr>
@@ -35325,7 +35651,7 @@
       </p:sp>
       <p:sp>
         <p:nvSpPr>
-          <p:cNvPr id="25" name="Shape 19"/>
+          <p:cNvPr id="26" name="Shape 19"/>
           <p:cNvSpPr/>
           <p:nvPr/>
         </p:nvSpPr>
@@ -35345,7 +35671,7 @@
       </p:sp>
       <p:sp>
         <p:nvSpPr>
-          <p:cNvPr id="26" name="Text 20"/>
+          <p:cNvPr id="27" name="Text 20"/>
           <p:cNvSpPr txBox="1"/>
           <p:nvPr/>
         </p:nvSpPr>
@@ -35384,7 +35710,7 @@
       </p:sp>
       <p:sp>
         <p:nvSpPr>
-          <p:cNvPr id="27" name="Shape 21"/>
+          <p:cNvPr id="28" name="Shape 21"/>
           <p:cNvSpPr/>
           <p:nvPr/>
         </p:nvSpPr>
@@ -35404,7 +35730,7 @@
       </p:sp>
       <p:sp>
         <p:nvSpPr>
-          <p:cNvPr id="28" name="Text 22"/>
+          <p:cNvPr id="29" name="Text 22"/>
           <p:cNvSpPr txBox="1"/>
           <p:nvPr/>
         </p:nvSpPr>

--- a/day2-deck/decks/Fixed Ops Profitability - House Style.pptx
+++ b/day2-deck/decks/Fixed Ops Profitability - House Style.pptx
@@ -6163,7 +6163,7 @@
           <a:p>
             <a:r>
               <a:rPr lang="en-US" dirty="0"/>
-              <a:t>Source: Qlik - Profit &amp; Loss. Jan-Sep. Same-store, INEOS excluded (opened 2026). P&amp;A department profit / P&amp;A department gross (P&amp;L Detail statement). Top and bottom five stores by change in Parts Net to Gross %, Jan-Sep 2026 vs 2025. Moving now: Jul-Sep 2026 vs Jan-Mar 2026, each store against itself; the group moved +5.3 pts on the same basis, so part of every store's change is seasonal.Conversation starter: each top store says one thing they started doing; each bottom store says what got in the way and what they would try. The room trades ideas. Moving now: ask the top three what they started this year.</a:t>
+              <a:t>Source: Qlik - Profit &amp; Loss. Jan-Sep. Same-store, INEOS excluded (opened 2026). P&amp;A department profit / P&amp;A department gross (P&amp;L Detail statement). Top and bottom five stores by change in Parts Net to Gross %, Jan-Sep 2026 vs 2025. Moving now: Jul-Sep 2026 vs Jan-Mar 2026, each store against itself; the group moved +5.3 pts on the same basis, so part of every store's change is seasonal. Green bar at the right of a row: the store is on both the top five vs last year and the top five moving now.Conversation starter: each top store says one thing they started doing; each bottom store says what got in the way and what they would try. The room trades ideas. Moving now: ask the top three what they started this year.</a:t>
             </a:r>
             <a:endParaRPr lang="en-US" dirty="0"/>
           </a:p>
@@ -6515,7 +6515,7 @@
           <a:p>
             <a:r>
               <a:rPr lang="en-US" dirty="0"/>
-              <a:t>Source: Qlik - Profit &amp; Loss. Jan-Sep. Same-store, INEOS excluded (opened 2026). P&amp;L line Fixed Ops Absorption % = Total Gross Profit - Fixed Ops / Fixed Expenses. GMC Prescott includes its body shop, as on the P&amp;L. Top and bottom five stores by change in Fixed Ops Absorption %, Jan-Sep 2026 vs 2025. Moving now: Jul-Sep 2026 vs Jan-Mar 2026, each store against itself; the group moved +4.2 pts on the same basis, so part of every store's change is seasonal.Conversation starter: each top store says one thing they started doing; each bottom store says what got in the way and what they would try. The room trades ideas. Moving now: ask the top three what they started this year.</a:t>
+              <a:t>Source: Qlik - Profit &amp; Loss. Jan-Sep. Same-store, INEOS excluded (opened 2026). P&amp;L line Fixed Ops Absorption % = Total Gross Profit - Fixed Ops / Fixed Expenses. GMC Prescott includes its body shop, as on the P&amp;L. Top and bottom five stores by change in Fixed Ops Absorption %, Jan-Sep 2026 vs 2025. Moving now: Jul-Sep 2026 vs Jan-Mar 2026, each store against itself; the group moved +4.2 pts on the same basis, so part of every store's change is seasonal. Green bar at the right of a row: the store is on both the top five vs last year and the top five moving now.Conversation starter: each top store says one thing they started doing; each bottom store says what got in the way and what they would try. The room trades ideas. Moving now: ask the top three what they started this year.</a:t>
             </a:r>
             <a:endParaRPr lang="en-US" dirty="0"/>
           </a:p>
@@ -6867,7 +6867,7 @@
           <a:p>
             <a:r>
               <a:rPr lang="en-US" dirty="0"/>
-              <a:t>Source: Qlik - Profit &amp; Loss. Jan-Sep. Same-store, INEOS excluded (opened 2026). Mechanical department profit / mechanical department gross (P&amp;L Detail statement). Body shop is its own department and is not included. Top and bottom five stores by change in Service Net to Gross %, Jan-Sep 2026 vs 2025. Moving now: Jul-Sep 2026 vs Jan-Mar 2026, each store against itself; the group moved +1.0 pts on the same basis, so part of every store's change is seasonal.Conversation starter: each top store says one thing they started doing; each bottom store says what got in the way and what they would try. The room trades ideas. Moving now: ask the top three what they started this year.</a:t>
+              <a:t>Source: Qlik - Profit &amp; Loss. Jan-Sep. Same-store, INEOS excluded (opened 2026). Mechanical department profit / mechanical department gross (P&amp;L Detail statement). Body shop is its own department and is not included. Top and bottom five stores by change in Service Net to Gross %, Jan-Sep 2026 vs 2025. Moving now: Jul-Sep 2026 vs Jan-Mar 2026, each store against itself; the group moved +1.0 pts on the same basis, so part of every store's change is seasonal. Green bar at the right of a row: the store is on both the top five vs last year and the top five moving now.Conversation starter: each top store says one thing they started doing; each bottom store says what got in the way and what they would try. The room trades ideas. Moving now: ask the top three what they started this year.</a:t>
             </a:r>
             <a:endParaRPr lang="en-US" dirty="0"/>
           </a:p>
@@ -13588,7 +13588,7 @@
               <a:buNone/>
             </a:pPr>
             <a:r>
-              <a:rPr lang="en-US" sz="1200" dirty="0">
+              <a:rPr lang="en-US" sz="1200" b="1" dirty="0">
                 <a:solidFill>
                   <a:srgbClr val="0B7A4A"/>
                 </a:solidFill>
@@ -13725,7 +13725,7 @@
               <a:buNone/>
             </a:pPr>
             <a:r>
-              <a:rPr lang="en-US" sz="1200" dirty="0">
+              <a:rPr lang="en-US" sz="1200" b="1" dirty="0">
                 <a:solidFill>
                   <a:srgbClr val="0B7A4A"/>
                 </a:solidFill>
@@ -13862,7 +13862,7 @@
               <a:buNone/>
             </a:pPr>
             <a:r>
-              <a:rPr lang="en-US" sz="1200" dirty="0">
+              <a:rPr lang="en-US" sz="1200" b="1" dirty="0">
                 <a:solidFill>
                   <a:srgbClr val="0B7A4A"/>
                 </a:solidFill>
@@ -13999,7 +13999,7 @@
               <a:buNone/>
             </a:pPr>
             <a:r>
-              <a:rPr lang="en-US" sz="1200" dirty="0">
+              <a:rPr lang="en-US" sz="1200" b="1" dirty="0">
                 <a:solidFill>
                   <a:srgbClr val="0B7A4A"/>
                 </a:solidFill>
@@ -14136,7 +14136,7 @@
               <a:buNone/>
             </a:pPr>
             <a:r>
-              <a:rPr lang="en-US" sz="1200" dirty="0">
+              <a:rPr lang="en-US" sz="1200" b="1" dirty="0">
                 <a:solidFill>
                   <a:srgbClr val="0B7A4A"/>
                 </a:solidFill>
@@ -14273,7 +14273,7 @@
               <a:buNone/>
             </a:pPr>
             <a:r>
-              <a:rPr lang="en-US" sz="1200" dirty="0">
+              <a:rPr lang="en-US" sz="1200" b="1" dirty="0">
                 <a:solidFill>
                   <a:srgbClr val="0B7A4A"/>
                 </a:solidFill>
@@ -14410,7 +14410,7 @@
               <a:buNone/>
             </a:pPr>
             <a:r>
-              <a:rPr lang="en-US" sz="1200" dirty="0">
+              <a:rPr lang="en-US" sz="1200" b="1" dirty="0">
                 <a:solidFill>
                   <a:srgbClr val="0B7A4A"/>
                 </a:solidFill>
@@ -14547,7 +14547,7 @@
               <a:buNone/>
             </a:pPr>
             <a:r>
-              <a:rPr lang="en-US" sz="1200" dirty="0">
+              <a:rPr lang="en-US" sz="1200" b="1" dirty="0">
                 <a:solidFill>
                   <a:srgbClr val="0B7A4A"/>
                 </a:solidFill>
@@ -14684,7 +14684,7 @@
               <a:buNone/>
             </a:pPr>
             <a:r>
-              <a:rPr lang="en-US" sz="1200" dirty="0">
+              <a:rPr lang="en-US" sz="1200" b="1" dirty="0">
                 <a:solidFill>
                   <a:srgbClr val="0B7A4A"/>
                 </a:solidFill>
@@ -14821,7 +14821,7 @@
               <a:buNone/>
             </a:pPr>
             <a:r>
-              <a:rPr lang="en-US" sz="1200" dirty="0">
+              <a:rPr lang="en-US" sz="1200" b="1" dirty="0">
                 <a:solidFill>
                   <a:srgbClr val="0B7A4A"/>
                 </a:solidFill>
@@ -14958,7 +14958,7 @@
               <a:buNone/>
             </a:pPr>
             <a:r>
-              <a:rPr lang="en-US" sz="1200" dirty="0">
+              <a:rPr lang="en-US" sz="1200" b="1" dirty="0">
                 <a:solidFill>
                   <a:srgbClr val="0B7A4A"/>
                 </a:solidFill>
@@ -15095,7 +15095,7 @@
               <a:buNone/>
             </a:pPr>
             <a:r>
-              <a:rPr lang="en-US" sz="1200" dirty="0">
+              <a:rPr lang="en-US" sz="1200" b="1" dirty="0">
                 <a:solidFill>
                   <a:srgbClr val="0B7A4A"/>
                 </a:solidFill>
@@ -15232,7 +15232,7 @@
               <a:buNone/>
             </a:pPr>
             <a:r>
-              <a:rPr lang="en-US" sz="1200" dirty="0">
+              <a:rPr lang="en-US" sz="1200" b="1" dirty="0">
                 <a:solidFill>
                   <a:srgbClr val="0B7A4A"/>
                 </a:solidFill>
@@ -15369,7 +15369,7 @@
               <a:buNone/>
             </a:pPr>
             <a:r>
-              <a:rPr lang="en-US" sz="1200" dirty="0">
+              <a:rPr lang="en-US" sz="1200" b="1" dirty="0">
                 <a:solidFill>
                   <a:srgbClr val="0B7A4A"/>
                 </a:solidFill>
@@ -15506,7 +15506,7 @@
               <a:buNone/>
             </a:pPr>
             <a:r>
-              <a:rPr lang="en-US" sz="1200" dirty="0">
+              <a:rPr lang="en-US" sz="1200" b="1" dirty="0">
                 <a:solidFill>
                   <a:srgbClr val="0B7A4A"/>
                 </a:solidFill>
@@ -15643,7 +15643,7 @@
               <a:buNone/>
             </a:pPr>
             <a:r>
-              <a:rPr lang="en-US" sz="1200" dirty="0">
+              <a:rPr lang="en-US" sz="1200" b="1" dirty="0">
                 <a:solidFill>
                   <a:srgbClr val="A82B26"/>
                 </a:solidFill>
@@ -15780,7 +15780,7 @@
               <a:buNone/>
             </a:pPr>
             <a:r>
-              <a:rPr lang="en-US" sz="1200" dirty="0">
+              <a:rPr lang="en-US" sz="1200" b="1" dirty="0">
                 <a:solidFill>
                   <a:srgbClr val="A82B26"/>
                 </a:solidFill>
@@ -15917,7 +15917,7 @@
               <a:buNone/>
             </a:pPr>
             <a:r>
-              <a:rPr lang="en-US" sz="1200" dirty="0">
+              <a:rPr lang="en-US" sz="1200" b="1" dirty="0">
                 <a:solidFill>
                   <a:srgbClr val="A82B26"/>
                 </a:solidFill>
@@ -16054,7 +16054,7 @@
               <a:buNone/>
             </a:pPr>
             <a:r>
-              <a:rPr lang="en-US" sz="1200" dirty="0">
+              <a:rPr lang="en-US" sz="1200" b="1" dirty="0">
                 <a:solidFill>
                   <a:srgbClr val="A82B26"/>
                 </a:solidFill>
@@ -16191,7 +16191,7 @@
               <a:buNone/>
             </a:pPr>
             <a:r>
-              <a:rPr lang="en-US" sz="1200" dirty="0">
+              <a:rPr lang="en-US" sz="1200" b="1" dirty="0">
                 <a:solidFill>
                   <a:srgbClr val="A82B26"/>
                 </a:solidFill>
@@ -16328,7 +16328,7 @@
               <a:buNone/>
             </a:pPr>
             <a:r>
-              <a:rPr lang="en-US" sz="1200" dirty="0">
+              <a:rPr lang="en-US" sz="1200" b="1" dirty="0">
                 <a:solidFill>
                   <a:srgbClr val="A82B26"/>
                 </a:solidFill>
@@ -16465,7 +16465,7 @@
               <a:buNone/>
             </a:pPr>
             <a:r>
-              <a:rPr lang="en-US" sz="1200" dirty="0">
+              <a:rPr lang="en-US" sz="1200" b="1" dirty="0">
                 <a:solidFill>
                   <a:srgbClr val="A82B26"/>
                 </a:solidFill>
@@ -16602,7 +16602,7 @@
               <a:buNone/>
             </a:pPr>
             <a:r>
-              <a:rPr lang="en-US" sz="1200" dirty="0">
+              <a:rPr lang="en-US" sz="1200" b="1" dirty="0">
                 <a:solidFill>
                   <a:srgbClr val="A82B26"/>
                 </a:solidFill>
@@ -16739,7 +16739,7 @@
               <a:buNone/>
             </a:pPr>
             <a:r>
-              <a:rPr lang="en-US" sz="1200" dirty="0">
+              <a:rPr lang="en-US" sz="1200" b="1" dirty="0">
                 <a:solidFill>
                   <a:srgbClr val="A82B26"/>
                 </a:solidFill>
@@ -16876,7 +16876,7 @@
               <a:buNone/>
             </a:pPr>
             <a:r>
-              <a:rPr lang="en-US" sz="1200" dirty="0">
+              <a:rPr lang="en-US" sz="1200" b="1" dirty="0">
                 <a:solidFill>
                   <a:srgbClr val="A82B26"/>
                 </a:solidFill>
@@ -17013,7 +17013,7 @@
               <a:buNone/>
             </a:pPr>
             <a:r>
-              <a:rPr lang="en-US" sz="1200" dirty="0">
+              <a:rPr lang="en-US" sz="1200" b="1" dirty="0">
                 <a:solidFill>
                   <a:srgbClr val="A82B26"/>
                 </a:solidFill>
@@ -17150,7 +17150,7 @@
               <a:buNone/>
             </a:pPr>
             <a:r>
-              <a:rPr lang="en-US" sz="1200" dirty="0">
+              <a:rPr lang="en-US" sz="1200" b="1" dirty="0">
                 <a:solidFill>
                   <a:srgbClr val="A82B26"/>
                 </a:solidFill>
@@ -17287,7 +17287,7 @@
               <a:buNone/>
             </a:pPr>
             <a:r>
-              <a:rPr lang="en-US" sz="1200" dirty="0">
+              <a:rPr lang="en-US" sz="1200" b="1" dirty="0">
                 <a:solidFill>
                   <a:srgbClr val="A82B26"/>
                 </a:solidFill>
@@ -17424,7 +17424,7 @@
               <a:buNone/>
             </a:pPr>
             <a:r>
-              <a:rPr lang="en-US" sz="1200" dirty="0">
+              <a:rPr lang="en-US" sz="1200" b="1" dirty="0">
                 <a:solidFill>
                   <a:srgbClr val="A82B26"/>
                 </a:solidFill>
@@ -17561,7 +17561,7 @@
               <a:buNone/>
             </a:pPr>
             <a:r>
-              <a:rPr lang="en-US" sz="1200" dirty="0">
+              <a:rPr lang="en-US" sz="1200" b="1" dirty="0">
                 <a:solidFill>
                   <a:srgbClr val="A82B26"/>
                 </a:solidFill>
@@ -17698,7 +17698,7 @@
               <a:buNone/>
             </a:pPr>
             <a:r>
-              <a:rPr lang="en-US" sz="1200" dirty="0">
+              <a:rPr lang="en-US" sz="1200" b="1" dirty="0">
                 <a:solidFill>
                   <a:srgbClr val="A82B26"/>
                 </a:solidFill>
@@ -17835,7 +17835,7 @@
               <a:buNone/>
             </a:pPr>
             <a:r>
-              <a:rPr lang="en-US" sz="1200" dirty="0">
+              <a:rPr lang="en-US" sz="1200" b="1" dirty="0">
                 <a:solidFill>
                   <a:srgbClr val="A82B26"/>
                 </a:solidFill>
@@ -17972,7 +17972,7 @@
               <a:buNone/>
             </a:pPr>
             <a:r>
-              <a:rPr lang="en-US" sz="1200" dirty="0">
+              <a:rPr lang="en-US" sz="1200" b="1" dirty="0">
                 <a:solidFill>
                   <a:srgbClr val="A82B26"/>
                 </a:solidFill>
@@ -18532,7 +18532,27 @@
       </p:sp>
       <p:sp>
         <p:nvSpPr>
-          <p:cNvPr id="13" name="Text 11"/>
+          <p:cNvPr id="13" name="Shape 11"/>
+          <p:cNvSpPr/>
+          <p:nvPr/>
+        </p:nvSpPr>
+        <p:spPr>
+          <a:xfrm>
+            <a:off x="4084320" y="2894990"/>
+            <a:ext cx="64008" cy="682142"/>
+          </a:xfrm>
+          <a:prstGeom prst="rect">
+            <a:avLst/>
+          </a:prstGeom>
+          <a:solidFill>
+            <a:srgbClr val="12A566"/>
+          </a:solidFill>
+          <a:ln/>
+        </p:spPr>
+      </p:sp>
+      <p:sp>
+        <p:nvSpPr>
+          <p:cNvPr id="14" name="Text 12"/>
           <p:cNvSpPr txBox="1"/>
           <p:nvPr/>
         </p:nvSpPr>
@@ -18571,7 +18591,7 @@
       </p:sp>
       <p:sp>
         <p:nvSpPr>
-          <p:cNvPr id="14" name="Text 12"/>
+          <p:cNvPr id="15" name="Text 13"/>
           <p:cNvSpPr txBox="1"/>
           <p:nvPr/>
         </p:nvSpPr>
@@ -18650,7 +18670,7 @@
       </p:sp>
       <p:sp>
         <p:nvSpPr>
-          <p:cNvPr id="15" name="Text 13"/>
+          <p:cNvPr id="16" name="Text 14"/>
           <p:cNvSpPr txBox="1"/>
           <p:nvPr/>
         </p:nvSpPr>
@@ -18689,7 +18709,7 @@
       </p:sp>
       <p:sp>
         <p:nvSpPr>
-          <p:cNvPr id="16" name="Shape 14"/>
+          <p:cNvPr id="17" name="Shape 15"/>
           <p:cNvSpPr/>
           <p:nvPr/>
         </p:nvSpPr>
@@ -18709,7 +18729,7 @@
       </p:sp>
       <p:sp>
         <p:nvSpPr>
-          <p:cNvPr id="17" name="Text 15"/>
+          <p:cNvPr id="18" name="Text 16"/>
           <p:cNvSpPr txBox="1"/>
           <p:nvPr/>
         </p:nvSpPr>
@@ -18748,7 +18768,7 @@
       </p:sp>
       <p:sp>
         <p:nvSpPr>
-          <p:cNvPr id="18" name="Text 16"/>
+          <p:cNvPr id="19" name="Text 17"/>
           <p:cNvSpPr txBox="1"/>
           <p:nvPr/>
         </p:nvSpPr>
@@ -18827,7 +18847,7 @@
       </p:sp>
       <p:sp>
         <p:nvSpPr>
-          <p:cNvPr id="19" name="Text 17"/>
+          <p:cNvPr id="20" name="Text 18"/>
           <p:cNvSpPr txBox="1"/>
           <p:nvPr/>
         </p:nvSpPr>
@@ -18866,7 +18886,7 @@
       </p:sp>
       <p:sp>
         <p:nvSpPr>
-          <p:cNvPr id="20" name="Text 18"/>
+          <p:cNvPr id="21" name="Text 19"/>
           <p:cNvSpPr txBox="1"/>
           <p:nvPr/>
         </p:nvSpPr>
@@ -18905,7 +18925,7 @@
       </p:sp>
       <p:sp>
         <p:nvSpPr>
-          <p:cNvPr id="21" name="Text 19"/>
+          <p:cNvPr id="22" name="Text 20"/>
           <p:cNvSpPr txBox="1"/>
           <p:nvPr/>
         </p:nvSpPr>
@@ -18984,7 +19004,7 @@
       </p:sp>
       <p:sp>
         <p:nvSpPr>
-          <p:cNvPr id="22" name="Text 20"/>
+          <p:cNvPr id="23" name="Text 21"/>
           <p:cNvSpPr txBox="1"/>
           <p:nvPr/>
         </p:nvSpPr>
@@ -19023,7 +19043,7 @@
       </p:sp>
       <p:sp>
         <p:nvSpPr>
-          <p:cNvPr id="23" name="Shape 21"/>
+          <p:cNvPr id="24" name="Shape 22"/>
           <p:cNvSpPr/>
           <p:nvPr/>
         </p:nvSpPr>
@@ -19043,7 +19063,7 @@
       </p:sp>
       <p:sp>
         <p:nvSpPr>
-          <p:cNvPr id="24" name="Text 22"/>
+          <p:cNvPr id="25" name="Text 23"/>
           <p:cNvSpPr txBox="1"/>
           <p:nvPr/>
         </p:nvSpPr>
@@ -19082,7 +19102,7 @@
       </p:sp>
       <p:sp>
         <p:nvSpPr>
-          <p:cNvPr id="25" name="Text 23"/>
+          <p:cNvPr id="26" name="Text 24"/>
           <p:cNvSpPr txBox="1"/>
           <p:nvPr/>
         </p:nvSpPr>
@@ -19161,7 +19181,7 @@
       </p:sp>
       <p:sp>
         <p:nvSpPr>
-          <p:cNvPr id="26" name="Text 24"/>
+          <p:cNvPr id="27" name="Text 25"/>
           <p:cNvSpPr txBox="1"/>
           <p:nvPr/>
         </p:nvSpPr>
@@ -19200,7 +19220,7 @@
       </p:sp>
       <p:sp>
         <p:nvSpPr>
-          <p:cNvPr id="27" name="Shape 25"/>
+          <p:cNvPr id="28" name="Shape 26"/>
           <p:cNvSpPr/>
           <p:nvPr/>
         </p:nvSpPr>
@@ -19220,7 +19240,7 @@
       </p:sp>
       <p:sp>
         <p:nvSpPr>
-          <p:cNvPr id="28" name="Text 26"/>
+          <p:cNvPr id="29" name="Text 27"/>
           <p:cNvSpPr txBox="1"/>
           <p:nvPr/>
         </p:nvSpPr>
@@ -19259,7 +19279,7 @@
       </p:sp>
       <p:sp>
         <p:nvSpPr>
-          <p:cNvPr id="29" name="Text 27"/>
+          <p:cNvPr id="30" name="Text 28"/>
           <p:cNvSpPr txBox="1"/>
           <p:nvPr/>
         </p:nvSpPr>
@@ -19298,7 +19318,7 @@
       </p:sp>
       <p:sp>
         <p:nvSpPr>
-          <p:cNvPr id="30" name="Shape 28"/>
+          <p:cNvPr id="31" name="Shape 29"/>
           <p:cNvSpPr/>
           <p:nvPr/>
         </p:nvSpPr>
@@ -19318,7 +19338,7 @@
       </p:sp>
       <p:sp>
         <p:nvSpPr>
-          <p:cNvPr id="31" name="Text 29"/>
+          <p:cNvPr id="32" name="Text 30"/>
           <p:cNvSpPr txBox="1"/>
           <p:nvPr/>
         </p:nvSpPr>
@@ -19357,7 +19377,7 @@
       </p:sp>
       <p:sp>
         <p:nvSpPr>
-          <p:cNvPr id="32" name="Text 30"/>
+          <p:cNvPr id="33" name="Text 31"/>
           <p:cNvSpPr txBox="1"/>
           <p:nvPr/>
         </p:nvSpPr>
@@ -19436,7 +19456,7 @@
       </p:sp>
       <p:sp>
         <p:nvSpPr>
-          <p:cNvPr id="33" name="Text 31"/>
+          <p:cNvPr id="34" name="Text 32"/>
           <p:cNvSpPr txBox="1"/>
           <p:nvPr/>
         </p:nvSpPr>
@@ -19475,7 +19495,7 @@
       </p:sp>
       <p:sp>
         <p:nvSpPr>
-          <p:cNvPr id="34" name="Text 32"/>
+          <p:cNvPr id="35" name="Text 33"/>
           <p:cNvSpPr txBox="1"/>
           <p:nvPr/>
         </p:nvSpPr>
@@ -19514,7 +19534,7 @@
       </p:sp>
       <p:sp>
         <p:nvSpPr>
-          <p:cNvPr id="35" name="Text 33"/>
+          <p:cNvPr id="36" name="Text 34"/>
           <p:cNvSpPr txBox="1"/>
           <p:nvPr/>
         </p:nvSpPr>
@@ -19593,7 +19613,7 @@
       </p:sp>
       <p:sp>
         <p:nvSpPr>
-          <p:cNvPr id="36" name="Text 34"/>
+          <p:cNvPr id="37" name="Text 35"/>
           <p:cNvSpPr txBox="1"/>
           <p:nvPr/>
         </p:nvSpPr>
@@ -19632,7 +19652,7 @@
       </p:sp>
       <p:sp>
         <p:nvSpPr>
-          <p:cNvPr id="37" name="Shape 35"/>
+          <p:cNvPr id="38" name="Shape 36"/>
           <p:cNvSpPr/>
           <p:nvPr/>
         </p:nvSpPr>
@@ -19652,7 +19672,7 @@
       </p:sp>
       <p:sp>
         <p:nvSpPr>
-          <p:cNvPr id="38" name="Text 36"/>
+          <p:cNvPr id="39" name="Text 37"/>
           <p:cNvSpPr txBox="1"/>
           <p:nvPr/>
         </p:nvSpPr>
@@ -19691,7 +19711,7 @@
       </p:sp>
       <p:sp>
         <p:nvSpPr>
-          <p:cNvPr id="39" name="Text 37"/>
+          <p:cNvPr id="40" name="Text 38"/>
           <p:cNvSpPr txBox="1"/>
           <p:nvPr/>
         </p:nvSpPr>
@@ -19770,7 +19790,7 @@
       </p:sp>
       <p:sp>
         <p:nvSpPr>
-          <p:cNvPr id="40" name="Text 38"/>
+          <p:cNvPr id="41" name="Text 39"/>
           <p:cNvSpPr txBox="1"/>
           <p:nvPr/>
         </p:nvSpPr>
@@ -19809,7 +19829,7 @@
       </p:sp>
       <p:sp>
         <p:nvSpPr>
-          <p:cNvPr id="41" name="Text 39"/>
+          <p:cNvPr id="42" name="Text 40"/>
           <p:cNvSpPr txBox="1"/>
           <p:nvPr/>
         </p:nvSpPr>
@@ -19848,7 +19868,7 @@
       </p:sp>
       <p:sp>
         <p:nvSpPr>
-          <p:cNvPr id="42" name="Text 40"/>
+          <p:cNvPr id="43" name="Text 41"/>
           <p:cNvSpPr txBox="1"/>
           <p:nvPr/>
         </p:nvSpPr>
@@ -19927,7 +19947,7 @@
       </p:sp>
       <p:sp>
         <p:nvSpPr>
-          <p:cNvPr id="43" name="Text 41"/>
+          <p:cNvPr id="44" name="Text 42"/>
           <p:cNvSpPr txBox="1"/>
           <p:nvPr/>
         </p:nvSpPr>
@@ -19966,7 +19986,7 @@
       </p:sp>
       <p:sp>
         <p:nvSpPr>
-          <p:cNvPr id="44" name="Shape 42"/>
+          <p:cNvPr id="45" name="Shape 43"/>
           <p:cNvSpPr/>
           <p:nvPr/>
         </p:nvSpPr>
@@ -19986,7 +20006,7 @@
       </p:sp>
       <p:sp>
         <p:nvSpPr>
-          <p:cNvPr id="45" name="Text 43"/>
+          <p:cNvPr id="46" name="Text 44"/>
           <p:cNvSpPr txBox="1"/>
           <p:nvPr/>
         </p:nvSpPr>
@@ -20025,7 +20045,7 @@
       </p:sp>
       <p:sp>
         <p:nvSpPr>
-          <p:cNvPr id="46" name="Text 44"/>
+          <p:cNvPr id="47" name="Text 45"/>
           <p:cNvSpPr txBox="1"/>
           <p:nvPr/>
         </p:nvSpPr>
@@ -20104,7 +20124,7 @@
       </p:sp>
       <p:sp>
         <p:nvSpPr>
-          <p:cNvPr id="47" name="Text 45"/>
+          <p:cNvPr id="48" name="Text 46"/>
           <p:cNvSpPr txBox="1"/>
           <p:nvPr/>
         </p:nvSpPr>
@@ -20143,7 +20163,7 @@
       </p:sp>
       <p:sp>
         <p:nvSpPr>
-          <p:cNvPr id="48" name="Shape 46"/>
+          <p:cNvPr id="49" name="Shape 47"/>
           <p:cNvSpPr/>
           <p:nvPr/>
         </p:nvSpPr>
@@ -20163,7 +20183,7 @@
       </p:sp>
       <p:sp>
         <p:nvSpPr>
-          <p:cNvPr id="49" name="Text 47"/>
+          <p:cNvPr id="50" name="Text 48"/>
           <p:cNvSpPr txBox="1"/>
           <p:nvPr/>
         </p:nvSpPr>
@@ -20202,7 +20222,7 @@
       </p:sp>
       <p:sp>
         <p:nvSpPr>
-          <p:cNvPr id="50" name="Text 48"/>
+          <p:cNvPr id="51" name="Text 49"/>
           <p:cNvSpPr txBox="1"/>
           <p:nvPr/>
         </p:nvSpPr>
@@ -20241,7 +20261,7 @@
       </p:sp>
       <p:sp>
         <p:nvSpPr>
-          <p:cNvPr id="51" name="Shape 49"/>
+          <p:cNvPr id="52" name="Shape 50"/>
           <p:cNvSpPr/>
           <p:nvPr/>
         </p:nvSpPr>
@@ -20261,7 +20281,7 @@
       </p:sp>
       <p:sp>
         <p:nvSpPr>
-          <p:cNvPr id="52" name="Text 50"/>
+          <p:cNvPr id="53" name="Text 51"/>
           <p:cNvSpPr txBox="1"/>
           <p:nvPr/>
         </p:nvSpPr>
@@ -20300,7 +20320,7 @@
       </p:sp>
       <p:sp>
         <p:nvSpPr>
-          <p:cNvPr id="53" name="Text 51"/>
+          <p:cNvPr id="54" name="Text 52"/>
           <p:cNvSpPr txBox="1"/>
           <p:nvPr/>
         </p:nvSpPr>
@@ -20379,7 +20399,7 @@
       </p:sp>
       <p:sp>
         <p:nvSpPr>
-          <p:cNvPr id="54" name="Text 52"/>
+          <p:cNvPr id="55" name="Text 53"/>
           <p:cNvSpPr txBox="1"/>
           <p:nvPr/>
         </p:nvSpPr>
@@ -20418,7 +20438,7 @@
       </p:sp>
       <p:sp>
         <p:nvSpPr>
-          <p:cNvPr id="55" name="Text 53"/>
+          <p:cNvPr id="56" name="Text 54"/>
           <p:cNvSpPr txBox="1"/>
           <p:nvPr/>
         </p:nvSpPr>
@@ -20457,7 +20477,7 @@
       </p:sp>
       <p:sp>
         <p:nvSpPr>
-          <p:cNvPr id="56" name="Text 54"/>
+          <p:cNvPr id="57" name="Text 55"/>
           <p:cNvSpPr txBox="1"/>
           <p:nvPr/>
         </p:nvSpPr>
@@ -20536,7 +20556,7 @@
       </p:sp>
       <p:sp>
         <p:nvSpPr>
-          <p:cNvPr id="57" name="Text 55"/>
+          <p:cNvPr id="58" name="Text 56"/>
           <p:cNvSpPr txBox="1"/>
           <p:nvPr/>
         </p:nvSpPr>
@@ -20575,7 +20595,7 @@
       </p:sp>
       <p:sp>
         <p:nvSpPr>
-          <p:cNvPr id="58" name="Shape 56"/>
+          <p:cNvPr id="59" name="Shape 57"/>
           <p:cNvSpPr/>
           <p:nvPr/>
         </p:nvSpPr>
@@ -20595,7 +20615,7 @@
       </p:sp>
       <p:sp>
         <p:nvSpPr>
-          <p:cNvPr id="59" name="Text 57"/>
+          <p:cNvPr id="60" name="Text 58"/>
           <p:cNvSpPr txBox="1"/>
           <p:nvPr/>
         </p:nvSpPr>
@@ -20634,7 +20654,7 @@
       </p:sp>
       <p:sp>
         <p:nvSpPr>
-          <p:cNvPr id="60" name="Text 58"/>
+          <p:cNvPr id="61" name="Text 59"/>
           <p:cNvSpPr txBox="1"/>
           <p:nvPr/>
         </p:nvSpPr>
@@ -20713,7 +20733,7 @@
       </p:sp>
       <p:sp>
         <p:nvSpPr>
-          <p:cNvPr id="61" name="Text 59"/>
+          <p:cNvPr id="62" name="Text 60"/>
           <p:cNvSpPr txBox="1"/>
           <p:nvPr/>
         </p:nvSpPr>
@@ -20752,7 +20772,27 @@
       </p:sp>
       <p:sp>
         <p:nvSpPr>
-          <p:cNvPr id="62" name="Text 60"/>
+          <p:cNvPr id="63" name="Shape 61"/>
+          <p:cNvSpPr/>
+          <p:nvPr/>
+        </p:nvSpPr>
+        <p:spPr>
+          <a:xfrm>
+            <a:off x="11466576" y="4405579"/>
+            <a:ext cx="64008" cy="682142"/>
+          </a:xfrm>
+          <a:prstGeom prst="rect">
+            <a:avLst/>
+          </a:prstGeom>
+          <a:solidFill>
+            <a:srgbClr val="12A566"/>
+          </a:solidFill>
+          <a:ln/>
+        </p:spPr>
+      </p:sp>
+      <p:sp>
+        <p:nvSpPr>
+          <p:cNvPr id="64" name="Text 62"/>
           <p:cNvSpPr txBox="1"/>
           <p:nvPr/>
         </p:nvSpPr>
@@ -20791,7 +20831,7 @@
       </p:sp>
       <p:sp>
         <p:nvSpPr>
-          <p:cNvPr id="63" name="Text 61"/>
+          <p:cNvPr id="65" name="Text 63"/>
           <p:cNvSpPr txBox="1"/>
           <p:nvPr/>
         </p:nvSpPr>
@@ -20870,7 +20910,7 @@
       </p:sp>
       <p:sp>
         <p:nvSpPr>
-          <p:cNvPr id="64" name="Text 62"/>
+          <p:cNvPr id="66" name="Text 64"/>
           <p:cNvSpPr txBox="1"/>
           <p:nvPr/>
         </p:nvSpPr>
@@ -20909,7 +20949,7 @@
       </p:sp>
       <p:sp>
         <p:nvSpPr>
-          <p:cNvPr id="65" name="Shape 63"/>
+          <p:cNvPr id="67" name="Shape 65"/>
           <p:cNvSpPr/>
           <p:nvPr/>
         </p:nvSpPr>
@@ -20929,7 +20969,7 @@
       </p:sp>
       <p:sp>
         <p:nvSpPr>
-          <p:cNvPr id="66" name="Text 64"/>
+          <p:cNvPr id="68" name="Text 66"/>
           <p:cNvSpPr txBox="1"/>
           <p:nvPr/>
         </p:nvSpPr>
@@ -20968,7 +21008,7 @@
       </p:sp>
       <p:sp>
         <p:nvSpPr>
-          <p:cNvPr id="67" name="Text 65"/>
+          <p:cNvPr id="69" name="Text 67"/>
           <p:cNvSpPr txBox="1"/>
           <p:nvPr/>
         </p:nvSpPr>
@@ -21047,7 +21087,7 @@
       </p:sp>
       <p:sp>
         <p:nvSpPr>
-          <p:cNvPr id="68" name="Text 66"/>
+          <p:cNvPr id="70" name="Text 68"/>
           <p:cNvSpPr txBox="1"/>
           <p:nvPr/>
         </p:nvSpPr>
@@ -21086,7 +21126,7 @@
       </p:sp>
       <p:sp>
         <p:nvSpPr>
-          <p:cNvPr id="69" name="Shape 67"/>
+          <p:cNvPr id="71" name="Shape 69"/>
           <p:cNvSpPr/>
           <p:nvPr/>
         </p:nvSpPr>
@@ -21106,7 +21146,7 @@
       </p:sp>
       <p:sp>
         <p:nvSpPr>
-          <p:cNvPr id="70" name="Text 68"/>
+          <p:cNvPr id="72" name="Text 70"/>
           <p:cNvSpPr txBox="1"/>
           <p:nvPr/>
         </p:nvSpPr>
@@ -27374,7 +27414,7 @@
               <a:buNone/>
             </a:pPr>
             <a:r>
-              <a:rPr lang="en-US" sz="1200" dirty="0">
+              <a:rPr lang="en-US" sz="1200" b="1" dirty="0">
                 <a:solidFill>
                   <a:srgbClr val="0B7A4A"/>
                 </a:solidFill>
@@ -27511,7 +27551,7 @@
               <a:buNone/>
             </a:pPr>
             <a:r>
-              <a:rPr lang="en-US" sz="1200" dirty="0">
+              <a:rPr lang="en-US" sz="1200" b="1" dirty="0">
                 <a:solidFill>
                   <a:srgbClr val="0B7A4A"/>
                 </a:solidFill>
@@ -27648,7 +27688,7 @@
               <a:buNone/>
             </a:pPr>
             <a:r>
-              <a:rPr lang="en-US" sz="1200" dirty="0">
+              <a:rPr lang="en-US" sz="1200" b="1" dirty="0">
                 <a:solidFill>
                   <a:srgbClr val="0B7A4A"/>
                 </a:solidFill>
@@ -27785,7 +27825,7 @@
               <a:buNone/>
             </a:pPr>
             <a:r>
-              <a:rPr lang="en-US" sz="1200" dirty="0">
+              <a:rPr lang="en-US" sz="1200" b="1" dirty="0">
                 <a:solidFill>
                   <a:srgbClr val="0B7A4A"/>
                 </a:solidFill>
@@ -27922,7 +27962,7 @@
               <a:buNone/>
             </a:pPr>
             <a:r>
-              <a:rPr lang="en-US" sz="1200" dirty="0">
+              <a:rPr lang="en-US" sz="1200" b="1" dirty="0">
                 <a:solidFill>
                   <a:srgbClr val="0B7A4A"/>
                 </a:solidFill>
@@ -28059,7 +28099,7 @@
               <a:buNone/>
             </a:pPr>
             <a:r>
-              <a:rPr lang="en-US" sz="1200" dirty="0">
+              <a:rPr lang="en-US" sz="1200" b="1" dirty="0">
                 <a:solidFill>
                   <a:srgbClr val="0B7A4A"/>
                 </a:solidFill>
@@ -28196,7 +28236,7 @@
               <a:buNone/>
             </a:pPr>
             <a:r>
-              <a:rPr lang="en-US" sz="1200" dirty="0">
+              <a:rPr lang="en-US" sz="1200" b="1" dirty="0">
                 <a:solidFill>
                   <a:srgbClr val="0B7A4A"/>
                 </a:solidFill>
@@ -28333,7 +28373,7 @@
               <a:buNone/>
             </a:pPr>
             <a:r>
-              <a:rPr lang="en-US" sz="1200" dirty="0">
+              <a:rPr lang="en-US" sz="1200" b="1" dirty="0">
                 <a:solidFill>
                   <a:srgbClr val="0B7A4A"/>
                 </a:solidFill>
@@ -28470,7 +28510,7 @@
               <a:buNone/>
             </a:pPr>
             <a:r>
-              <a:rPr lang="en-US" sz="1200" dirty="0">
+              <a:rPr lang="en-US" sz="1200" b="1" dirty="0">
                 <a:solidFill>
                   <a:srgbClr val="0B7A4A"/>
                 </a:solidFill>
@@ -28607,7 +28647,7 @@
               <a:buNone/>
             </a:pPr>
             <a:r>
-              <a:rPr lang="en-US" sz="1200" dirty="0">
+              <a:rPr lang="en-US" sz="1200" b="1" dirty="0">
                 <a:solidFill>
                   <a:srgbClr val="0B7A4A"/>
                 </a:solidFill>
@@ -28744,7 +28784,7 @@
               <a:buNone/>
             </a:pPr>
             <a:r>
-              <a:rPr lang="en-US" sz="1200" dirty="0">
+              <a:rPr lang="en-US" sz="1200" b="1" dirty="0">
                 <a:solidFill>
                   <a:srgbClr val="0B7A4A"/>
                 </a:solidFill>
@@ -28881,7 +28921,7 @@
               <a:buNone/>
             </a:pPr>
             <a:r>
-              <a:rPr lang="en-US" sz="1200" dirty="0">
+              <a:rPr lang="en-US" sz="1200" b="1" dirty="0">
                 <a:solidFill>
                   <a:srgbClr val="0B7A4A"/>
                 </a:solidFill>
@@ -29018,7 +29058,7 @@
               <a:buNone/>
             </a:pPr>
             <a:r>
-              <a:rPr lang="en-US" sz="1200" dirty="0">
+              <a:rPr lang="en-US" sz="1200" b="1" dirty="0">
                 <a:solidFill>
                   <a:srgbClr val="0B7A4A"/>
                 </a:solidFill>
@@ -29155,7 +29195,7 @@
               <a:buNone/>
             </a:pPr>
             <a:r>
-              <a:rPr lang="en-US" sz="1200" dirty="0">
+              <a:rPr lang="en-US" sz="1200" b="1" dirty="0">
                 <a:solidFill>
                   <a:srgbClr val="0B7A4A"/>
                 </a:solidFill>
@@ -29292,7 +29332,7 @@
               <a:buNone/>
             </a:pPr>
             <a:r>
-              <a:rPr lang="en-US" sz="1200" dirty="0">
+              <a:rPr lang="en-US" sz="1200" b="1" dirty="0">
                 <a:solidFill>
                   <a:srgbClr val="0B7A4A"/>
                 </a:solidFill>
@@ -29429,7 +29469,7 @@
               <a:buNone/>
             </a:pPr>
             <a:r>
-              <a:rPr lang="en-US" sz="1200" dirty="0">
+              <a:rPr lang="en-US" sz="1200" b="1" dirty="0">
                 <a:solidFill>
                   <a:srgbClr val="0B7A4A"/>
                 </a:solidFill>
@@ -29566,7 +29606,7 @@
               <a:buNone/>
             </a:pPr>
             <a:r>
-              <a:rPr lang="en-US" sz="1200" dirty="0">
+              <a:rPr lang="en-US" sz="1200" b="1" dirty="0">
                 <a:solidFill>
                   <a:srgbClr val="0B7A4A"/>
                 </a:solidFill>
@@ -29703,7 +29743,7 @@
               <a:buNone/>
             </a:pPr>
             <a:r>
-              <a:rPr lang="en-US" sz="1200" dirty="0">
+              <a:rPr lang="en-US" sz="1200" b="1" dirty="0">
                 <a:solidFill>
                   <a:srgbClr val="0B7A4A"/>
                 </a:solidFill>
@@ -29840,7 +29880,7 @@
               <a:buNone/>
             </a:pPr>
             <a:r>
-              <a:rPr lang="en-US" sz="1200" dirty="0">
+              <a:rPr lang="en-US" sz="1200" b="1" dirty="0">
                 <a:solidFill>
                   <a:srgbClr val="0B7A4A"/>
                 </a:solidFill>
@@ -29977,7 +30017,7 @@
               <a:buNone/>
             </a:pPr>
             <a:r>
-              <a:rPr lang="en-US" sz="1200" dirty="0">
+              <a:rPr lang="en-US" sz="1200" b="1" dirty="0">
                 <a:solidFill>
                   <a:srgbClr val="0B7A4A"/>
                 </a:solidFill>
@@ -30114,7 +30154,7 @@
               <a:buNone/>
             </a:pPr>
             <a:r>
-              <a:rPr lang="en-US" sz="1200" dirty="0">
+              <a:rPr lang="en-US" sz="1200" b="1" dirty="0">
                 <a:solidFill>
                   <a:srgbClr val="0B7A4A"/>
                 </a:solidFill>
@@ -30251,7 +30291,7 @@
               <a:buNone/>
             </a:pPr>
             <a:r>
-              <a:rPr lang="en-US" sz="1200" dirty="0">
+              <a:rPr lang="en-US" sz="1200" b="1" dirty="0">
                 <a:solidFill>
                   <a:srgbClr val="0B7A4A"/>
                 </a:solidFill>
@@ -30388,7 +30428,7 @@
               <a:buNone/>
             </a:pPr>
             <a:r>
-              <a:rPr lang="en-US" sz="1200" dirty="0">
+              <a:rPr lang="en-US" sz="1200" b="1" dirty="0">
                 <a:solidFill>
                   <a:srgbClr val="0B7A4A"/>
                 </a:solidFill>
@@ -30525,7 +30565,7 @@
               <a:buNone/>
             </a:pPr>
             <a:r>
-              <a:rPr lang="en-US" sz="1200" dirty="0">
+              <a:rPr lang="en-US" sz="1200" b="1" dirty="0">
                 <a:solidFill>
                   <a:srgbClr val="A82B26"/>
                 </a:solidFill>
@@ -30662,7 +30702,7 @@
               <a:buNone/>
             </a:pPr>
             <a:r>
-              <a:rPr lang="en-US" sz="1200" dirty="0">
+              <a:rPr lang="en-US" sz="1200" b="1" dirty="0">
                 <a:solidFill>
                   <a:srgbClr val="A82B26"/>
                 </a:solidFill>
@@ -30799,7 +30839,7 @@
               <a:buNone/>
             </a:pPr>
             <a:r>
-              <a:rPr lang="en-US" sz="1200" dirty="0">
+              <a:rPr lang="en-US" sz="1200" b="1" dirty="0">
                 <a:solidFill>
                   <a:srgbClr val="A82B26"/>
                 </a:solidFill>
@@ -30936,7 +30976,7 @@
               <a:buNone/>
             </a:pPr>
             <a:r>
-              <a:rPr lang="en-US" sz="1200" dirty="0">
+              <a:rPr lang="en-US" sz="1200" b="1" dirty="0">
                 <a:solidFill>
                   <a:srgbClr val="A82B26"/>
                 </a:solidFill>
@@ -31073,7 +31113,7 @@
               <a:buNone/>
             </a:pPr>
             <a:r>
-              <a:rPr lang="en-US" sz="1200" dirty="0">
+              <a:rPr lang="en-US" sz="1200" b="1" dirty="0">
                 <a:solidFill>
                   <a:srgbClr val="A82B26"/>
                 </a:solidFill>
@@ -31210,7 +31250,7 @@
               <a:buNone/>
             </a:pPr>
             <a:r>
-              <a:rPr lang="en-US" sz="1200" dirty="0">
+              <a:rPr lang="en-US" sz="1200" b="1" dirty="0">
                 <a:solidFill>
                   <a:srgbClr val="A82B26"/>
                 </a:solidFill>
@@ -31347,7 +31387,7 @@
               <a:buNone/>
             </a:pPr>
             <a:r>
-              <a:rPr lang="en-US" sz="1200" dirty="0">
+              <a:rPr lang="en-US" sz="1200" b="1" dirty="0">
                 <a:solidFill>
                   <a:srgbClr val="A82B26"/>
                 </a:solidFill>
@@ -31484,7 +31524,7 @@
               <a:buNone/>
             </a:pPr>
             <a:r>
-              <a:rPr lang="en-US" sz="1200" dirty="0">
+              <a:rPr lang="en-US" sz="1200" b="1" dirty="0">
                 <a:solidFill>
                   <a:srgbClr val="A82B26"/>
                 </a:solidFill>
@@ -31621,7 +31661,7 @@
               <a:buNone/>
             </a:pPr>
             <a:r>
-              <a:rPr lang="en-US" sz="1200" dirty="0">
+              <a:rPr lang="en-US" sz="1200" b="1" dirty="0">
                 <a:solidFill>
                   <a:srgbClr val="A82B26"/>
                 </a:solidFill>
@@ -31758,7 +31798,7 @@
               <a:buNone/>
             </a:pPr>
             <a:r>
-              <a:rPr lang="en-US" sz="1200" dirty="0">
+              <a:rPr lang="en-US" sz="1200" b="1" dirty="0">
                 <a:solidFill>
                   <a:srgbClr val="A82B26"/>
                 </a:solidFill>
@@ -32495,7 +32535,27 @@
       </p:sp>
       <p:sp>
         <p:nvSpPr>
-          <p:cNvPr id="17" name="Text 15"/>
+          <p:cNvPr id="17" name="Shape 15"/>
+          <p:cNvSpPr/>
+          <p:nvPr/>
+        </p:nvSpPr>
+        <p:spPr>
+          <a:xfrm>
+            <a:off x="4084320" y="3650285"/>
+            <a:ext cx="64008" cy="682142"/>
+          </a:xfrm>
+          <a:prstGeom prst="rect">
+            <a:avLst/>
+          </a:prstGeom>
+          <a:solidFill>
+            <a:srgbClr val="12A566"/>
+          </a:solidFill>
+          <a:ln/>
+        </p:spPr>
+      </p:sp>
+      <p:sp>
+        <p:nvSpPr>
+          <p:cNvPr id="18" name="Text 16"/>
           <p:cNvSpPr txBox="1"/>
           <p:nvPr/>
         </p:nvSpPr>
@@ -32534,7 +32594,7 @@
       </p:sp>
       <p:sp>
         <p:nvSpPr>
-          <p:cNvPr id="18" name="Text 16"/>
+          <p:cNvPr id="19" name="Text 17"/>
           <p:cNvSpPr txBox="1"/>
           <p:nvPr/>
         </p:nvSpPr>
@@ -32613,7 +32673,7 @@
       </p:sp>
       <p:sp>
         <p:nvSpPr>
-          <p:cNvPr id="19" name="Text 17"/>
+          <p:cNvPr id="20" name="Text 18"/>
           <p:cNvSpPr txBox="1"/>
           <p:nvPr/>
         </p:nvSpPr>
@@ -32652,7 +32712,7 @@
       </p:sp>
       <p:sp>
         <p:nvSpPr>
-          <p:cNvPr id="20" name="Text 18"/>
+          <p:cNvPr id="21" name="Text 19"/>
           <p:cNvSpPr txBox="1"/>
           <p:nvPr/>
         </p:nvSpPr>
@@ -32691,7 +32751,7 @@
       </p:sp>
       <p:sp>
         <p:nvSpPr>
-          <p:cNvPr id="21" name="Text 19"/>
+          <p:cNvPr id="22" name="Text 20"/>
           <p:cNvSpPr txBox="1"/>
           <p:nvPr/>
         </p:nvSpPr>
@@ -32770,7 +32830,7 @@
       </p:sp>
       <p:sp>
         <p:nvSpPr>
-          <p:cNvPr id="22" name="Text 20"/>
+          <p:cNvPr id="23" name="Text 21"/>
           <p:cNvSpPr txBox="1"/>
           <p:nvPr/>
         </p:nvSpPr>
@@ -32809,7 +32869,7 @@
       </p:sp>
       <p:sp>
         <p:nvSpPr>
-          <p:cNvPr id="23" name="Shape 21"/>
+          <p:cNvPr id="24" name="Shape 22"/>
           <p:cNvSpPr/>
           <p:nvPr/>
         </p:nvSpPr>
@@ -32829,7 +32889,7 @@
       </p:sp>
       <p:sp>
         <p:nvSpPr>
-          <p:cNvPr id="24" name="Text 22"/>
+          <p:cNvPr id="25" name="Text 23"/>
           <p:cNvSpPr txBox="1"/>
           <p:nvPr/>
         </p:nvSpPr>
@@ -32868,7 +32928,7 @@
       </p:sp>
       <p:sp>
         <p:nvSpPr>
-          <p:cNvPr id="25" name="Text 23"/>
+          <p:cNvPr id="26" name="Text 24"/>
           <p:cNvSpPr txBox="1"/>
           <p:nvPr/>
         </p:nvSpPr>
@@ -32947,7 +33007,7 @@
       </p:sp>
       <p:sp>
         <p:nvSpPr>
-          <p:cNvPr id="26" name="Text 24"/>
+          <p:cNvPr id="27" name="Text 25"/>
           <p:cNvSpPr txBox="1"/>
           <p:nvPr/>
         </p:nvSpPr>
@@ -32986,7 +33046,7 @@
       </p:sp>
       <p:sp>
         <p:nvSpPr>
-          <p:cNvPr id="27" name="Shape 25"/>
+          <p:cNvPr id="28" name="Shape 26"/>
           <p:cNvSpPr/>
           <p:nvPr/>
         </p:nvSpPr>
@@ -33006,7 +33066,7 @@
       </p:sp>
       <p:sp>
         <p:nvSpPr>
-          <p:cNvPr id="28" name="Text 26"/>
+          <p:cNvPr id="29" name="Text 27"/>
           <p:cNvSpPr txBox="1"/>
           <p:nvPr/>
         </p:nvSpPr>
@@ -33045,7 +33105,7 @@
       </p:sp>
       <p:sp>
         <p:nvSpPr>
-          <p:cNvPr id="29" name="Text 27"/>
+          <p:cNvPr id="30" name="Text 28"/>
           <p:cNvSpPr txBox="1"/>
           <p:nvPr/>
         </p:nvSpPr>
@@ -33084,7 +33144,7 @@
       </p:sp>
       <p:sp>
         <p:nvSpPr>
-          <p:cNvPr id="30" name="Shape 28"/>
+          <p:cNvPr id="31" name="Shape 29"/>
           <p:cNvSpPr/>
           <p:nvPr/>
         </p:nvSpPr>
@@ -33104,7 +33164,7 @@
       </p:sp>
       <p:sp>
         <p:nvSpPr>
-          <p:cNvPr id="31" name="Text 29"/>
+          <p:cNvPr id="32" name="Text 30"/>
           <p:cNvSpPr txBox="1"/>
           <p:nvPr/>
         </p:nvSpPr>
@@ -33143,7 +33203,7 @@
       </p:sp>
       <p:sp>
         <p:nvSpPr>
-          <p:cNvPr id="32" name="Text 30"/>
+          <p:cNvPr id="33" name="Text 31"/>
           <p:cNvSpPr txBox="1"/>
           <p:nvPr/>
         </p:nvSpPr>
@@ -33222,7 +33282,7 @@
       </p:sp>
       <p:sp>
         <p:nvSpPr>
-          <p:cNvPr id="33" name="Text 31"/>
+          <p:cNvPr id="34" name="Text 32"/>
           <p:cNvSpPr txBox="1"/>
           <p:nvPr/>
         </p:nvSpPr>
@@ -33261,7 +33321,7 @@
       </p:sp>
       <p:sp>
         <p:nvSpPr>
-          <p:cNvPr id="34" name="Text 32"/>
+          <p:cNvPr id="35" name="Text 33"/>
           <p:cNvSpPr txBox="1"/>
           <p:nvPr/>
         </p:nvSpPr>
@@ -33300,7 +33360,7 @@
       </p:sp>
       <p:sp>
         <p:nvSpPr>
-          <p:cNvPr id="35" name="Text 33"/>
+          <p:cNvPr id="36" name="Text 34"/>
           <p:cNvSpPr txBox="1"/>
           <p:nvPr/>
         </p:nvSpPr>
@@ -33379,7 +33439,7 @@
       </p:sp>
       <p:sp>
         <p:nvSpPr>
-          <p:cNvPr id="36" name="Text 34"/>
+          <p:cNvPr id="37" name="Text 35"/>
           <p:cNvSpPr txBox="1"/>
           <p:nvPr/>
         </p:nvSpPr>
@@ -33418,7 +33478,7 @@
       </p:sp>
       <p:sp>
         <p:nvSpPr>
-          <p:cNvPr id="37" name="Shape 35"/>
+          <p:cNvPr id="38" name="Shape 36"/>
           <p:cNvSpPr/>
           <p:nvPr/>
         </p:nvSpPr>
@@ -33438,7 +33498,7 @@
       </p:sp>
       <p:sp>
         <p:nvSpPr>
-          <p:cNvPr id="38" name="Text 36"/>
+          <p:cNvPr id="39" name="Text 37"/>
           <p:cNvSpPr txBox="1"/>
           <p:nvPr/>
         </p:nvSpPr>
@@ -33477,7 +33537,7 @@
       </p:sp>
       <p:sp>
         <p:nvSpPr>
-          <p:cNvPr id="39" name="Text 37"/>
+          <p:cNvPr id="40" name="Text 38"/>
           <p:cNvSpPr txBox="1"/>
           <p:nvPr/>
         </p:nvSpPr>
@@ -33556,7 +33616,7 @@
       </p:sp>
       <p:sp>
         <p:nvSpPr>
-          <p:cNvPr id="40" name="Text 38"/>
+          <p:cNvPr id="41" name="Text 39"/>
           <p:cNvSpPr txBox="1"/>
           <p:nvPr/>
         </p:nvSpPr>
@@ -33595,7 +33655,7 @@
       </p:sp>
       <p:sp>
         <p:nvSpPr>
-          <p:cNvPr id="41" name="Text 39"/>
+          <p:cNvPr id="42" name="Text 40"/>
           <p:cNvSpPr txBox="1"/>
           <p:nvPr/>
         </p:nvSpPr>
@@ -33634,7 +33694,7 @@
       </p:sp>
       <p:sp>
         <p:nvSpPr>
-          <p:cNvPr id="42" name="Text 40"/>
+          <p:cNvPr id="43" name="Text 41"/>
           <p:cNvSpPr txBox="1"/>
           <p:nvPr/>
         </p:nvSpPr>
@@ -33713,7 +33773,7 @@
       </p:sp>
       <p:sp>
         <p:nvSpPr>
-          <p:cNvPr id="43" name="Text 41"/>
+          <p:cNvPr id="44" name="Text 42"/>
           <p:cNvSpPr txBox="1"/>
           <p:nvPr/>
         </p:nvSpPr>
@@ -33752,7 +33812,7 @@
       </p:sp>
       <p:sp>
         <p:nvSpPr>
-          <p:cNvPr id="44" name="Shape 42"/>
+          <p:cNvPr id="45" name="Shape 43"/>
           <p:cNvSpPr/>
           <p:nvPr/>
         </p:nvSpPr>
@@ -33772,7 +33832,7 @@
       </p:sp>
       <p:sp>
         <p:nvSpPr>
-          <p:cNvPr id="45" name="Text 43"/>
+          <p:cNvPr id="46" name="Text 44"/>
           <p:cNvSpPr txBox="1"/>
           <p:nvPr/>
         </p:nvSpPr>
@@ -33811,7 +33871,7 @@
       </p:sp>
       <p:sp>
         <p:nvSpPr>
-          <p:cNvPr id="46" name="Text 44"/>
+          <p:cNvPr id="47" name="Text 45"/>
           <p:cNvSpPr txBox="1"/>
           <p:nvPr/>
         </p:nvSpPr>
@@ -33890,7 +33950,7 @@
       </p:sp>
       <p:sp>
         <p:nvSpPr>
-          <p:cNvPr id="47" name="Text 45"/>
+          <p:cNvPr id="48" name="Text 46"/>
           <p:cNvSpPr txBox="1"/>
           <p:nvPr/>
         </p:nvSpPr>
@@ -33929,7 +33989,7 @@
       </p:sp>
       <p:sp>
         <p:nvSpPr>
-          <p:cNvPr id="48" name="Shape 46"/>
+          <p:cNvPr id="49" name="Shape 47"/>
           <p:cNvSpPr/>
           <p:nvPr/>
         </p:nvSpPr>
@@ -33949,7 +34009,7 @@
       </p:sp>
       <p:sp>
         <p:nvSpPr>
-          <p:cNvPr id="49" name="Text 47"/>
+          <p:cNvPr id="50" name="Text 48"/>
           <p:cNvSpPr txBox="1"/>
           <p:nvPr/>
         </p:nvSpPr>
@@ -33988,7 +34048,7 @@
       </p:sp>
       <p:sp>
         <p:nvSpPr>
-          <p:cNvPr id="50" name="Text 48"/>
+          <p:cNvPr id="51" name="Text 49"/>
           <p:cNvSpPr txBox="1"/>
           <p:nvPr/>
         </p:nvSpPr>
@@ -34027,7 +34087,7 @@
       </p:sp>
       <p:sp>
         <p:nvSpPr>
-          <p:cNvPr id="51" name="Shape 49"/>
+          <p:cNvPr id="52" name="Shape 50"/>
           <p:cNvSpPr/>
           <p:nvPr/>
         </p:nvSpPr>
@@ -34047,7 +34107,7 @@
       </p:sp>
       <p:sp>
         <p:nvSpPr>
-          <p:cNvPr id="52" name="Text 50"/>
+          <p:cNvPr id="53" name="Text 51"/>
           <p:cNvSpPr txBox="1"/>
           <p:nvPr/>
         </p:nvSpPr>
@@ -34086,7 +34146,7 @@
       </p:sp>
       <p:sp>
         <p:nvSpPr>
-          <p:cNvPr id="53" name="Text 51"/>
+          <p:cNvPr id="54" name="Text 52"/>
           <p:cNvSpPr txBox="1"/>
           <p:nvPr/>
         </p:nvSpPr>
@@ -34165,7 +34225,7 @@
       </p:sp>
       <p:sp>
         <p:nvSpPr>
-          <p:cNvPr id="54" name="Text 52"/>
+          <p:cNvPr id="55" name="Text 53"/>
           <p:cNvSpPr txBox="1"/>
           <p:nvPr/>
         </p:nvSpPr>
@@ -34204,7 +34264,27 @@
       </p:sp>
       <p:sp>
         <p:nvSpPr>
-          <p:cNvPr id="55" name="Text 53"/>
+          <p:cNvPr id="56" name="Shape 54"/>
+          <p:cNvSpPr/>
+          <p:nvPr/>
+        </p:nvSpPr>
+        <p:spPr>
+          <a:xfrm>
+            <a:off x="11466576" y="2894990"/>
+            <a:ext cx="64008" cy="682142"/>
+          </a:xfrm>
+          <a:prstGeom prst="rect">
+            <a:avLst/>
+          </a:prstGeom>
+          <a:solidFill>
+            <a:srgbClr val="12A566"/>
+          </a:solidFill>
+          <a:ln/>
+        </p:spPr>
+      </p:sp>
+      <p:sp>
+        <p:nvSpPr>
+          <p:cNvPr id="57" name="Text 55"/>
           <p:cNvSpPr txBox="1"/>
           <p:nvPr/>
         </p:nvSpPr>
@@ -34243,7 +34323,7 @@
       </p:sp>
       <p:sp>
         <p:nvSpPr>
-          <p:cNvPr id="56" name="Text 54"/>
+          <p:cNvPr id="58" name="Text 56"/>
           <p:cNvSpPr txBox="1"/>
           <p:nvPr/>
         </p:nvSpPr>
@@ -34322,7 +34402,7 @@
       </p:sp>
       <p:sp>
         <p:nvSpPr>
-          <p:cNvPr id="57" name="Text 55"/>
+          <p:cNvPr id="59" name="Text 57"/>
           <p:cNvSpPr txBox="1"/>
           <p:nvPr/>
         </p:nvSpPr>
@@ -34361,7 +34441,7 @@
       </p:sp>
       <p:sp>
         <p:nvSpPr>
-          <p:cNvPr id="58" name="Shape 56"/>
+          <p:cNvPr id="60" name="Shape 58"/>
           <p:cNvSpPr/>
           <p:nvPr/>
         </p:nvSpPr>
@@ -34381,7 +34461,7 @@
       </p:sp>
       <p:sp>
         <p:nvSpPr>
-          <p:cNvPr id="59" name="Text 57"/>
+          <p:cNvPr id="61" name="Text 59"/>
           <p:cNvSpPr txBox="1"/>
           <p:nvPr/>
         </p:nvSpPr>
@@ -34420,7 +34500,7 @@
       </p:sp>
       <p:sp>
         <p:nvSpPr>
-          <p:cNvPr id="60" name="Text 58"/>
+          <p:cNvPr id="62" name="Text 60"/>
           <p:cNvSpPr txBox="1"/>
           <p:nvPr/>
         </p:nvSpPr>
@@ -34499,7 +34579,7 @@
       </p:sp>
       <p:sp>
         <p:nvSpPr>
-          <p:cNvPr id="61" name="Text 59"/>
+          <p:cNvPr id="63" name="Text 61"/>
           <p:cNvSpPr txBox="1"/>
           <p:nvPr/>
         </p:nvSpPr>
@@ -34538,7 +34618,7 @@
       </p:sp>
       <p:sp>
         <p:nvSpPr>
-          <p:cNvPr id="62" name="Text 60"/>
+          <p:cNvPr id="64" name="Text 62"/>
           <p:cNvSpPr txBox="1"/>
           <p:nvPr/>
         </p:nvSpPr>
@@ -34577,7 +34657,7 @@
       </p:sp>
       <p:sp>
         <p:nvSpPr>
-          <p:cNvPr id="63" name="Text 61"/>
+          <p:cNvPr id="65" name="Text 63"/>
           <p:cNvSpPr txBox="1"/>
           <p:nvPr/>
         </p:nvSpPr>
@@ -34656,7 +34736,7 @@
       </p:sp>
       <p:sp>
         <p:nvSpPr>
-          <p:cNvPr id="64" name="Text 62"/>
+          <p:cNvPr id="66" name="Text 64"/>
           <p:cNvSpPr txBox="1"/>
           <p:nvPr/>
         </p:nvSpPr>
@@ -34695,7 +34775,7 @@
       </p:sp>
       <p:sp>
         <p:nvSpPr>
-          <p:cNvPr id="65" name="Shape 63"/>
+          <p:cNvPr id="67" name="Shape 65"/>
           <p:cNvSpPr/>
           <p:nvPr/>
         </p:nvSpPr>
@@ -34715,7 +34795,7 @@
       </p:sp>
       <p:sp>
         <p:nvSpPr>
-          <p:cNvPr id="66" name="Text 64"/>
+          <p:cNvPr id="68" name="Text 66"/>
           <p:cNvSpPr txBox="1"/>
           <p:nvPr/>
         </p:nvSpPr>
@@ -34754,7 +34834,7 @@
       </p:sp>
       <p:sp>
         <p:nvSpPr>
-          <p:cNvPr id="67" name="Text 65"/>
+          <p:cNvPr id="69" name="Text 67"/>
           <p:cNvSpPr txBox="1"/>
           <p:nvPr/>
         </p:nvSpPr>
@@ -34833,7 +34913,7 @@
       </p:sp>
       <p:sp>
         <p:nvSpPr>
-          <p:cNvPr id="68" name="Text 66"/>
+          <p:cNvPr id="70" name="Text 68"/>
           <p:cNvSpPr txBox="1"/>
           <p:nvPr/>
         </p:nvSpPr>
@@ -34872,7 +34952,7 @@
       </p:sp>
       <p:sp>
         <p:nvSpPr>
-          <p:cNvPr id="69" name="Shape 67"/>
+          <p:cNvPr id="71" name="Shape 69"/>
           <p:cNvSpPr/>
           <p:nvPr/>
         </p:nvSpPr>
@@ -34892,7 +34972,7 @@
       </p:sp>
       <p:sp>
         <p:nvSpPr>
-          <p:cNvPr id="70" name="Text 68"/>
+          <p:cNvPr id="72" name="Text 70"/>
           <p:cNvSpPr txBox="1"/>
           <p:nvPr/>
         </p:nvSpPr>
@@ -41184,7 +41264,7 @@
               <a:buNone/>
             </a:pPr>
             <a:r>
-              <a:rPr lang="en-US" sz="1200" dirty="0">
+              <a:rPr lang="en-US" sz="1200" b="1" dirty="0">
                 <a:solidFill>
                   <a:srgbClr val="0B7A4A"/>
                 </a:solidFill>
@@ -41321,7 +41401,7 @@
               <a:buNone/>
             </a:pPr>
             <a:r>
-              <a:rPr lang="en-US" sz="1200" dirty="0">
+              <a:rPr lang="en-US" sz="1200" b="1" dirty="0">
                 <a:solidFill>
                   <a:srgbClr val="0B7A4A"/>
                 </a:solidFill>
@@ -41458,7 +41538,7 @@
               <a:buNone/>
             </a:pPr>
             <a:r>
-              <a:rPr lang="en-US" sz="1200" dirty="0">
+              <a:rPr lang="en-US" sz="1200" b="1" dirty="0">
                 <a:solidFill>
                   <a:srgbClr val="0B7A4A"/>
                 </a:solidFill>
@@ -41595,7 +41675,7 @@
               <a:buNone/>
             </a:pPr>
             <a:r>
-              <a:rPr lang="en-US" sz="1200" dirty="0">
+              <a:rPr lang="en-US" sz="1200" b="1" dirty="0">
                 <a:solidFill>
                   <a:srgbClr val="0B7A4A"/>
                 </a:solidFill>
@@ -41732,7 +41812,7 @@
               <a:buNone/>
             </a:pPr>
             <a:r>
-              <a:rPr lang="en-US" sz="1200" dirty="0">
+              <a:rPr lang="en-US" sz="1200" b="1" dirty="0">
                 <a:solidFill>
                   <a:srgbClr val="0B7A4A"/>
                 </a:solidFill>
@@ -41869,7 +41949,7 @@
               <a:buNone/>
             </a:pPr>
             <a:r>
-              <a:rPr lang="en-US" sz="1200" dirty="0">
+              <a:rPr lang="en-US" sz="1200" b="1" dirty="0">
                 <a:solidFill>
                   <a:srgbClr val="0B7A4A"/>
                 </a:solidFill>
@@ -42006,7 +42086,7 @@
               <a:buNone/>
             </a:pPr>
             <a:r>
-              <a:rPr lang="en-US" sz="1200" dirty="0">
+              <a:rPr lang="en-US" sz="1200" b="1" dirty="0">
                 <a:solidFill>
                   <a:srgbClr val="0B7A4A"/>
                 </a:solidFill>
@@ -42143,7 +42223,7 @@
               <a:buNone/>
             </a:pPr>
             <a:r>
-              <a:rPr lang="en-US" sz="1200" dirty="0">
+              <a:rPr lang="en-US" sz="1200" b="1" dirty="0">
                 <a:solidFill>
                   <a:srgbClr val="0B7A4A"/>
                 </a:solidFill>
@@ -42280,7 +42360,7 @@
               <a:buNone/>
             </a:pPr>
             <a:r>
-              <a:rPr lang="en-US" sz="1200" dirty="0">
+              <a:rPr lang="en-US" sz="1200" b="1" dirty="0">
                 <a:solidFill>
                   <a:srgbClr val="0B7A4A"/>
                 </a:solidFill>
@@ -42417,7 +42497,7 @@
               <a:buNone/>
             </a:pPr>
             <a:r>
-              <a:rPr lang="en-US" sz="1200" dirty="0">
+              <a:rPr lang="en-US" sz="1200" b="1" dirty="0">
                 <a:solidFill>
                   <a:srgbClr val="0B7A4A"/>
                 </a:solidFill>
@@ -42554,7 +42634,7 @@
               <a:buNone/>
             </a:pPr>
             <a:r>
-              <a:rPr lang="en-US" sz="1200" dirty="0">
+              <a:rPr lang="en-US" sz="1200" b="1" dirty="0">
                 <a:solidFill>
                   <a:srgbClr val="0B7A4A"/>
                 </a:solidFill>
@@ -42691,7 +42771,7 @@
               <a:buNone/>
             </a:pPr>
             <a:r>
-              <a:rPr lang="en-US" sz="1200" dirty="0">
+              <a:rPr lang="en-US" sz="1200" b="1" dirty="0">
                 <a:solidFill>
                   <a:srgbClr val="0B7A4A"/>
                 </a:solidFill>
@@ -42828,7 +42908,7 @@
               <a:buNone/>
             </a:pPr>
             <a:r>
-              <a:rPr lang="en-US" sz="1200" dirty="0">
+              <a:rPr lang="en-US" sz="1200" b="1" dirty="0">
                 <a:solidFill>
                   <a:srgbClr val="0B7A4A"/>
                 </a:solidFill>
@@ -42965,7 +43045,7 @@
               <a:buNone/>
             </a:pPr>
             <a:r>
-              <a:rPr lang="en-US" sz="1200" dirty="0">
+              <a:rPr lang="en-US" sz="1200" b="1" dirty="0">
                 <a:solidFill>
                   <a:srgbClr val="0B7A4A"/>
                 </a:solidFill>
@@ -43102,7 +43182,7 @@
               <a:buNone/>
             </a:pPr>
             <a:r>
-              <a:rPr lang="en-US" sz="1200" dirty="0">
+              <a:rPr lang="en-US" sz="1200" b="1" dirty="0">
                 <a:solidFill>
                   <a:srgbClr val="0B7A4A"/>
                 </a:solidFill>
@@ -43239,7 +43319,7 @@
               <a:buNone/>
             </a:pPr>
             <a:r>
-              <a:rPr lang="en-US" sz="1200" dirty="0">
+              <a:rPr lang="en-US" sz="1200" b="1" dirty="0">
                 <a:solidFill>
                   <a:srgbClr val="0B7A4A"/>
                 </a:solidFill>
@@ -43376,7 +43456,7 @@
               <a:buNone/>
             </a:pPr>
             <a:r>
-              <a:rPr lang="en-US" sz="1200" dirty="0">
+              <a:rPr lang="en-US" sz="1200" b="1" dirty="0">
                 <a:solidFill>
                   <a:srgbClr val="0B7A4A"/>
                 </a:solidFill>
@@ -43513,7 +43593,7 @@
               <a:buNone/>
             </a:pPr>
             <a:r>
-              <a:rPr lang="en-US" sz="1200" dirty="0">
+              <a:rPr lang="en-US" sz="1200" b="1" dirty="0">
                 <a:solidFill>
                   <a:srgbClr val="0B7A4A"/>
                 </a:solidFill>
@@ -43650,7 +43730,7 @@
               <a:buNone/>
             </a:pPr>
             <a:r>
-              <a:rPr lang="en-US" sz="1200" dirty="0">
+              <a:rPr lang="en-US" sz="1200" b="1" dirty="0">
                 <a:solidFill>
                   <a:srgbClr val="0B7A4A"/>
                 </a:solidFill>
@@ -43787,7 +43867,7 @@
               <a:buNone/>
             </a:pPr>
             <a:r>
-              <a:rPr lang="en-US" sz="1200" dirty="0">
+              <a:rPr lang="en-US" sz="1200" b="1" dirty="0">
                 <a:solidFill>
                   <a:srgbClr val="0B7A4A"/>
                 </a:solidFill>
@@ -43924,7 +44004,7 @@
               <a:buNone/>
             </a:pPr>
             <a:r>
-              <a:rPr lang="en-US" sz="1200" dirty="0">
+              <a:rPr lang="en-US" sz="1200" b="1" dirty="0">
                 <a:solidFill>
                   <a:srgbClr val="0B7A4A"/>
                 </a:solidFill>
@@ -44061,7 +44141,7 @@
               <a:buNone/>
             </a:pPr>
             <a:r>
-              <a:rPr lang="en-US" sz="1200" dirty="0">
+              <a:rPr lang="en-US" sz="1200" b="1" dirty="0">
                 <a:solidFill>
                   <a:srgbClr val="0B7A4A"/>
                 </a:solidFill>
@@ -44198,7 +44278,7 @@
               <a:buNone/>
             </a:pPr>
             <a:r>
-              <a:rPr lang="en-US" sz="1200" dirty="0">
+              <a:rPr lang="en-US" sz="1200" b="1" dirty="0">
                 <a:solidFill>
                   <a:srgbClr val="0B7A4A"/>
                 </a:solidFill>
@@ -44335,7 +44415,7 @@
               <a:buNone/>
             </a:pPr>
             <a:r>
-              <a:rPr lang="en-US" sz="1200" dirty="0">
+              <a:rPr lang="en-US" sz="1200" b="1" dirty="0">
                 <a:solidFill>
                   <a:srgbClr val="0B7A4A"/>
                 </a:solidFill>
@@ -44472,7 +44552,7 @@
               <a:buNone/>
             </a:pPr>
             <a:r>
-              <a:rPr lang="en-US" sz="1200" dirty="0">
+              <a:rPr lang="en-US" sz="1200" b="1" dirty="0">
                 <a:solidFill>
                   <a:srgbClr val="A82B26"/>
                 </a:solidFill>
@@ -44609,7 +44689,7 @@
               <a:buNone/>
             </a:pPr>
             <a:r>
-              <a:rPr lang="en-US" sz="1200" dirty="0">
+              <a:rPr lang="en-US" sz="1200" b="1" dirty="0">
                 <a:solidFill>
                   <a:srgbClr val="A82B26"/>
                 </a:solidFill>
@@ -44746,7 +44826,7 @@
               <a:buNone/>
             </a:pPr>
             <a:r>
-              <a:rPr lang="en-US" sz="1200" dirty="0">
+              <a:rPr lang="en-US" sz="1200" b="1" dirty="0">
                 <a:solidFill>
                   <a:srgbClr val="A82B26"/>
                 </a:solidFill>
@@ -44883,7 +44963,7 @@
               <a:buNone/>
             </a:pPr>
             <a:r>
-              <a:rPr lang="en-US" sz="1200" dirty="0">
+              <a:rPr lang="en-US" sz="1200" b="1" dirty="0">
                 <a:solidFill>
                   <a:srgbClr val="A82B26"/>
                 </a:solidFill>
@@ -45020,7 +45100,7 @@
               <a:buNone/>
             </a:pPr>
             <a:r>
-              <a:rPr lang="en-US" sz="1200" dirty="0">
+              <a:rPr lang="en-US" sz="1200" b="1" dirty="0">
                 <a:solidFill>
                   <a:srgbClr val="A82B26"/>
                 </a:solidFill>
@@ -45157,7 +45237,7 @@
               <a:buNone/>
             </a:pPr>
             <a:r>
-              <a:rPr lang="en-US" sz="1200" dirty="0">
+              <a:rPr lang="en-US" sz="1200" b="1" dirty="0">
                 <a:solidFill>
                   <a:srgbClr val="A82B26"/>
                 </a:solidFill>
@@ -45294,7 +45374,7 @@
               <a:buNone/>
             </a:pPr>
             <a:r>
-              <a:rPr lang="en-US" sz="1200" dirty="0">
+              <a:rPr lang="en-US" sz="1200" b="1" dirty="0">
                 <a:solidFill>
                   <a:srgbClr val="A82B26"/>
                 </a:solidFill>
@@ -45431,7 +45511,7 @@
               <a:buNone/>
             </a:pPr>
             <a:r>
-              <a:rPr lang="en-US" sz="1200" dirty="0">
+              <a:rPr lang="en-US" sz="1200" b="1" dirty="0">
                 <a:solidFill>
                   <a:srgbClr val="A82B26"/>
                 </a:solidFill>
@@ -45568,7 +45648,7 @@
               <a:buNone/>
             </a:pPr>
             <a:r>
-              <a:rPr lang="en-US" sz="1200" dirty="0">
+              <a:rPr lang="en-US" sz="1200" b="1" dirty="0">
                 <a:solidFill>
                   <a:srgbClr val="A82B26"/>
                 </a:solidFill>
@@ -45971,7 +46051,27 @@
       </p:sp>
       <p:sp>
         <p:nvSpPr>
-          <p:cNvPr id="10" name="Text 8"/>
+          <p:cNvPr id="10" name="Shape 8"/>
+          <p:cNvSpPr/>
+          <p:nvPr/>
+        </p:nvSpPr>
+        <p:spPr>
+          <a:xfrm>
+            <a:off x="4084320" y="2139696"/>
+            <a:ext cx="64008" cy="682142"/>
+          </a:xfrm>
+          <a:prstGeom prst="rect">
+            <a:avLst/>
+          </a:prstGeom>
+          <a:solidFill>
+            <a:srgbClr val="12A566"/>
+          </a:solidFill>
+          <a:ln/>
+        </p:spPr>
+      </p:sp>
+      <p:sp>
+        <p:nvSpPr>
+          <p:cNvPr id="11" name="Text 9"/>
           <p:cNvSpPr txBox="1"/>
           <p:nvPr/>
         </p:nvSpPr>
@@ -46010,7 +46110,7 @@
       </p:sp>
       <p:sp>
         <p:nvSpPr>
-          <p:cNvPr id="11" name="Text 9"/>
+          <p:cNvPr id="12" name="Text 10"/>
           <p:cNvSpPr txBox="1"/>
           <p:nvPr/>
         </p:nvSpPr>
@@ -46089,7 +46189,7 @@
       </p:sp>
       <p:sp>
         <p:nvSpPr>
-          <p:cNvPr id="12" name="Text 10"/>
+          <p:cNvPr id="13" name="Text 11"/>
           <p:cNvSpPr txBox="1"/>
           <p:nvPr/>
         </p:nvSpPr>
@@ -46128,7 +46228,27 @@
       </p:sp>
       <p:sp>
         <p:nvSpPr>
-          <p:cNvPr id="13" name="Text 11"/>
+          <p:cNvPr id="14" name="Shape 12"/>
+          <p:cNvSpPr/>
+          <p:nvPr/>
+        </p:nvSpPr>
+        <p:spPr>
+          <a:xfrm>
+            <a:off x="4084320" y="2894990"/>
+            <a:ext cx="64008" cy="682142"/>
+          </a:xfrm>
+          <a:prstGeom prst="rect">
+            <a:avLst/>
+          </a:prstGeom>
+          <a:solidFill>
+            <a:srgbClr val="12A566"/>
+          </a:solidFill>
+          <a:ln/>
+        </p:spPr>
+      </p:sp>
+      <p:sp>
+        <p:nvSpPr>
+          <p:cNvPr id="15" name="Text 13"/>
           <p:cNvSpPr txBox="1"/>
           <p:nvPr/>
         </p:nvSpPr>
@@ -46167,7 +46287,7 @@
       </p:sp>
       <p:sp>
         <p:nvSpPr>
-          <p:cNvPr id="14" name="Text 12"/>
+          <p:cNvPr id="16" name="Text 14"/>
           <p:cNvSpPr txBox="1"/>
           <p:nvPr/>
         </p:nvSpPr>
@@ -46246,7 +46366,7 @@
       </p:sp>
       <p:sp>
         <p:nvSpPr>
-          <p:cNvPr id="15" name="Text 13"/>
+          <p:cNvPr id="17" name="Text 15"/>
           <p:cNvSpPr txBox="1"/>
           <p:nvPr/>
         </p:nvSpPr>
@@ -46285,7 +46405,7 @@
       </p:sp>
       <p:sp>
         <p:nvSpPr>
-          <p:cNvPr id="16" name="Shape 14"/>
+          <p:cNvPr id="18" name="Shape 16"/>
           <p:cNvSpPr/>
           <p:nvPr/>
         </p:nvSpPr>
@@ -46305,7 +46425,27 @@
       </p:sp>
       <p:sp>
         <p:nvSpPr>
-          <p:cNvPr id="17" name="Text 15"/>
+          <p:cNvPr id="19" name="Shape 17"/>
+          <p:cNvSpPr/>
+          <p:nvPr/>
+        </p:nvSpPr>
+        <p:spPr>
+          <a:xfrm>
+            <a:off x="4084320" y="3650285"/>
+            <a:ext cx="64008" cy="682142"/>
+          </a:xfrm>
+          <a:prstGeom prst="rect">
+            <a:avLst/>
+          </a:prstGeom>
+          <a:solidFill>
+            <a:srgbClr val="12A566"/>
+          </a:solidFill>
+          <a:ln/>
+        </p:spPr>
+      </p:sp>
+      <p:sp>
+        <p:nvSpPr>
+          <p:cNvPr id="20" name="Text 18"/>
           <p:cNvSpPr txBox="1"/>
           <p:nvPr/>
         </p:nvSpPr>
@@ -46344,7 +46484,7 @@
       </p:sp>
       <p:sp>
         <p:nvSpPr>
-          <p:cNvPr id="18" name="Text 16"/>
+          <p:cNvPr id="21" name="Text 19"/>
           <p:cNvSpPr txBox="1"/>
           <p:nvPr/>
         </p:nvSpPr>
@@ -46423,7 +46563,7 @@
       </p:sp>
       <p:sp>
         <p:nvSpPr>
-          <p:cNvPr id="19" name="Text 17"/>
+          <p:cNvPr id="22" name="Text 20"/>
           <p:cNvSpPr txBox="1"/>
           <p:nvPr/>
         </p:nvSpPr>
@@ -46462,7 +46602,7 @@
       </p:sp>
       <p:sp>
         <p:nvSpPr>
-          <p:cNvPr id="20" name="Text 18"/>
+          <p:cNvPr id="23" name="Text 21"/>
           <p:cNvSpPr txBox="1"/>
           <p:nvPr/>
         </p:nvSpPr>
@@ -46501,7 +46641,7 @@
       </p:sp>
       <p:sp>
         <p:nvSpPr>
-          <p:cNvPr id="21" name="Text 19"/>
+          <p:cNvPr id="24" name="Text 22"/>
           <p:cNvSpPr txBox="1"/>
           <p:nvPr/>
         </p:nvSpPr>
@@ -46580,7 +46720,7 @@
       </p:sp>
       <p:sp>
         <p:nvSpPr>
-          <p:cNvPr id="22" name="Text 20"/>
+          <p:cNvPr id="25" name="Text 23"/>
           <p:cNvSpPr txBox="1"/>
           <p:nvPr/>
         </p:nvSpPr>
@@ -46619,7 +46759,7 @@
       </p:sp>
       <p:sp>
         <p:nvSpPr>
-          <p:cNvPr id="23" name="Shape 21"/>
+          <p:cNvPr id="26" name="Shape 24"/>
           <p:cNvSpPr/>
           <p:nvPr/>
         </p:nvSpPr>
@@ -46639,7 +46779,7 @@
       </p:sp>
       <p:sp>
         <p:nvSpPr>
-          <p:cNvPr id="24" name="Text 22"/>
+          <p:cNvPr id="27" name="Text 25"/>
           <p:cNvSpPr txBox="1"/>
           <p:nvPr/>
         </p:nvSpPr>
@@ -46678,7 +46818,7 @@
       </p:sp>
       <p:sp>
         <p:nvSpPr>
-          <p:cNvPr id="25" name="Text 23"/>
+          <p:cNvPr id="28" name="Text 26"/>
           <p:cNvSpPr txBox="1"/>
           <p:nvPr/>
         </p:nvSpPr>
@@ -46757,7 +46897,7 @@
       </p:sp>
       <p:sp>
         <p:nvSpPr>
-          <p:cNvPr id="26" name="Text 24"/>
+          <p:cNvPr id="29" name="Text 27"/>
           <p:cNvSpPr txBox="1"/>
           <p:nvPr/>
         </p:nvSpPr>
@@ -46796,7 +46936,7 @@
       </p:sp>
       <p:sp>
         <p:nvSpPr>
-          <p:cNvPr id="27" name="Shape 25"/>
+          <p:cNvPr id="30" name="Shape 28"/>
           <p:cNvSpPr/>
           <p:nvPr/>
         </p:nvSpPr>
@@ -46816,7 +46956,7 @@
       </p:sp>
       <p:sp>
         <p:nvSpPr>
-          <p:cNvPr id="28" name="Text 26"/>
+          <p:cNvPr id="31" name="Text 29"/>
           <p:cNvSpPr txBox="1"/>
           <p:nvPr/>
         </p:nvSpPr>
@@ -46855,7 +46995,7 @@
       </p:sp>
       <p:sp>
         <p:nvSpPr>
-          <p:cNvPr id="29" name="Text 27"/>
+          <p:cNvPr id="32" name="Text 30"/>
           <p:cNvSpPr txBox="1"/>
           <p:nvPr/>
         </p:nvSpPr>
@@ -46894,7 +47034,7 @@
       </p:sp>
       <p:sp>
         <p:nvSpPr>
-          <p:cNvPr id="30" name="Shape 28"/>
+          <p:cNvPr id="33" name="Shape 31"/>
           <p:cNvSpPr/>
           <p:nvPr/>
         </p:nvSpPr>
@@ -46914,7 +47054,7 @@
       </p:sp>
       <p:sp>
         <p:nvSpPr>
-          <p:cNvPr id="31" name="Text 29"/>
+          <p:cNvPr id="34" name="Text 32"/>
           <p:cNvSpPr txBox="1"/>
           <p:nvPr/>
         </p:nvSpPr>
@@ -46953,7 +47093,7 @@
       </p:sp>
       <p:sp>
         <p:nvSpPr>
-          <p:cNvPr id="32" name="Text 30"/>
+          <p:cNvPr id="35" name="Text 33"/>
           <p:cNvSpPr txBox="1"/>
           <p:nvPr/>
         </p:nvSpPr>
@@ -47032,7 +47172,7 @@
       </p:sp>
       <p:sp>
         <p:nvSpPr>
-          <p:cNvPr id="33" name="Text 31"/>
+          <p:cNvPr id="36" name="Text 34"/>
           <p:cNvSpPr txBox="1"/>
           <p:nvPr/>
         </p:nvSpPr>
@@ -47071,7 +47211,7 @@
       </p:sp>
       <p:sp>
         <p:nvSpPr>
-          <p:cNvPr id="34" name="Text 32"/>
+          <p:cNvPr id="37" name="Text 35"/>
           <p:cNvSpPr txBox="1"/>
           <p:nvPr/>
         </p:nvSpPr>
@@ -47110,7 +47250,7 @@
       </p:sp>
       <p:sp>
         <p:nvSpPr>
-          <p:cNvPr id="35" name="Text 33"/>
+          <p:cNvPr id="38" name="Text 36"/>
           <p:cNvSpPr txBox="1"/>
           <p:nvPr/>
         </p:nvSpPr>
@@ -47189,7 +47329,7 @@
       </p:sp>
       <p:sp>
         <p:nvSpPr>
-          <p:cNvPr id="36" name="Text 34"/>
+          <p:cNvPr id="39" name="Text 37"/>
           <p:cNvSpPr txBox="1"/>
           <p:nvPr/>
         </p:nvSpPr>
@@ -47228,7 +47368,7 @@
       </p:sp>
       <p:sp>
         <p:nvSpPr>
-          <p:cNvPr id="37" name="Shape 35"/>
+          <p:cNvPr id="40" name="Shape 38"/>
           <p:cNvSpPr/>
           <p:nvPr/>
         </p:nvSpPr>
@@ -47248,7 +47388,7 @@
       </p:sp>
       <p:sp>
         <p:nvSpPr>
-          <p:cNvPr id="38" name="Text 36"/>
+          <p:cNvPr id="41" name="Text 39"/>
           <p:cNvSpPr txBox="1"/>
           <p:nvPr/>
         </p:nvSpPr>
@@ -47287,7 +47427,7 @@
       </p:sp>
       <p:sp>
         <p:nvSpPr>
-          <p:cNvPr id="39" name="Text 37"/>
+          <p:cNvPr id="42" name="Text 40"/>
           <p:cNvSpPr txBox="1"/>
           <p:nvPr/>
         </p:nvSpPr>
@@ -47366,7 +47506,7 @@
       </p:sp>
       <p:sp>
         <p:nvSpPr>
-          <p:cNvPr id="40" name="Text 38"/>
+          <p:cNvPr id="43" name="Text 41"/>
           <p:cNvSpPr txBox="1"/>
           <p:nvPr/>
         </p:nvSpPr>
@@ -47405,7 +47545,7 @@
       </p:sp>
       <p:sp>
         <p:nvSpPr>
-          <p:cNvPr id="41" name="Text 39"/>
+          <p:cNvPr id="44" name="Text 42"/>
           <p:cNvSpPr txBox="1"/>
           <p:nvPr/>
         </p:nvSpPr>
@@ -47444,7 +47584,7 @@
       </p:sp>
       <p:sp>
         <p:nvSpPr>
-          <p:cNvPr id="42" name="Text 40"/>
+          <p:cNvPr id="45" name="Text 43"/>
           <p:cNvSpPr txBox="1"/>
           <p:nvPr/>
         </p:nvSpPr>
@@ -47523,7 +47663,7 @@
       </p:sp>
       <p:sp>
         <p:nvSpPr>
-          <p:cNvPr id="43" name="Text 41"/>
+          <p:cNvPr id="46" name="Text 44"/>
           <p:cNvSpPr txBox="1"/>
           <p:nvPr/>
         </p:nvSpPr>
@@ -47562,7 +47702,7 @@
       </p:sp>
       <p:sp>
         <p:nvSpPr>
-          <p:cNvPr id="44" name="Shape 42"/>
+          <p:cNvPr id="47" name="Shape 45"/>
           <p:cNvSpPr/>
           <p:nvPr/>
         </p:nvSpPr>
@@ -47582,7 +47722,7 @@
       </p:sp>
       <p:sp>
         <p:nvSpPr>
-          <p:cNvPr id="45" name="Text 43"/>
+          <p:cNvPr id="48" name="Text 46"/>
           <p:cNvSpPr txBox="1"/>
           <p:nvPr/>
         </p:nvSpPr>
@@ -47621,7 +47761,7 @@
       </p:sp>
       <p:sp>
         <p:nvSpPr>
-          <p:cNvPr id="46" name="Text 44"/>
+          <p:cNvPr id="49" name="Text 47"/>
           <p:cNvSpPr txBox="1"/>
           <p:nvPr/>
         </p:nvSpPr>
@@ -47700,7 +47840,7 @@
       </p:sp>
       <p:sp>
         <p:nvSpPr>
-          <p:cNvPr id="47" name="Text 45"/>
+          <p:cNvPr id="50" name="Text 48"/>
           <p:cNvSpPr txBox="1"/>
           <p:nvPr/>
         </p:nvSpPr>
@@ -47739,7 +47879,7 @@
       </p:sp>
       <p:sp>
         <p:nvSpPr>
-          <p:cNvPr id="48" name="Shape 46"/>
+          <p:cNvPr id="51" name="Shape 49"/>
           <p:cNvSpPr/>
           <p:nvPr/>
         </p:nvSpPr>
@@ -47759,7 +47899,7 @@
       </p:sp>
       <p:sp>
         <p:nvSpPr>
-          <p:cNvPr id="49" name="Text 47"/>
+          <p:cNvPr id="52" name="Text 50"/>
           <p:cNvSpPr txBox="1"/>
           <p:nvPr/>
         </p:nvSpPr>
@@ -47798,7 +47938,7 @@
       </p:sp>
       <p:sp>
         <p:nvSpPr>
-          <p:cNvPr id="50" name="Text 48"/>
+          <p:cNvPr id="53" name="Text 51"/>
           <p:cNvSpPr txBox="1"/>
           <p:nvPr/>
         </p:nvSpPr>
@@ -47837,7 +47977,7 @@
       </p:sp>
       <p:sp>
         <p:nvSpPr>
-          <p:cNvPr id="51" name="Shape 49"/>
+          <p:cNvPr id="54" name="Shape 52"/>
           <p:cNvSpPr/>
           <p:nvPr/>
         </p:nvSpPr>
@@ -47857,7 +47997,27 @@
       </p:sp>
       <p:sp>
         <p:nvSpPr>
-          <p:cNvPr id="52" name="Text 50"/>
+          <p:cNvPr id="55" name="Shape 53"/>
+          <p:cNvSpPr/>
+          <p:nvPr/>
+        </p:nvSpPr>
+        <p:spPr>
+          <a:xfrm>
+            <a:off x="11466576" y="2139696"/>
+            <a:ext cx="64008" cy="682142"/>
+          </a:xfrm>
+          <a:prstGeom prst="rect">
+            <a:avLst/>
+          </a:prstGeom>
+          <a:solidFill>
+            <a:srgbClr val="12A566"/>
+          </a:solidFill>
+          <a:ln/>
+        </p:spPr>
+      </p:sp>
+      <p:sp>
+        <p:nvSpPr>
+          <p:cNvPr id="56" name="Text 54"/>
           <p:cNvSpPr txBox="1"/>
           <p:nvPr/>
         </p:nvSpPr>
@@ -47896,7 +48056,7 @@
       </p:sp>
       <p:sp>
         <p:nvSpPr>
-          <p:cNvPr id="53" name="Text 51"/>
+          <p:cNvPr id="57" name="Text 55"/>
           <p:cNvSpPr txBox="1"/>
           <p:nvPr/>
         </p:nvSpPr>
@@ -47975,7 +48135,7 @@
       </p:sp>
       <p:sp>
         <p:nvSpPr>
-          <p:cNvPr id="54" name="Text 52"/>
+          <p:cNvPr id="58" name="Text 56"/>
           <p:cNvSpPr txBox="1"/>
           <p:nvPr/>
         </p:nvSpPr>
@@ -48014,7 +48174,7 @@
       </p:sp>
       <p:sp>
         <p:nvSpPr>
-          <p:cNvPr id="55" name="Text 53"/>
+          <p:cNvPr id="59" name="Text 57"/>
           <p:cNvSpPr txBox="1"/>
           <p:nvPr/>
         </p:nvSpPr>
@@ -48053,7 +48213,7 @@
       </p:sp>
       <p:sp>
         <p:nvSpPr>
-          <p:cNvPr id="56" name="Text 54"/>
+          <p:cNvPr id="60" name="Text 58"/>
           <p:cNvSpPr txBox="1"/>
           <p:nvPr/>
         </p:nvSpPr>
@@ -48132,7 +48292,7 @@
       </p:sp>
       <p:sp>
         <p:nvSpPr>
-          <p:cNvPr id="57" name="Text 55"/>
+          <p:cNvPr id="61" name="Text 59"/>
           <p:cNvSpPr txBox="1"/>
           <p:nvPr/>
         </p:nvSpPr>
@@ -48171,7 +48331,7 @@
       </p:sp>
       <p:sp>
         <p:nvSpPr>
-          <p:cNvPr id="58" name="Shape 56"/>
+          <p:cNvPr id="62" name="Shape 60"/>
           <p:cNvSpPr/>
           <p:nvPr/>
         </p:nvSpPr>
@@ -48191,7 +48351,27 @@
       </p:sp>
       <p:sp>
         <p:nvSpPr>
-          <p:cNvPr id="59" name="Text 57"/>
+          <p:cNvPr id="63" name="Shape 61"/>
+          <p:cNvSpPr/>
+          <p:nvPr/>
+        </p:nvSpPr>
+        <p:spPr>
+          <a:xfrm>
+            <a:off x="11466576" y="3650285"/>
+            <a:ext cx="64008" cy="682142"/>
+          </a:xfrm>
+          <a:prstGeom prst="rect">
+            <a:avLst/>
+          </a:prstGeom>
+          <a:solidFill>
+            <a:srgbClr val="12A566"/>
+          </a:solidFill>
+          <a:ln/>
+        </p:spPr>
+      </p:sp>
+      <p:sp>
+        <p:nvSpPr>
+          <p:cNvPr id="64" name="Text 62"/>
           <p:cNvSpPr txBox="1"/>
           <p:nvPr/>
         </p:nvSpPr>
@@ -48230,7 +48410,7 @@
       </p:sp>
       <p:sp>
         <p:nvSpPr>
-          <p:cNvPr id="60" name="Text 58"/>
+          <p:cNvPr id="65" name="Text 63"/>
           <p:cNvSpPr txBox="1"/>
           <p:nvPr/>
         </p:nvSpPr>
@@ -48309,7 +48489,7 @@
       </p:sp>
       <p:sp>
         <p:nvSpPr>
-          <p:cNvPr id="61" name="Text 59"/>
+          <p:cNvPr id="66" name="Text 64"/>
           <p:cNvSpPr txBox="1"/>
           <p:nvPr/>
         </p:nvSpPr>
@@ -48348,7 +48528,7 @@
       </p:sp>
       <p:sp>
         <p:nvSpPr>
-          <p:cNvPr id="62" name="Text 60"/>
+          <p:cNvPr id="67" name="Text 65"/>
           <p:cNvSpPr txBox="1"/>
           <p:nvPr/>
         </p:nvSpPr>
@@ -48387,7 +48567,7 @@
       </p:sp>
       <p:sp>
         <p:nvSpPr>
-          <p:cNvPr id="63" name="Text 61"/>
+          <p:cNvPr id="68" name="Text 66"/>
           <p:cNvSpPr txBox="1"/>
           <p:nvPr/>
         </p:nvSpPr>
@@ -48466,7 +48646,7 @@
       </p:sp>
       <p:sp>
         <p:nvSpPr>
-          <p:cNvPr id="64" name="Text 62"/>
+          <p:cNvPr id="69" name="Text 67"/>
           <p:cNvSpPr txBox="1"/>
           <p:nvPr/>
         </p:nvSpPr>
@@ -48505,7 +48685,7 @@
       </p:sp>
       <p:sp>
         <p:nvSpPr>
-          <p:cNvPr id="65" name="Shape 63"/>
+          <p:cNvPr id="70" name="Shape 68"/>
           <p:cNvSpPr/>
           <p:nvPr/>
         </p:nvSpPr>
@@ -48525,7 +48705,27 @@
       </p:sp>
       <p:sp>
         <p:nvSpPr>
-          <p:cNvPr id="66" name="Text 64"/>
+          <p:cNvPr id="71" name="Shape 69"/>
+          <p:cNvSpPr/>
+          <p:nvPr/>
+        </p:nvSpPr>
+        <p:spPr>
+          <a:xfrm>
+            <a:off x="11466576" y="5160874"/>
+            <a:ext cx="64008" cy="682142"/>
+          </a:xfrm>
+          <a:prstGeom prst="rect">
+            <a:avLst/>
+          </a:prstGeom>
+          <a:solidFill>
+            <a:srgbClr val="12A566"/>
+          </a:solidFill>
+          <a:ln/>
+        </p:spPr>
+      </p:sp>
+      <p:sp>
+        <p:nvSpPr>
+          <p:cNvPr id="72" name="Text 70"/>
           <p:cNvSpPr txBox="1"/>
           <p:nvPr/>
         </p:nvSpPr>
@@ -48564,7 +48764,7 @@
       </p:sp>
       <p:sp>
         <p:nvSpPr>
-          <p:cNvPr id="67" name="Text 65"/>
+          <p:cNvPr id="73" name="Text 71"/>
           <p:cNvSpPr txBox="1"/>
           <p:nvPr/>
         </p:nvSpPr>
@@ -48643,7 +48843,7 @@
       </p:sp>
       <p:sp>
         <p:nvSpPr>
-          <p:cNvPr id="68" name="Text 66"/>
+          <p:cNvPr id="74" name="Text 72"/>
           <p:cNvSpPr txBox="1"/>
           <p:nvPr/>
         </p:nvSpPr>
@@ -48682,7 +48882,7 @@
       </p:sp>
       <p:sp>
         <p:nvSpPr>
-          <p:cNvPr id="69" name="Shape 67"/>
+          <p:cNvPr id="75" name="Shape 73"/>
           <p:cNvSpPr/>
           <p:nvPr/>
         </p:nvSpPr>
@@ -48702,7 +48902,7 @@
       </p:sp>
       <p:sp>
         <p:nvSpPr>
-          <p:cNvPr id="70" name="Text 68"/>
+          <p:cNvPr id="76" name="Text 74"/>
           <p:cNvSpPr txBox="1"/>
           <p:nvPr/>
         </p:nvSpPr>

--- a/day2-deck/decks/Fixed Ops Profitability - House Style.pptx
+++ b/day2-deck/decks/Fixed Ops Profitability - House Style.pptx
@@ -18347,7 +18347,7 @@
                 <a:ea typeface="Inter" pitchFamily="34" charset="-122"/>
                 <a:cs typeface="Inter" pitchFamily="34" charset="-120"/>
               </a:rPr>
-              <a:t>Jan–Sep 2026 vs Jan–Sep 2025</a:t>
+              <a:t>Jan–Sep, this year vs last</a:t>
             </a:r>
             <a:endParaRPr lang="en-US" sz="1200" dirty="0"/>
           </a:p>
@@ -19310,7 +19310,7 @@
                 <a:ea typeface="Inter" pitchFamily="34" charset="-122"/>
                 <a:cs typeface="Inter" pitchFamily="34" charset="-120"/>
               </a:rPr>
-              <a:t>Jan–Sep 2026 vs Jan–Sep 2025</a:t>
+              <a:t>Jan–Sep, this year vs last</a:t>
             </a:r>
             <a:endParaRPr lang="en-US" sz="1200" dirty="0"/>
           </a:p>
@@ -20253,7 +20253,7 @@
                 <a:ea typeface="Inter" pitchFamily="34" charset="-122"/>
                 <a:cs typeface="Inter" pitchFamily="34" charset="-120"/>
               </a:rPr>
-              <a:t>Jul–Sep vs Jan–Mar 2026</a:t>
+              <a:t>Jul–Sep vs Jan–Mar this year</a:t>
             </a:r>
             <a:endParaRPr lang="en-US" sz="1200" dirty="0"/>
           </a:p>
@@ -32173,7 +32173,7 @@
                 <a:ea typeface="Inter" pitchFamily="34" charset="-122"/>
                 <a:cs typeface="Inter" pitchFamily="34" charset="-120"/>
               </a:rPr>
-              <a:t>Jan–Sep 2026 vs Jan–Sep 2025</a:t>
+              <a:t>Jan–Sep, this year vs last</a:t>
             </a:r>
             <a:endParaRPr lang="en-US" sz="1200" dirty="0"/>
           </a:p>
@@ -33136,7 +33136,7 @@
                 <a:ea typeface="Inter" pitchFamily="34" charset="-122"/>
                 <a:cs typeface="Inter" pitchFamily="34" charset="-120"/>
               </a:rPr>
-              <a:t>Jan–Sep 2026 vs Jan–Sep 2025</a:t>
+              <a:t>Jan–Sep, this year vs last</a:t>
             </a:r>
             <a:endParaRPr lang="en-US" sz="1200" dirty="0"/>
           </a:p>
@@ -34079,7 +34079,7 @@
                 <a:ea typeface="Inter" pitchFamily="34" charset="-122"/>
                 <a:cs typeface="Inter" pitchFamily="34" charset="-120"/>
               </a:rPr>
-              <a:t>Jul–Sep vs Jan–Mar 2026</a:t>
+              <a:t>Jul–Sep vs Jan–Mar this year</a:t>
             </a:r>
             <a:endParaRPr lang="en-US" sz="1200" dirty="0"/>
           </a:p>
@@ -46023,7 +46023,7 @@
                 <a:ea typeface="Inter" pitchFamily="34" charset="-122"/>
                 <a:cs typeface="Inter" pitchFamily="34" charset="-120"/>
               </a:rPr>
-              <a:t>Jan–Sep 2026 vs Jan–Sep 2025</a:t>
+              <a:t>Jan–Sep, this year vs last</a:t>
             </a:r>
             <a:endParaRPr lang="en-US" sz="1200" dirty="0"/>
           </a:p>
@@ -47026,7 +47026,7 @@
                 <a:ea typeface="Inter" pitchFamily="34" charset="-122"/>
                 <a:cs typeface="Inter" pitchFamily="34" charset="-120"/>
               </a:rPr>
-              <a:t>Jan–Sep 2026 vs Jan–Sep 2025</a:t>
+              <a:t>Jan–Sep, this year vs last</a:t>
             </a:r>
             <a:endParaRPr lang="en-US" sz="1200" dirty="0"/>
           </a:p>
@@ -47969,7 +47969,7 @@
                 <a:ea typeface="Inter" pitchFamily="34" charset="-122"/>
                 <a:cs typeface="Inter" pitchFamily="34" charset="-120"/>
               </a:rPr>
-              <a:t>Jul–Sep vs Jan–Mar 2026</a:t>
+              <a:t>Jul–Sep vs Jan–Mar this year</a:t>
             </a:r>
             <a:endParaRPr lang="en-US" sz="1200" dirty="0"/>
           </a:p>

--- a/day2-deck/decks/Fixed Ops Profitability - House Style.pptx
+++ b/day2-deck/decks/Fixed Ops Profitability - House Style.pptx
@@ -5987,7 +5987,7 @@
           <a:p>
             <a:r>
               <a:rPr lang="en-US" dirty="0"/>
-              <a:t>Takeaway (off the slide): 15 of 33 stores at or above the 36.7% group, led by Subaru St George at 58.7%. Hyundai Prescott is lowest at 10.0%.Source: Qlik - Profit &amp; Loss. Jan-Sep. Same-store, INEOS excluded (opened 2026). P&amp;A department profit / P&amp;A department gross (P&amp;L Detail statement). Jan-Sep 2026 YTD. Green at or above the group, red below.</a:t>
+              <a:t>Takeaway with the store call-outs (off the slide): 15 of 33 stores at or above the 36.7% group, led by Subaru St George at 58.7%. Hyundai Prescott is lowest at 10.0%.Source: Qlik - Profit &amp; Loss. Jan-Sep. Same-store, INEOS excluded (opened 2026). P&amp;A department profit / P&amp;A department gross (P&amp;L Detail statement). Jan-Sep 2026 YTD. Green at or above the group, red below.</a:t>
             </a:r>
             <a:endParaRPr lang="en-US" dirty="0"/>
           </a:p>
@@ -6075,7 +6075,7 @@
           <a:p>
             <a:r>
               <a:rPr lang="en-US" dirty="0"/>
-              <a:t>Takeaway (off the slide): 15 of 33 stores raised parts net to gross, led by Lincoln at +14.2 pts to 17.9%. 18 declined; Hyundai Prescott fell most at −12.5 pts.Source: Qlik - Profit &amp; Loss. Jan-Sep. Same-store, INEOS excluded (opened 2026). Change in Parts Net to Gross %, Jan-Sep 2026 vs 2025, best first.</a:t>
+              <a:t>Takeaway with the store call-outs (off the slide): 15 of 33 stores raised parts net to gross, led by Lincoln at +14.2 pts to 17.9%. 18 declined; Hyundai Prescott fell most at −12.5 pts.Source: Qlik - Profit &amp; Loss. Jan-Sep. Same-store, INEOS excluded (opened 2026). Change in Parts Net to Gross %, Jan-Sep 2026 vs 2025, best first.</a:t>
             </a:r>
             <a:endParaRPr lang="en-US" dirty="0"/>
           </a:p>
@@ -6163,7 +6163,7 @@
           <a:p>
             <a:r>
               <a:rPr lang="en-US" dirty="0"/>
-              <a:t>Takeaway (off the slide): Ask Lincoln, Acura and Nissan what changed. Ask Hyundai Prescott, Hyundai St George and VW St George what got in the way. Ask LR Reno, VW St George and Mazda what they started this year.Source: Qlik - Profit &amp; Loss. Jan-Sep. Same-store, INEOS excluded (opened 2026). P&amp;A department profit / P&amp;A department gross (P&amp;L Detail statement). Top and bottom five stores by change in Parts Net to Gross %, Jan-Sep 2026 vs 2025. Moving now: Jul-Sep 2026 vs Jan-Mar 2026, each store against itself; the group moved +5.3 pts on the same basis, so part of every store's change is seasonal. Green bar at the right of a row: the store is on both the top five vs last year and the top five moving now.Conversation starter: each top store says one thing they started doing; each bottom store says what got in the way and what they would try. The room trades ideas. Moving now: ask the top three what they started this year.</a:t>
+              <a:t>Takeaway with the store call-outs (off the slide): Ask Lincoln, Acura and Nissan what changed. Ask Hyundai Prescott, Hyundai St George and VW St George what got in the way. Ask LR Reno, VW St George and Mazda what they started this year.Source: Qlik - Profit &amp; Loss. Jan-Sep. Same-store, INEOS excluded (opened 2026). P&amp;A department profit / P&amp;A department gross (P&amp;L Detail statement). Top and bottom five stores by change in Parts Net to Gross %, Jan-Sep 2026 vs 2025. Moving now: Jul-Sep 2026 vs Jan-Mar 2026, each store against itself; the group moved +5.3 pts on the same basis, so part of every store's change is seasonal. Green bar at the right of a row: the store is on both the top five vs last year and the top five moving now.Conversation starter: each top store says one thing they started doing; each bottom store says what got in the way and what they would try. The room trades ideas. Moving now: ask the top three what they started this year.</a:t>
             </a:r>
             <a:endParaRPr lang="en-US" dirty="0"/>
           </a:p>
@@ -6339,7 +6339,7 @@
           <a:p>
             <a:r>
               <a:rPr lang="en-US" dirty="0"/>
-              <a:t>Takeaway (off the slide): 15 of 33 stores at or above the 78.1% group, led by Audi Henderson at 106.6%. Hyundai Prescott is lowest at 46.2%.Source: Qlik - Profit &amp; Loss. Jan-Sep. Same-store, INEOS excluded (opened 2026). P&amp;L line Fixed Ops Absorption % = Total Gross Profit - Fixed Ops / Fixed Expenses. GMC Prescott includes its body shop, as on the P&amp;L. Jan-Sep 2026 YTD. Green at or above the group, red below. Bars start at 30.0% so differences are visible.</a:t>
+              <a:t>Takeaway with the store call-outs (off the slide): 15 of 33 stores at or above the 78.1% group, led by Audi Henderson at 106.6%. Hyundai Prescott is lowest at 46.2%.Source: Qlik - Profit &amp; Loss. Jan-Sep. Same-store, INEOS excluded (opened 2026). P&amp;L line Fixed Ops Absorption % = Total Gross Profit - Fixed Ops / Fixed Expenses. GMC Prescott includes its body shop, as on the P&amp;L. Jan-Sep 2026 YTD. Green at or above the group, red below. Bars start at 30.0% so differences are visible.</a:t>
             </a:r>
             <a:endParaRPr lang="en-US" dirty="0"/>
           </a:p>
@@ -6427,7 +6427,7 @@
           <a:p>
             <a:r>
               <a:rPr lang="en-US" dirty="0"/>
-              <a:t>Takeaway (off the slide): 23 of 33 stores raised absorption, led by Lincoln at +16.1 pts to 59.9%. 10 declined; VW St George fell most at −17.4 pts.Source: Qlik - Profit &amp; Loss. Jan-Sep. Same-store, INEOS excluded (opened 2026). Change in Fixed Ops Absorption %, Jan-Sep 2026 vs 2025, best first.</a:t>
+              <a:t>Takeaway with the store call-outs (off the slide): 23 of 33 stores raised absorption, led by Lincoln at +16.1 pts to 59.9%. 10 declined; VW St George fell most at −17.4 pts.Source: Qlik - Profit &amp; Loss. Jan-Sep. Same-store, INEOS excluded (opened 2026). Change in Fixed Ops Absorption %, Jan-Sep 2026 vs 2025, best first.</a:t>
             </a:r>
             <a:endParaRPr lang="en-US" dirty="0"/>
           </a:p>
@@ -6515,7 +6515,7 @@
           <a:p>
             <a:r>
               <a:rPr lang="en-US" dirty="0"/>
-              <a:t>Takeaway (off the slide): Ask Lincoln, Cadillac and LR Reno what changed. Ask VW St George, Kia St George and VW Henderson what got in the way. Ask LR Henderson, LR Reno and Kia St George what they started this year.Source: Qlik - Profit &amp; Loss. Jan-Sep. Same-store, INEOS excluded (opened 2026). P&amp;L line Fixed Ops Absorption % = Total Gross Profit - Fixed Ops / Fixed Expenses. GMC Prescott includes its body shop, as on the P&amp;L. Top and bottom five stores by change in Fixed Ops Absorption %, Jan-Sep 2026 vs 2025. Moving now: Jul-Sep 2026 vs Jan-Mar 2026, each store against itself; the group moved +4.2 pts on the same basis, so part of every store's change is seasonal. Green bar at the right of a row: the store is on both the top five vs last year and the top five moving now.Conversation starter: each top store says one thing they started doing; each bottom store says what got in the way and what they would try. The room trades ideas. Moving now: ask the top three what they started this year.</a:t>
+              <a:t>Takeaway with the store call-outs (off the slide): Ask Lincoln, Cadillac and LR Reno what changed. Ask VW St George, Kia St George and VW Henderson what got in the way. Ask LR Henderson, LR Reno and Kia St George what they started this year.Source: Qlik - Profit &amp; Loss. Jan-Sep. Same-store, INEOS excluded (opened 2026). P&amp;L line Fixed Ops Absorption % = Total Gross Profit - Fixed Ops / Fixed Expenses. GMC Prescott includes its body shop, as on the P&amp;L. Top and bottom five stores by change in Fixed Ops Absorption %, Jan-Sep 2026 vs 2025. Moving now: Jul-Sep 2026 vs Jan-Mar 2026, each store against itself; the group moved +4.2 pts on the same basis, so part of every store's change is seasonal. Green bar at the right of a row: the store is on both the top five vs last year and the top five moving now.Conversation starter: each top store says one thing they started doing; each bottom store says what got in the way and what they would try. The room trades ideas. Moving now: ask the top three what they started this year.</a:t>
             </a:r>
             <a:endParaRPr lang="en-US" dirty="0"/>
           </a:p>
@@ -6691,7 +6691,7 @@
           <a:p>
             <a:r>
               <a:rPr lang="en-US" dirty="0"/>
-              <a:t>Takeaway (off the slide): 10 of 33 stores at or above the 21.8% group, led by Honda Henderson at 43.0%. GMC Prescott is lowest at -38.1%.Source: Qlik - Profit &amp; Loss. Jan-Sep. Same-store, INEOS excluded (opened 2026). Mechanical department profit / mechanical department gross (P&amp;L Detail statement). Body shop is its own department and is not included. Jan-Sep 2026 YTD. Green at or above the group, red below. Bars start at -45.0% so differences are visible.</a:t>
+              <a:t>Takeaway with the store call-outs (off the slide): 10 of 33 stores at or above the 21.8% group, led by Honda Henderson at 43.0%. GMC Prescott is lowest at -38.1%.Source: Qlik - Profit &amp; Loss. Jan-Sep. Same-store, INEOS excluded (opened 2026). Mechanical department profit / mechanical department gross (P&amp;L Detail statement). Body shop is its own department and is not included. Jan-Sep 2026 YTD. Green at or above the group, red below. Bars start at -45.0% so differences are visible.</a:t>
             </a:r>
             <a:endParaRPr lang="en-US" dirty="0"/>
           </a:p>
@@ -6779,7 +6779,7 @@
           <a:p>
             <a:r>
               <a:rPr lang="en-US" dirty="0"/>
-              <a:t>Takeaway (off the slide): 24 of 33 stores raised service net to gross, led by Hyundai Prescott at +33.5 pts to -19.2%. 9 declined; VW St George fell most at −26.8 pts.Source: Qlik - Profit &amp; Loss. Jan-Sep. Same-store, INEOS excluded (opened 2026). Change in Service Net to Gross %, Jan-Sep 2026 vs 2025, best first.</a:t>
+              <a:t>Takeaway with the store call-outs (off the slide): 24 of 33 stores raised service net to gross, led by Hyundai Prescott at +33.5 pts to -19.2%. 9 declined; VW St George fell most at −26.8 pts.Source: Qlik - Profit &amp; Loss. Jan-Sep. Same-store, INEOS excluded (opened 2026). Change in Service Net to Gross %, Jan-Sep 2026 vs 2025, best first.</a:t>
             </a:r>
             <a:endParaRPr lang="en-US" dirty="0"/>
           </a:p>
@@ -6867,7 +6867,7 @@
           <a:p>
             <a:r>
               <a:rPr lang="en-US" dirty="0"/>
-              <a:t>Takeaway (off the slide): Ask Hyundai Prescott, Lincoln and LR Reno what changed. Ask VW St George, Kia St George and Mazda what got in the way. Ask Hyundai Prescott, LR Henderson and LR Reno what they started this year.Source: Qlik - Profit &amp; Loss. Jan-Sep. Same-store, INEOS excluded (opened 2026). Mechanical department profit / mechanical department gross (P&amp;L Detail statement). Body shop is its own department and is not included. Top and bottom five stores by change in Service Net to Gross %, Jan-Sep 2026 vs 2025. Moving now: Jul-Sep 2026 vs Jan-Mar 2026, each store against itself; the group moved +1.0 pts on the same basis, so part of every store's change is seasonal. Green bar at the right of a row: the store is on both the top five vs last year and the top five moving now.Conversation starter: each top store says one thing they started doing; each bottom store says what got in the way and what they would try. The room trades ideas. Moving now: ask the top three what they started this year.</a:t>
+              <a:t>Takeaway with the store call-outs (off the slide): Ask Hyundai Prescott, Lincoln and LR Reno what changed. Ask VW St George, Kia St George and Mazda what got in the way. Ask Hyundai Prescott, LR Henderson and LR Reno what they started this year.Source: Qlik - Profit &amp; Loss. Jan-Sep. Same-store, INEOS excluded (opened 2026). Mechanical department profit / mechanical department gross (P&amp;L Detail statement). Body shop is its own department and is not included. Top and bottom five stores by change in Service Net to Gross %, Jan-Sep 2026 vs 2025. Moving now: Jul-Sep 2026 vs Jan-Mar 2026, each store against itself; the group moved +1.0 pts on the same basis, so part of every store's change is seasonal. Green bar at the right of a row: the store is on both the top five vs last year and the top five moving now.Conversation starter: each top store says one thing they started doing; each bottom store says what got in the way and what they would try. The room trades ideas. Moving now: ask the top three what they started this year.</a:t>
             </a:r>
             <a:endParaRPr lang="en-US" dirty="0"/>
           </a:p>
@@ -8350,7 +8350,7 @@
         <p:spPr>
           <a:xfrm>
             <a:off x="457200" y="1207008"/>
-            <a:ext cx="11274552" cy="5148072"/>
+            <a:ext cx="11274552" cy="4782312"/>
           </a:xfrm>
           <a:prstGeom prst="rect">
             <a:avLst/>
@@ -8527,7 +8527,7 @@
         <p:spPr>
           <a:xfrm>
             <a:off x="658368" y="1847088"/>
-            <a:ext cx="310896" cy="261411"/>
+            <a:ext cx="310896" cy="239896"/>
           </a:xfrm>
           <a:prstGeom prst="rect">
             <a:avLst/>
@@ -8566,7 +8566,7 @@
         <p:spPr>
           <a:xfrm>
             <a:off x="1014984" y="1847088"/>
-            <a:ext cx="1920240" cy="261411"/>
+            <a:ext cx="1920240" cy="239896"/>
           </a:xfrm>
           <a:prstGeom prst="rect">
             <a:avLst/>
@@ -8604,8 +8604,8 @@
         </p:nvSpPr>
         <p:spPr>
           <a:xfrm>
-            <a:off x="3008376" y="1912441"/>
-            <a:ext cx="1691640" cy="130705"/>
+            <a:off x="3008376" y="1907062"/>
+            <a:ext cx="1691640" cy="119948"/>
           </a:xfrm>
           <a:prstGeom prst="rect">
             <a:avLst/>
@@ -8625,7 +8625,7 @@
         <p:spPr>
           <a:xfrm>
             <a:off x="4754880" y="1847088"/>
-            <a:ext cx="1143000" cy="261411"/>
+            <a:ext cx="1143000" cy="239896"/>
           </a:xfrm>
           <a:prstGeom prst="rect">
             <a:avLst/>
@@ -8663,8 +8663,8 @@
         </p:nvSpPr>
         <p:spPr>
           <a:xfrm>
-            <a:off x="658368" y="2108499"/>
-            <a:ext cx="310896" cy="261411"/>
+            <a:off x="658368" y="2086984"/>
+            <a:ext cx="310896" cy="239896"/>
           </a:xfrm>
           <a:prstGeom prst="rect">
             <a:avLst/>
@@ -8702,8 +8702,8 @@
         </p:nvSpPr>
         <p:spPr>
           <a:xfrm>
-            <a:off x="1014984" y="2108499"/>
-            <a:ext cx="1920240" cy="261411"/>
+            <a:off x="1014984" y="2086984"/>
+            <a:ext cx="1920240" cy="239896"/>
           </a:xfrm>
           <a:prstGeom prst="rect">
             <a:avLst/>
@@ -8741,8 +8741,8 @@
         </p:nvSpPr>
         <p:spPr>
           <a:xfrm>
-            <a:off x="3008376" y="2173852"/>
-            <a:ext cx="1429353" cy="130705"/>
+            <a:off x="3008376" y="2146957"/>
+            <a:ext cx="1429353" cy="119948"/>
           </a:xfrm>
           <a:prstGeom prst="rect">
             <a:avLst/>
@@ -8761,8 +8761,8 @@
         </p:nvSpPr>
         <p:spPr>
           <a:xfrm>
-            <a:off x="4754880" y="2108499"/>
-            <a:ext cx="1143000" cy="261411"/>
+            <a:off x="4754880" y="2086984"/>
+            <a:ext cx="1143000" cy="239896"/>
           </a:xfrm>
           <a:prstGeom prst="rect">
             <a:avLst/>
@@ -8800,8 +8800,8 @@
         </p:nvSpPr>
         <p:spPr>
           <a:xfrm>
-            <a:off x="658368" y="2369910"/>
-            <a:ext cx="310896" cy="261411"/>
+            <a:off x="658368" y="2326879"/>
+            <a:ext cx="310896" cy="239896"/>
           </a:xfrm>
           <a:prstGeom prst="rect">
             <a:avLst/>
@@ -8839,8 +8839,8 @@
         </p:nvSpPr>
         <p:spPr>
           <a:xfrm>
-            <a:off x="1014984" y="2369910"/>
-            <a:ext cx="1920240" cy="261411"/>
+            <a:off x="1014984" y="2326879"/>
+            <a:ext cx="1920240" cy="239896"/>
           </a:xfrm>
           <a:prstGeom prst="rect">
             <a:avLst/>
@@ -8878,8 +8878,8 @@
         </p:nvSpPr>
         <p:spPr>
           <a:xfrm>
-            <a:off x="3008376" y="2435262"/>
-            <a:ext cx="1412066" cy="130705"/>
+            <a:off x="3008376" y="2386853"/>
+            <a:ext cx="1412066" cy="119948"/>
           </a:xfrm>
           <a:prstGeom prst="rect">
             <a:avLst/>
@@ -8898,8 +8898,8 @@
         </p:nvSpPr>
         <p:spPr>
           <a:xfrm>
-            <a:off x="4754880" y="2369910"/>
-            <a:ext cx="1143000" cy="261411"/>
+            <a:off x="4754880" y="2326879"/>
+            <a:ext cx="1143000" cy="239896"/>
           </a:xfrm>
           <a:prstGeom prst="rect">
             <a:avLst/>
@@ -8937,8 +8937,8 @@
         </p:nvSpPr>
         <p:spPr>
           <a:xfrm>
-            <a:off x="658368" y="2631320"/>
-            <a:ext cx="310896" cy="261411"/>
+            <a:off x="658368" y="2566775"/>
+            <a:ext cx="310896" cy="239896"/>
           </a:xfrm>
           <a:prstGeom prst="rect">
             <a:avLst/>
@@ -8976,8 +8976,8 @@
         </p:nvSpPr>
         <p:spPr>
           <a:xfrm>
-            <a:off x="1014984" y="2631320"/>
-            <a:ext cx="1920240" cy="261411"/>
+            <a:off x="1014984" y="2566775"/>
+            <a:ext cx="1920240" cy="239896"/>
           </a:xfrm>
           <a:prstGeom prst="rect">
             <a:avLst/>
@@ -9015,8 +9015,8 @@
         </p:nvSpPr>
         <p:spPr>
           <a:xfrm>
-            <a:off x="3008376" y="2696673"/>
-            <a:ext cx="1398451" cy="130705"/>
+            <a:off x="3008376" y="2626748"/>
+            <a:ext cx="1398451" cy="119948"/>
           </a:xfrm>
           <a:prstGeom prst="rect">
             <a:avLst/>
@@ -9035,8 +9035,8 @@
         </p:nvSpPr>
         <p:spPr>
           <a:xfrm>
-            <a:off x="4754880" y="2631320"/>
-            <a:ext cx="1143000" cy="261411"/>
+            <a:off x="4754880" y="2566775"/>
+            <a:ext cx="1143000" cy="239896"/>
           </a:xfrm>
           <a:prstGeom prst="rect">
             <a:avLst/>
@@ -9074,8 +9074,8 @@
         </p:nvSpPr>
         <p:spPr>
           <a:xfrm>
-            <a:off x="658368" y="2892731"/>
-            <a:ext cx="310896" cy="261411"/>
+            <a:off x="658368" y="2806670"/>
+            <a:ext cx="310896" cy="239896"/>
           </a:xfrm>
           <a:prstGeom prst="rect">
             <a:avLst/>
@@ -9113,8 +9113,8 @@
         </p:nvSpPr>
         <p:spPr>
           <a:xfrm>
-            <a:off x="1014984" y="2892731"/>
-            <a:ext cx="1920240" cy="261411"/>
+            <a:off x="1014984" y="2806670"/>
+            <a:ext cx="1920240" cy="239896"/>
           </a:xfrm>
           <a:prstGeom prst="rect">
             <a:avLst/>
@@ -9152,8 +9152,8 @@
         </p:nvSpPr>
         <p:spPr>
           <a:xfrm>
-            <a:off x="3008376" y="2958084"/>
-            <a:ext cx="1317467" cy="130705"/>
+            <a:off x="3008376" y="2866644"/>
+            <a:ext cx="1317467" cy="119948"/>
           </a:xfrm>
           <a:prstGeom prst="rect">
             <a:avLst/>
@@ -9172,8 +9172,8 @@
         </p:nvSpPr>
         <p:spPr>
           <a:xfrm>
-            <a:off x="4754880" y="2892731"/>
-            <a:ext cx="1143000" cy="261411"/>
+            <a:off x="4754880" y="2806670"/>
+            <a:ext cx="1143000" cy="239896"/>
           </a:xfrm>
           <a:prstGeom prst="rect">
             <a:avLst/>
@@ -9211,8 +9211,8 @@
         </p:nvSpPr>
         <p:spPr>
           <a:xfrm>
-            <a:off x="658368" y="3154142"/>
-            <a:ext cx="310896" cy="261411"/>
+            <a:off x="658368" y="3046566"/>
+            <a:ext cx="310896" cy="239896"/>
           </a:xfrm>
           <a:prstGeom prst="rect">
             <a:avLst/>
@@ -9250,8 +9250,8 @@
         </p:nvSpPr>
         <p:spPr>
           <a:xfrm>
-            <a:off x="1014984" y="3154142"/>
-            <a:ext cx="1920240" cy="261411"/>
+            <a:off x="1014984" y="3046566"/>
+            <a:ext cx="1920240" cy="239896"/>
           </a:xfrm>
           <a:prstGeom prst="rect">
             <a:avLst/>
@@ -9289,8 +9289,8 @@
         </p:nvSpPr>
         <p:spPr>
           <a:xfrm>
-            <a:off x="3008376" y="3219495"/>
-            <a:ext cx="1312721" cy="130705"/>
+            <a:off x="3008376" y="3106540"/>
+            <a:ext cx="1312721" cy="119948"/>
           </a:xfrm>
           <a:prstGeom prst="rect">
             <a:avLst/>
@@ -9309,8 +9309,8 @@
         </p:nvSpPr>
         <p:spPr>
           <a:xfrm>
-            <a:off x="4754880" y="3154142"/>
-            <a:ext cx="1143000" cy="261411"/>
+            <a:off x="4754880" y="3046566"/>
+            <a:ext cx="1143000" cy="239896"/>
           </a:xfrm>
           <a:prstGeom prst="rect">
             <a:avLst/>
@@ -9348,8 +9348,8 @@
         </p:nvSpPr>
         <p:spPr>
           <a:xfrm>
-            <a:off x="658368" y="3415553"/>
-            <a:ext cx="310896" cy="261411"/>
+            <a:off x="658368" y="3286461"/>
+            <a:ext cx="310896" cy="239896"/>
           </a:xfrm>
           <a:prstGeom prst="rect">
             <a:avLst/>
@@ -9387,8 +9387,8 @@
         </p:nvSpPr>
         <p:spPr>
           <a:xfrm>
-            <a:off x="1014984" y="3415553"/>
-            <a:ext cx="1920240" cy="261411"/>
+            <a:off x="1014984" y="3286461"/>
+            <a:ext cx="1920240" cy="239896"/>
           </a:xfrm>
           <a:prstGeom prst="rect">
             <a:avLst/>
@@ -9426,8 +9426,8 @@
         </p:nvSpPr>
         <p:spPr>
           <a:xfrm>
-            <a:off x="3008376" y="3480906"/>
-            <a:ext cx="1306825" cy="130705"/>
+            <a:off x="3008376" y="3346435"/>
+            <a:ext cx="1306825" cy="119948"/>
           </a:xfrm>
           <a:prstGeom prst="rect">
             <a:avLst/>
@@ -9446,8 +9446,8 @@
         </p:nvSpPr>
         <p:spPr>
           <a:xfrm>
-            <a:off x="4754880" y="3415553"/>
-            <a:ext cx="1143000" cy="261411"/>
+            <a:off x="4754880" y="3286461"/>
+            <a:ext cx="1143000" cy="239896"/>
           </a:xfrm>
           <a:prstGeom prst="rect">
             <a:avLst/>
@@ -9485,8 +9485,8 @@
         </p:nvSpPr>
         <p:spPr>
           <a:xfrm>
-            <a:off x="658368" y="3676964"/>
-            <a:ext cx="310896" cy="261411"/>
+            <a:off x="658368" y="3526357"/>
+            <a:ext cx="310896" cy="239896"/>
           </a:xfrm>
           <a:prstGeom prst="rect">
             <a:avLst/>
@@ -9524,8 +9524,8 @@
         </p:nvSpPr>
         <p:spPr>
           <a:xfrm>
-            <a:off x="1014984" y="3676964"/>
-            <a:ext cx="1920240" cy="261411"/>
+            <a:off x="1014984" y="3526357"/>
+            <a:ext cx="1920240" cy="239896"/>
           </a:xfrm>
           <a:prstGeom prst="rect">
             <a:avLst/>
@@ -9563,8 +9563,8 @@
         </p:nvSpPr>
         <p:spPr>
           <a:xfrm>
-            <a:off x="3008376" y="3742316"/>
-            <a:ext cx="1279067" cy="130705"/>
+            <a:off x="3008376" y="3586331"/>
+            <a:ext cx="1279067" cy="119948"/>
           </a:xfrm>
           <a:prstGeom prst="rect">
             <a:avLst/>
@@ -9583,8 +9583,8 @@
         </p:nvSpPr>
         <p:spPr>
           <a:xfrm>
-            <a:off x="4754880" y="3676964"/>
-            <a:ext cx="1143000" cy="261411"/>
+            <a:off x="4754880" y="3526357"/>
+            <a:ext cx="1143000" cy="239896"/>
           </a:xfrm>
           <a:prstGeom prst="rect">
             <a:avLst/>
@@ -9622,8 +9622,8 @@
         </p:nvSpPr>
         <p:spPr>
           <a:xfrm>
-            <a:off x="658368" y="3938375"/>
-            <a:ext cx="310896" cy="261411"/>
+            <a:off x="658368" y="3766252"/>
+            <a:ext cx="310896" cy="239896"/>
           </a:xfrm>
           <a:prstGeom prst="rect">
             <a:avLst/>
@@ -9661,8 +9661,8 @@
         </p:nvSpPr>
         <p:spPr>
           <a:xfrm>
-            <a:off x="1014984" y="3938375"/>
-            <a:ext cx="1920240" cy="261411"/>
+            <a:off x="1014984" y="3766252"/>
+            <a:ext cx="1920240" cy="239896"/>
           </a:xfrm>
           <a:prstGeom prst="rect">
             <a:avLst/>
@@ -9700,8 +9700,8 @@
         </p:nvSpPr>
         <p:spPr>
           <a:xfrm>
-            <a:off x="3008376" y="4003727"/>
-            <a:ext cx="1273414" cy="130705"/>
+            <a:off x="3008376" y="3826226"/>
+            <a:ext cx="1273414" cy="119948"/>
           </a:xfrm>
           <a:prstGeom prst="rect">
             <a:avLst/>
@@ -9720,8 +9720,8 @@
         </p:nvSpPr>
         <p:spPr>
           <a:xfrm>
-            <a:off x="4754880" y="3938375"/>
-            <a:ext cx="1143000" cy="261411"/>
+            <a:off x="4754880" y="3766252"/>
+            <a:ext cx="1143000" cy="239896"/>
           </a:xfrm>
           <a:prstGeom prst="rect">
             <a:avLst/>
@@ -9759,8 +9759,8 @@
         </p:nvSpPr>
         <p:spPr>
           <a:xfrm>
-            <a:off x="658368" y="4199785"/>
-            <a:ext cx="310896" cy="261411"/>
+            <a:off x="658368" y="4006148"/>
+            <a:ext cx="310896" cy="239896"/>
           </a:xfrm>
           <a:prstGeom prst="rect">
             <a:avLst/>
@@ -9798,8 +9798,8 @@
         </p:nvSpPr>
         <p:spPr>
           <a:xfrm>
-            <a:off x="1014984" y="4199785"/>
-            <a:ext cx="1920240" cy="261411"/>
+            <a:off x="1014984" y="4006148"/>
+            <a:ext cx="1920240" cy="239896"/>
           </a:xfrm>
           <a:prstGeom prst="rect">
             <a:avLst/>
@@ -9837,8 +9837,8 @@
         </p:nvSpPr>
         <p:spPr>
           <a:xfrm>
-            <a:off x="3008376" y="4265138"/>
-            <a:ext cx="1261946" cy="130705"/>
+            <a:off x="3008376" y="4066122"/>
+            <a:ext cx="1261946" cy="119948"/>
           </a:xfrm>
           <a:prstGeom prst="rect">
             <a:avLst/>
@@ -9857,8 +9857,8 @@
         </p:nvSpPr>
         <p:spPr>
           <a:xfrm>
-            <a:off x="4754880" y="4199785"/>
-            <a:ext cx="1143000" cy="261411"/>
+            <a:off x="4754880" y="4006148"/>
+            <a:ext cx="1143000" cy="239896"/>
           </a:xfrm>
           <a:prstGeom prst="rect">
             <a:avLst/>
@@ -9896,8 +9896,8 @@
         </p:nvSpPr>
         <p:spPr>
           <a:xfrm>
-            <a:off x="658368" y="4461196"/>
-            <a:ext cx="310896" cy="261411"/>
+            <a:off x="658368" y="4246043"/>
+            <a:ext cx="310896" cy="239896"/>
           </a:xfrm>
           <a:prstGeom prst="rect">
             <a:avLst/>
@@ -9935,8 +9935,8 @@
         </p:nvSpPr>
         <p:spPr>
           <a:xfrm>
-            <a:off x="1014984" y="4461196"/>
-            <a:ext cx="1920240" cy="261411"/>
+            <a:off x="1014984" y="4246043"/>
+            <a:ext cx="1920240" cy="239896"/>
           </a:xfrm>
           <a:prstGeom prst="rect">
             <a:avLst/>
@@ -9974,8 +9974,8 @@
         </p:nvSpPr>
         <p:spPr>
           <a:xfrm>
-            <a:off x="3008376" y="4526549"/>
-            <a:ext cx="1239549" cy="130705"/>
+            <a:off x="3008376" y="4306017"/>
+            <a:ext cx="1239549" cy="119948"/>
           </a:xfrm>
           <a:prstGeom prst="rect">
             <a:avLst/>
@@ -9994,8 +9994,8 @@
         </p:nvSpPr>
         <p:spPr>
           <a:xfrm>
-            <a:off x="4754880" y="4461196"/>
-            <a:ext cx="1143000" cy="261411"/>
+            <a:off x="4754880" y="4246043"/>
+            <a:ext cx="1143000" cy="239896"/>
           </a:xfrm>
           <a:prstGeom prst="rect">
             <a:avLst/>
@@ -10033,8 +10033,8 @@
         </p:nvSpPr>
         <p:spPr>
           <a:xfrm>
-            <a:off x="658368" y="4722607"/>
-            <a:ext cx="310896" cy="261411"/>
+            <a:off x="658368" y="4485939"/>
+            <a:ext cx="310896" cy="239896"/>
           </a:xfrm>
           <a:prstGeom prst="rect">
             <a:avLst/>
@@ -10072,8 +10072,8 @@
         </p:nvSpPr>
         <p:spPr>
           <a:xfrm>
-            <a:off x="1014984" y="4722607"/>
-            <a:ext cx="1920240" cy="261411"/>
+            <a:off x="1014984" y="4485939"/>
+            <a:ext cx="1920240" cy="239896"/>
           </a:xfrm>
           <a:prstGeom prst="rect">
             <a:avLst/>
@@ -10111,8 +10111,8 @@
         </p:nvSpPr>
         <p:spPr>
           <a:xfrm>
-            <a:off x="3008376" y="4787960"/>
-            <a:ext cx="1209944" cy="130705"/>
+            <a:off x="3008376" y="4545913"/>
+            <a:ext cx="1209944" cy="119948"/>
           </a:xfrm>
           <a:prstGeom prst="rect">
             <a:avLst/>
@@ -10131,8 +10131,8 @@
         </p:nvSpPr>
         <p:spPr>
           <a:xfrm>
-            <a:off x="4754880" y="4722607"/>
-            <a:ext cx="1143000" cy="261411"/>
+            <a:off x="4754880" y="4485939"/>
+            <a:ext cx="1143000" cy="239896"/>
           </a:xfrm>
           <a:prstGeom prst="rect">
             <a:avLst/>
@@ -10170,8 +10170,8 @@
         </p:nvSpPr>
         <p:spPr>
           <a:xfrm>
-            <a:off x="658368" y="4984018"/>
-            <a:ext cx="310896" cy="261411"/>
+            <a:off x="658368" y="4725834"/>
+            <a:ext cx="310896" cy="239896"/>
           </a:xfrm>
           <a:prstGeom prst="rect">
             <a:avLst/>
@@ -10209,8 +10209,8 @@
         </p:nvSpPr>
         <p:spPr>
           <a:xfrm>
-            <a:off x="1014984" y="4984018"/>
-            <a:ext cx="1920240" cy="261411"/>
+            <a:off x="1014984" y="4725834"/>
+            <a:ext cx="1920240" cy="239896"/>
           </a:xfrm>
           <a:prstGeom prst="rect">
             <a:avLst/>
@@ -10248,8 +10248,8 @@
         </p:nvSpPr>
         <p:spPr>
           <a:xfrm>
-            <a:off x="3008376" y="5049371"/>
-            <a:ext cx="1143812" cy="130705"/>
+            <a:off x="3008376" y="4785808"/>
+            <a:ext cx="1143812" cy="119948"/>
           </a:xfrm>
           <a:prstGeom prst="rect">
             <a:avLst/>
@@ -10268,8 +10268,8 @@
         </p:nvSpPr>
         <p:spPr>
           <a:xfrm>
-            <a:off x="4754880" y="4984018"/>
-            <a:ext cx="1143000" cy="261411"/>
+            <a:off x="4754880" y="4725834"/>
+            <a:ext cx="1143000" cy="239896"/>
           </a:xfrm>
           <a:prstGeom prst="rect">
             <a:avLst/>
@@ -10307,8 +10307,8 @@
         </p:nvSpPr>
         <p:spPr>
           <a:xfrm>
-            <a:off x="658368" y="5245429"/>
-            <a:ext cx="310896" cy="261411"/>
+            <a:off x="658368" y="4965730"/>
+            <a:ext cx="310896" cy="239896"/>
           </a:xfrm>
           <a:prstGeom prst="rect">
             <a:avLst/>
@@ -10346,8 +10346,8 @@
         </p:nvSpPr>
         <p:spPr>
           <a:xfrm>
-            <a:off x="1014984" y="5245429"/>
-            <a:ext cx="1920240" cy="261411"/>
+            <a:off x="1014984" y="4965730"/>
+            <a:ext cx="1920240" cy="239896"/>
           </a:xfrm>
           <a:prstGeom prst="rect">
             <a:avLst/>
@@ -10385,8 +10385,8 @@
         </p:nvSpPr>
         <p:spPr>
           <a:xfrm>
-            <a:off x="3008376" y="5310781"/>
-            <a:ext cx="1134120" cy="130705"/>
+            <a:off x="3008376" y="5025704"/>
+            <a:ext cx="1134120" cy="119948"/>
           </a:xfrm>
           <a:prstGeom prst="rect">
             <a:avLst/>
@@ -10405,8 +10405,8 @@
         </p:nvSpPr>
         <p:spPr>
           <a:xfrm>
-            <a:off x="4754880" y="5245429"/>
-            <a:ext cx="1143000" cy="261411"/>
+            <a:off x="4754880" y="4965730"/>
+            <a:ext cx="1143000" cy="239896"/>
           </a:xfrm>
           <a:prstGeom prst="rect">
             <a:avLst/>
@@ -10444,8 +10444,8 @@
         </p:nvSpPr>
         <p:spPr>
           <a:xfrm>
-            <a:off x="658368" y="5506840"/>
-            <a:ext cx="310896" cy="261411"/>
+            <a:off x="658368" y="5205625"/>
+            <a:ext cx="310896" cy="239896"/>
           </a:xfrm>
           <a:prstGeom prst="rect">
             <a:avLst/>
@@ -10483,8 +10483,8 @@
         </p:nvSpPr>
         <p:spPr>
           <a:xfrm>
-            <a:off x="1014984" y="5506840"/>
-            <a:ext cx="1920240" cy="261411"/>
+            <a:off x="1014984" y="5205625"/>
+            <a:ext cx="1920240" cy="239896"/>
           </a:xfrm>
           <a:prstGeom prst="rect">
             <a:avLst/>
@@ -10522,8 +10522,8 @@
         </p:nvSpPr>
         <p:spPr>
           <a:xfrm>
-            <a:off x="3008376" y="5572192"/>
-            <a:ext cx="1079936" cy="130705"/>
+            <a:off x="3008376" y="5265599"/>
+            <a:ext cx="1079936" cy="119948"/>
           </a:xfrm>
           <a:prstGeom prst="rect">
             <a:avLst/>
@@ -10542,8 +10542,8 @@
         </p:nvSpPr>
         <p:spPr>
           <a:xfrm>
-            <a:off x="4754880" y="5506840"/>
-            <a:ext cx="1143000" cy="261411"/>
+            <a:off x="4754880" y="5205625"/>
+            <a:ext cx="1143000" cy="239896"/>
           </a:xfrm>
           <a:prstGeom prst="rect">
             <a:avLst/>
@@ -10581,8 +10581,8 @@
         </p:nvSpPr>
         <p:spPr>
           <a:xfrm>
-            <a:off x="658368" y="5768250"/>
-            <a:ext cx="310896" cy="261411"/>
+            <a:off x="658368" y="5445521"/>
+            <a:ext cx="310896" cy="239896"/>
           </a:xfrm>
           <a:prstGeom prst="rect">
             <a:avLst/>
@@ -10620,8 +10620,8 @@
         </p:nvSpPr>
         <p:spPr>
           <a:xfrm>
-            <a:off x="1014984" y="5768250"/>
-            <a:ext cx="1920240" cy="261411"/>
+            <a:off x="1014984" y="5445521"/>
+            <a:ext cx="1920240" cy="239896"/>
           </a:xfrm>
           <a:prstGeom prst="rect">
             <a:avLst/>
@@ -10659,8 +10659,8 @@
         </p:nvSpPr>
         <p:spPr>
           <a:xfrm>
-            <a:off x="3008376" y="5833603"/>
-            <a:ext cx="1039071" cy="130705"/>
+            <a:off x="3008376" y="5505495"/>
+            <a:ext cx="1039071" cy="119948"/>
           </a:xfrm>
           <a:prstGeom prst="rect">
             <a:avLst/>
@@ -10679,8 +10679,8 @@
         </p:nvSpPr>
         <p:spPr>
           <a:xfrm>
-            <a:off x="4754880" y="5768250"/>
-            <a:ext cx="1143000" cy="261411"/>
+            <a:off x="4754880" y="5445521"/>
+            <a:ext cx="1143000" cy="239896"/>
           </a:xfrm>
           <a:prstGeom prst="rect">
             <a:avLst/>
@@ -10718,8 +10718,8 @@
         </p:nvSpPr>
         <p:spPr>
           <a:xfrm>
-            <a:off x="658368" y="6029661"/>
-            <a:ext cx="310896" cy="261411"/>
+            <a:off x="658368" y="5685416"/>
+            <a:ext cx="310896" cy="239896"/>
           </a:xfrm>
           <a:prstGeom prst="rect">
             <a:avLst/>
@@ -10757,8 +10757,8 @@
         </p:nvSpPr>
         <p:spPr>
           <a:xfrm>
-            <a:off x="1014984" y="6029661"/>
-            <a:ext cx="1920240" cy="261411"/>
+            <a:off x="1014984" y="5685416"/>
+            <a:ext cx="1920240" cy="239896"/>
           </a:xfrm>
           <a:prstGeom prst="rect">
             <a:avLst/>
@@ -10796,8 +10796,8 @@
         </p:nvSpPr>
         <p:spPr>
           <a:xfrm>
-            <a:off x="3008376" y="6095014"/>
-            <a:ext cx="1026056" cy="130705"/>
+            <a:off x="3008376" y="5745390"/>
+            <a:ext cx="1026056" cy="119948"/>
           </a:xfrm>
           <a:prstGeom prst="rect">
             <a:avLst/>
@@ -10816,8 +10816,8 @@
         </p:nvSpPr>
         <p:spPr>
           <a:xfrm>
-            <a:off x="4754880" y="6029661"/>
-            <a:ext cx="1143000" cy="261411"/>
+            <a:off x="4754880" y="5685416"/>
+            <a:ext cx="1143000" cy="239896"/>
           </a:xfrm>
           <a:prstGeom prst="rect">
             <a:avLst/>
@@ -10856,7 +10856,7 @@
         <p:spPr>
           <a:xfrm>
             <a:off x="6208776" y="1847088"/>
-            <a:ext cx="310896" cy="261411"/>
+            <a:ext cx="310896" cy="239896"/>
           </a:xfrm>
           <a:prstGeom prst="rect">
             <a:avLst/>
@@ -10895,7 +10895,7 @@
         <p:spPr>
           <a:xfrm>
             <a:off x="6565392" y="1847088"/>
-            <a:ext cx="1920240" cy="261411"/>
+            <a:ext cx="1920240" cy="239896"/>
           </a:xfrm>
           <a:prstGeom prst="rect">
             <a:avLst/>
@@ -10933,8 +10933,8 @@
         </p:nvSpPr>
         <p:spPr>
           <a:xfrm>
-            <a:off x="8558784" y="1912441"/>
-            <a:ext cx="994650" cy="130705"/>
+            <a:off x="8558784" y="1907062"/>
+            <a:ext cx="994650" cy="119948"/>
           </a:xfrm>
           <a:prstGeom prst="rect">
             <a:avLst/>
@@ -10954,7 +10954,7 @@
         <p:spPr>
           <a:xfrm>
             <a:off x="10305288" y="1847088"/>
-            <a:ext cx="1143000" cy="261411"/>
+            <a:ext cx="1143000" cy="239896"/>
           </a:xfrm>
           <a:prstGeom prst="rect">
             <a:avLst/>
@@ -10992,8 +10992,8 @@
         </p:nvSpPr>
         <p:spPr>
           <a:xfrm>
-            <a:off x="6208776" y="2108499"/>
-            <a:ext cx="310896" cy="261411"/>
+            <a:off x="6208776" y="2086984"/>
+            <a:ext cx="310896" cy="239896"/>
           </a:xfrm>
           <a:prstGeom prst="rect">
             <a:avLst/>
@@ -11031,8 +11031,8 @@
         </p:nvSpPr>
         <p:spPr>
           <a:xfrm>
-            <a:off x="6565392" y="2108499"/>
-            <a:ext cx="1920240" cy="261411"/>
+            <a:off x="6565392" y="2086984"/>
+            <a:ext cx="1920240" cy="239896"/>
           </a:xfrm>
           <a:prstGeom prst="rect">
             <a:avLst/>
@@ -11070,8 +11070,8 @@
         </p:nvSpPr>
         <p:spPr>
           <a:xfrm>
-            <a:off x="8558784" y="2173852"/>
-            <a:ext cx="946998" cy="130705"/>
+            <a:off x="8558784" y="2146957"/>
+            <a:ext cx="946998" cy="119948"/>
           </a:xfrm>
           <a:prstGeom prst="rect">
             <a:avLst/>
@@ -11090,8 +11090,8 @@
         </p:nvSpPr>
         <p:spPr>
           <a:xfrm>
-            <a:off x="10305288" y="2108499"/>
-            <a:ext cx="1143000" cy="261411"/>
+            <a:off x="10305288" y="2086984"/>
+            <a:ext cx="1143000" cy="239896"/>
           </a:xfrm>
           <a:prstGeom prst="rect">
             <a:avLst/>
@@ -11129,8 +11129,8 @@
         </p:nvSpPr>
         <p:spPr>
           <a:xfrm>
-            <a:off x="6208776" y="2369910"/>
-            <a:ext cx="310896" cy="261411"/>
+            <a:off x="6208776" y="2326879"/>
+            <a:ext cx="310896" cy="239896"/>
           </a:xfrm>
           <a:prstGeom prst="rect">
             <a:avLst/>
@@ -11168,8 +11168,8 @@
         </p:nvSpPr>
         <p:spPr>
           <a:xfrm>
-            <a:off x="6565392" y="2369910"/>
-            <a:ext cx="1920240" cy="261411"/>
+            <a:off x="6565392" y="2326879"/>
+            <a:ext cx="1920240" cy="239896"/>
           </a:xfrm>
           <a:prstGeom prst="rect">
             <a:avLst/>
@@ -11207,8 +11207,8 @@
         </p:nvSpPr>
         <p:spPr>
           <a:xfrm>
-            <a:off x="8558784" y="2435262"/>
-            <a:ext cx="941033" cy="130705"/>
+            <a:off x="8558784" y="2386853"/>
+            <a:ext cx="941033" cy="119948"/>
           </a:xfrm>
           <a:prstGeom prst="rect">
             <a:avLst/>
@@ -11227,8 +11227,8 @@
         </p:nvSpPr>
         <p:spPr>
           <a:xfrm>
-            <a:off x="10305288" y="2369910"/>
-            <a:ext cx="1143000" cy="261411"/>
+            <a:off x="10305288" y="2326879"/>
+            <a:ext cx="1143000" cy="239896"/>
           </a:xfrm>
           <a:prstGeom prst="rect">
             <a:avLst/>
@@ -11266,8 +11266,8 @@
         </p:nvSpPr>
         <p:spPr>
           <a:xfrm>
-            <a:off x="6208776" y="2631320"/>
-            <a:ext cx="310896" cy="261411"/>
+            <a:off x="6208776" y="2566775"/>
+            <a:ext cx="310896" cy="239896"/>
           </a:xfrm>
           <a:prstGeom prst="rect">
             <a:avLst/>
@@ -11305,8 +11305,8 @@
         </p:nvSpPr>
         <p:spPr>
           <a:xfrm>
-            <a:off x="6565392" y="2631320"/>
-            <a:ext cx="1920240" cy="261411"/>
+            <a:off x="6565392" y="2566775"/>
+            <a:ext cx="1920240" cy="239896"/>
           </a:xfrm>
           <a:prstGeom prst="rect">
             <a:avLst/>
@@ -11344,8 +11344,8 @@
         </p:nvSpPr>
         <p:spPr>
           <a:xfrm>
-            <a:off x="8558784" y="2696673"/>
-            <a:ext cx="900852" cy="130705"/>
+            <a:off x="8558784" y="2626748"/>
+            <a:ext cx="900852" cy="119948"/>
           </a:xfrm>
           <a:prstGeom prst="rect">
             <a:avLst/>
@@ -11364,8 +11364,8 @@
         </p:nvSpPr>
         <p:spPr>
           <a:xfrm>
-            <a:off x="10305288" y="2631320"/>
-            <a:ext cx="1143000" cy="261411"/>
+            <a:off x="10305288" y="2566775"/>
+            <a:ext cx="1143000" cy="239896"/>
           </a:xfrm>
           <a:prstGeom prst="rect">
             <a:avLst/>
@@ -11403,8 +11403,8 @@
         </p:nvSpPr>
         <p:spPr>
           <a:xfrm>
-            <a:off x="6208776" y="2892731"/>
-            <a:ext cx="310896" cy="261411"/>
+            <a:off x="6208776" y="2806670"/>
+            <a:ext cx="310896" cy="239896"/>
           </a:xfrm>
           <a:prstGeom prst="rect">
             <a:avLst/>
@@ -11442,8 +11442,8 @@
         </p:nvSpPr>
         <p:spPr>
           <a:xfrm>
-            <a:off x="6565392" y="2892731"/>
-            <a:ext cx="1920240" cy="261411"/>
+            <a:off x="6565392" y="2806670"/>
+            <a:ext cx="1920240" cy="239896"/>
           </a:xfrm>
           <a:prstGeom prst="rect">
             <a:avLst/>
@@ -11481,8 +11481,8 @@
         </p:nvSpPr>
         <p:spPr>
           <a:xfrm>
-            <a:off x="8558784" y="2958084"/>
-            <a:ext cx="894005" cy="130705"/>
+            <a:off x="8558784" y="2866644"/>
+            <a:ext cx="894005" cy="119948"/>
           </a:xfrm>
           <a:prstGeom prst="rect">
             <a:avLst/>
@@ -11501,8 +11501,8 @@
         </p:nvSpPr>
         <p:spPr>
           <a:xfrm>
-            <a:off x="10305288" y="2892731"/>
-            <a:ext cx="1143000" cy="261411"/>
+            <a:off x="10305288" y="2806670"/>
+            <a:ext cx="1143000" cy="239896"/>
           </a:xfrm>
           <a:prstGeom prst="rect">
             <a:avLst/>
@@ -11540,8 +11540,8 @@
         </p:nvSpPr>
         <p:spPr>
           <a:xfrm>
-            <a:off x="6208776" y="3154142"/>
-            <a:ext cx="310896" cy="261411"/>
+            <a:off x="6208776" y="3046566"/>
+            <a:ext cx="310896" cy="239896"/>
           </a:xfrm>
           <a:prstGeom prst="rect">
             <a:avLst/>
@@ -11579,8 +11579,8 @@
         </p:nvSpPr>
         <p:spPr>
           <a:xfrm>
-            <a:off x="6565392" y="3154142"/>
-            <a:ext cx="1920240" cy="261411"/>
+            <a:off x="6565392" y="3046566"/>
+            <a:ext cx="1920240" cy="239896"/>
           </a:xfrm>
           <a:prstGeom prst="rect">
             <a:avLst/>
@@ -11618,8 +11618,8 @@
         </p:nvSpPr>
         <p:spPr>
           <a:xfrm>
-            <a:off x="8558784" y="3219495"/>
-            <a:ext cx="887363" cy="130705"/>
+            <a:off x="8558784" y="3106540"/>
+            <a:ext cx="887363" cy="119948"/>
           </a:xfrm>
           <a:prstGeom prst="rect">
             <a:avLst/>
@@ -11638,8 +11638,8 @@
         </p:nvSpPr>
         <p:spPr>
           <a:xfrm>
-            <a:off x="10305288" y="3154142"/>
-            <a:ext cx="1143000" cy="261411"/>
+            <a:off x="10305288" y="3046566"/>
+            <a:ext cx="1143000" cy="239896"/>
           </a:xfrm>
           <a:prstGeom prst="rect">
             <a:avLst/>
@@ -11677,8 +11677,8 @@
         </p:nvSpPr>
         <p:spPr>
           <a:xfrm>
-            <a:off x="6208776" y="3415553"/>
-            <a:ext cx="310896" cy="261411"/>
+            <a:off x="6208776" y="3286461"/>
+            <a:ext cx="310896" cy="239896"/>
           </a:xfrm>
           <a:prstGeom prst="rect">
             <a:avLst/>
@@ -11716,8 +11716,8 @@
         </p:nvSpPr>
         <p:spPr>
           <a:xfrm>
-            <a:off x="6565392" y="3415553"/>
-            <a:ext cx="1920240" cy="261411"/>
+            <a:off x="6565392" y="3286461"/>
+            <a:ext cx="1920240" cy="239896"/>
           </a:xfrm>
           <a:prstGeom prst="rect">
             <a:avLst/>
@@ -11755,8 +11755,8 @@
         </p:nvSpPr>
         <p:spPr>
           <a:xfrm>
-            <a:off x="8558784" y="3480906"/>
-            <a:ext cx="863472" cy="130705"/>
+            <a:off x="8558784" y="3346435"/>
+            <a:ext cx="863472" cy="119948"/>
           </a:xfrm>
           <a:prstGeom prst="rect">
             <a:avLst/>
@@ -11775,8 +11775,8 @@
         </p:nvSpPr>
         <p:spPr>
           <a:xfrm>
-            <a:off x="10305288" y="3415553"/>
-            <a:ext cx="1143000" cy="261411"/>
+            <a:off x="10305288" y="3286461"/>
+            <a:ext cx="1143000" cy="239896"/>
           </a:xfrm>
           <a:prstGeom prst="rect">
             <a:avLst/>
@@ -11814,8 +11814,8 @@
         </p:nvSpPr>
         <p:spPr>
           <a:xfrm>
-            <a:off x="6208776" y="3676964"/>
-            <a:ext cx="310896" cy="261411"/>
+            <a:off x="6208776" y="3526357"/>
+            <a:ext cx="310896" cy="239896"/>
           </a:xfrm>
           <a:prstGeom prst="rect">
             <a:avLst/>
@@ -11853,8 +11853,8 @@
         </p:nvSpPr>
         <p:spPr>
           <a:xfrm>
-            <a:off x="6565392" y="3676964"/>
-            <a:ext cx="1920240" cy="261411"/>
+            <a:off x="6565392" y="3526357"/>
+            <a:ext cx="1920240" cy="239896"/>
           </a:xfrm>
           <a:prstGeom prst="rect">
             <a:avLst/>
@@ -11892,8 +11892,8 @@
         </p:nvSpPr>
         <p:spPr>
           <a:xfrm>
-            <a:off x="8558784" y="3742316"/>
-            <a:ext cx="767637" cy="130705"/>
+            <a:off x="8558784" y="3586331"/>
+            <a:ext cx="767637" cy="119948"/>
           </a:xfrm>
           <a:prstGeom prst="rect">
             <a:avLst/>
@@ -11912,8 +11912,8 @@
         </p:nvSpPr>
         <p:spPr>
           <a:xfrm>
-            <a:off x="10305288" y="3676964"/>
-            <a:ext cx="1143000" cy="261411"/>
+            <a:off x="10305288" y="3526357"/>
+            <a:ext cx="1143000" cy="239896"/>
           </a:xfrm>
           <a:prstGeom prst="rect">
             <a:avLst/>
@@ -11951,8 +11951,8 @@
         </p:nvSpPr>
         <p:spPr>
           <a:xfrm>
-            <a:off x="6208776" y="3938375"/>
-            <a:ext cx="310896" cy="261411"/>
+            <a:off x="6208776" y="3766252"/>
+            <a:ext cx="310896" cy="239896"/>
           </a:xfrm>
           <a:prstGeom prst="rect">
             <a:avLst/>
@@ -11990,8 +11990,8 @@
         </p:nvSpPr>
         <p:spPr>
           <a:xfrm>
-            <a:off x="6565392" y="3938375"/>
-            <a:ext cx="1920240" cy="261411"/>
+            <a:off x="6565392" y="3766252"/>
+            <a:ext cx="1920240" cy="239896"/>
           </a:xfrm>
           <a:prstGeom prst="rect">
             <a:avLst/>
@@ -12029,8 +12029,8 @@
         </p:nvSpPr>
         <p:spPr>
           <a:xfrm>
-            <a:off x="8558784" y="4003727"/>
-            <a:ext cx="740911" cy="130705"/>
+            <a:off x="8558784" y="3826226"/>
+            <a:ext cx="740911" cy="119948"/>
           </a:xfrm>
           <a:prstGeom prst="rect">
             <a:avLst/>
@@ -12049,8 +12049,8 @@
         </p:nvSpPr>
         <p:spPr>
           <a:xfrm>
-            <a:off x="10305288" y="3938375"/>
-            <a:ext cx="1143000" cy="261411"/>
+            <a:off x="10305288" y="3766252"/>
+            <a:ext cx="1143000" cy="239896"/>
           </a:xfrm>
           <a:prstGeom prst="rect">
             <a:avLst/>
@@ -12088,8 +12088,8 @@
         </p:nvSpPr>
         <p:spPr>
           <a:xfrm>
-            <a:off x="6208776" y="4199785"/>
-            <a:ext cx="310896" cy="261411"/>
+            <a:off x="6208776" y="4006148"/>
+            <a:ext cx="310896" cy="239896"/>
           </a:xfrm>
           <a:prstGeom prst="rect">
             <a:avLst/>
@@ -12127,8 +12127,8 @@
         </p:nvSpPr>
         <p:spPr>
           <a:xfrm>
-            <a:off x="6565392" y="4199785"/>
-            <a:ext cx="1920240" cy="261411"/>
+            <a:off x="6565392" y="4006148"/>
+            <a:ext cx="1920240" cy="239896"/>
           </a:xfrm>
           <a:prstGeom prst="rect">
             <a:avLst/>
@@ -12166,8 +12166,8 @@
         </p:nvSpPr>
         <p:spPr>
           <a:xfrm>
-            <a:off x="8558784" y="4265138"/>
-            <a:ext cx="728589" cy="130705"/>
+            <a:off x="8558784" y="4066122"/>
+            <a:ext cx="728589" cy="119948"/>
           </a:xfrm>
           <a:prstGeom prst="rect">
             <a:avLst/>
@@ -12186,8 +12186,8 @@
         </p:nvSpPr>
         <p:spPr>
           <a:xfrm>
-            <a:off x="10305288" y="4199785"/>
-            <a:ext cx="1143000" cy="261411"/>
+            <a:off x="10305288" y="4006148"/>
+            <a:ext cx="1143000" cy="239896"/>
           </a:xfrm>
           <a:prstGeom prst="rect">
             <a:avLst/>
@@ -12225,8 +12225,8 @@
         </p:nvSpPr>
         <p:spPr>
           <a:xfrm>
-            <a:off x="6208776" y="4461196"/>
-            <a:ext cx="310896" cy="261411"/>
+            <a:off x="6208776" y="4246043"/>
+            <a:ext cx="310896" cy="239896"/>
           </a:xfrm>
           <a:prstGeom prst="rect">
             <a:avLst/>
@@ -12264,8 +12264,8 @@
         </p:nvSpPr>
         <p:spPr>
           <a:xfrm>
-            <a:off x="6565392" y="4461196"/>
-            <a:ext cx="1920240" cy="261411"/>
+            <a:off x="6565392" y="4246043"/>
+            <a:ext cx="1920240" cy="239896"/>
           </a:xfrm>
           <a:prstGeom prst="rect">
             <a:avLst/>
@@ -12303,8 +12303,8 @@
         </p:nvSpPr>
         <p:spPr>
           <a:xfrm>
-            <a:off x="8558784" y="4526549"/>
-            <a:ext cx="726153" cy="130705"/>
+            <a:off x="8558784" y="4306017"/>
+            <a:ext cx="726153" cy="119948"/>
           </a:xfrm>
           <a:prstGeom prst="rect">
             <a:avLst/>
@@ -12323,8 +12323,8 @@
         </p:nvSpPr>
         <p:spPr>
           <a:xfrm>
-            <a:off x="10305288" y="4461196"/>
-            <a:ext cx="1143000" cy="261411"/>
+            <a:off x="10305288" y="4246043"/>
+            <a:ext cx="1143000" cy="239896"/>
           </a:xfrm>
           <a:prstGeom prst="rect">
             <a:avLst/>
@@ -12362,8 +12362,8 @@
         </p:nvSpPr>
         <p:spPr>
           <a:xfrm>
-            <a:off x="6208776" y="4722607"/>
-            <a:ext cx="310896" cy="261411"/>
+            <a:off x="6208776" y="4485939"/>
+            <a:ext cx="310896" cy="239896"/>
           </a:xfrm>
           <a:prstGeom prst="rect">
             <a:avLst/>
@@ -12401,8 +12401,8 @@
         </p:nvSpPr>
         <p:spPr>
           <a:xfrm>
-            <a:off x="6565392" y="4722607"/>
-            <a:ext cx="1920240" cy="261411"/>
+            <a:off x="6565392" y="4485939"/>
+            <a:ext cx="1920240" cy="239896"/>
           </a:xfrm>
           <a:prstGeom prst="rect">
             <a:avLst/>
@@ -12440,8 +12440,8 @@
         </p:nvSpPr>
         <p:spPr>
           <a:xfrm>
-            <a:off x="8558784" y="4787960"/>
-            <a:ext cx="687804" cy="130705"/>
+            <a:off x="8558784" y="4545913"/>
+            <a:ext cx="687804" cy="119948"/>
           </a:xfrm>
           <a:prstGeom prst="rect">
             <a:avLst/>
@@ -12460,8 +12460,8 @@
         </p:nvSpPr>
         <p:spPr>
           <a:xfrm>
-            <a:off x="10305288" y="4722607"/>
-            <a:ext cx="1143000" cy="261411"/>
+            <a:off x="10305288" y="4485939"/>
+            <a:ext cx="1143000" cy="239896"/>
           </a:xfrm>
           <a:prstGeom prst="rect">
             <a:avLst/>
@@ -12499,8 +12499,8 @@
         </p:nvSpPr>
         <p:spPr>
           <a:xfrm>
-            <a:off x="6208776" y="4984018"/>
-            <a:ext cx="310896" cy="261411"/>
+            <a:off x="6208776" y="4725834"/>
+            <a:ext cx="310896" cy="239896"/>
           </a:xfrm>
           <a:prstGeom prst="rect">
             <a:avLst/>
@@ -12538,8 +12538,8 @@
         </p:nvSpPr>
         <p:spPr>
           <a:xfrm>
-            <a:off x="6565392" y="4984018"/>
-            <a:ext cx="1920240" cy="261411"/>
+            <a:off x="6565392" y="4725834"/>
+            <a:ext cx="1920240" cy="239896"/>
           </a:xfrm>
           <a:prstGeom prst="rect">
             <a:avLst/>
@@ -12577,8 +12577,8 @@
         </p:nvSpPr>
         <p:spPr>
           <a:xfrm>
-            <a:off x="8558784" y="5049371"/>
-            <a:ext cx="680786" cy="130705"/>
+            <a:off x="8558784" y="4785808"/>
+            <a:ext cx="680786" cy="119948"/>
           </a:xfrm>
           <a:prstGeom prst="rect">
             <a:avLst/>
@@ -12597,8 +12597,8 @@
         </p:nvSpPr>
         <p:spPr>
           <a:xfrm>
-            <a:off x="10305288" y="4984018"/>
-            <a:ext cx="1143000" cy="261411"/>
+            <a:off x="10305288" y="4725834"/>
+            <a:ext cx="1143000" cy="239896"/>
           </a:xfrm>
           <a:prstGeom prst="rect">
             <a:avLst/>
@@ -12636,8 +12636,8 @@
         </p:nvSpPr>
         <p:spPr>
           <a:xfrm>
-            <a:off x="6208776" y="5245429"/>
-            <a:ext cx="310896" cy="261411"/>
+            <a:off x="6208776" y="4965730"/>
+            <a:ext cx="310896" cy="239896"/>
           </a:xfrm>
           <a:prstGeom prst="rect">
             <a:avLst/>
@@ -12675,8 +12675,8 @@
         </p:nvSpPr>
         <p:spPr>
           <a:xfrm>
-            <a:off x="6565392" y="5245429"/>
-            <a:ext cx="1920240" cy="261411"/>
+            <a:off x="6565392" y="4965730"/>
+            <a:ext cx="1920240" cy="239896"/>
           </a:xfrm>
           <a:prstGeom prst="rect">
             <a:avLst/>
@@ -12714,8 +12714,8 @@
         </p:nvSpPr>
         <p:spPr>
           <a:xfrm>
-            <a:off x="8558784" y="5310781"/>
-            <a:ext cx="516128" cy="130705"/>
+            <a:off x="8558784" y="5025704"/>
+            <a:ext cx="516128" cy="119948"/>
           </a:xfrm>
           <a:prstGeom prst="rect">
             <a:avLst/>
@@ -12734,8 +12734,8 @@
         </p:nvSpPr>
         <p:spPr>
           <a:xfrm>
-            <a:off x="10305288" y="5245429"/>
-            <a:ext cx="1143000" cy="261411"/>
+            <a:off x="10305288" y="4965730"/>
+            <a:ext cx="1143000" cy="239896"/>
           </a:xfrm>
           <a:prstGeom prst="rect">
             <a:avLst/>
@@ -12773,8 +12773,8 @@
         </p:nvSpPr>
         <p:spPr>
           <a:xfrm>
-            <a:off x="6208776" y="5506840"/>
-            <a:ext cx="310896" cy="261411"/>
+            <a:off x="6208776" y="5205625"/>
+            <a:ext cx="310896" cy="239896"/>
           </a:xfrm>
           <a:prstGeom prst="rect">
             <a:avLst/>
@@ -12812,8 +12812,8 @@
         </p:nvSpPr>
         <p:spPr>
           <a:xfrm>
-            <a:off x="6565392" y="5506840"/>
-            <a:ext cx="1920240" cy="261411"/>
+            <a:off x="6565392" y="5205625"/>
+            <a:ext cx="1920240" cy="239896"/>
           </a:xfrm>
           <a:prstGeom prst="rect">
             <a:avLst/>
@@ -12851,8 +12851,8 @@
         </p:nvSpPr>
         <p:spPr>
           <a:xfrm>
-            <a:off x="8558784" y="5572192"/>
-            <a:ext cx="455373" cy="130705"/>
+            <a:off x="8558784" y="5265599"/>
+            <a:ext cx="455373" cy="119948"/>
           </a:xfrm>
           <a:prstGeom prst="rect">
             <a:avLst/>
@@ -12871,8 +12871,8 @@
         </p:nvSpPr>
         <p:spPr>
           <a:xfrm>
-            <a:off x="10305288" y="5506840"/>
-            <a:ext cx="1143000" cy="261411"/>
+            <a:off x="10305288" y="5205625"/>
+            <a:ext cx="1143000" cy="239896"/>
           </a:xfrm>
           <a:prstGeom prst="rect">
             <a:avLst/>
@@ -12910,8 +12910,8 @@
         </p:nvSpPr>
         <p:spPr>
           <a:xfrm>
-            <a:off x="6208776" y="5768250"/>
-            <a:ext cx="310896" cy="261411"/>
+            <a:off x="6208776" y="5445521"/>
+            <a:ext cx="310896" cy="239896"/>
           </a:xfrm>
           <a:prstGeom prst="rect">
             <a:avLst/>
@@ -12949,8 +12949,8 @@
         </p:nvSpPr>
         <p:spPr>
           <a:xfrm>
-            <a:off x="6565392" y="5768250"/>
-            <a:ext cx="1920240" cy="261411"/>
+            <a:off x="6565392" y="5445521"/>
+            <a:ext cx="1920240" cy="239896"/>
           </a:xfrm>
           <a:prstGeom prst="rect">
             <a:avLst/>
@@ -12988,8 +12988,8 @@
         </p:nvSpPr>
         <p:spPr>
           <a:xfrm>
-            <a:off x="8558784" y="5833603"/>
-            <a:ext cx="287195" cy="130705"/>
+            <a:off x="8558784" y="5505495"/>
+            <a:ext cx="287195" cy="119948"/>
           </a:xfrm>
           <a:prstGeom prst="rect">
             <a:avLst/>
@@ -13008,8 +13008,8 @@
         </p:nvSpPr>
         <p:spPr>
           <a:xfrm>
-            <a:off x="10305288" y="5768250"/>
-            <a:ext cx="1143000" cy="261411"/>
+            <a:off x="10305288" y="5445521"/>
+            <a:ext cx="1143000" cy="239896"/>
           </a:xfrm>
           <a:prstGeom prst="rect">
             <a:avLst/>
@@ -13048,7 +13048,7 @@
         <p:spPr>
           <a:xfrm>
             <a:off x="4060077" y="1847088"/>
-            <a:ext cx="14630" cy="4443984"/>
+            <a:ext cx="14630" cy="4078224"/>
           </a:xfrm>
           <a:prstGeom prst="rect">
             <a:avLst/>
@@ -13068,7 +13068,7 @@
         <p:spPr>
           <a:xfrm>
             <a:off x="9610485" y="1847088"/>
-            <a:ext cx="14630" cy="4443984"/>
+            <a:ext cx="14630" cy="4078224"/>
           </a:xfrm>
           <a:prstGeom prst="rect">
             <a:avLst/>
@@ -13088,7 +13088,7 @@
         <p:spPr>
           <a:xfrm>
             <a:off x="6085332" y="1847088"/>
-            <a:ext cx="10973" cy="4443984"/>
+            <a:ext cx="10973" cy="4078224"/>
           </a:xfrm>
           <a:prstGeom prst="rect">
             <a:avLst/>
@@ -13098,6 +13098,65 @@
           </a:solidFill>
           <a:ln/>
         </p:spPr>
+      </p:sp>
+      <p:sp>
+        <p:nvSpPr>
+          <p:cNvPr id="147" name="Shape 144"/>
+          <p:cNvSpPr/>
+          <p:nvPr/>
+        </p:nvSpPr>
+        <p:spPr>
+          <a:xfrm>
+            <a:off x="457200" y="6126480"/>
+            <a:ext cx="11274552" cy="371856"/>
+          </a:xfrm>
+          <a:prstGeom prst="rect">
+            <a:avLst/>
+          </a:prstGeom>
+          <a:solidFill>
+            <a:srgbClr val="EDF4FA"/>
+          </a:solidFill>
+          <a:ln/>
+        </p:spPr>
+      </p:sp>
+      <p:sp>
+        <p:nvSpPr>
+          <p:cNvPr id="148" name="Text 145"/>
+          <p:cNvSpPr txBox="1"/>
+          <p:nvPr/>
+        </p:nvSpPr>
+        <p:spPr>
+          <a:xfrm>
+            <a:off x="658368" y="6144768"/>
+            <a:ext cx="10927080" cy="335280"/>
+          </a:xfrm>
+          <a:prstGeom prst="rect">
+            <a:avLst/>
+          </a:prstGeom>
+          <a:noFill/>
+          <a:ln/>
+        </p:spPr>
+        <p:txBody>
+          <a:bodyPr wrap="square" lIns="0" tIns="0" rIns="0" bIns="0" rtlCol="0" anchor="ctr"/>
+          <a:lstStyle/>
+          <a:p>
+            <a:pPr indent="0" marL="0">
+              <a:buNone/>
+            </a:pPr>
+            <a:r>
+              <a:rPr lang="en-US" sz="1600" b="1" dirty="0">
+                <a:solidFill>
+                  <a:srgbClr val="0B2C4A"/>
+                </a:solidFill>
+                <a:latin typeface="Inter" pitchFamily="34" charset="0"/>
+                <a:ea typeface="Inter" pitchFamily="34" charset="-122"/>
+                <a:cs typeface="Inter" pitchFamily="34" charset="-120"/>
+              </a:rPr>
+              <a:t>15 of 33 stores at or above the 36.7% group.</a:t>
+            </a:r>
+            <a:endParaRPr lang="en-US" sz="1600" dirty="0"/>
+          </a:p>
+        </p:txBody>
       </p:sp>
     </p:spTree>
   </p:cSld>
@@ -13238,7 +13297,7 @@
         <p:spPr>
           <a:xfrm>
             <a:off x="457200" y="1207008"/>
-            <a:ext cx="11274552" cy="5148072"/>
+            <a:ext cx="11274552" cy="4782312"/>
           </a:xfrm>
           <a:prstGeom prst="rect">
             <a:avLst/>
@@ -13415,7 +13474,7 @@
         <p:spPr>
           <a:xfrm>
             <a:off x="658368" y="1847088"/>
-            <a:ext cx="310896" cy="261411"/>
+            <a:ext cx="310896" cy="239896"/>
           </a:xfrm>
           <a:prstGeom prst="rect">
             <a:avLst/>
@@ -13454,7 +13513,7 @@
         <p:spPr>
           <a:xfrm>
             <a:off x="1014984" y="1847088"/>
-            <a:ext cx="1920240" cy="261411"/>
+            <a:ext cx="1920240" cy="239896"/>
           </a:xfrm>
           <a:prstGeom prst="rect">
             <a:avLst/>
@@ -13492,8 +13551,8 @@
         </p:nvSpPr>
         <p:spPr>
           <a:xfrm>
-            <a:off x="3785616" y="1917669"/>
-            <a:ext cx="777240" cy="120249"/>
+            <a:off x="3785616" y="1911860"/>
+            <a:ext cx="777240" cy="110352"/>
           </a:xfrm>
           <a:prstGeom prst="rect">
             <a:avLst/>
@@ -13513,7 +13572,7 @@
         <p:spPr>
           <a:xfrm>
             <a:off x="4617720" y="1847088"/>
-            <a:ext cx="1234440" cy="261411"/>
+            <a:ext cx="1234440" cy="239896"/>
           </a:xfrm>
           <a:prstGeom prst="rect">
             <a:avLst/>
@@ -13551,8 +13610,8 @@
         </p:nvSpPr>
         <p:spPr>
           <a:xfrm>
-            <a:off x="658368" y="2108499"/>
-            <a:ext cx="310896" cy="261411"/>
+            <a:off x="658368" y="2086984"/>
+            <a:ext cx="310896" cy="239896"/>
           </a:xfrm>
           <a:prstGeom prst="rect">
             <a:avLst/>
@@ -13590,8 +13649,8 @@
         </p:nvSpPr>
         <p:spPr>
           <a:xfrm>
-            <a:off x="1014984" y="2108499"/>
-            <a:ext cx="1920240" cy="261411"/>
+            <a:off x="1014984" y="2086984"/>
+            <a:ext cx="1920240" cy="239896"/>
           </a:xfrm>
           <a:prstGeom prst="rect">
             <a:avLst/>
@@ -13629,8 +13688,8 @@
         </p:nvSpPr>
         <p:spPr>
           <a:xfrm>
-            <a:off x="3785616" y="2179080"/>
-            <a:ext cx="712549" cy="120249"/>
+            <a:off x="3785616" y="2151755"/>
+            <a:ext cx="712549" cy="110352"/>
           </a:xfrm>
           <a:prstGeom prst="rect">
             <a:avLst/>
@@ -13649,8 +13708,8 @@
         </p:nvSpPr>
         <p:spPr>
           <a:xfrm>
-            <a:off x="4617720" y="2108499"/>
-            <a:ext cx="1234440" cy="261411"/>
+            <a:off x="4617720" y="2086984"/>
+            <a:ext cx="1234440" cy="239896"/>
           </a:xfrm>
           <a:prstGeom prst="rect">
             <a:avLst/>
@@ -13688,8 +13747,8 @@
         </p:nvSpPr>
         <p:spPr>
           <a:xfrm>
-            <a:off x="658368" y="2369910"/>
-            <a:ext cx="310896" cy="261411"/>
+            <a:off x="658368" y="2326879"/>
+            <a:ext cx="310896" cy="239896"/>
           </a:xfrm>
           <a:prstGeom prst="rect">
             <a:avLst/>
@@ -13727,8 +13786,8 @@
         </p:nvSpPr>
         <p:spPr>
           <a:xfrm>
-            <a:off x="1014984" y="2369910"/>
-            <a:ext cx="1920240" cy="261411"/>
+            <a:off x="1014984" y="2326879"/>
+            <a:ext cx="1920240" cy="239896"/>
           </a:xfrm>
           <a:prstGeom prst="rect">
             <a:avLst/>
@@ -13766,8 +13825,8 @@
         </p:nvSpPr>
         <p:spPr>
           <a:xfrm>
-            <a:off x="3785616" y="2440491"/>
-            <a:ext cx="579309" cy="120249"/>
+            <a:off x="3785616" y="2391651"/>
+            <a:ext cx="579309" cy="110352"/>
           </a:xfrm>
           <a:prstGeom prst="rect">
             <a:avLst/>
@@ -13786,8 +13845,8 @@
         </p:nvSpPr>
         <p:spPr>
           <a:xfrm>
-            <a:off x="4617720" y="2369910"/>
-            <a:ext cx="1234440" cy="261411"/>
+            <a:off x="4617720" y="2326879"/>
+            <a:ext cx="1234440" cy="239896"/>
           </a:xfrm>
           <a:prstGeom prst="rect">
             <a:avLst/>
@@ -13825,8 +13884,8 @@
         </p:nvSpPr>
         <p:spPr>
           <a:xfrm>
-            <a:off x="658368" y="2631320"/>
-            <a:ext cx="310896" cy="261411"/>
+            <a:off x="658368" y="2566775"/>
+            <a:ext cx="310896" cy="239896"/>
           </a:xfrm>
           <a:prstGeom prst="rect">
             <a:avLst/>
@@ -13864,8 +13923,8 @@
         </p:nvSpPr>
         <p:spPr>
           <a:xfrm>
-            <a:off x="1014984" y="2631320"/>
-            <a:ext cx="1920240" cy="261411"/>
+            <a:off x="1014984" y="2566775"/>
+            <a:ext cx="1920240" cy="239896"/>
           </a:xfrm>
           <a:prstGeom prst="rect">
             <a:avLst/>
@@ -13903,8 +13962,8 @@
         </p:nvSpPr>
         <p:spPr>
           <a:xfrm>
-            <a:off x="3785616" y="2701901"/>
-            <a:ext cx="412524" cy="120249"/>
+            <a:off x="3785616" y="2631546"/>
+            <a:ext cx="412524" cy="110352"/>
           </a:xfrm>
           <a:prstGeom prst="rect">
             <a:avLst/>
@@ -13923,8 +13982,8 @@
         </p:nvSpPr>
         <p:spPr>
           <a:xfrm>
-            <a:off x="4617720" y="2631320"/>
-            <a:ext cx="1234440" cy="261411"/>
+            <a:off x="4617720" y="2566775"/>
+            <a:ext cx="1234440" cy="239896"/>
           </a:xfrm>
           <a:prstGeom prst="rect">
             <a:avLst/>
@@ -13962,8 +14021,8 @@
         </p:nvSpPr>
         <p:spPr>
           <a:xfrm>
-            <a:off x="658368" y="2892731"/>
-            <a:ext cx="310896" cy="261411"/>
+            <a:off x="658368" y="2806670"/>
+            <a:ext cx="310896" cy="239896"/>
           </a:xfrm>
           <a:prstGeom prst="rect">
             <a:avLst/>
@@ -14001,8 +14060,8 @@
         </p:nvSpPr>
         <p:spPr>
           <a:xfrm>
-            <a:off x="1014984" y="2892731"/>
-            <a:ext cx="1920240" cy="261411"/>
+            <a:off x="1014984" y="2806670"/>
+            <a:ext cx="1920240" cy="239896"/>
           </a:xfrm>
           <a:prstGeom prst="rect">
             <a:avLst/>
@@ -14040,8 +14099,8 @@
         </p:nvSpPr>
         <p:spPr>
           <a:xfrm>
-            <a:off x="3785616" y="2963312"/>
-            <a:ext cx="384335" cy="120249"/>
+            <a:off x="3785616" y="2871442"/>
+            <a:ext cx="384335" cy="110352"/>
           </a:xfrm>
           <a:prstGeom prst="rect">
             <a:avLst/>
@@ -14060,8 +14119,8 @@
         </p:nvSpPr>
         <p:spPr>
           <a:xfrm>
-            <a:off x="4617720" y="2892731"/>
-            <a:ext cx="1234440" cy="261411"/>
+            <a:off x="4617720" y="2806670"/>
+            <a:ext cx="1234440" cy="239896"/>
           </a:xfrm>
           <a:prstGeom prst="rect">
             <a:avLst/>
@@ -14099,8 +14158,8 @@
         </p:nvSpPr>
         <p:spPr>
           <a:xfrm>
-            <a:off x="658368" y="3154142"/>
-            <a:ext cx="310896" cy="261411"/>
+            <a:off x="658368" y="3046566"/>
+            <a:ext cx="310896" cy="239896"/>
           </a:xfrm>
           <a:prstGeom prst="rect">
             <a:avLst/>
@@ -14138,8 +14197,8 @@
         </p:nvSpPr>
         <p:spPr>
           <a:xfrm>
-            <a:off x="1014984" y="3154142"/>
-            <a:ext cx="1920240" cy="261411"/>
+            <a:off x="1014984" y="3046566"/>
+            <a:ext cx="1920240" cy="239896"/>
           </a:xfrm>
           <a:prstGeom prst="rect">
             <a:avLst/>
@@ -14177,8 +14236,8 @@
         </p:nvSpPr>
         <p:spPr>
           <a:xfrm>
-            <a:off x="3785616" y="3224723"/>
-            <a:ext cx="345136" cy="120249"/>
+            <a:off x="3785616" y="3111337"/>
+            <a:ext cx="345136" cy="110352"/>
           </a:xfrm>
           <a:prstGeom prst="rect">
             <a:avLst/>
@@ -14197,8 +14256,8 @@
         </p:nvSpPr>
         <p:spPr>
           <a:xfrm>
-            <a:off x="4617720" y="3154142"/>
-            <a:ext cx="1234440" cy="261411"/>
+            <a:off x="4617720" y="3046566"/>
+            <a:ext cx="1234440" cy="239896"/>
           </a:xfrm>
           <a:prstGeom prst="rect">
             <a:avLst/>
@@ -14236,8 +14295,8 @@
         </p:nvSpPr>
         <p:spPr>
           <a:xfrm>
-            <a:off x="658368" y="3415553"/>
-            <a:ext cx="310896" cy="261411"/>
+            <a:off x="658368" y="3286461"/>
+            <a:ext cx="310896" cy="239896"/>
           </a:xfrm>
           <a:prstGeom prst="rect">
             <a:avLst/>
@@ -14275,8 +14334,8 @@
         </p:nvSpPr>
         <p:spPr>
           <a:xfrm>
-            <a:off x="1014984" y="3415553"/>
-            <a:ext cx="1920240" cy="261411"/>
+            <a:off x="1014984" y="3286461"/>
+            <a:ext cx="1920240" cy="239896"/>
           </a:xfrm>
           <a:prstGeom prst="rect">
             <a:avLst/>
@@ -14314,8 +14373,8 @@
         </p:nvSpPr>
         <p:spPr>
           <a:xfrm>
-            <a:off x="3785616" y="3486134"/>
-            <a:ext cx="344254" cy="120249"/>
+            <a:off x="3785616" y="3351233"/>
+            <a:ext cx="344254" cy="110352"/>
           </a:xfrm>
           <a:prstGeom prst="rect">
             <a:avLst/>
@@ -14334,8 +14393,8 @@
         </p:nvSpPr>
         <p:spPr>
           <a:xfrm>
-            <a:off x="4617720" y="3415553"/>
-            <a:ext cx="1234440" cy="261411"/>
+            <a:off x="4617720" y="3286461"/>
+            <a:ext cx="1234440" cy="239896"/>
           </a:xfrm>
           <a:prstGeom prst="rect">
             <a:avLst/>
@@ -14373,8 +14432,8 @@
         </p:nvSpPr>
         <p:spPr>
           <a:xfrm>
-            <a:off x="658368" y="3676964"/>
-            <a:ext cx="310896" cy="261411"/>
+            <a:off x="658368" y="3526357"/>
+            <a:ext cx="310896" cy="239896"/>
           </a:xfrm>
           <a:prstGeom prst="rect">
             <a:avLst/>
@@ -14412,8 +14471,8 @@
         </p:nvSpPr>
         <p:spPr>
           <a:xfrm>
-            <a:off x="1014984" y="3676964"/>
-            <a:ext cx="1920240" cy="261411"/>
+            <a:off x="1014984" y="3526357"/>
+            <a:ext cx="1920240" cy="239896"/>
           </a:xfrm>
           <a:prstGeom prst="rect">
             <a:avLst/>
@@ -14451,8 +14510,8 @@
         </p:nvSpPr>
         <p:spPr>
           <a:xfrm>
-            <a:off x="3785616" y="3747545"/>
-            <a:ext cx="326556" cy="120249"/>
+            <a:off x="3785616" y="3591128"/>
+            <a:ext cx="326556" cy="110352"/>
           </a:xfrm>
           <a:prstGeom prst="rect">
             <a:avLst/>
@@ -14471,8 +14530,8 @@
         </p:nvSpPr>
         <p:spPr>
           <a:xfrm>
-            <a:off x="4617720" y="3676964"/>
-            <a:ext cx="1234440" cy="261411"/>
+            <a:off x="4617720" y="3526357"/>
+            <a:ext cx="1234440" cy="239896"/>
           </a:xfrm>
           <a:prstGeom prst="rect">
             <a:avLst/>
@@ -14510,8 +14569,8 @@
         </p:nvSpPr>
         <p:spPr>
           <a:xfrm>
-            <a:off x="658368" y="3938375"/>
-            <a:ext cx="310896" cy="261411"/>
+            <a:off x="658368" y="3766252"/>
+            <a:ext cx="310896" cy="239896"/>
           </a:xfrm>
           <a:prstGeom prst="rect">
             <a:avLst/>
@@ -14549,8 +14608,8 @@
         </p:nvSpPr>
         <p:spPr>
           <a:xfrm>
-            <a:off x="1014984" y="3938375"/>
-            <a:ext cx="1920240" cy="261411"/>
+            <a:off x="1014984" y="3766252"/>
+            <a:ext cx="1920240" cy="239896"/>
           </a:xfrm>
           <a:prstGeom prst="rect">
             <a:avLst/>
@@ -14588,8 +14647,8 @@
         </p:nvSpPr>
         <p:spPr>
           <a:xfrm>
-            <a:off x="3785616" y="4008956"/>
-            <a:ext cx="248228" cy="120249"/>
+            <a:off x="3785616" y="3831024"/>
+            <a:ext cx="248228" cy="110352"/>
           </a:xfrm>
           <a:prstGeom prst="rect">
             <a:avLst/>
@@ -14608,8 +14667,8 @@
         </p:nvSpPr>
         <p:spPr>
           <a:xfrm>
-            <a:off x="4617720" y="3938375"/>
-            <a:ext cx="1234440" cy="261411"/>
+            <a:off x="4617720" y="3766252"/>
+            <a:ext cx="1234440" cy="239896"/>
           </a:xfrm>
           <a:prstGeom prst="rect">
             <a:avLst/>
@@ -14647,8 +14706,8 @@
         </p:nvSpPr>
         <p:spPr>
           <a:xfrm>
-            <a:off x="658368" y="4199785"/>
-            <a:ext cx="310896" cy="261411"/>
+            <a:off x="658368" y="4006148"/>
+            <a:ext cx="310896" cy="239896"/>
           </a:xfrm>
           <a:prstGeom prst="rect">
             <a:avLst/>
@@ -14686,8 +14745,8 @@
         </p:nvSpPr>
         <p:spPr>
           <a:xfrm>
-            <a:off x="1014984" y="4199785"/>
-            <a:ext cx="1920240" cy="261411"/>
+            <a:off x="1014984" y="4006148"/>
+            <a:ext cx="1920240" cy="239896"/>
           </a:xfrm>
           <a:prstGeom prst="rect">
             <a:avLst/>
@@ -14725,8 +14784,8 @@
         </p:nvSpPr>
         <p:spPr>
           <a:xfrm>
-            <a:off x="3785616" y="4270366"/>
-            <a:ext cx="176703" cy="120249"/>
+            <a:off x="3785616" y="4070920"/>
+            <a:ext cx="176703" cy="110352"/>
           </a:xfrm>
           <a:prstGeom prst="rect">
             <a:avLst/>
@@ -14745,8 +14804,8 @@
         </p:nvSpPr>
         <p:spPr>
           <a:xfrm>
-            <a:off x="4617720" y="4199785"/>
-            <a:ext cx="1234440" cy="261411"/>
+            <a:off x="4617720" y="4006148"/>
+            <a:ext cx="1234440" cy="239896"/>
           </a:xfrm>
           <a:prstGeom prst="rect">
             <a:avLst/>
@@ -14784,8 +14843,8 @@
         </p:nvSpPr>
         <p:spPr>
           <a:xfrm>
-            <a:off x="658368" y="4461196"/>
-            <a:ext cx="310896" cy="261411"/>
+            <a:off x="658368" y="4246043"/>
+            <a:ext cx="310896" cy="239896"/>
           </a:xfrm>
           <a:prstGeom prst="rect">
             <a:avLst/>
@@ -14823,8 +14882,8 @@
         </p:nvSpPr>
         <p:spPr>
           <a:xfrm>
-            <a:off x="1014984" y="4461196"/>
-            <a:ext cx="1920240" cy="261411"/>
+            <a:off x="1014984" y="4246043"/>
+            <a:ext cx="1920240" cy="239896"/>
           </a:xfrm>
           <a:prstGeom prst="rect">
             <a:avLst/>
@@ -14862,8 +14921,8 @@
         </p:nvSpPr>
         <p:spPr>
           <a:xfrm>
-            <a:off x="3785616" y="4531777"/>
-            <a:ext cx="172791" cy="120249"/>
+            <a:off x="3785616" y="4310815"/>
+            <a:ext cx="172791" cy="110352"/>
           </a:xfrm>
           <a:prstGeom prst="rect">
             <a:avLst/>
@@ -14882,8 +14941,8 @@
         </p:nvSpPr>
         <p:spPr>
           <a:xfrm>
-            <a:off x="4617720" y="4461196"/>
-            <a:ext cx="1234440" cy="261411"/>
+            <a:off x="4617720" y="4246043"/>
+            <a:ext cx="1234440" cy="239896"/>
           </a:xfrm>
           <a:prstGeom prst="rect">
             <a:avLst/>
@@ -14921,8 +14980,8 @@
         </p:nvSpPr>
         <p:spPr>
           <a:xfrm>
-            <a:off x="658368" y="4722607"/>
-            <a:ext cx="310896" cy="261411"/>
+            <a:off x="658368" y="4485939"/>
+            <a:ext cx="310896" cy="239896"/>
           </a:xfrm>
           <a:prstGeom prst="rect">
             <a:avLst/>
@@ -14960,8 +15019,8 @@
         </p:nvSpPr>
         <p:spPr>
           <a:xfrm>
-            <a:off x="1014984" y="4722607"/>
-            <a:ext cx="1920240" cy="261411"/>
+            <a:off x="1014984" y="4485939"/>
+            <a:ext cx="1920240" cy="239896"/>
           </a:xfrm>
           <a:prstGeom prst="rect">
             <a:avLst/>
@@ -14999,8 +15058,8 @@
         </p:nvSpPr>
         <p:spPr>
           <a:xfrm>
-            <a:off x="3785616" y="4793188"/>
-            <a:ext cx="120839" cy="120249"/>
+            <a:off x="3785616" y="4550711"/>
+            <a:ext cx="120839" cy="110352"/>
           </a:xfrm>
           <a:prstGeom prst="rect">
             <a:avLst/>
@@ -15019,8 +15078,8 @@
         </p:nvSpPr>
         <p:spPr>
           <a:xfrm>
-            <a:off x="4617720" y="4722607"/>
-            <a:ext cx="1234440" cy="261411"/>
+            <a:off x="4617720" y="4485939"/>
+            <a:ext cx="1234440" cy="239896"/>
           </a:xfrm>
           <a:prstGeom prst="rect">
             <a:avLst/>
@@ -15058,8 +15117,8 @@
         </p:nvSpPr>
         <p:spPr>
           <a:xfrm>
-            <a:off x="658368" y="4984018"/>
-            <a:ext cx="310896" cy="261411"/>
+            <a:off x="658368" y="4725834"/>
+            <a:ext cx="310896" cy="239896"/>
           </a:xfrm>
           <a:prstGeom prst="rect">
             <a:avLst/>
@@ -15097,8 +15156,8 @@
         </p:nvSpPr>
         <p:spPr>
           <a:xfrm>
-            <a:off x="1014984" y="4984018"/>
-            <a:ext cx="1920240" cy="261411"/>
+            <a:off x="1014984" y="4725834"/>
+            <a:ext cx="1920240" cy="239896"/>
           </a:xfrm>
           <a:prstGeom prst="rect">
             <a:avLst/>
@@ -15136,8 +15195,8 @@
         </p:nvSpPr>
         <p:spPr>
           <a:xfrm>
-            <a:off x="3785616" y="5054599"/>
-            <a:ext cx="109670" cy="120249"/>
+            <a:off x="3785616" y="4790606"/>
+            <a:ext cx="109670" cy="110352"/>
           </a:xfrm>
           <a:prstGeom prst="rect">
             <a:avLst/>
@@ -15156,8 +15215,8 @@
         </p:nvSpPr>
         <p:spPr>
           <a:xfrm>
-            <a:off x="4617720" y="4984018"/>
-            <a:ext cx="1234440" cy="261411"/>
+            <a:off x="4617720" y="4725834"/>
+            <a:ext cx="1234440" cy="239896"/>
           </a:xfrm>
           <a:prstGeom prst="rect">
             <a:avLst/>
@@ -15195,8 +15254,8 @@
         </p:nvSpPr>
         <p:spPr>
           <a:xfrm>
-            <a:off x="658368" y="5245429"/>
-            <a:ext cx="310896" cy="261411"/>
+            <a:off x="658368" y="4965730"/>
+            <a:ext cx="310896" cy="239896"/>
           </a:xfrm>
           <a:prstGeom prst="rect">
             <a:avLst/>
@@ -15234,8 +15293,8 @@
         </p:nvSpPr>
         <p:spPr>
           <a:xfrm>
-            <a:off x="1014984" y="5245429"/>
-            <a:ext cx="1920240" cy="261411"/>
+            <a:off x="1014984" y="4965730"/>
+            <a:ext cx="1920240" cy="239896"/>
           </a:xfrm>
           <a:prstGeom prst="rect">
             <a:avLst/>
@@ -15273,8 +15332,8 @@
         </p:nvSpPr>
         <p:spPr>
           <a:xfrm>
-            <a:off x="3785616" y="5316010"/>
-            <a:ext cx="81021" cy="120249"/>
+            <a:off x="3785616" y="5030502"/>
+            <a:ext cx="81021" cy="110352"/>
           </a:xfrm>
           <a:prstGeom prst="rect">
             <a:avLst/>
@@ -15293,8 +15352,8 @@
         </p:nvSpPr>
         <p:spPr>
           <a:xfrm>
-            <a:off x="4617720" y="5245429"/>
-            <a:ext cx="1234440" cy="261411"/>
+            <a:off x="4617720" y="4965730"/>
+            <a:ext cx="1234440" cy="239896"/>
           </a:xfrm>
           <a:prstGeom prst="rect">
             <a:avLst/>
@@ -15332,8 +15391,8 @@
         </p:nvSpPr>
         <p:spPr>
           <a:xfrm>
-            <a:off x="658368" y="5506840"/>
-            <a:ext cx="310896" cy="261411"/>
+            <a:off x="658368" y="5205625"/>
+            <a:ext cx="310896" cy="239896"/>
           </a:xfrm>
           <a:prstGeom prst="rect">
             <a:avLst/>
@@ -15371,8 +15430,8 @@
         </p:nvSpPr>
         <p:spPr>
           <a:xfrm>
-            <a:off x="1014984" y="5506840"/>
-            <a:ext cx="1920240" cy="261411"/>
+            <a:off x="1014984" y="5205625"/>
+            <a:ext cx="1920240" cy="239896"/>
           </a:xfrm>
           <a:prstGeom prst="rect">
             <a:avLst/>
@@ -15410,8 +15469,8 @@
         </p:nvSpPr>
         <p:spPr>
           <a:xfrm>
-            <a:off x="3785616" y="5577420"/>
-            <a:ext cx="69580" cy="120249"/>
+            <a:off x="3785616" y="5270397"/>
+            <a:ext cx="69580" cy="110352"/>
           </a:xfrm>
           <a:prstGeom prst="rect">
             <a:avLst/>
@@ -15430,8 +15489,8 @@
         </p:nvSpPr>
         <p:spPr>
           <a:xfrm>
-            <a:off x="4617720" y="5506840"/>
-            <a:ext cx="1234440" cy="261411"/>
+            <a:off x="4617720" y="5205625"/>
+            <a:ext cx="1234440" cy="239896"/>
           </a:xfrm>
           <a:prstGeom prst="rect">
             <a:avLst/>
@@ -15469,8 +15528,8 @@
         </p:nvSpPr>
         <p:spPr>
           <a:xfrm>
-            <a:off x="658368" y="5768250"/>
-            <a:ext cx="310896" cy="261411"/>
+            <a:off x="658368" y="5445521"/>
+            <a:ext cx="310896" cy="239896"/>
           </a:xfrm>
           <a:prstGeom prst="rect">
             <a:avLst/>
@@ -15508,8 +15567,8 @@
         </p:nvSpPr>
         <p:spPr>
           <a:xfrm>
-            <a:off x="1014984" y="5768250"/>
-            <a:ext cx="1920240" cy="261411"/>
+            <a:off x="1014984" y="5445521"/>
+            <a:ext cx="1920240" cy="239896"/>
           </a:xfrm>
           <a:prstGeom prst="rect">
             <a:avLst/>
@@ -15547,8 +15606,8 @@
         </p:nvSpPr>
         <p:spPr>
           <a:xfrm>
-            <a:off x="3783808" y="5838831"/>
-            <a:ext cx="12802" cy="120249"/>
+            <a:off x="3783808" y="5510293"/>
+            <a:ext cx="12802" cy="110352"/>
           </a:xfrm>
           <a:prstGeom prst="rect">
             <a:avLst/>
@@ -15567,8 +15626,8 @@
         </p:nvSpPr>
         <p:spPr>
           <a:xfrm>
-            <a:off x="4617720" y="5768250"/>
-            <a:ext cx="1234440" cy="261411"/>
+            <a:off x="4617720" y="5445521"/>
+            <a:ext cx="1234440" cy="239896"/>
           </a:xfrm>
           <a:prstGeom prst="rect">
             <a:avLst/>
@@ -15606,8 +15665,8 @@
         </p:nvSpPr>
         <p:spPr>
           <a:xfrm>
-            <a:off x="658368" y="6029661"/>
-            <a:ext cx="310896" cy="261411"/>
+            <a:off x="658368" y="5685416"/>
+            <a:ext cx="310896" cy="239896"/>
           </a:xfrm>
           <a:prstGeom prst="rect">
             <a:avLst/>
@@ -15645,8 +15704,8 @@
         </p:nvSpPr>
         <p:spPr>
           <a:xfrm>
-            <a:off x="1014984" y="6029661"/>
-            <a:ext cx="1920240" cy="261411"/>
+            <a:off x="1014984" y="5685416"/>
+            <a:ext cx="1920240" cy="239896"/>
           </a:xfrm>
           <a:prstGeom prst="rect">
             <a:avLst/>
@@ -15684,8 +15743,8 @@
         </p:nvSpPr>
         <p:spPr>
           <a:xfrm>
-            <a:off x="3782938" y="6100242"/>
-            <a:ext cx="12802" cy="120249"/>
+            <a:off x="3782938" y="5750188"/>
+            <a:ext cx="12802" cy="110352"/>
           </a:xfrm>
           <a:prstGeom prst="rect">
             <a:avLst/>
@@ -15704,8 +15763,8 @@
         </p:nvSpPr>
         <p:spPr>
           <a:xfrm>
-            <a:off x="4617720" y="6029661"/>
-            <a:ext cx="1234440" cy="261411"/>
+            <a:off x="4617720" y="5685416"/>
+            <a:ext cx="1234440" cy="239896"/>
           </a:xfrm>
           <a:prstGeom prst="rect">
             <a:avLst/>
@@ -15744,7 +15803,7 @@
         <p:spPr>
           <a:xfrm>
             <a:off x="6208776" y="1847088"/>
-            <a:ext cx="310896" cy="261411"/>
+            <a:ext cx="310896" cy="239896"/>
           </a:xfrm>
           <a:prstGeom prst="rect">
             <a:avLst/>
@@ -15783,7 +15842,7 @@
         <p:spPr>
           <a:xfrm>
             <a:off x="6565392" y="1847088"/>
-            <a:ext cx="1920240" cy="261411"/>
+            <a:ext cx="1920240" cy="239896"/>
           </a:xfrm>
           <a:prstGeom prst="rect">
             <a:avLst/>
@@ -15821,8 +15880,8 @@
         </p:nvSpPr>
         <p:spPr>
           <a:xfrm>
-            <a:off x="9279706" y="1917669"/>
-            <a:ext cx="56318" cy="120249"/>
+            <a:off x="9279706" y="1911860"/>
+            <a:ext cx="56318" cy="110352"/>
           </a:xfrm>
           <a:prstGeom prst="rect">
             <a:avLst/>
@@ -15842,7 +15901,7 @@
         <p:spPr>
           <a:xfrm>
             <a:off x="10168128" y="1847088"/>
-            <a:ext cx="1234440" cy="261411"/>
+            <a:ext cx="1234440" cy="239896"/>
           </a:xfrm>
           <a:prstGeom prst="rect">
             <a:avLst/>
@@ -15880,8 +15939,8 @@
         </p:nvSpPr>
         <p:spPr>
           <a:xfrm>
-            <a:off x="6208776" y="2108499"/>
-            <a:ext cx="310896" cy="261411"/>
+            <a:off x="6208776" y="2086984"/>
+            <a:ext cx="310896" cy="239896"/>
           </a:xfrm>
           <a:prstGeom prst="rect">
             <a:avLst/>
@@ -15919,8 +15978,8 @@
         </p:nvSpPr>
         <p:spPr>
           <a:xfrm>
-            <a:off x="6565392" y="2108499"/>
-            <a:ext cx="1920240" cy="261411"/>
+            <a:off x="6565392" y="2086984"/>
+            <a:ext cx="1920240" cy="239896"/>
           </a:xfrm>
           <a:prstGeom prst="rect">
             <a:avLst/>
@@ -15958,8 +16017,8 @@
         </p:nvSpPr>
         <p:spPr>
           <a:xfrm>
-            <a:off x="9261209" y="2179080"/>
-            <a:ext cx="74815" cy="120249"/>
+            <a:off x="9261209" y="2151755"/>
+            <a:ext cx="74815" cy="110352"/>
           </a:xfrm>
           <a:prstGeom prst="rect">
             <a:avLst/>
@@ -15978,8 +16037,8 @@
         </p:nvSpPr>
         <p:spPr>
           <a:xfrm>
-            <a:off x="10168128" y="2108499"/>
-            <a:ext cx="1234440" cy="261411"/>
+            <a:off x="10168128" y="2086984"/>
+            <a:ext cx="1234440" cy="239896"/>
           </a:xfrm>
           <a:prstGeom prst="rect">
             <a:avLst/>
@@ -16017,8 +16076,8 @@
         </p:nvSpPr>
         <p:spPr>
           <a:xfrm>
-            <a:off x="6208776" y="2369910"/>
-            <a:ext cx="310896" cy="261411"/>
+            <a:off x="6208776" y="2326879"/>
+            <a:ext cx="310896" cy="239896"/>
           </a:xfrm>
           <a:prstGeom prst="rect">
             <a:avLst/>
@@ -16056,8 +16115,8 @@
         </p:nvSpPr>
         <p:spPr>
           <a:xfrm>
-            <a:off x="6565392" y="2369910"/>
-            <a:ext cx="1920240" cy="261411"/>
+            <a:off x="6565392" y="2326879"/>
+            <a:ext cx="1920240" cy="239896"/>
           </a:xfrm>
           <a:prstGeom prst="rect">
             <a:avLst/>
@@ -16095,8 +16154,8 @@
         </p:nvSpPr>
         <p:spPr>
           <a:xfrm>
-            <a:off x="9182825" y="2440491"/>
-            <a:ext cx="153199" cy="120249"/>
+            <a:off x="9182825" y="2391651"/>
+            <a:ext cx="153199" cy="110352"/>
           </a:xfrm>
           <a:prstGeom prst="rect">
             <a:avLst/>
@@ -16115,8 +16174,8 @@
         </p:nvSpPr>
         <p:spPr>
           <a:xfrm>
-            <a:off x="10168128" y="2369910"/>
-            <a:ext cx="1234440" cy="261411"/>
+            <a:off x="10168128" y="2326879"/>
+            <a:ext cx="1234440" cy="239896"/>
           </a:xfrm>
           <a:prstGeom prst="rect">
             <a:avLst/>
@@ -16154,8 +16213,8 @@
         </p:nvSpPr>
         <p:spPr>
           <a:xfrm>
-            <a:off x="6208776" y="2631320"/>
-            <a:ext cx="310896" cy="261411"/>
+            <a:off x="6208776" y="2566775"/>
+            <a:ext cx="310896" cy="239896"/>
           </a:xfrm>
           <a:prstGeom prst="rect">
             <a:avLst/>
@@ -16193,8 +16252,8 @@
         </p:nvSpPr>
         <p:spPr>
           <a:xfrm>
-            <a:off x="6565392" y="2631320"/>
-            <a:ext cx="1920240" cy="261411"/>
+            <a:off x="6565392" y="2566775"/>
+            <a:ext cx="1920240" cy="239896"/>
           </a:xfrm>
           <a:prstGeom prst="rect">
             <a:avLst/>
@@ -16232,8 +16291,8 @@
         </p:nvSpPr>
         <p:spPr>
           <a:xfrm>
-            <a:off x="9150574" y="2701901"/>
-            <a:ext cx="185450" cy="120249"/>
+            <a:off x="9150574" y="2631546"/>
+            <a:ext cx="185450" cy="110352"/>
           </a:xfrm>
           <a:prstGeom prst="rect">
             <a:avLst/>
@@ -16252,8 +16311,8 @@
         </p:nvSpPr>
         <p:spPr>
           <a:xfrm>
-            <a:off x="10168128" y="2631320"/>
-            <a:ext cx="1234440" cy="261411"/>
+            <a:off x="10168128" y="2566775"/>
+            <a:ext cx="1234440" cy="239896"/>
           </a:xfrm>
           <a:prstGeom prst="rect">
             <a:avLst/>
@@ -16291,8 +16350,8 @@
         </p:nvSpPr>
         <p:spPr>
           <a:xfrm>
-            <a:off x="6208776" y="2892731"/>
-            <a:ext cx="310896" cy="261411"/>
+            <a:off x="6208776" y="2806670"/>
+            <a:ext cx="310896" cy="239896"/>
           </a:xfrm>
           <a:prstGeom prst="rect">
             <a:avLst/>
@@ -16330,8 +16389,8 @@
         </p:nvSpPr>
         <p:spPr>
           <a:xfrm>
-            <a:off x="6565392" y="2892731"/>
-            <a:ext cx="1920240" cy="261411"/>
+            <a:off x="6565392" y="2806670"/>
+            <a:ext cx="1920240" cy="239896"/>
           </a:xfrm>
           <a:prstGeom prst="rect">
             <a:avLst/>
@@ -16369,8 +16428,8 @@
         </p:nvSpPr>
         <p:spPr>
           <a:xfrm>
-            <a:off x="9107949" y="2963312"/>
-            <a:ext cx="228075" cy="120249"/>
+            <a:off x="9107949" y="2871442"/>
+            <a:ext cx="228075" cy="110352"/>
           </a:xfrm>
           <a:prstGeom prst="rect">
             <a:avLst/>
@@ -16389,8 +16448,8 @@
         </p:nvSpPr>
         <p:spPr>
           <a:xfrm>
-            <a:off x="10168128" y="2892731"/>
-            <a:ext cx="1234440" cy="261411"/>
+            <a:off x="10168128" y="2806670"/>
+            <a:ext cx="1234440" cy="239896"/>
           </a:xfrm>
           <a:prstGeom prst="rect">
             <a:avLst/>
@@ -16428,8 +16487,8 @@
         </p:nvSpPr>
         <p:spPr>
           <a:xfrm>
-            <a:off x="6208776" y="3154142"/>
-            <a:ext cx="310896" cy="261411"/>
+            <a:off x="6208776" y="3046566"/>
+            <a:ext cx="310896" cy="239896"/>
           </a:xfrm>
           <a:prstGeom prst="rect">
             <a:avLst/>
@@ -16467,8 +16526,8 @@
         </p:nvSpPr>
         <p:spPr>
           <a:xfrm>
-            <a:off x="6565392" y="3154142"/>
-            <a:ext cx="1920240" cy="261411"/>
+            <a:off x="6565392" y="3046566"/>
+            <a:ext cx="1920240" cy="239896"/>
           </a:xfrm>
           <a:prstGeom prst="rect">
             <a:avLst/>
@@ -16506,8 +16565,8 @@
         </p:nvSpPr>
         <p:spPr>
           <a:xfrm>
-            <a:off x="9106168" y="3224723"/>
-            <a:ext cx="229856" cy="120249"/>
+            <a:off x="9106168" y="3111337"/>
+            <a:ext cx="229856" cy="110352"/>
           </a:xfrm>
           <a:prstGeom prst="rect">
             <a:avLst/>
@@ -16526,8 +16585,8 @@
         </p:nvSpPr>
         <p:spPr>
           <a:xfrm>
-            <a:off x="10168128" y="3154142"/>
-            <a:ext cx="1234440" cy="261411"/>
+            <a:off x="10168128" y="3046566"/>
+            <a:ext cx="1234440" cy="239896"/>
           </a:xfrm>
           <a:prstGeom prst="rect">
             <a:avLst/>
@@ -16565,8 +16624,8 @@
         </p:nvSpPr>
         <p:spPr>
           <a:xfrm>
-            <a:off x="6208776" y="3415553"/>
-            <a:ext cx="310896" cy="261411"/>
+            <a:off x="6208776" y="3286461"/>
+            <a:ext cx="310896" cy="239896"/>
           </a:xfrm>
           <a:prstGeom prst="rect">
             <a:avLst/>
@@ -16604,8 +16663,8 @@
         </p:nvSpPr>
         <p:spPr>
           <a:xfrm>
-            <a:off x="6565392" y="3415553"/>
-            <a:ext cx="1920240" cy="261411"/>
+            <a:off x="6565392" y="3286461"/>
+            <a:ext cx="1920240" cy="239896"/>
           </a:xfrm>
           <a:prstGeom prst="rect">
             <a:avLst/>
@@ -16643,8 +16702,8 @@
         </p:nvSpPr>
         <p:spPr>
           <a:xfrm>
-            <a:off x="9076473" y="3486134"/>
-            <a:ext cx="259551" cy="120249"/>
+            <a:off x="9076473" y="3351233"/>
+            <a:ext cx="259551" cy="110352"/>
           </a:xfrm>
           <a:prstGeom prst="rect">
             <a:avLst/>
@@ -16663,8 +16722,8 @@
         </p:nvSpPr>
         <p:spPr>
           <a:xfrm>
-            <a:off x="10168128" y="3415553"/>
-            <a:ext cx="1234440" cy="261411"/>
+            <a:off x="10168128" y="3286461"/>
+            <a:ext cx="1234440" cy="239896"/>
           </a:xfrm>
           <a:prstGeom prst="rect">
             <a:avLst/>
@@ -16702,8 +16761,8 @@
         </p:nvSpPr>
         <p:spPr>
           <a:xfrm>
-            <a:off x="6208776" y="3676964"/>
-            <a:ext cx="310896" cy="261411"/>
+            <a:off x="6208776" y="3526357"/>
+            <a:ext cx="310896" cy="239896"/>
           </a:xfrm>
           <a:prstGeom prst="rect">
             <a:avLst/>
@@ -16741,8 +16800,8 @@
         </p:nvSpPr>
         <p:spPr>
           <a:xfrm>
-            <a:off x="6565392" y="3676964"/>
-            <a:ext cx="1920240" cy="261411"/>
+            <a:off x="6565392" y="3526357"/>
+            <a:ext cx="1920240" cy="239896"/>
           </a:xfrm>
           <a:prstGeom prst="rect">
             <a:avLst/>
@@ -16780,8 +16839,8 @@
         </p:nvSpPr>
         <p:spPr>
           <a:xfrm>
-            <a:off x="9037703" y="3747545"/>
-            <a:ext cx="298321" cy="120249"/>
+            <a:off x="9037703" y="3591128"/>
+            <a:ext cx="298321" cy="110352"/>
           </a:xfrm>
           <a:prstGeom prst="rect">
             <a:avLst/>
@@ -16800,8 +16859,8 @@
         </p:nvSpPr>
         <p:spPr>
           <a:xfrm>
-            <a:off x="10168128" y="3676964"/>
-            <a:ext cx="1234440" cy="261411"/>
+            <a:off x="10168128" y="3526357"/>
+            <a:ext cx="1234440" cy="239896"/>
           </a:xfrm>
           <a:prstGeom prst="rect">
             <a:avLst/>
@@ -16839,8 +16898,8 @@
         </p:nvSpPr>
         <p:spPr>
           <a:xfrm>
-            <a:off x="6208776" y="3938375"/>
-            <a:ext cx="310896" cy="261411"/>
+            <a:off x="6208776" y="3766252"/>
+            <a:ext cx="310896" cy="239896"/>
           </a:xfrm>
           <a:prstGeom prst="rect">
             <a:avLst/>
@@ -16878,8 +16937,8 @@
         </p:nvSpPr>
         <p:spPr>
           <a:xfrm>
-            <a:off x="6565392" y="3938375"/>
-            <a:ext cx="1920240" cy="261411"/>
+            <a:off x="6565392" y="3766252"/>
+            <a:ext cx="1920240" cy="239896"/>
           </a:xfrm>
           <a:prstGeom prst="rect">
             <a:avLst/>
@@ -16917,8 +16976,8 @@
         </p:nvSpPr>
         <p:spPr>
           <a:xfrm>
-            <a:off x="9035179" y="4008956"/>
-            <a:ext cx="300845" cy="120249"/>
+            <a:off x="9035179" y="3831024"/>
+            <a:ext cx="300845" cy="110352"/>
           </a:xfrm>
           <a:prstGeom prst="rect">
             <a:avLst/>
@@ -16937,8 +16996,8 @@
         </p:nvSpPr>
         <p:spPr>
           <a:xfrm>
-            <a:off x="10168128" y="3938375"/>
-            <a:ext cx="1234440" cy="261411"/>
+            <a:off x="10168128" y="3766252"/>
+            <a:ext cx="1234440" cy="239896"/>
           </a:xfrm>
           <a:prstGeom prst="rect">
             <a:avLst/>
@@ -16976,8 +17035,8 @@
         </p:nvSpPr>
         <p:spPr>
           <a:xfrm>
-            <a:off x="6208776" y="4199785"/>
-            <a:ext cx="310896" cy="261411"/>
+            <a:off x="6208776" y="4006148"/>
+            <a:ext cx="310896" cy="239896"/>
           </a:xfrm>
           <a:prstGeom prst="rect">
             <a:avLst/>
@@ -17015,8 +17074,8 @@
         </p:nvSpPr>
         <p:spPr>
           <a:xfrm>
-            <a:off x="6565392" y="4199785"/>
-            <a:ext cx="1920240" cy="261411"/>
+            <a:off x="6565392" y="4006148"/>
+            <a:ext cx="1920240" cy="239896"/>
           </a:xfrm>
           <a:prstGeom prst="rect">
             <a:avLst/>
@@ -17054,8 +17113,8 @@
         </p:nvSpPr>
         <p:spPr>
           <a:xfrm>
-            <a:off x="9018589" y="4270366"/>
-            <a:ext cx="317435" cy="120249"/>
+            <a:off x="9018589" y="4070920"/>
+            <a:ext cx="317435" cy="110352"/>
           </a:xfrm>
           <a:prstGeom prst="rect">
             <a:avLst/>
@@ -17074,8 +17133,8 @@
         </p:nvSpPr>
         <p:spPr>
           <a:xfrm>
-            <a:off x="10168128" y="4199785"/>
-            <a:ext cx="1234440" cy="261411"/>
+            <a:off x="10168128" y="4006148"/>
+            <a:ext cx="1234440" cy="239896"/>
           </a:xfrm>
           <a:prstGeom prst="rect">
             <a:avLst/>
@@ -17113,8 +17172,8 @@
         </p:nvSpPr>
         <p:spPr>
           <a:xfrm>
-            <a:off x="6208776" y="4461196"/>
-            <a:ext cx="310896" cy="261411"/>
+            <a:off x="6208776" y="4246043"/>
+            <a:ext cx="310896" cy="239896"/>
           </a:xfrm>
           <a:prstGeom prst="rect">
             <a:avLst/>
@@ -17152,8 +17211,8 @@
         </p:nvSpPr>
         <p:spPr>
           <a:xfrm>
-            <a:off x="6565392" y="4461196"/>
-            <a:ext cx="1920240" cy="261411"/>
+            <a:off x="6565392" y="4246043"/>
+            <a:ext cx="1920240" cy="239896"/>
           </a:xfrm>
           <a:prstGeom prst="rect">
             <a:avLst/>
@@ -17191,8 +17250,8 @@
         </p:nvSpPr>
         <p:spPr>
           <a:xfrm>
-            <a:off x="8963304" y="4531777"/>
-            <a:ext cx="372720" cy="120249"/>
+            <a:off x="8963304" y="4310815"/>
+            <a:ext cx="372720" cy="110352"/>
           </a:xfrm>
           <a:prstGeom prst="rect">
             <a:avLst/>
@@ -17211,8 +17270,8 @@
         </p:nvSpPr>
         <p:spPr>
           <a:xfrm>
-            <a:off x="10168128" y="4461196"/>
-            <a:ext cx="1234440" cy="261411"/>
+            <a:off x="10168128" y="4246043"/>
+            <a:ext cx="1234440" cy="239896"/>
           </a:xfrm>
           <a:prstGeom prst="rect">
             <a:avLst/>
@@ -17250,8 +17309,8 @@
         </p:nvSpPr>
         <p:spPr>
           <a:xfrm>
-            <a:off x="6208776" y="4722607"/>
-            <a:ext cx="310896" cy="261411"/>
+            <a:off x="6208776" y="4485939"/>
+            <a:ext cx="310896" cy="239896"/>
           </a:xfrm>
           <a:prstGeom prst="rect">
             <a:avLst/>
@@ -17289,8 +17348,8 @@
         </p:nvSpPr>
         <p:spPr>
           <a:xfrm>
-            <a:off x="6565392" y="4722607"/>
-            <a:ext cx="1920240" cy="261411"/>
+            <a:off x="6565392" y="4485939"/>
+            <a:ext cx="1920240" cy="239896"/>
           </a:xfrm>
           <a:prstGeom prst="rect">
             <a:avLst/>
@@ -17328,8 +17387,8 @@
         </p:nvSpPr>
         <p:spPr>
           <a:xfrm>
-            <a:off x="8882230" y="4793188"/>
-            <a:ext cx="453794" cy="120249"/>
+            <a:off x="8882230" y="4550711"/>
+            <a:ext cx="453794" cy="110352"/>
           </a:xfrm>
           <a:prstGeom prst="rect">
             <a:avLst/>
@@ -17348,8 +17407,8 @@
         </p:nvSpPr>
         <p:spPr>
           <a:xfrm>
-            <a:off x="10168128" y="4722607"/>
-            <a:ext cx="1234440" cy="261411"/>
+            <a:off x="10168128" y="4485939"/>
+            <a:ext cx="1234440" cy="239896"/>
           </a:xfrm>
           <a:prstGeom prst="rect">
             <a:avLst/>
@@ -17387,8 +17446,8 @@
         </p:nvSpPr>
         <p:spPr>
           <a:xfrm>
-            <a:off x="6208776" y="4984018"/>
-            <a:ext cx="310896" cy="261411"/>
+            <a:off x="6208776" y="4725834"/>
+            <a:ext cx="310896" cy="239896"/>
           </a:xfrm>
           <a:prstGeom prst="rect">
             <a:avLst/>
@@ -17426,8 +17485,8 @@
         </p:nvSpPr>
         <p:spPr>
           <a:xfrm>
-            <a:off x="6565392" y="4984018"/>
-            <a:ext cx="1920240" cy="261411"/>
+            <a:off x="6565392" y="4725834"/>
+            <a:ext cx="1920240" cy="239896"/>
           </a:xfrm>
           <a:prstGeom prst="rect">
             <a:avLst/>
@@ -17465,8 +17524,8 @@
         </p:nvSpPr>
         <p:spPr>
           <a:xfrm>
-            <a:off x="8795705" y="5054599"/>
-            <a:ext cx="540319" cy="120249"/>
+            <a:off x="8795705" y="4790606"/>
+            <a:ext cx="540319" cy="110352"/>
           </a:xfrm>
           <a:prstGeom prst="rect">
             <a:avLst/>
@@ -17485,8 +17544,8 @@
         </p:nvSpPr>
         <p:spPr>
           <a:xfrm>
-            <a:off x="10168128" y="4984018"/>
-            <a:ext cx="1234440" cy="261411"/>
+            <a:off x="10168128" y="4725834"/>
+            <a:ext cx="1234440" cy="239896"/>
           </a:xfrm>
           <a:prstGeom prst="rect">
             <a:avLst/>
@@ -17524,8 +17583,8 @@
         </p:nvSpPr>
         <p:spPr>
           <a:xfrm>
-            <a:off x="6208776" y="5245429"/>
-            <a:ext cx="310896" cy="261411"/>
+            <a:off x="6208776" y="4965730"/>
+            <a:ext cx="310896" cy="239896"/>
           </a:xfrm>
           <a:prstGeom prst="rect">
             <a:avLst/>
@@ -17563,8 +17622,8 @@
         </p:nvSpPr>
         <p:spPr>
           <a:xfrm>
-            <a:off x="6565392" y="5245429"/>
-            <a:ext cx="1920240" cy="261411"/>
+            <a:off x="6565392" y="4965730"/>
+            <a:ext cx="1920240" cy="239896"/>
           </a:xfrm>
           <a:prstGeom prst="rect">
             <a:avLst/>
@@ -17602,8 +17661,8 @@
         </p:nvSpPr>
         <p:spPr>
           <a:xfrm>
-            <a:off x="8725604" y="5316010"/>
-            <a:ext cx="610420" cy="120249"/>
+            <a:off x="8725604" y="5030502"/>
+            <a:ext cx="610420" cy="110352"/>
           </a:xfrm>
           <a:prstGeom prst="rect">
             <a:avLst/>
@@ -17622,8 +17681,8 @@
         </p:nvSpPr>
         <p:spPr>
           <a:xfrm>
-            <a:off x="10168128" y="5245429"/>
-            <a:ext cx="1234440" cy="261411"/>
+            <a:off x="10168128" y="4965730"/>
+            <a:ext cx="1234440" cy="239896"/>
           </a:xfrm>
           <a:prstGeom prst="rect">
             <a:avLst/>
@@ -17661,8 +17720,8 @@
         </p:nvSpPr>
         <p:spPr>
           <a:xfrm>
-            <a:off x="6208776" y="5506840"/>
-            <a:ext cx="310896" cy="261411"/>
+            <a:off x="6208776" y="5205625"/>
+            <a:ext cx="310896" cy="239896"/>
           </a:xfrm>
           <a:prstGeom prst="rect">
             <a:avLst/>
@@ -17700,8 +17759,8 @@
         </p:nvSpPr>
         <p:spPr>
           <a:xfrm>
-            <a:off x="6565392" y="5506840"/>
-            <a:ext cx="1920240" cy="261411"/>
+            <a:off x="6565392" y="5205625"/>
+            <a:ext cx="1920240" cy="239896"/>
           </a:xfrm>
           <a:prstGeom prst="rect">
             <a:avLst/>
@@ -17739,8 +17798,8 @@
         </p:nvSpPr>
         <p:spPr>
           <a:xfrm>
-            <a:off x="8691636" y="5577420"/>
-            <a:ext cx="644388" cy="120249"/>
+            <a:off x="8691636" y="5270397"/>
+            <a:ext cx="644388" cy="110352"/>
           </a:xfrm>
           <a:prstGeom prst="rect">
             <a:avLst/>
@@ -17759,8 +17818,8 @@
         </p:nvSpPr>
         <p:spPr>
           <a:xfrm>
-            <a:off x="10168128" y="5506840"/>
-            <a:ext cx="1234440" cy="261411"/>
+            <a:off x="10168128" y="5205625"/>
+            <a:ext cx="1234440" cy="239896"/>
           </a:xfrm>
           <a:prstGeom prst="rect">
             <a:avLst/>
@@ -17798,8 +17857,8 @@
         </p:nvSpPr>
         <p:spPr>
           <a:xfrm>
-            <a:off x="6208776" y="5768250"/>
-            <a:ext cx="310896" cy="261411"/>
+            <a:off x="6208776" y="5445521"/>
+            <a:ext cx="310896" cy="239896"/>
           </a:xfrm>
           <a:prstGeom prst="rect">
             <a:avLst/>
@@ -17837,8 +17896,8 @@
         </p:nvSpPr>
         <p:spPr>
           <a:xfrm>
-            <a:off x="6565392" y="5768250"/>
-            <a:ext cx="1920240" cy="261411"/>
+            <a:off x="6565392" y="5445521"/>
+            <a:ext cx="1920240" cy="239896"/>
           </a:xfrm>
           <a:prstGeom prst="rect">
             <a:avLst/>
@@ -17876,8 +17935,8 @@
         </p:nvSpPr>
         <p:spPr>
           <a:xfrm>
-            <a:off x="8652415" y="5838831"/>
-            <a:ext cx="683609" cy="120249"/>
+            <a:off x="8652415" y="5510293"/>
+            <a:ext cx="683609" cy="110352"/>
           </a:xfrm>
           <a:prstGeom prst="rect">
             <a:avLst/>
@@ -17896,8 +17955,8 @@
         </p:nvSpPr>
         <p:spPr>
           <a:xfrm>
-            <a:off x="10168128" y="5768250"/>
-            <a:ext cx="1234440" cy="261411"/>
+            <a:off x="10168128" y="5445521"/>
+            <a:ext cx="1234440" cy="239896"/>
           </a:xfrm>
           <a:prstGeom prst="rect">
             <a:avLst/>
@@ -17936,7 +17995,7 @@
         <p:spPr>
           <a:xfrm>
             <a:off x="3780130" y="1847088"/>
-            <a:ext cx="10973" cy="4443984"/>
+            <a:ext cx="10973" cy="4078224"/>
           </a:xfrm>
           <a:prstGeom prst="rect">
             <a:avLst/>
@@ -17956,7 +18015,7 @@
         <p:spPr>
           <a:xfrm>
             <a:off x="9330538" y="1847088"/>
-            <a:ext cx="10973" cy="4443984"/>
+            <a:ext cx="10973" cy="4078224"/>
           </a:xfrm>
           <a:prstGeom prst="rect">
             <a:avLst/>
@@ -17976,7 +18035,7 @@
         <p:spPr>
           <a:xfrm>
             <a:off x="6085332" y="1847088"/>
-            <a:ext cx="10973" cy="4443984"/>
+            <a:ext cx="10973" cy="4078224"/>
           </a:xfrm>
           <a:prstGeom prst="rect">
             <a:avLst/>
@@ -17986,6 +18045,65 @@
           </a:solidFill>
           <a:ln/>
         </p:spPr>
+      </p:sp>
+      <p:sp>
+        <p:nvSpPr>
+          <p:cNvPr id="147" name="Shape 144"/>
+          <p:cNvSpPr/>
+          <p:nvPr/>
+        </p:nvSpPr>
+        <p:spPr>
+          <a:xfrm>
+            <a:off x="457200" y="6126480"/>
+            <a:ext cx="11274552" cy="371856"/>
+          </a:xfrm>
+          <a:prstGeom prst="rect">
+            <a:avLst/>
+          </a:prstGeom>
+          <a:solidFill>
+            <a:srgbClr val="FBEBEA"/>
+          </a:solidFill>
+          <a:ln/>
+        </p:spPr>
+      </p:sp>
+      <p:sp>
+        <p:nvSpPr>
+          <p:cNvPr id="148" name="Text 145"/>
+          <p:cNvSpPr txBox="1"/>
+          <p:nvPr/>
+        </p:nvSpPr>
+        <p:spPr>
+          <a:xfrm>
+            <a:off x="658368" y="6144768"/>
+            <a:ext cx="10927080" cy="335280"/>
+          </a:xfrm>
+          <a:prstGeom prst="rect">
+            <a:avLst/>
+          </a:prstGeom>
+          <a:noFill/>
+          <a:ln/>
+        </p:spPr>
+        <p:txBody>
+          <a:bodyPr wrap="square" lIns="0" tIns="0" rIns="0" bIns="0" rtlCol="0" anchor="ctr"/>
+          <a:lstStyle/>
+          <a:p>
+            <a:pPr indent="0" marL="0">
+              <a:buNone/>
+            </a:pPr>
+            <a:r>
+              <a:rPr lang="en-US" sz="1600" b="1" dirty="0">
+                <a:solidFill>
+                  <a:srgbClr val="A82B26"/>
+                </a:solidFill>
+                <a:latin typeface="Inter" pitchFamily="34" charset="0"/>
+                <a:ea typeface="Inter" pitchFamily="34" charset="-122"/>
+                <a:cs typeface="Inter" pitchFamily="34" charset="-120"/>
+              </a:rPr>
+              <a:t>15 of 33 stores raised parts net to gross. 18 declined.</a:t>
+            </a:r>
+            <a:endParaRPr lang="en-US" sz="1600" dirty="0"/>
+          </a:p>
+        </p:txBody>
       </p:sp>
     </p:spTree>
   </p:cSld>
@@ -21999,7 +22117,7 @@
         <p:spPr>
           <a:xfrm>
             <a:off x="457200" y="1207008"/>
-            <a:ext cx="11274552" cy="5148072"/>
+            <a:ext cx="11274552" cy="4782312"/>
           </a:xfrm>
           <a:prstGeom prst="rect">
             <a:avLst/>
@@ -22176,7 +22294,7 @@
         <p:spPr>
           <a:xfrm>
             <a:off x="658368" y="1847088"/>
-            <a:ext cx="310896" cy="261411"/>
+            <a:ext cx="310896" cy="239896"/>
           </a:xfrm>
           <a:prstGeom prst="rect">
             <a:avLst/>
@@ -22215,7 +22333,7 @@
         <p:spPr>
           <a:xfrm>
             <a:off x="1014984" y="1847088"/>
-            <a:ext cx="1920240" cy="261411"/>
+            <a:ext cx="1920240" cy="239896"/>
           </a:xfrm>
           <a:prstGeom prst="rect">
             <a:avLst/>
@@ -22253,8 +22371,8 @@
         </p:nvSpPr>
         <p:spPr>
           <a:xfrm>
-            <a:off x="3008376" y="1912441"/>
-            <a:ext cx="1691640" cy="130705"/>
+            <a:off x="3008376" y="1907062"/>
+            <a:ext cx="1691640" cy="119948"/>
           </a:xfrm>
           <a:prstGeom prst="rect">
             <a:avLst/>
@@ -22274,7 +22392,7 @@
         <p:spPr>
           <a:xfrm>
             <a:off x="4754880" y="1847088"/>
-            <a:ext cx="1143000" cy="261411"/>
+            <a:ext cx="1143000" cy="239896"/>
           </a:xfrm>
           <a:prstGeom prst="rect">
             <a:avLst/>
@@ -22312,8 +22430,8 @@
         </p:nvSpPr>
         <p:spPr>
           <a:xfrm>
-            <a:off x="658368" y="2108499"/>
-            <a:ext cx="310896" cy="261411"/>
+            <a:off x="658368" y="2086984"/>
+            <a:ext cx="310896" cy="239896"/>
           </a:xfrm>
           <a:prstGeom prst="rect">
             <a:avLst/>
@@ -22351,8 +22469,8 @@
         </p:nvSpPr>
         <p:spPr>
           <a:xfrm>
-            <a:off x="1014984" y="2108499"/>
-            <a:ext cx="1920240" cy="261411"/>
+            <a:off x="1014984" y="2086984"/>
+            <a:ext cx="1920240" cy="239896"/>
           </a:xfrm>
           <a:prstGeom prst="rect">
             <a:avLst/>
@@ -22390,8 +22508,8 @@
         </p:nvSpPr>
         <p:spPr>
           <a:xfrm>
-            <a:off x="3008376" y="2173852"/>
-            <a:ext cx="1625327" cy="130705"/>
+            <a:off x="3008376" y="2146957"/>
+            <a:ext cx="1625327" cy="119948"/>
           </a:xfrm>
           <a:prstGeom prst="rect">
             <a:avLst/>
@@ -22410,8 +22528,8 @@
         </p:nvSpPr>
         <p:spPr>
           <a:xfrm>
-            <a:off x="4754880" y="2108499"/>
-            <a:ext cx="1143000" cy="261411"/>
+            <a:off x="4754880" y="2086984"/>
+            <a:ext cx="1143000" cy="239896"/>
           </a:xfrm>
           <a:prstGeom prst="rect">
             <a:avLst/>
@@ -22449,8 +22567,8 @@
         </p:nvSpPr>
         <p:spPr>
           <a:xfrm>
-            <a:off x="658368" y="2369910"/>
-            <a:ext cx="310896" cy="261411"/>
+            <a:off x="658368" y="2326879"/>
+            <a:ext cx="310896" cy="239896"/>
           </a:xfrm>
           <a:prstGeom prst="rect">
             <a:avLst/>
@@ -22488,8 +22606,8 @@
         </p:nvSpPr>
         <p:spPr>
           <a:xfrm>
-            <a:off x="1014984" y="2369910"/>
-            <a:ext cx="1920240" cy="261411"/>
+            <a:off x="1014984" y="2326879"/>
+            <a:ext cx="1920240" cy="239896"/>
           </a:xfrm>
           <a:prstGeom prst="rect">
             <a:avLst/>
@@ -22527,8 +22645,8 @@
         </p:nvSpPr>
         <p:spPr>
           <a:xfrm>
-            <a:off x="3008376" y="2435262"/>
-            <a:ext cx="1406928" cy="130705"/>
+            <a:off x="3008376" y="2386853"/>
+            <a:ext cx="1406928" cy="119948"/>
           </a:xfrm>
           <a:prstGeom prst="rect">
             <a:avLst/>
@@ -22547,8 +22665,8 @@
         </p:nvSpPr>
         <p:spPr>
           <a:xfrm>
-            <a:off x="4754880" y="2369910"/>
-            <a:ext cx="1143000" cy="261411"/>
+            <a:off x="4754880" y="2326879"/>
+            <a:ext cx="1143000" cy="239896"/>
           </a:xfrm>
           <a:prstGeom prst="rect">
             <a:avLst/>
@@ -22586,8 +22704,8 @@
         </p:nvSpPr>
         <p:spPr>
           <a:xfrm>
-            <a:off x="658368" y="2631320"/>
-            <a:ext cx="310896" cy="261411"/>
+            <a:off x="658368" y="2566775"/>
+            <a:ext cx="310896" cy="239896"/>
           </a:xfrm>
           <a:prstGeom prst="rect">
             <a:avLst/>
@@ -22625,8 +22743,8 @@
         </p:nvSpPr>
         <p:spPr>
           <a:xfrm>
-            <a:off x="1014984" y="2631320"/>
-            <a:ext cx="1920240" cy="261411"/>
+            <a:off x="1014984" y="2566775"/>
+            <a:ext cx="1920240" cy="239896"/>
           </a:xfrm>
           <a:prstGeom prst="rect">
             <a:avLst/>
@@ -22664,8 +22782,8 @@
         </p:nvSpPr>
         <p:spPr>
           <a:xfrm>
-            <a:off x="3008376" y="2696673"/>
-            <a:ext cx="1323114" cy="130705"/>
+            <a:off x="3008376" y="2626748"/>
+            <a:ext cx="1323114" cy="119948"/>
           </a:xfrm>
           <a:prstGeom prst="rect">
             <a:avLst/>
@@ -22684,8 +22802,8 @@
         </p:nvSpPr>
         <p:spPr>
           <a:xfrm>
-            <a:off x="4754880" y="2631320"/>
-            <a:ext cx="1143000" cy="261411"/>
+            <a:off x="4754880" y="2566775"/>
+            <a:ext cx="1143000" cy="239896"/>
           </a:xfrm>
           <a:prstGeom prst="rect">
             <a:avLst/>
@@ -22723,8 +22841,8 @@
         </p:nvSpPr>
         <p:spPr>
           <a:xfrm>
-            <a:off x="658368" y="2892731"/>
-            <a:ext cx="310896" cy="261411"/>
+            <a:off x="658368" y="2806670"/>
+            <a:ext cx="310896" cy="239896"/>
           </a:xfrm>
           <a:prstGeom prst="rect">
             <a:avLst/>
@@ -22762,8 +22880,8 @@
         </p:nvSpPr>
         <p:spPr>
           <a:xfrm>
-            <a:off x="1014984" y="2892731"/>
-            <a:ext cx="1920240" cy="261411"/>
+            <a:off x="1014984" y="2806670"/>
+            <a:ext cx="1920240" cy="239896"/>
           </a:xfrm>
           <a:prstGeom prst="rect">
             <a:avLst/>
@@ -22801,8 +22919,8 @@
         </p:nvSpPr>
         <p:spPr>
           <a:xfrm>
-            <a:off x="3008376" y="2958084"/>
-            <a:ext cx="1271788" cy="130705"/>
+            <a:off x="3008376" y="2866644"/>
+            <a:ext cx="1271788" cy="119948"/>
           </a:xfrm>
           <a:prstGeom prst="rect">
             <a:avLst/>
@@ -22821,8 +22939,8 @@
         </p:nvSpPr>
         <p:spPr>
           <a:xfrm>
-            <a:off x="4754880" y="2892731"/>
-            <a:ext cx="1143000" cy="261411"/>
+            <a:off x="4754880" y="2806670"/>
+            <a:ext cx="1143000" cy="239896"/>
           </a:xfrm>
           <a:prstGeom prst="rect">
             <a:avLst/>
@@ -22860,8 +22978,8 @@
         </p:nvSpPr>
         <p:spPr>
           <a:xfrm>
-            <a:off x="658368" y="3154142"/>
-            <a:ext cx="310896" cy="261411"/>
+            <a:off x="658368" y="3046566"/>
+            <a:ext cx="310896" cy="239896"/>
           </a:xfrm>
           <a:prstGeom prst="rect">
             <a:avLst/>
@@ -22899,8 +23017,8 @@
         </p:nvSpPr>
         <p:spPr>
           <a:xfrm>
-            <a:off x="1014984" y="3154142"/>
-            <a:ext cx="1920240" cy="261411"/>
+            <a:off x="1014984" y="3046566"/>
+            <a:ext cx="1920240" cy="239896"/>
           </a:xfrm>
           <a:prstGeom prst="rect">
             <a:avLst/>
@@ -22938,8 +23056,8 @@
         </p:nvSpPr>
         <p:spPr>
           <a:xfrm>
-            <a:off x="3008376" y="3219495"/>
-            <a:ext cx="1243905" cy="130705"/>
+            <a:off x="3008376" y="3106540"/>
+            <a:ext cx="1243905" cy="119948"/>
           </a:xfrm>
           <a:prstGeom prst="rect">
             <a:avLst/>
@@ -22958,8 +23076,8 @@
         </p:nvSpPr>
         <p:spPr>
           <a:xfrm>
-            <a:off x="4754880" y="3154142"/>
-            <a:ext cx="1143000" cy="261411"/>
+            <a:off x="4754880" y="3046566"/>
+            <a:ext cx="1143000" cy="239896"/>
           </a:xfrm>
           <a:prstGeom prst="rect">
             <a:avLst/>
@@ -22997,8 +23115,8 @@
         </p:nvSpPr>
         <p:spPr>
           <a:xfrm>
-            <a:off x="658368" y="3415553"/>
-            <a:ext cx="310896" cy="261411"/>
+            <a:off x="658368" y="3286461"/>
+            <a:ext cx="310896" cy="239896"/>
           </a:xfrm>
           <a:prstGeom prst="rect">
             <a:avLst/>
@@ -23036,8 +23154,8 @@
         </p:nvSpPr>
         <p:spPr>
           <a:xfrm>
-            <a:off x="1014984" y="3415553"/>
-            <a:ext cx="1920240" cy="261411"/>
+            <a:off x="1014984" y="3286461"/>
+            <a:ext cx="1920240" cy="239896"/>
           </a:xfrm>
           <a:prstGeom prst="rect">
             <a:avLst/>
@@ -23075,8 +23193,8 @@
         </p:nvSpPr>
         <p:spPr>
           <a:xfrm>
-            <a:off x="3008376" y="3480906"/>
-            <a:ext cx="1238289" cy="130705"/>
+            <a:off x="3008376" y="3346435"/>
+            <a:ext cx="1238289" cy="119948"/>
           </a:xfrm>
           <a:prstGeom prst="rect">
             <a:avLst/>
@@ -23095,8 +23213,8 @@
         </p:nvSpPr>
         <p:spPr>
           <a:xfrm>
-            <a:off x="4754880" y="3415553"/>
-            <a:ext cx="1143000" cy="261411"/>
+            <a:off x="4754880" y="3286461"/>
+            <a:ext cx="1143000" cy="239896"/>
           </a:xfrm>
           <a:prstGeom prst="rect">
             <a:avLst/>
@@ -23134,8 +23252,8 @@
         </p:nvSpPr>
         <p:spPr>
           <a:xfrm>
-            <a:off x="658368" y="3676964"/>
-            <a:ext cx="310896" cy="261411"/>
+            <a:off x="658368" y="3526357"/>
+            <a:ext cx="310896" cy="239896"/>
           </a:xfrm>
           <a:prstGeom prst="rect">
             <a:avLst/>
@@ -23173,8 +23291,8 @@
         </p:nvSpPr>
         <p:spPr>
           <a:xfrm>
-            <a:off x="1014984" y="3676964"/>
-            <a:ext cx="1920240" cy="261411"/>
+            <a:off x="1014984" y="3526357"/>
+            <a:ext cx="1920240" cy="239896"/>
           </a:xfrm>
           <a:prstGeom prst="rect">
             <a:avLst/>
@@ -23212,8 +23330,8 @@
         </p:nvSpPr>
         <p:spPr>
           <a:xfrm>
-            <a:off x="3008376" y="3742316"/>
-            <a:ext cx="1236225" cy="130705"/>
+            <a:off x="3008376" y="3586331"/>
+            <a:ext cx="1236225" cy="119948"/>
           </a:xfrm>
           <a:prstGeom prst="rect">
             <a:avLst/>
@@ -23232,8 +23350,8 @@
         </p:nvSpPr>
         <p:spPr>
           <a:xfrm>
-            <a:off x="4754880" y="3676964"/>
-            <a:ext cx="1143000" cy="261411"/>
+            <a:off x="4754880" y="3526357"/>
+            <a:ext cx="1143000" cy="239896"/>
           </a:xfrm>
           <a:prstGeom prst="rect">
             <a:avLst/>
@@ -23271,8 +23389,8 @@
         </p:nvSpPr>
         <p:spPr>
           <a:xfrm>
-            <a:off x="658368" y="3938375"/>
-            <a:ext cx="310896" cy="261411"/>
+            <a:off x="658368" y="3766252"/>
+            <a:ext cx="310896" cy="239896"/>
           </a:xfrm>
           <a:prstGeom prst="rect">
             <a:avLst/>
@@ -23310,8 +23428,8 @@
         </p:nvSpPr>
         <p:spPr>
           <a:xfrm>
-            <a:off x="1014984" y="3938375"/>
-            <a:ext cx="1920240" cy="261411"/>
+            <a:off x="1014984" y="3766252"/>
+            <a:ext cx="1920240" cy="239896"/>
           </a:xfrm>
           <a:prstGeom prst="rect">
             <a:avLst/>
@@ -23349,8 +23467,8 @@
         </p:nvSpPr>
         <p:spPr>
           <a:xfrm>
-            <a:off x="3008376" y="4003727"/>
-            <a:ext cx="1203167" cy="130705"/>
+            <a:off x="3008376" y="3826226"/>
+            <a:ext cx="1203167" cy="119948"/>
           </a:xfrm>
           <a:prstGeom prst="rect">
             <a:avLst/>
@@ -23369,8 +23487,8 @@
         </p:nvSpPr>
         <p:spPr>
           <a:xfrm>
-            <a:off x="4754880" y="3938375"/>
-            <a:ext cx="1143000" cy="261411"/>
+            <a:off x="4754880" y="3766252"/>
+            <a:ext cx="1143000" cy="239896"/>
           </a:xfrm>
           <a:prstGeom prst="rect">
             <a:avLst/>
@@ -23408,8 +23526,8 @@
         </p:nvSpPr>
         <p:spPr>
           <a:xfrm>
-            <a:off x="658368" y="4199785"/>
-            <a:ext cx="310896" cy="261411"/>
+            <a:off x="658368" y="4006148"/>
+            <a:ext cx="310896" cy="239896"/>
           </a:xfrm>
           <a:prstGeom prst="rect">
             <a:avLst/>
@@ -23447,8 +23565,8 @@
         </p:nvSpPr>
         <p:spPr>
           <a:xfrm>
-            <a:off x="1014984" y="4199785"/>
-            <a:ext cx="1920240" cy="261411"/>
+            <a:off x="1014984" y="4006148"/>
+            <a:ext cx="1920240" cy="239896"/>
           </a:xfrm>
           <a:prstGeom prst="rect">
             <a:avLst/>
@@ -23486,8 +23604,8 @@
         </p:nvSpPr>
         <p:spPr>
           <a:xfrm>
-            <a:off x="3008376" y="4265138"/>
-            <a:ext cx="1188815" cy="130705"/>
+            <a:off x="3008376" y="4066122"/>
+            <a:ext cx="1188815" cy="119948"/>
           </a:xfrm>
           <a:prstGeom prst="rect">
             <a:avLst/>
@@ -23506,8 +23624,8 @@
         </p:nvSpPr>
         <p:spPr>
           <a:xfrm>
-            <a:off x="4754880" y="4199785"/>
-            <a:ext cx="1143000" cy="261411"/>
+            <a:off x="4754880" y="4006148"/>
+            <a:ext cx="1143000" cy="239896"/>
           </a:xfrm>
           <a:prstGeom prst="rect">
             <a:avLst/>
@@ -23545,8 +23663,8 @@
         </p:nvSpPr>
         <p:spPr>
           <a:xfrm>
-            <a:off x="658368" y="4461196"/>
-            <a:ext cx="310896" cy="261411"/>
+            <a:off x="658368" y="4246043"/>
+            <a:ext cx="310896" cy="239896"/>
           </a:xfrm>
           <a:prstGeom prst="rect">
             <a:avLst/>
@@ -23584,8 +23702,8 @@
         </p:nvSpPr>
         <p:spPr>
           <a:xfrm>
-            <a:off x="1014984" y="4461196"/>
-            <a:ext cx="1920240" cy="261411"/>
+            <a:off x="1014984" y="4246043"/>
+            <a:ext cx="1920240" cy="239896"/>
           </a:xfrm>
           <a:prstGeom prst="rect">
             <a:avLst/>
@@ -23623,8 +23741,8 @@
         </p:nvSpPr>
         <p:spPr>
           <a:xfrm>
-            <a:off x="3008376" y="4526549"/>
-            <a:ext cx="1143609" cy="130705"/>
+            <a:off x="3008376" y="4306017"/>
+            <a:ext cx="1143609" cy="119948"/>
           </a:xfrm>
           <a:prstGeom prst="rect">
             <a:avLst/>
@@ -23643,8 +23761,8 @@
         </p:nvSpPr>
         <p:spPr>
           <a:xfrm>
-            <a:off x="4754880" y="4461196"/>
-            <a:ext cx="1143000" cy="261411"/>
+            <a:off x="4754880" y="4246043"/>
+            <a:ext cx="1143000" cy="239896"/>
           </a:xfrm>
           <a:prstGeom prst="rect">
             <a:avLst/>
@@ -23682,8 +23800,8 @@
         </p:nvSpPr>
         <p:spPr>
           <a:xfrm>
-            <a:off x="658368" y="4722607"/>
-            <a:ext cx="310896" cy="261411"/>
+            <a:off x="658368" y="4485939"/>
+            <a:ext cx="310896" cy="239896"/>
           </a:xfrm>
           <a:prstGeom prst="rect">
             <a:avLst/>
@@ -23721,8 +23839,8 @@
         </p:nvSpPr>
         <p:spPr>
           <a:xfrm>
-            <a:off x="1014984" y="4722607"/>
-            <a:ext cx="1920240" cy="261411"/>
+            <a:off x="1014984" y="4485939"/>
+            <a:ext cx="1920240" cy="239896"/>
           </a:xfrm>
           <a:prstGeom prst="rect">
             <a:avLst/>
@@ -23760,8 +23878,8 @@
         </p:nvSpPr>
         <p:spPr>
           <a:xfrm>
-            <a:off x="3008376" y="4787960"/>
-            <a:ext cx="1136929" cy="130705"/>
+            <a:off x="3008376" y="4545913"/>
+            <a:ext cx="1136929" cy="119948"/>
           </a:xfrm>
           <a:prstGeom prst="rect">
             <a:avLst/>
@@ -23780,8 +23898,8 @@
         </p:nvSpPr>
         <p:spPr>
           <a:xfrm>
-            <a:off x="4754880" y="4722607"/>
-            <a:ext cx="1143000" cy="261411"/>
+            <a:off x="4754880" y="4485939"/>
+            <a:ext cx="1143000" cy="239896"/>
           </a:xfrm>
           <a:prstGeom prst="rect">
             <a:avLst/>
@@ -23819,8 +23937,8 @@
         </p:nvSpPr>
         <p:spPr>
           <a:xfrm>
-            <a:off x="658368" y="4984018"/>
-            <a:ext cx="310896" cy="261411"/>
+            <a:off x="658368" y="4725834"/>
+            <a:ext cx="310896" cy="239896"/>
           </a:xfrm>
           <a:prstGeom prst="rect">
             <a:avLst/>
@@ -23858,8 +23976,8 @@
         </p:nvSpPr>
         <p:spPr>
           <a:xfrm>
-            <a:off x="1014984" y="4984018"/>
-            <a:ext cx="1920240" cy="261411"/>
+            <a:off x="1014984" y="4725834"/>
+            <a:ext cx="1920240" cy="239896"/>
           </a:xfrm>
           <a:prstGeom prst="rect">
             <a:avLst/>
@@ -23897,8 +24015,8 @@
         </p:nvSpPr>
         <p:spPr>
           <a:xfrm>
-            <a:off x="3008376" y="5049371"/>
-            <a:ext cx="1094886" cy="130705"/>
+            <a:off x="3008376" y="4785808"/>
+            <a:ext cx="1094886" cy="119948"/>
           </a:xfrm>
           <a:prstGeom prst="rect">
             <a:avLst/>
@@ -23917,8 +24035,8 @@
         </p:nvSpPr>
         <p:spPr>
           <a:xfrm>
-            <a:off x="4754880" y="4984018"/>
-            <a:ext cx="1143000" cy="261411"/>
+            <a:off x="4754880" y="4725834"/>
+            <a:ext cx="1143000" cy="239896"/>
           </a:xfrm>
           <a:prstGeom prst="rect">
             <a:avLst/>
@@ -23956,8 +24074,8 @@
         </p:nvSpPr>
         <p:spPr>
           <a:xfrm>
-            <a:off x="658368" y="5245429"/>
-            <a:ext cx="310896" cy="261411"/>
+            <a:off x="658368" y="4965730"/>
+            <a:ext cx="310896" cy="239896"/>
           </a:xfrm>
           <a:prstGeom prst="rect">
             <a:avLst/>
@@ -23995,8 +24113,8 @@
         </p:nvSpPr>
         <p:spPr>
           <a:xfrm>
-            <a:off x="1014984" y="5245429"/>
-            <a:ext cx="1920240" cy="261411"/>
+            <a:off x="1014984" y="4965730"/>
+            <a:ext cx="1920240" cy="239896"/>
           </a:xfrm>
           <a:prstGeom prst="rect">
             <a:avLst/>
@@ -24034,8 +24152,8 @@
         </p:nvSpPr>
         <p:spPr>
           <a:xfrm>
-            <a:off x="3008376" y="5310781"/>
-            <a:ext cx="1073984" cy="130705"/>
+            <a:off x="3008376" y="5025704"/>
+            <a:ext cx="1073984" cy="119948"/>
           </a:xfrm>
           <a:prstGeom prst="rect">
             <a:avLst/>
@@ -24054,8 +24172,8 @@
         </p:nvSpPr>
         <p:spPr>
           <a:xfrm>
-            <a:off x="4754880" y="5245429"/>
-            <a:ext cx="1143000" cy="261411"/>
+            <a:off x="4754880" y="4965730"/>
+            <a:ext cx="1143000" cy="239896"/>
           </a:xfrm>
           <a:prstGeom prst="rect">
             <a:avLst/>
@@ -24093,8 +24211,8 @@
         </p:nvSpPr>
         <p:spPr>
           <a:xfrm>
-            <a:off x="658368" y="5506840"/>
-            <a:ext cx="310896" cy="261411"/>
+            <a:off x="658368" y="5205625"/>
+            <a:ext cx="310896" cy="239896"/>
           </a:xfrm>
           <a:prstGeom prst="rect">
             <a:avLst/>
@@ -24132,8 +24250,8 @@
         </p:nvSpPr>
         <p:spPr>
           <a:xfrm>
-            <a:off x="1014984" y="5506840"/>
-            <a:ext cx="1920240" cy="261411"/>
+            <a:off x="1014984" y="5205625"/>
+            <a:ext cx="1920240" cy="239896"/>
           </a:xfrm>
           <a:prstGeom prst="rect">
             <a:avLst/>
@@ -24171,8 +24289,8 @@
         </p:nvSpPr>
         <p:spPr>
           <a:xfrm>
-            <a:off x="3008376" y="5572192"/>
-            <a:ext cx="1069793" cy="130705"/>
+            <a:off x="3008376" y="5265599"/>
+            <a:ext cx="1069793" cy="119948"/>
           </a:xfrm>
           <a:prstGeom prst="rect">
             <a:avLst/>
@@ -24191,8 +24309,8 @@
         </p:nvSpPr>
         <p:spPr>
           <a:xfrm>
-            <a:off x="4754880" y="5506840"/>
-            <a:ext cx="1143000" cy="261411"/>
+            <a:off x="4754880" y="5205625"/>
+            <a:ext cx="1143000" cy="239896"/>
           </a:xfrm>
           <a:prstGeom prst="rect">
             <a:avLst/>
@@ -24230,8 +24348,8 @@
         </p:nvSpPr>
         <p:spPr>
           <a:xfrm>
-            <a:off x="658368" y="5768250"/>
-            <a:ext cx="310896" cy="261411"/>
+            <a:off x="658368" y="5445521"/>
+            <a:ext cx="310896" cy="239896"/>
           </a:xfrm>
           <a:prstGeom prst="rect">
             <a:avLst/>
@@ -24269,8 +24387,8 @@
         </p:nvSpPr>
         <p:spPr>
           <a:xfrm>
-            <a:off x="1014984" y="5768250"/>
-            <a:ext cx="1920240" cy="261411"/>
+            <a:off x="1014984" y="5445521"/>
+            <a:ext cx="1920240" cy="239896"/>
           </a:xfrm>
           <a:prstGeom prst="rect">
             <a:avLst/>
@@ -24308,8 +24426,8 @@
         </p:nvSpPr>
         <p:spPr>
           <a:xfrm>
-            <a:off x="3008376" y="5833603"/>
-            <a:ext cx="1044916" cy="130705"/>
+            <a:off x="3008376" y="5505495"/>
+            <a:ext cx="1044916" cy="119948"/>
           </a:xfrm>
           <a:prstGeom prst="rect">
             <a:avLst/>
@@ -24328,8 +24446,8 @@
         </p:nvSpPr>
         <p:spPr>
           <a:xfrm>
-            <a:off x="4754880" y="5768250"/>
-            <a:ext cx="1143000" cy="261411"/>
+            <a:off x="4754880" y="5445521"/>
+            <a:ext cx="1143000" cy="239896"/>
           </a:xfrm>
           <a:prstGeom prst="rect">
             <a:avLst/>
@@ -24367,8 +24485,8 @@
         </p:nvSpPr>
         <p:spPr>
           <a:xfrm>
-            <a:off x="658368" y="6029661"/>
-            <a:ext cx="310896" cy="261411"/>
+            <a:off x="658368" y="5685416"/>
+            <a:ext cx="310896" cy="239896"/>
           </a:xfrm>
           <a:prstGeom prst="rect">
             <a:avLst/>
@@ -24406,8 +24524,8 @@
         </p:nvSpPr>
         <p:spPr>
           <a:xfrm>
-            <a:off x="1014984" y="6029661"/>
-            <a:ext cx="1920240" cy="261411"/>
+            <a:off x="1014984" y="5685416"/>
+            <a:ext cx="1920240" cy="239896"/>
           </a:xfrm>
           <a:prstGeom prst="rect">
             <a:avLst/>
@@ -24445,8 +24563,8 @@
         </p:nvSpPr>
         <p:spPr>
           <a:xfrm>
-            <a:off x="3008376" y="6095014"/>
-            <a:ext cx="1007984" cy="130705"/>
+            <a:off x="3008376" y="5745390"/>
+            <a:ext cx="1007984" cy="119948"/>
           </a:xfrm>
           <a:prstGeom prst="rect">
             <a:avLst/>
@@ -24465,8 +24583,8 @@
         </p:nvSpPr>
         <p:spPr>
           <a:xfrm>
-            <a:off x="4754880" y="6029661"/>
-            <a:ext cx="1143000" cy="261411"/>
+            <a:off x="4754880" y="5685416"/>
+            <a:ext cx="1143000" cy="239896"/>
           </a:xfrm>
           <a:prstGeom prst="rect">
             <a:avLst/>
@@ -24505,7 +24623,7 @@
         <p:spPr>
           <a:xfrm>
             <a:off x="6208776" y="1847088"/>
-            <a:ext cx="310896" cy="261411"/>
+            <a:ext cx="310896" cy="239896"/>
           </a:xfrm>
           <a:prstGeom prst="rect">
             <a:avLst/>
@@ -24544,7 +24662,7 @@
         <p:spPr>
           <a:xfrm>
             <a:off x="6565392" y="1847088"/>
-            <a:ext cx="1920240" cy="261411"/>
+            <a:ext cx="1920240" cy="239896"/>
           </a:xfrm>
           <a:prstGeom prst="rect">
             <a:avLst/>
@@ -24582,8 +24700,8 @@
         </p:nvSpPr>
         <p:spPr>
           <a:xfrm>
-            <a:off x="8558784" y="1912441"/>
-            <a:ext cx="1007915" cy="130705"/>
+            <a:off x="8558784" y="1907062"/>
+            <a:ext cx="1007915" cy="119948"/>
           </a:xfrm>
           <a:prstGeom prst="rect">
             <a:avLst/>
@@ -24603,7 +24721,7 @@
         <p:spPr>
           <a:xfrm>
             <a:off x="10305288" y="1847088"/>
-            <a:ext cx="1143000" cy="261411"/>
+            <a:ext cx="1143000" cy="239896"/>
           </a:xfrm>
           <a:prstGeom prst="rect">
             <a:avLst/>
@@ -24641,8 +24759,8 @@
         </p:nvSpPr>
         <p:spPr>
           <a:xfrm>
-            <a:off x="6208776" y="2108499"/>
-            <a:ext cx="310896" cy="261411"/>
+            <a:off x="6208776" y="2086984"/>
+            <a:ext cx="310896" cy="239896"/>
           </a:xfrm>
           <a:prstGeom prst="rect">
             <a:avLst/>
@@ -24680,8 +24798,8 @@
         </p:nvSpPr>
         <p:spPr>
           <a:xfrm>
-            <a:off x="6565392" y="2108499"/>
-            <a:ext cx="1920240" cy="261411"/>
+            <a:off x="6565392" y="2086984"/>
+            <a:ext cx="1920240" cy="239896"/>
           </a:xfrm>
           <a:prstGeom prst="rect">
             <a:avLst/>
@@ -24719,8 +24837,8 @@
         </p:nvSpPr>
         <p:spPr>
           <a:xfrm>
-            <a:off x="8558784" y="2173852"/>
-            <a:ext cx="979751" cy="130705"/>
+            <a:off x="8558784" y="2146957"/>
+            <a:ext cx="979751" cy="119948"/>
           </a:xfrm>
           <a:prstGeom prst="rect">
             <a:avLst/>
@@ -24739,8 +24857,8 @@
         </p:nvSpPr>
         <p:spPr>
           <a:xfrm>
-            <a:off x="10305288" y="2108499"/>
-            <a:ext cx="1143000" cy="261411"/>
+            <a:off x="10305288" y="2086984"/>
+            <a:ext cx="1143000" cy="239896"/>
           </a:xfrm>
           <a:prstGeom prst="rect">
             <a:avLst/>
@@ -24778,8 +24896,8 @@
         </p:nvSpPr>
         <p:spPr>
           <a:xfrm>
-            <a:off x="6208776" y="2369910"/>
-            <a:ext cx="310896" cy="261411"/>
+            <a:off x="6208776" y="2326879"/>
+            <a:ext cx="310896" cy="239896"/>
           </a:xfrm>
           <a:prstGeom prst="rect">
             <a:avLst/>
@@ -24817,8 +24935,8 @@
         </p:nvSpPr>
         <p:spPr>
           <a:xfrm>
-            <a:off x="6565392" y="2369910"/>
-            <a:ext cx="1920240" cy="261411"/>
+            <a:off x="6565392" y="2326879"/>
+            <a:ext cx="1920240" cy="239896"/>
           </a:xfrm>
           <a:prstGeom prst="rect">
             <a:avLst/>
@@ -24856,8 +24974,8 @@
         </p:nvSpPr>
         <p:spPr>
           <a:xfrm>
-            <a:off x="8558784" y="2435262"/>
-            <a:ext cx="956432" cy="130705"/>
+            <a:off x="8558784" y="2386853"/>
+            <a:ext cx="956432" cy="119948"/>
           </a:xfrm>
           <a:prstGeom prst="rect">
             <a:avLst/>
@@ -24876,8 +24994,8 @@
         </p:nvSpPr>
         <p:spPr>
           <a:xfrm>
-            <a:off x="10305288" y="2369910"/>
-            <a:ext cx="1143000" cy="261411"/>
+            <a:off x="10305288" y="2326879"/>
+            <a:ext cx="1143000" cy="239896"/>
           </a:xfrm>
           <a:prstGeom prst="rect">
             <a:avLst/>
@@ -24915,8 +25033,8 @@
         </p:nvSpPr>
         <p:spPr>
           <a:xfrm>
-            <a:off x="6208776" y="2631320"/>
-            <a:ext cx="310896" cy="261411"/>
+            <a:off x="6208776" y="2566775"/>
+            <a:ext cx="310896" cy="239896"/>
           </a:xfrm>
           <a:prstGeom prst="rect">
             <a:avLst/>
@@ -24954,8 +25072,8 @@
         </p:nvSpPr>
         <p:spPr>
           <a:xfrm>
-            <a:off x="6565392" y="2631320"/>
-            <a:ext cx="1920240" cy="261411"/>
+            <a:off x="6565392" y="2566775"/>
+            <a:ext cx="1920240" cy="239896"/>
           </a:xfrm>
           <a:prstGeom prst="rect">
             <a:avLst/>
@@ -24993,8 +25111,8 @@
         </p:nvSpPr>
         <p:spPr>
           <a:xfrm>
-            <a:off x="8558784" y="2696673"/>
-            <a:ext cx="897553" cy="130705"/>
+            <a:off x="8558784" y="2626748"/>
+            <a:ext cx="897553" cy="119948"/>
           </a:xfrm>
           <a:prstGeom prst="rect">
             <a:avLst/>
@@ -25013,8 +25131,8 @@
         </p:nvSpPr>
         <p:spPr>
           <a:xfrm>
-            <a:off x="10305288" y="2631320"/>
-            <a:ext cx="1143000" cy="261411"/>
+            <a:off x="10305288" y="2566775"/>
+            <a:ext cx="1143000" cy="239896"/>
           </a:xfrm>
           <a:prstGeom prst="rect">
             <a:avLst/>
@@ -25052,8 +25170,8 @@
         </p:nvSpPr>
         <p:spPr>
           <a:xfrm>
-            <a:off x="6208776" y="2892731"/>
-            <a:ext cx="310896" cy="261411"/>
+            <a:off x="6208776" y="2806670"/>
+            <a:ext cx="310896" cy="239896"/>
           </a:xfrm>
           <a:prstGeom prst="rect">
             <a:avLst/>
@@ -25091,8 +25209,8 @@
         </p:nvSpPr>
         <p:spPr>
           <a:xfrm>
-            <a:off x="6565392" y="2892731"/>
-            <a:ext cx="1920240" cy="261411"/>
+            <a:off x="6565392" y="2806670"/>
+            <a:ext cx="1920240" cy="239896"/>
           </a:xfrm>
           <a:prstGeom prst="rect">
             <a:avLst/>
@@ -25130,8 +25248,8 @@
         </p:nvSpPr>
         <p:spPr>
           <a:xfrm>
-            <a:off x="8558784" y="2958084"/>
-            <a:ext cx="890311" cy="130705"/>
+            <a:off x="8558784" y="2866644"/>
+            <a:ext cx="890311" cy="119948"/>
           </a:xfrm>
           <a:prstGeom prst="rect">
             <a:avLst/>
@@ -25150,8 +25268,8 @@
         </p:nvSpPr>
         <p:spPr>
           <a:xfrm>
-            <a:off x="10305288" y="2892731"/>
-            <a:ext cx="1143000" cy="261411"/>
+            <a:off x="10305288" y="2806670"/>
+            <a:ext cx="1143000" cy="239896"/>
           </a:xfrm>
           <a:prstGeom prst="rect">
             <a:avLst/>
@@ -25189,8 +25307,8 @@
         </p:nvSpPr>
         <p:spPr>
           <a:xfrm>
-            <a:off x="6208776" y="3154142"/>
-            <a:ext cx="310896" cy="261411"/>
+            <a:off x="6208776" y="3046566"/>
+            <a:ext cx="310896" cy="239896"/>
           </a:xfrm>
           <a:prstGeom prst="rect">
             <a:avLst/>
@@ -25228,8 +25346,8 @@
         </p:nvSpPr>
         <p:spPr>
           <a:xfrm>
-            <a:off x="6565392" y="3154142"/>
-            <a:ext cx="1920240" cy="261411"/>
+            <a:off x="6565392" y="3046566"/>
+            <a:ext cx="1920240" cy="239896"/>
           </a:xfrm>
           <a:prstGeom prst="rect">
             <a:avLst/>
@@ -25267,8 +25385,8 @@
         </p:nvSpPr>
         <p:spPr>
           <a:xfrm>
-            <a:off x="8558784" y="3219495"/>
-            <a:ext cx="883510" cy="130705"/>
+            <a:off x="8558784" y="3106540"/>
+            <a:ext cx="883510" cy="119948"/>
           </a:xfrm>
           <a:prstGeom prst="rect">
             <a:avLst/>
@@ -25287,8 +25405,8 @@
         </p:nvSpPr>
         <p:spPr>
           <a:xfrm>
-            <a:off x="10305288" y="3154142"/>
-            <a:ext cx="1143000" cy="261411"/>
+            <a:off x="10305288" y="3046566"/>
+            <a:ext cx="1143000" cy="239896"/>
           </a:xfrm>
           <a:prstGeom prst="rect">
             <a:avLst/>
@@ -25326,8 +25444,8 @@
         </p:nvSpPr>
         <p:spPr>
           <a:xfrm>
-            <a:off x="6208776" y="3415553"/>
-            <a:ext cx="310896" cy="261411"/>
+            <a:off x="6208776" y="3286461"/>
+            <a:ext cx="310896" cy="239896"/>
           </a:xfrm>
           <a:prstGeom prst="rect">
             <a:avLst/>
@@ -25365,8 +25483,8 @@
         </p:nvSpPr>
         <p:spPr>
           <a:xfrm>
-            <a:off x="6565392" y="3415553"/>
-            <a:ext cx="1920240" cy="261411"/>
+            <a:off x="6565392" y="3286461"/>
+            <a:ext cx="1920240" cy="239896"/>
           </a:xfrm>
           <a:prstGeom prst="rect">
             <a:avLst/>
@@ -25404,8 +25522,8 @@
         </p:nvSpPr>
         <p:spPr>
           <a:xfrm>
-            <a:off x="8558784" y="3480906"/>
-            <a:ext cx="860120" cy="130705"/>
+            <a:off x="8558784" y="3346435"/>
+            <a:ext cx="860120" cy="119948"/>
           </a:xfrm>
           <a:prstGeom prst="rect">
             <a:avLst/>
@@ -25424,8 +25542,8 @@
         </p:nvSpPr>
         <p:spPr>
           <a:xfrm>
-            <a:off x="10305288" y="3415553"/>
-            <a:ext cx="1143000" cy="261411"/>
+            <a:off x="10305288" y="3286461"/>
+            <a:ext cx="1143000" cy="239896"/>
           </a:xfrm>
           <a:prstGeom prst="rect">
             <a:avLst/>
@@ -25463,8 +25581,8 @@
         </p:nvSpPr>
         <p:spPr>
           <a:xfrm>
-            <a:off x="6208776" y="3676964"/>
-            <a:ext cx="310896" cy="261411"/>
+            <a:off x="6208776" y="3526357"/>
+            <a:ext cx="310896" cy="239896"/>
           </a:xfrm>
           <a:prstGeom prst="rect">
             <a:avLst/>
@@ -25502,8 +25620,8 @@
         </p:nvSpPr>
         <p:spPr>
           <a:xfrm>
-            <a:off x="6565392" y="3676964"/>
-            <a:ext cx="1920240" cy="261411"/>
+            <a:off x="6565392" y="3526357"/>
+            <a:ext cx="1920240" cy="239896"/>
           </a:xfrm>
           <a:prstGeom prst="rect">
             <a:avLst/>
@@ -25541,8 +25659,8 @@
         </p:nvSpPr>
         <p:spPr>
           <a:xfrm>
-            <a:off x="8558784" y="3742316"/>
-            <a:ext cx="791399" cy="130705"/>
+            <a:off x="8558784" y="3586331"/>
+            <a:ext cx="791399" cy="119948"/>
           </a:xfrm>
           <a:prstGeom prst="rect">
             <a:avLst/>
@@ -25561,8 +25679,8 @@
         </p:nvSpPr>
         <p:spPr>
           <a:xfrm>
-            <a:off x="10305288" y="3676964"/>
-            <a:ext cx="1143000" cy="261411"/>
+            <a:off x="10305288" y="3526357"/>
+            <a:ext cx="1143000" cy="239896"/>
           </a:xfrm>
           <a:prstGeom prst="rect">
             <a:avLst/>
@@ -25600,8 +25718,8 @@
         </p:nvSpPr>
         <p:spPr>
           <a:xfrm>
-            <a:off x="6208776" y="3938375"/>
-            <a:ext cx="310896" cy="261411"/>
+            <a:off x="6208776" y="3766252"/>
+            <a:ext cx="310896" cy="239896"/>
           </a:xfrm>
           <a:prstGeom prst="rect">
             <a:avLst/>
@@ -25639,8 +25757,8 @@
         </p:nvSpPr>
         <p:spPr>
           <a:xfrm>
-            <a:off x="6565392" y="3938375"/>
-            <a:ext cx="1920240" cy="261411"/>
+            <a:off x="6565392" y="3766252"/>
+            <a:ext cx="1920240" cy="239896"/>
           </a:xfrm>
           <a:prstGeom prst="rect">
             <a:avLst/>
@@ -25678,8 +25796,8 @@
         </p:nvSpPr>
         <p:spPr>
           <a:xfrm>
-            <a:off x="8558784" y="4003727"/>
-            <a:ext cx="774373" cy="130705"/>
+            <a:off x="8558784" y="3826226"/>
+            <a:ext cx="774373" cy="119948"/>
           </a:xfrm>
           <a:prstGeom prst="rect">
             <a:avLst/>
@@ -25698,8 +25816,8 @@
         </p:nvSpPr>
         <p:spPr>
           <a:xfrm>
-            <a:off x="10305288" y="3938375"/>
-            <a:ext cx="1143000" cy="261411"/>
+            <a:off x="10305288" y="3766252"/>
+            <a:ext cx="1143000" cy="239896"/>
           </a:xfrm>
           <a:prstGeom prst="rect">
             <a:avLst/>
@@ -25737,8 +25855,8 @@
         </p:nvSpPr>
         <p:spPr>
           <a:xfrm>
-            <a:off x="6208776" y="4199785"/>
-            <a:ext cx="310896" cy="261411"/>
+            <a:off x="6208776" y="4006148"/>
+            <a:ext cx="310896" cy="239896"/>
           </a:xfrm>
           <a:prstGeom prst="rect">
             <a:avLst/>
@@ -25776,8 +25894,8 @@
         </p:nvSpPr>
         <p:spPr>
           <a:xfrm>
-            <a:off x="6565392" y="4199785"/>
-            <a:ext cx="1920240" cy="261411"/>
+            <a:off x="6565392" y="4006148"/>
+            <a:ext cx="1920240" cy="239896"/>
           </a:xfrm>
           <a:prstGeom prst="rect">
             <a:avLst/>
@@ -25815,8 +25933,8 @@
         </p:nvSpPr>
         <p:spPr>
           <a:xfrm>
-            <a:off x="8558784" y="4265138"/>
-            <a:ext cx="743729" cy="130705"/>
+            <a:off x="8558784" y="4066122"/>
+            <a:ext cx="743729" cy="119948"/>
           </a:xfrm>
           <a:prstGeom prst="rect">
             <a:avLst/>
@@ -25835,8 +25953,8 @@
         </p:nvSpPr>
         <p:spPr>
           <a:xfrm>
-            <a:off x="10305288" y="4199785"/>
-            <a:ext cx="1143000" cy="261411"/>
+            <a:off x="10305288" y="4006148"/>
+            <a:ext cx="1143000" cy="239896"/>
           </a:xfrm>
           <a:prstGeom prst="rect">
             <a:avLst/>
@@ -25874,8 +25992,8 @@
         </p:nvSpPr>
         <p:spPr>
           <a:xfrm>
-            <a:off x="6208776" y="4461196"/>
-            <a:ext cx="310896" cy="261411"/>
+            <a:off x="6208776" y="4246043"/>
+            <a:ext cx="310896" cy="239896"/>
           </a:xfrm>
           <a:prstGeom prst="rect">
             <a:avLst/>
@@ -25913,8 +26031,8 @@
         </p:nvSpPr>
         <p:spPr>
           <a:xfrm>
-            <a:off x="6565392" y="4461196"/>
-            <a:ext cx="1920240" cy="261411"/>
+            <a:off x="6565392" y="4246043"/>
+            <a:ext cx="1920240" cy="239896"/>
           </a:xfrm>
           <a:prstGeom prst="rect">
             <a:avLst/>
@@ -25952,8 +26070,8 @@
         </p:nvSpPr>
         <p:spPr>
           <a:xfrm>
-            <a:off x="8558784" y="4526549"/>
-            <a:ext cx="730224" cy="130705"/>
+            <a:off x="8558784" y="4306017"/>
+            <a:ext cx="730224" cy="119948"/>
           </a:xfrm>
           <a:prstGeom prst="rect">
             <a:avLst/>
@@ -25972,8 +26090,8 @@
         </p:nvSpPr>
         <p:spPr>
           <a:xfrm>
-            <a:off x="10305288" y="4461196"/>
-            <a:ext cx="1143000" cy="261411"/>
+            <a:off x="10305288" y="4246043"/>
+            <a:ext cx="1143000" cy="239896"/>
           </a:xfrm>
           <a:prstGeom prst="rect">
             <a:avLst/>
@@ -26011,8 +26129,8 @@
         </p:nvSpPr>
         <p:spPr>
           <a:xfrm>
-            <a:off x="6208776" y="4722607"/>
-            <a:ext cx="310896" cy="261411"/>
+            <a:off x="6208776" y="4485939"/>
+            <a:ext cx="310896" cy="239896"/>
           </a:xfrm>
           <a:prstGeom prst="rect">
             <a:avLst/>
@@ -26050,8 +26168,8 @@
         </p:nvSpPr>
         <p:spPr>
           <a:xfrm>
-            <a:off x="6565392" y="4722607"/>
-            <a:ext cx="1920240" cy="261411"/>
+            <a:off x="6565392" y="4485939"/>
+            <a:ext cx="1920240" cy="239896"/>
           </a:xfrm>
           <a:prstGeom prst="rect">
             <a:avLst/>
@@ -26089,8 +26207,8 @@
         </p:nvSpPr>
         <p:spPr>
           <a:xfrm>
-            <a:off x="8558784" y="4787960"/>
-            <a:ext cx="660247" cy="130705"/>
+            <a:off x="8558784" y="4545913"/>
+            <a:ext cx="660247" cy="119948"/>
           </a:xfrm>
           <a:prstGeom prst="rect">
             <a:avLst/>
@@ -26109,8 +26227,8 @@
         </p:nvSpPr>
         <p:spPr>
           <a:xfrm>
-            <a:off x="10305288" y="4722607"/>
-            <a:ext cx="1143000" cy="261411"/>
+            <a:off x="10305288" y="4485939"/>
+            <a:ext cx="1143000" cy="239896"/>
           </a:xfrm>
           <a:prstGeom prst="rect">
             <a:avLst/>
@@ -26148,8 +26266,8 @@
         </p:nvSpPr>
         <p:spPr>
           <a:xfrm>
-            <a:off x="6208776" y="4984018"/>
-            <a:ext cx="310896" cy="261411"/>
+            <a:off x="6208776" y="4725834"/>
+            <a:ext cx="310896" cy="239896"/>
           </a:xfrm>
           <a:prstGeom prst="rect">
             <a:avLst/>
@@ -26187,8 +26305,8 @@
         </p:nvSpPr>
         <p:spPr>
           <a:xfrm>
-            <a:off x="6565392" y="4984018"/>
-            <a:ext cx="1920240" cy="261411"/>
+            <a:off x="6565392" y="4725834"/>
+            <a:ext cx="1920240" cy="239896"/>
           </a:xfrm>
           <a:prstGeom prst="rect">
             <a:avLst/>
@@ -26226,8 +26344,8 @@
         </p:nvSpPr>
         <p:spPr>
           <a:xfrm>
-            <a:off x="8558784" y="5049371"/>
-            <a:ext cx="601492" cy="130705"/>
+            <a:off x="8558784" y="4785808"/>
+            <a:ext cx="601492" cy="119948"/>
           </a:xfrm>
           <a:prstGeom prst="rect">
             <a:avLst/>
@@ -26246,8 +26364,8 @@
         </p:nvSpPr>
         <p:spPr>
           <a:xfrm>
-            <a:off x="10305288" y="4984018"/>
-            <a:ext cx="1143000" cy="261411"/>
+            <a:off x="10305288" y="4725834"/>
+            <a:ext cx="1143000" cy="239896"/>
           </a:xfrm>
           <a:prstGeom prst="rect">
             <a:avLst/>
@@ -26285,8 +26403,8 @@
         </p:nvSpPr>
         <p:spPr>
           <a:xfrm>
-            <a:off x="6208776" y="5245429"/>
-            <a:ext cx="310896" cy="261411"/>
+            <a:off x="6208776" y="4965730"/>
+            <a:ext cx="310896" cy="239896"/>
           </a:xfrm>
           <a:prstGeom prst="rect">
             <a:avLst/>
@@ -26324,8 +26442,8 @@
         </p:nvSpPr>
         <p:spPr>
           <a:xfrm>
-            <a:off x="6565392" y="5245429"/>
-            <a:ext cx="1920240" cy="261411"/>
+            <a:off x="6565392" y="4965730"/>
+            <a:ext cx="1920240" cy="239896"/>
           </a:xfrm>
           <a:prstGeom prst="rect">
             <a:avLst/>
@@ -26363,8 +26481,8 @@
         </p:nvSpPr>
         <p:spPr>
           <a:xfrm>
-            <a:off x="8558784" y="5310781"/>
-            <a:ext cx="531644" cy="130705"/>
+            <a:off x="8558784" y="5025704"/>
+            <a:ext cx="531644" cy="119948"/>
           </a:xfrm>
           <a:prstGeom prst="rect">
             <a:avLst/>
@@ -26383,8 +26501,8 @@
         </p:nvSpPr>
         <p:spPr>
           <a:xfrm>
-            <a:off x="10305288" y="5245429"/>
-            <a:ext cx="1143000" cy="261411"/>
+            <a:off x="10305288" y="4965730"/>
+            <a:ext cx="1143000" cy="239896"/>
           </a:xfrm>
           <a:prstGeom prst="rect">
             <a:avLst/>
@@ -26422,8 +26540,8 @@
         </p:nvSpPr>
         <p:spPr>
           <a:xfrm>
-            <a:off x="6208776" y="5506840"/>
-            <a:ext cx="310896" cy="261411"/>
+            <a:off x="6208776" y="5205625"/>
+            <a:ext cx="310896" cy="239896"/>
           </a:xfrm>
           <a:prstGeom prst="rect">
             <a:avLst/>
@@ -26461,8 +26579,8 @@
         </p:nvSpPr>
         <p:spPr>
           <a:xfrm>
-            <a:off x="6565392" y="5506840"/>
-            <a:ext cx="1920240" cy="261411"/>
+            <a:off x="6565392" y="5205625"/>
+            <a:ext cx="1920240" cy="239896"/>
           </a:xfrm>
           <a:prstGeom prst="rect">
             <a:avLst/>
@@ -26500,8 +26618,8 @@
         </p:nvSpPr>
         <p:spPr>
           <a:xfrm>
-            <a:off x="8558784" y="5572192"/>
-            <a:ext cx="471852" cy="130705"/>
+            <a:off x="8558784" y="5265599"/>
+            <a:ext cx="471852" cy="119948"/>
           </a:xfrm>
           <a:prstGeom prst="rect">
             <a:avLst/>
@@ -26520,8 +26638,8 @@
         </p:nvSpPr>
         <p:spPr>
           <a:xfrm>
-            <a:off x="10305288" y="5506840"/>
-            <a:ext cx="1143000" cy="261411"/>
+            <a:off x="10305288" y="5205625"/>
+            <a:ext cx="1143000" cy="239896"/>
           </a:xfrm>
           <a:prstGeom prst="rect">
             <a:avLst/>
@@ -26559,8 +26677,8 @@
         </p:nvSpPr>
         <p:spPr>
           <a:xfrm>
-            <a:off x="6208776" y="5768250"/>
-            <a:ext cx="310896" cy="261411"/>
+            <a:off x="6208776" y="5445521"/>
+            <a:ext cx="310896" cy="239896"/>
           </a:xfrm>
           <a:prstGeom prst="rect">
             <a:avLst/>
@@ -26598,8 +26716,8 @@
         </p:nvSpPr>
         <p:spPr>
           <a:xfrm>
-            <a:off x="6565392" y="5768250"/>
-            <a:ext cx="1920240" cy="261411"/>
+            <a:off x="6565392" y="5445521"/>
+            <a:ext cx="1920240" cy="239896"/>
           </a:xfrm>
           <a:prstGeom prst="rect">
             <a:avLst/>
@@ -26637,8 +26755,8 @@
         </p:nvSpPr>
         <p:spPr>
           <a:xfrm>
-            <a:off x="8558784" y="5833603"/>
-            <a:ext cx="358005" cy="130705"/>
+            <a:off x="8558784" y="5505495"/>
+            <a:ext cx="358005" cy="119948"/>
           </a:xfrm>
           <a:prstGeom prst="rect">
             <a:avLst/>
@@ -26657,8 +26775,8 @@
         </p:nvSpPr>
         <p:spPr>
           <a:xfrm>
-            <a:off x="10305288" y="5768250"/>
-            <a:ext cx="1143000" cy="261411"/>
+            <a:off x="10305288" y="5445521"/>
+            <a:ext cx="1143000" cy="239896"/>
           </a:xfrm>
           <a:prstGeom prst="rect">
             <a:avLst/>
@@ -26697,7 +26815,7 @@
         <p:spPr>
           <a:xfrm>
             <a:off x="4063635" y="1847088"/>
-            <a:ext cx="14630" cy="4443984"/>
+            <a:ext cx="14630" cy="4078224"/>
           </a:xfrm>
           <a:prstGeom prst="rect">
             <a:avLst/>
@@ -26717,7 +26835,7 @@
         <p:spPr>
           <a:xfrm>
             <a:off x="9614043" y="1847088"/>
-            <a:ext cx="14630" cy="4443984"/>
+            <a:ext cx="14630" cy="4078224"/>
           </a:xfrm>
           <a:prstGeom prst="rect">
             <a:avLst/>
@@ -26737,7 +26855,7 @@
         <p:spPr>
           <a:xfrm>
             <a:off x="6085332" y="1847088"/>
-            <a:ext cx="10973" cy="4443984"/>
+            <a:ext cx="10973" cy="4078224"/>
           </a:xfrm>
           <a:prstGeom prst="rect">
             <a:avLst/>
@@ -26747,6 +26865,65 @@
           </a:solidFill>
           <a:ln/>
         </p:spPr>
+      </p:sp>
+      <p:sp>
+        <p:nvSpPr>
+          <p:cNvPr id="147" name="Shape 144"/>
+          <p:cNvSpPr/>
+          <p:nvPr/>
+        </p:nvSpPr>
+        <p:spPr>
+          <a:xfrm>
+            <a:off x="457200" y="6126480"/>
+            <a:ext cx="11274552" cy="371856"/>
+          </a:xfrm>
+          <a:prstGeom prst="rect">
+            <a:avLst/>
+          </a:prstGeom>
+          <a:solidFill>
+            <a:srgbClr val="EDF4FA"/>
+          </a:solidFill>
+          <a:ln/>
+        </p:spPr>
+      </p:sp>
+      <p:sp>
+        <p:nvSpPr>
+          <p:cNvPr id="148" name="Text 145"/>
+          <p:cNvSpPr txBox="1"/>
+          <p:nvPr/>
+        </p:nvSpPr>
+        <p:spPr>
+          <a:xfrm>
+            <a:off x="658368" y="6144768"/>
+            <a:ext cx="10927080" cy="335280"/>
+          </a:xfrm>
+          <a:prstGeom prst="rect">
+            <a:avLst/>
+          </a:prstGeom>
+          <a:noFill/>
+          <a:ln/>
+        </p:spPr>
+        <p:txBody>
+          <a:bodyPr wrap="square" lIns="0" tIns="0" rIns="0" bIns="0" rtlCol="0" anchor="ctr"/>
+          <a:lstStyle/>
+          <a:p>
+            <a:pPr indent="0" marL="0">
+              <a:buNone/>
+            </a:pPr>
+            <a:r>
+              <a:rPr lang="en-US" sz="1600" b="1" dirty="0">
+                <a:solidFill>
+                  <a:srgbClr val="0B2C4A"/>
+                </a:solidFill>
+                <a:latin typeface="Inter" pitchFamily="34" charset="0"/>
+                <a:ea typeface="Inter" pitchFamily="34" charset="-122"/>
+                <a:cs typeface="Inter" pitchFamily="34" charset="-120"/>
+              </a:rPr>
+              <a:t>15 of 33 stores at or above the 78.1% group.</a:t>
+            </a:r>
+            <a:endParaRPr lang="en-US" sz="1600" dirty="0"/>
+          </a:p>
+        </p:txBody>
       </p:sp>
     </p:spTree>
   </p:cSld>
@@ -26887,7 +27064,7 @@
         <p:spPr>
           <a:xfrm>
             <a:off x="457200" y="1207008"/>
-            <a:ext cx="11274552" cy="5148072"/>
+            <a:ext cx="11274552" cy="4782312"/>
           </a:xfrm>
           <a:prstGeom prst="rect">
             <a:avLst/>
@@ -27064,7 +27241,7 @@
         <p:spPr>
           <a:xfrm>
             <a:off x="658368" y="1847088"/>
-            <a:ext cx="310896" cy="261411"/>
+            <a:ext cx="310896" cy="239896"/>
           </a:xfrm>
           <a:prstGeom prst="rect">
             <a:avLst/>
@@ -27103,7 +27280,7 @@
         <p:spPr>
           <a:xfrm>
             <a:off x="1014984" y="1847088"/>
-            <a:ext cx="1920240" cy="261411"/>
+            <a:ext cx="1920240" cy="239896"/>
           </a:xfrm>
           <a:prstGeom prst="rect">
             <a:avLst/>
@@ -27141,8 +27318,8 @@
         </p:nvSpPr>
         <p:spPr>
           <a:xfrm>
-            <a:off x="3785616" y="1917669"/>
-            <a:ext cx="716268" cy="120249"/>
+            <a:off x="3785616" y="1911860"/>
+            <a:ext cx="716268" cy="110352"/>
           </a:xfrm>
           <a:prstGeom prst="rect">
             <a:avLst/>
@@ -27162,7 +27339,7 @@
         <p:spPr>
           <a:xfrm>
             <a:off x="4617720" y="1847088"/>
-            <a:ext cx="1234440" cy="261411"/>
+            <a:ext cx="1234440" cy="239896"/>
           </a:xfrm>
           <a:prstGeom prst="rect">
             <a:avLst/>
@@ -27200,8 +27377,8 @@
         </p:nvSpPr>
         <p:spPr>
           <a:xfrm>
-            <a:off x="658368" y="2108499"/>
-            <a:ext cx="310896" cy="261411"/>
+            <a:off x="658368" y="2086984"/>
+            <a:ext cx="310896" cy="239896"/>
           </a:xfrm>
           <a:prstGeom prst="rect">
             <a:avLst/>
@@ -27239,8 +27416,8 @@
         </p:nvSpPr>
         <p:spPr>
           <a:xfrm>
-            <a:off x="1014984" y="2108499"/>
-            <a:ext cx="1920240" cy="261411"/>
+            <a:off x="1014984" y="2086984"/>
+            <a:ext cx="1920240" cy="239896"/>
           </a:xfrm>
           <a:prstGeom prst="rect">
             <a:avLst/>
@@ -27278,8 +27455,8 @@
         </p:nvSpPr>
         <p:spPr>
           <a:xfrm>
-            <a:off x="3785616" y="2179080"/>
-            <a:ext cx="425726" cy="120249"/>
+            <a:off x="3785616" y="2151755"/>
+            <a:ext cx="425726" cy="110352"/>
           </a:xfrm>
           <a:prstGeom prst="rect">
             <a:avLst/>
@@ -27298,8 +27475,8 @@
         </p:nvSpPr>
         <p:spPr>
           <a:xfrm>
-            <a:off x="4617720" y="2108499"/>
-            <a:ext cx="1234440" cy="261411"/>
+            <a:off x="4617720" y="2086984"/>
+            <a:ext cx="1234440" cy="239896"/>
           </a:xfrm>
           <a:prstGeom prst="rect">
             <a:avLst/>
@@ -27337,8 +27514,8 @@
         </p:nvSpPr>
         <p:spPr>
           <a:xfrm>
-            <a:off x="658368" y="2369910"/>
-            <a:ext cx="310896" cy="261411"/>
+            <a:off x="658368" y="2326879"/>
+            <a:ext cx="310896" cy="239896"/>
           </a:xfrm>
           <a:prstGeom prst="rect">
             <a:avLst/>
@@ -27376,8 +27553,8 @@
         </p:nvSpPr>
         <p:spPr>
           <a:xfrm>
-            <a:off x="1014984" y="2369910"/>
-            <a:ext cx="1920240" cy="261411"/>
+            <a:off x="1014984" y="2326879"/>
+            <a:ext cx="1920240" cy="239896"/>
           </a:xfrm>
           <a:prstGeom prst="rect">
             <a:avLst/>
@@ -27415,8 +27592,8 @@
         </p:nvSpPr>
         <p:spPr>
           <a:xfrm>
-            <a:off x="3785616" y="2440491"/>
-            <a:ext cx="423929" cy="120249"/>
+            <a:off x="3785616" y="2391651"/>
+            <a:ext cx="423929" cy="110352"/>
           </a:xfrm>
           <a:prstGeom prst="rect">
             <a:avLst/>
@@ -27435,8 +27612,8 @@
         </p:nvSpPr>
         <p:spPr>
           <a:xfrm>
-            <a:off x="4617720" y="2369910"/>
-            <a:ext cx="1234440" cy="261411"/>
+            <a:off x="4617720" y="2326879"/>
+            <a:ext cx="1234440" cy="239896"/>
           </a:xfrm>
           <a:prstGeom prst="rect">
             <a:avLst/>
@@ -27474,8 +27651,8 @@
         </p:nvSpPr>
         <p:spPr>
           <a:xfrm>
-            <a:off x="658368" y="2631320"/>
-            <a:ext cx="310896" cy="261411"/>
+            <a:off x="658368" y="2566775"/>
+            <a:ext cx="310896" cy="239896"/>
           </a:xfrm>
           <a:prstGeom prst="rect">
             <a:avLst/>
@@ -27513,8 +27690,8 @@
         </p:nvSpPr>
         <p:spPr>
           <a:xfrm>
-            <a:off x="1014984" y="2631320"/>
-            <a:ext cx="1920240" cy="261411"/>
+            <a:off x="1014984" y="2566775"/>
+            <a:ext cx="1920240" cy="239896"/>
           </a:xfrm>
           <a:prstGeom prst="rect">
             <a:avLst/>
@@ -27552,8 +27729,8 @@
         </p:nvSpPr>
         <p:spPr>
           <a:xfrm>
-            <a:off x="3785616" y="2701901"/>
-            <a:ext cx="249780" cy="120249"/>
+            <a:off x="3785616" y="2631546"/>
+            <a:ext cx="249780" cy="110352"/>
           </a:xfrm>
           <a:prstGeom prst="rect">
             <a:avLst/>
@@ -27572,8 +27749,8 @@
         </p:nvSpPr>
         <p:spPr>
           <a:xfrm>
-            <a:off x="4617720" y="2631320"/>
-            <a:ext cx="1234440" cy="261411"/>
+            <a:off x="4617720" y="2566775"/>
+            <a:ext cx="1234440" cy="239896"/>
           </a:xfrm>
           <a:prstGeom prst="rect">
             <a:avLst/>
@@ -27611,8 +27788,8 @@
         </p:nvSpPr>
         <p:spPr>
           <a:xfrm>
-            <a:off x="658368" y="2892731"/>
-            <a:ext cx="310896" cy="261411"/>
+            <a:off x="658368" y="2806670"/>
+            <a:ext cx="310896" cy="239896"/>
           </a:xfrm>
           <a:prstGeom prst="rect">
             <a:avLst/>
@@ -27650,8 +27827,8 @@
         </p:nvSpPr>
         <p:spPr>
           <a:xfrm>
-            <a:off x="1014984" y="2892731"/>
-            <a:ext cx="1920240" cy="261411"/>
+            <a:off x="1014984" y="2806670"/>
+            <a:ext cx="1920240" cy="239896"/>
           </a:xfrm>
           <a:prstGeom prst="rect">
             <a:avLst/>
@@ -27689,8 +27866,8 @@
         </p:nvSpPr>
         <p:spPr>
           <a:xfrm>
-            <a:off x="3785616" y="2963312"/>
-            <a:ext cx="241902" cy="120249"/>
+            <a:off x="3785616" y="2871442"/>
+            <a:ext cx="241902" cy="110352"/>
           </a:xfrm>
           <a:prstGeom prst="rect">
             <a:avLst/>
@@ -27709,8 +27886,8 @@
         </p:nvSpPr>
         <p:spPr>
           <a:xfrm>
-            <a:off x="4617720" y="2892731"/>
-            <a:ext cx="1234440" cy="261411"/>
+            <a:off x="4617720" y="2806670"/>
+            <a:ext cx="1234440" cy="239896"/>
           </a:xfrm>
           <a:prstGeom prst="rect">
             <a:avLst/>
@@ -27748,8 +27925,8 @@
         </p:nvSpPr>
         <p:spPr>
           <a:xfrm>
-            <a:off x="658368" y="3154142"/>
-            <a:ext cx="310896" cy="261411"/>
+            <a:off x="658368" y="3046566"/>
+            <a:ext cx="310896" cy="239896"/>
           </a:xfrm>
           <a:prstGeom prst="rect">
             <a:avLst/>
@@ -27787,8 +27964,8 @@
         </p:nvSpPr>
         <p:spPr>
           <a:xfrm>
-            <a:off x="1014984" y="3154142"/>
-            <a:ext cx="1920240" cy="261411"/>
+            <a:off x="1014984" y="3046566"/>
+            <a:ext cx="1920240" cy="239896"/>
           </a:xfrm>
           <a:prstGeom prst="rect">
             <a:avLst/>
@@ -27826,8 +28003,8 @@
         </p:nvSpPr>
         <p:spPr>
           <a:xfrm>
-            <a:off x="3785616" y="3224723"/>
-            <a:ext cx="234433" cy="120249"/>
+            <a:off x="3785616" y="3111337"/>
+            <a:ext cx="234433" cy="110352"/>
           </a:xfrm>
           <a:prstGeom prst="rect">
             <a:avLst/>
@@ -27846,8 +28023,8 @@
         </p:nvSpPr>
         <p:spPr>
           <a:xfrm>
-            <a:off x="4617720" y="3154142"/>
-            <a:ext cx="1234440" cy="261411"/>
+            <a:off x="4617720" y="3046566"/>
+            <a:ext cx="1234440" cy="239896"/>
           </a:xfrm>
           <a:prstGeom prst="rect">
             <a:avLst/>
@@ -27885,8 +28062,8 @@
         </p:nvSpPr>
         <p:spPr>
           <a:xfrm>
-            <a:off x="658368" y="3415553"/>
-            <a:ext cx="310896" cy="261411"/>
+            <a:off x="658368" y="3286461"/>
+            <a:ext cx="310896" cy="239896"/>
           </a:xfrm>
           <a:prstGeom prst="rect">
             <a:avLst/>
@@ -27924,8 +28101,8 @@
         </p:nvSpPr>
         <p:spPr>
           <a:xfrm>
-            <a:off x="1014984" y="3415553"/>
-            <a:ext cx="1920240" cy="261411"/>
+            <a:off x="1014984" y="3286461"/>
+            <a:ext cx="1920240" cy="239896"/>
           </a:xfrm>
           <a:prstGeom prst="rect">
             <a:avLst/>
@@ -27963,8 +28140,8 @@
         </p:nvSpPr>
         <p:spPr>
           <a:xfrm>
-            <a:off x="3785616" y="3486134"/>
-            <a:ext cx="234127" cy="120249"/>
+            <a:off x="3785616" y="3351233"/>
+            <a:ext cx="234127" cy="110352"/>
           </a:xfrm>
           <a:prstGeom prst="rect">
             <a:avLst/>
@@ -27983,8 +28160,8 @@
         </p:nvSpPr>
         <p:spPr>
           <a:xfrm>
-            <a:off x="4617720" y="3415553"/>
-            <a:ext cx="1234440" cy="261411"/>
+            <a:off x="4617720" y="3286461"/>
+            <a:ext cx="1234440" cy="239896"/>
           </a:xfrm>
           <a:prstGeom prst="rect">
             <a:avLst/>
@@ -28022,8 +28199,8 @@
         </p:nvSpPr>
         <p:spPr>
           <a:xfrm>
-            <a:off x="658368" y="3676964"/>
-            <a:ext cx="310896" cy="261411"/>
+            <a:off x="658368" y="3526357"/>
+            <a:ext cx="310896" cy="239896"/>
           </a:xfrm>
           <a:prstGeom prst="rect">
             <a:avLst/>
@@ -28061,8 +28238,8 @@
         </p:nvSpPr>
         <p:spPr>
           <a:xfrm>
-            <a:off x="1014984" y="3676964"/>
-            <a:ext cx="1920240" cy="261411"/>
+            <a:off x="1014984" y="3526357"/>
+            <a:ext cx="1920240" cy="239896"/>
           </a:xfrm>
           <a:prstGeom prst="rect">
             <a:avLst/>
@@ -28100,8 +28277,8 @@
         </p:nvSpPr>
         <p:spPr>
           <a:xfrm>
-            <a:off x="3785616" y="3747545"/>
-            <a:ext cx="230514" cy="120249"/>
+            <a:off x="3785616" y="3591128"/>
+            <a:ext cx="230514" cy="110352"/>
           </a:xfrm>
           <a:prstGeom prst="rect">
             <a:avLst/>
@@ -28120,8 +28297,8 @@
         </p:nvSpPr>
         <p:spPr>
           <a:xfrm>
-            <a:off x="4617720" y="3676964"/>
-            <a:ext cx="1234440" cy="261411"/>
+            <a:off x="4617720" y="3526357"/>
+            <a:ext cx="1234440" cy="239896"/>
           </a:xfrm>
           <a:prstGeom prst="rect">
             <a:avLst/>
@@ -28159,8 +28336,8 @@
         </p:nvSpPr>
         <p:spPr>
           <a:xfrm>
-            <a:off x="658368" y="3938375"/>
-            <a:ext cx="310896" cy="261411"/>
+            <a:off x="658368" y="3766252"/>
+            <a:ext cx="310896" cy="239896"/>
           </a:xfrm>
           <a:prstGeom prst="rect">
             <a:avLst/>
@@ -28198,8 +28375,8 @@
         </p:nvSpPr>
         <p:spPr>
           <a:xfrm>
-            <a:off x="1014984" y="3938375"/>
-            <a:ext cx="1920240" cy="261411"/>
+            <a:off x="1014984" y="3766252"/>
+            <a:ext cx="1920240" cy="239896"/>
           </a:xfrm>
           <a:prstGeom prst="rect">
             <a:avLst/>
@@ -28237,8 +28414,8 @@
         </p:nvSpPr>
         <p:spPr>
           <a:xfrm>
-            <a:off x="3785616" y="4008956"/>
-            <a:ext cx="227415" cy="120249"/>
+            <a:off x="3785616" y="3831024"/>
+            <a:ext cx="227415" cy="110352"/>
           </a:xfrm>
           <a:prstGeom prst="rect">
             <a:avLst/>
@@ -28257,8 +28434,8 @@
         </p:nvSpPr>
         <p:spPr>
           <a:xfrm>
-            <a:off x="4617720" y="3938375"/>
-            <a:ext cx="1234440" cy="261411"/>
+            <a:off x="4617720" y="3766252"/>
+            <a:ext cx="1234440" cy="239896"/>
           </a:xfrm>
           <a:prstGeom prst="rect">
             <a:avLst/>
@@ -28296,8 +28473,8 @@
         </p:nvSpPr>
         <p:spPr>
           <a:xfrm>
-            <a:off x="658368" y="4199785"/>
-            <a:ext cx="310896" cy="261411"/>
+            <a:off x="658368" y="4006148"/>
+            <a:ext cx="310896" cy="239896"/>
           </a:xfrm>
           <a:prstGeom prst="rect">
             <a:avLst/>
@@ -28335,8 +28512,8 @@
         </p:nvSpPr>
         <p:spPr>
           <a:xfrm>
-            <a:off x="1014984" y="4199785"/>
-            <a:ext cx="1920240" cy="261411"/>
+            <a:off x="1014984" y="4006148"/>
+            <a:ext cx="1920240" cy="239896"/>
           </a:xfrm>
           <a:prstGeom prst="rect">
             <a:avLst/>
@@ -28374,8 +28551,8 @@
         </p:nvSpPr>
         <p:spPr>
           <a:xfrm>
-            <a:off x="3785616" y="4270366"/>
-            <a:ext cx="222558" cy="120249"/>
+            <a:off x="3785616" y="4070920"/>
+            <a:ext cx="222558" cy="110352"/>
           </a:xfrm>
           <a:prstGeom prst="rect">
             <a:avLst/>
@@ -28394,8 +28571,8 @@
         </p:nvSpPr>
         <p:spPr>
           <a:xfrm>
-            <a:off x="4617720" y="4199785"/>
-            <a:ext cx="1234440" cy="261411"/>
+            <a:off x="4617720" y="4006148"/>
+            <a:ext cx="1234440" cy="239896"/>
           </a:xfrm>
           <a:prstGeom prst="rect">
             <a:avLst/>
@@ -28433,8 +28610,8 @@
         </p:nvSpPr>
         <p:spPr>
           <a:xfrm>
-            <a:off x="658368" y="4461196"/>
-            <a:ext cx="310896" cy="261411"/>
+            <a:off x="658368" y="4246043"/>
+            <a:ext cx="310896" cy="239896"/>
           </a:xfrm>
           <a:prstGeom prst="rect">
             <a:avLst/>
@@ -28472,8 +28649,8 @@
         </p:nvSpPr>
         <p:spPr>
           <a:xfrm>
-            <a:off x="1014984" y="4461196"/>
-            <a:ext cx="1920240" cy="261411"/>
+            <a:off x="1014984" y="4246043"/>
+            <a:ext cx="1920240" cy="239896"/>
           </a:xfrm>
           <a:prstGeom prst="rect">
             <a:avLst/>
@@ -28511,8 +28688,8 @@
         </p:nvSpPr>
         <p:spPr>
           <a:xfrm>
-            <a:off x="3785616" y="4531777"/>
-            <a:ext cx="220801" cy="120249"/>
+            <a:off x="3785616" y="4310815"/>
+            <a:ext cx="220801" cy="110352"/>
           </a:xfrm>
           <a:prstGeom prst="rect">
             <a:avLst/>
@@ -28531,8 +28708,8 @@
         </p:nvSpPr>
         <p:spPr>
           <a:xfrm>
-            <a:off x="4617720" y="4461196"/>
-            <a:ext cx="1234440" cy="261411"/>
+            <a:off x="4617720" y="4246043"/>
+            <a:ext cx="1234440" cy="239896"/>
           </a:xfrm>
           <a:prstGeom prst="rect">
             <a:avLst/>
@@ -28570,8 +28747,8 @@
         </p:nvSpPr>
         <p:spPr>
           <a:xfrm>
-            <a:off x="658368" y="4722607"/>
-            <a:ext cx="310896" cy="261411"/>
+            <a:off x="658368" y="4485939"/>
+            <a:ext cx="310896" cy="239896"/>
           </a:xfrm>
           <a:prstGeom prst="rect">
             <a:avLst/>
@@ -28609,8 +28786,8 @@
         </p:nvSpPr>
         <p:spPr>
           <a:xfrm>
-            <a:off x="1014984" y="4722607"/>
-            <a:ext cx="1920240" cy="261411"/>
+            <a:off x="1014984" y="4485939"/>
+            <a:ext cx="1920240" cy="239896"/>
           </a:xfrm>
           <a:prstGeom prst="rect">
             <a:avLst/>
@@ -28648,8 +28825,8 @@
         </p:nvSpPr>
         <p:spPr>
           <a:xfrm>
-            <a:off x="3785616" y="4793188"/>
-            <a:ext cx="212368" cy="120249"/>
+            <a:off x="3785616" y="4550711"/>
+            <a:ext cx="212368" cy="110352"/>
           </a:xfrm>
           <a:prstGeom prst="rect">
             <a:avLst/>
@@ -28668,8 +28845,8 @@
         </p:nvSpPr>
         <p:spPr>
           <a:xfrm>
-            <a:off x="4617720" y="4722607"/>
-            <a:ext cx="1234440" cy="261411"/>
+            <a:off x="4617720" y="4485939"/>
+            <a:ext cx="1234440" cy="239896"/>
           </a:xfrm>
           <a:prstGeom prst="rect">
             <a:avLst/>
@@ -28707,8 +28884,8 @@
         </p:nvSpPr>
         <p:spPr>
           <a:xfrm>
-            <a:off x="658368" y="4984018"/>
-            <a:ext cx="310896" cy="261411"/>
+            <a:off x="658368" y="4725834"/>
+            <a:ext cx="310896" cy="239896"/>
           </a:xfrm>
           <a:prstGeom prst="rect">
             <a:avLst/>
@@ -28746,8 +28923,8 @@
         </p:nvSpPr>
         <p:spPr>
           <a:xfrm>
-            <a:off x="1014984" y="4984018"/>
-            <a:ext cx="1920240" cy="261411"/>
+            <a:off x="1014984" y="4725834"/>
+            <a:ext cx="1920240" cy="239896"/>
           </a:xfrm>
           <a:prstGeom prst="rect">
             <a:avLst/>
@@ -28785,8 +28962,8 @@
         </p:nvSpPr>
         <p:spPr>
           <a:xfrm>
-            <a:off x="3785616" y="5054599"/>
-            <a:ext cx="178083" cy="120249"/>
+            <a:off x="3785616" y="4790606"/>
+            <a:ext cx="178083" cy="110352"/>
           </a:xfrm>
           <a:prstGeom prst="rect">
             <a:avLst/>
@@ -28805,8 +28982,8 @@
         </p:nvSpPr>
         <p:spPr>
           <a:xfrm>
-            <a:off x="4617720" y="4984018"/>
-            <a:ext cx="1234440" cy="261411"/>
+            <a:off x="4617720" y="4725834"/>
+            <a:ext cx="1234440" cy="239896"/>
           </a:xfrm>
           <a:prstGeom prst="rect">
             <a:avLst/>
@@ -28844,8 +29021,8 @@
         </p:nvSpPr>
         <p:spPr>
           <a:xfrm>
-            <a:off x="658368" y="5245429"/>
-            <a:ext cx="310896" cy="261411"/>
+            <a:off x="658368" y="4965730"/>
+            <a:ext cx="310896" cy="239896"/>
           </a:xfrm>
           <a:prstGeom prst="rect">
             <a:avLst/>
@@ -28883,8 +29060,8 @@
         </p:nvSpPr>
         <p:spPr>
           <a:xfrm>
-            <a:off x="1014984" y="5245429"/>
-            <a:ext cx="1920240" cy="261411"/>
+            <a:off x="1014984" y="4965730"/>
+            <a:ext cx="1920240" cy="239896"/>
           </a:xfrm>
           <a:prstGeom prst="rect">
             <a:avLst/>
@@ -28922,8 +29099,8 @@
         </p:nvSpPr>
         <p:spPr>
           <a:xfrm>
-            <a:off x="3785616" y="5316010"/>
-            <a:ext cx="171975" cy="120249"/>
+            <a:off x="3785616" y="5030502"/>
+            <a:ext cx="171975" cy="110352"/>
           </a:xfrm>
           <a:prstGeom prst="rect">
             <a:avLst/>
@@ -28942,8 +29119,8 @@
         </p:nvSpPr>
         <p:spPr>
           <a:xfrm>
-            <a:off x="4617720" y="5245429"/>
-            <a:ext cx="1234440" cy="261411"/>
+            <a:off x="4617720" y="4965730"/>
+            <a:ext cx="1234440" cy="239896"/>
           </a:xfrm>
           <a:prstGeom prst="rect">
             <a:avLst/>
@@ -28981,8 +29158,8 @@
         </p:nvSpPr>
         <p:spPr>
           <a:xfrm>
-            <a:off x="658368" y="5506840"/>
-            <a:ext cx="310896" cy="261411"/>
+            <a:off x="658368" y="5205625"/>
+            <a:ext cx="310896" cy="239896"/>
           </a:xfrm>
           <a:prstGeom prst="rect">
             <a:avLst/>
@@ -29020,8 +29197,8 @@
         </p:nvSpPr>
         <p:spPr>
           <a:xfrm>
-            <a:off x="1014984" y="5506840"/>
-            <a:ext cx="1920240" cy="261411"/>
+            <a:off x="1014984" y="5205625"/>
+            <a:ext cx="1920240" cy="239896"/>
           </a:xfrm>
           <a:prstGeom prst="rect">
             <a:avLst/>
@@ -29059,8 +29236,8 @@
         </p:nvSpPr>
         <p:spPr>
           <a:xfrm>
-            <a:off x="3785616" y="5577420"/>
-            <a:ext cx="170724" cy="120249"/>
+            <a:off x="3785616" y="5270397"/>
+            <a:ext cx="170724" cy="110352"/>
           </a:xfrm>
           <a:prstGeom prst="rect">
             <a:avLst/>
@@ -29079,8 +29256,8 @@
         </p:nvSpPr>
         <p:spPr>
           <a:xfrm>
-            <a:off x="4617720" y="5506840"/>
-            <a:ext cx="1234440" cy="261411"/>
+            <a:off x="4617720" y="5205625"/>
+            <a:ext cx="1234440" cy="239896"/>
           </a:xfrm>
           <a:prstGeom prst="rect">
             <a:avLst/>
@@ -29118,8 +29295,8 @@
         </p:nvSpPr>
         <p:spPr>
           <a:xfrm>
-            <a:off x="658368" y="5768250"/>
-            <a:ext cx="310896" cy="261411"/>
+            <a:off x="658368" y="5445521"/>
+            <a:ext cx="310896" cy="239896"/>
           </a:xfrm>
           <a:prstGeom prst="rect">
             <a:avLst/>
@@ -29157,8 +29334,8 @@
         </p:nvSpPr>
         <p:spPr>
           <a:xfrm>
-            <a:off x="1014984" y="5768250"/>
-            <a:ext cx="1920240" cy="261411"/>
+            <a:off x="1014984" y="5445521"/>
+            <a:ext cx="1920240" cy="239896"/>
           </a:xfrm>
           <a:prstGeom prst="rect">
             <a:avLst/>
@@ -29196,8 +29373,8 @@
         </p:nvSpPr>
         <p:spPr>
           <a:xfrm>
-            <a:off x="3785616" y="5838831"/>
-            <a:ext cx="145782" cy="120249"/>
+            <a:off x="3785616" y="5510293"/>
+            <a:ext cx="145782" cy="110352"/>
           </a:xfrm>
           <a:prstGeom prst="rect">
             <a:avLst/>
@@ -29216,8 +29393,8 @@
         </p:nvSpPr>
         <p:spPr>
           <a:xfrm>
-            <a:off x="4617720" y="5768250"/>
-            <a:ext cx="1234440" cy="261411"/>
+            <a:off x="4617720" y="5445521"/>
+            <a:ext cx="1234440" cy="239896"/>
           </a:xfrm>
           <a:prstGeom prst="rect">
             <a:avLst/>
@@ -29255,8 +29432,8 @@
         </p:nvSpPr>
         <p:spPr>
           <a:xfrm>
-            <a:off x="658368" y="6029661"/>
-            <a:ext cx="310896" cy="261411"/>
+            <a:off x="658368" y="5685416"/>
+            <a:ext cx="310896" cy="239896"/>
           </a:xfrm>
           <a:prstGeom prst="rect">
             <a:avLst/>
@@ -29294,8 +29471,8 @@
         </p:nvSpPr>
         <p:spPr>
           <a:xfrm>
-            <a:off x="1014984" y="6029661"/>
-            <a:ext cx="1920240" cy="261411"/>
+            <a:off x="1014984" y="5685416"/>
+            <a:ext cx="1920240" cy="239896"/>
           </a:xfrm>
           <a:prstGeom prst="rect">
             <a:avLst/>
@@ -29333,8 +29510,8 @@
         </p:nvSpPr>
         <p:spPr>
           <a:xfrm>
-            <a:off x="3785616" y="6100242"/>
-            <a:ext cx="144022" cy="120249"/>
+            <a:off x="3785616" y="5750188"/>
+            <a:ext cx="144022" cy="110352"/>
           </a:xfrm>
           <a:prstGeom prst="rect">
             <a:avLst/>
@@ -29353,8 +29530,8 @@
         </p:nvSpPr>
         <p:spPr>
           <a:xfrm>
-            <a:off x="4617720" y="6029661"/>
-            <a:ext cx="1234440" cy="261411"/>
+            <a:off x="4617720" y="5685416"/>
+            <a:ext cx="1234440" cy="239896"/>
           </a:xfrm>
           <a:prstGeom prst="rect">
             <a:avLst/>
@@ -29393,7 +29570,7 @@
         <p:spPr>
           <a:xfrm>
             <a:off x="6208776" y="1847088"/>
-            <a:ext cx="310896" cy="261411"/>
+            <a:ext cx="310896" cy="239896"/>
           </a:xfrm>
           <a:prstGeom prst="rect">
             <a:avLst/>
@@ -29432,7 +29609,7 @@
         <p:spPr>
           <a:xfrm>
             <a:off x="6565392" y="1847088"/>
-            <a:ext cx="1920240" cy="261411"/>
+            <a:ext cx="1920240" cy="239896"/>
           </a:xfrm>
           <a:prstGeom prst="rect">
             <a:avLst/>
@@ -29470,8 +29647,8 @@
         </p:nvSpPr>
         <p:spPr>
           <a:xfrm>
-            <a:off x="9336024" y="1917669"/>
-            <a:ext cx="111949" cy="120249"/>
+            <a:off x="9336024" y="1911860"/>
+            <a:ext cx="111949" cy="110352"/>
           </a:xfrm>
           <a:prstGeom prst="rect">
             <a:avLst/>
@@ -29491,7 +29668,7 @@
         <p:spPr>
           <a:xfrm>
             <a:off x="10168128" y="1847088"/>
-            <a:ext cx="1234440" cy="261411"/>
+            <a:ext cx="1234440" cy="239896"/>
           </a:xfrm>
           <a:prstGeom prst="rect">
             <a:avLst/>
@@ -29529,8 +29706,8 @@
         </p:nvSpPr>
         <p:spPr>
           <a:xfrm>
-            <a:off x="6208776" y="2108499"/>
-            <a:ext cx="310896" cy="261411"/>
+            <a:off x="6208776" y="2086984"/>
+            <a:ext cx="310896" cy="239896"/>
           </a:xfrm>
           <a:prstGeom prst="rect">
             <a:avLst/>
@@ -29568,8 +29745,8 @@
         </p:nvSpPr>
         <p:spPr>
           <a:xfrm>
-            <a:off x="6565392" y="2108499"/>
-            <a:ext cx="1920240" cy="261411"/>
+            <a:off x="6565392" y="2086984"/>
+            <a:ext cx="1920240" cy="239896"/>
           </a:xfrm>
           <a:prstGeom prst="rect">
             <a:avLst/>
@@ -29607,8 +29784,8 @@
         </p:nvSpPr>
         <p:spPr>
           <a:xfrm>
-            <a:off x="9336024" y="2179080"/>
-            <a:ext cx="76399" cy="120249"/>
+            <a:off x="9336024" y="2151755"/>
+            <a:ext cx="76399" cy="110352"/>
           </a:xfrm>
           <a:prstGeom prst="rect">
             <a:avLst/>
@@ -29627,8 +29804,8 @@
         </p:nvSpPr>
         <p:spPr>
           <a:xfrm>
-            <a:off x="10168128" y="2108499"/>
-            <a:ext cx="1234440" cy="261411"/>
+            <a:off x="10168128" y="2086984"/>
+            <a:ext cx="1234440" cy="239896"/>
           </a:xfrm>
           <a:prstGeom prst="rect">
             <a:avLst/>
@@ -29666,8 +29843,8 @@
         </p:nvSpPr>
         <p:spPr>
           <a:xfrm>
-            <a:off x="6208776" y="2369910"/>
-            <a:ext cx="310896" cy="261411"/>
+            <a:off x="6208776" y="2326879"/>
+            <a:ext cx="310896" cy="239896"/>
           </a:xfrm>
           <a:prstGeom prst="rect">
             <a:avLst/>
@@ -29705,8 +29882,8 @@
         </p:nvSpPr>
         <p:spPr>
           <a:xfrm>
-            <a:off x="6565392" y="2369910"/>
-            <a:ext cx="1920240" cy="261411"/>
+            <a:off x="6565392" y="2326879"/>
+            <a:ext cx="1920240" cy="239896"/>
           </a:xfrm>
           <a:prstGeom prst="rect">
             <a:avLst/>
@@ -29744,8 +29921,8 @@
         </p:nvSpPr>
         <p:spPr>
           <a:xfrm>
-            <a:off x="9336024" y="2440491"/>
-            <a:ext cx="71229" cy="120249"/>
+            <a:off x="9336024" y="2391651"/>
+            <a:ext cx="71229" cy="110352"/>
           </a:xfrm>
           <a:prstGeom prst="rect">
             <a:avLst/>
@@ -29764,8 +29941,8 @@
         </p:nvSpPr>
         <p:spPr>
           <a:xfrm>
-            <a:off x="10168128" y="2369910"/>
-            <a:ext cx="1234440" cy="261411"/>
+            <a:off x="10168128" y="2326879"/>
+            <a:ext cx="1234440" cy="239896"/>
           </a:xfrm>
           <a:prstGeom prst="rect">
             <a:avLst/>
@@ -29803,8 +29980,8 @@
         </p:nvSpPr>
         <p:spPr>
           <a:xfrm>
-            <a:off x="6208776" y="2631320"/>
-            <a:ext cx="310896" cy="261411"/>
+            <a:off x="6208776" y="2566775"/>
+            <a:ext cx="310896" cy="239896"/>
           </a:xfrm>
           <a:prstGeom prst="rect">
             <a:avLst/>
@@ -29842,8 +30019,8 @@
         </p:nvSpPr>
         <p:spPr>
           <a:xfrm>
-            <a:off x="6565392" y="2631320"/>
-            <a:ext cx="1920240" cy="261411"/>
+            <a:off x="6565392" y="2566775"/>
+            <a:ext cx="1920240" cy="239896"/>
           </a:xfrm>
           <a:prstGeom prst="rect">
             <a:avLst/>
@@ -29881,8 +30058,8 @@
         </p:nvSpPr>
         <p:spPr>
           <a:xfrm>
-            <a:off x="9336024" y="2701901"/>
-            <a:ext cx="27863" cy="120249"/>
+            <a:off x="9336024" y="2631546"/>
+            <a:ext cx="27863" cy="110352"/>
           </a:xfrm>
           <a:prstGeom prst="rect">
             <a:avLst/>
@@ -29901,8 +30078,8 @@
         </p:nvSpPr>
         <p:spPr>
           <a:xfrm>
-            <a:off x="10168128" y="2631320"/>
-            <a:ext cx="1234440" cy="261411"/>
+            <a:off x="10168128" y="2566775"/>
+            <a:ext cx="1234440" cy="239896"/>
           </a:xfrm>
           <a:prstGeom prst="rect">
             <a:avLst/>
@@ -29940,8 +30117,8 @@
         </p:nvSpPr>
         <p:spPr>
           <a:xfrm>
-            <a:off x="6208776" y="2892731"/>
-            <a:ext cx="310896" cy="261411"/>
+            <a:off x="6208776" y="2806670"/>
+            <a:ext cx="310896" cy="239896"/>
           </a:xfrm>
           <a:prstGeom prst="rect">
             <a:avLst/>
@@ -29979,8 +30156,8 @@
         </p:nvSpPr>
         <p:spPr>
           <a:xfrm>
-            <a:off x="6565392" y="2892731"/>
-            <a:ext cx="1920240" cy="261411"/>
+            <a:off x="6565392" y="2806670"/>
+            <a:ext cx="1920240" cy="239896"/>
           </a:xfrm>
           <a:prstGeom prst="rect">
             <a:avLst/>
@@ -30018,8 +30195,8 @@
         </p:nvSpPr>
         <p:spPr>
           <a:xfrm>
-            <a:off x="9336024" y="2963312"/>
-            <a:ext cx="13338" cy="120249"/>
+            <a:off x="9336024" y="2871442"/>
+            <a:ext cx="13338" cy="110352"/>
           </a:xfrm>
           <a:prstGeom prst="rect">
             <a:avLst/>
@@ -30038,8 +30215,8 @@
         </p:nvSpPr>
         <p:spPr>
           <a:xfrm>
-            <a:off x="10168128" y="2892731"/>
-            <a:ext cx="1234440" cy="261411"/>
+            <a:off x="10168128" y="2806670"/>
+            <a:ext cx="1234440" cy="239896"/>
           </a:xfrm>
           <a:prstGeom prst="rect">
             <a:avLst/>
@@ -30077,8 +30254,8 @@
         </p:nvSpPr>
         <p:spPr>
           <a:xfrm>
-            <a:off x="6208776" y="3154142"/>
-            <a:ext cx="310896" cy="261411"/>
+            <a:off x="6208776" y="3046566"/>
+            <a:ext cx="310896" cy="239896"/>
           </a:xfrm>
           <a:prstGeom prst="rect">
             <a:avLst/>
@@ -30116,8 +30293,8 @@
         </p:nvSpPr>
         <p:spPr>
           <a:xfrm>
-            <a:off x="6565392" y="3154142"/>
-            <a:ext cx="1920240" cy="261411"/>
+            <a:off x="6565392" y="3046566"/>
+            <a:ext cx="1920240" cy="239896"/>
           </a:xfrm>
           <a:prstGeom prst="rect">
             <a:avLst/>
@@ -30155,8 +30332,8 @@
         </p:nvSpPr>
         <p:spPr>
           <a:xfrm>
-            <a:off x="9336024" y="3224723"/>
-            <a:ext cx="12802" cy="120249"/>
+            <a:off x="9336024" y="3111337"/>
+            <a:ext cx="12802" cy="110352"/>
           </a:xfrm>
           <a:prstGeom prst="rect">
             <a:avLst/>
@@ -30175,8 +30352,8 @@
         </p:nvSpPr>
         <p:spPr>
           <a:xfrm>
-            <a:off x="10168128" y="3154142"/>
-            <a:ext cx="1234440" cy="261411"/>
+            <a:off x="10168128" y="3046566"/>
+            <a:ext cx="1234440" cy="239896"/>
           </a:xfrm>
           <a:prstGeom prst="rect">
             <a:avLst/>
@@ -30214,8 +30391,8 @@
         </p:nvSpPr>
         <p:spPr>
           <a:xfrm>
-            <a:off x="6208776" y="3415553"/>
-            <a:ext cx="310896" cy="261411"/>
+            <a:off x="6208776" y="3286461"/>
+            <a:ext cx="310896" cy="239896"/>
           </a:xfrm>
           <a:prstGeom prst="rect">
             <a:avLst/>
@@ -30253,8 +30430,8 @@
         </p:nvSpPr>
         <p:spPr>
           <a:xfrm>
-            <a:off x="6565392" y="3415553"/>
-            <a:ext cx="1920240" cy="261411"/>
+            <a:off x="6565392" y="3286461"/>
+            <a:ext cx="1920240" cy="239896"/>
           </a:xfrm>
           <a:prstGeom prst="rect">
             <a:avLst/>
@@ -30292,8 +30469,8 @@
         </p:nvSpPr>
         <p:spPr>
           <a:xfrm>
-            <a:off x="9330933" y="3486134"/>
-            <a:ext cx="12802" cy="120249"/>
+            <a:off x="9330933" y="3351233"/>
+            <a:ext cx="12802" cy="110352"/>
           </a:xfrm>
           <a:prstGeom prst="rect">
             <a:avLst/>
@@ -30312,8 +30489,8 @@
         </p:nvSpPr>
         <p:spPr>
           <a:xfrm>
-            <a:off x="10168128" y="3415553"/>
-            <a:ext cx="1234440" cy="261411"/>
+            <a:off x="10168128" y="3286461"/>
+            <a:ext cx="1234440" cy="239896"/>
           </a:xfrm>
           <a:prstGeom prst="rect">
             <a:avLst/>
@@ -30351,8 +30528,8 @@
         </p:nvSpPr>
         <p:spPr>
           <a:xfrm>
-            <a:off x="6208776" y="3676964"/>
-            <a:ext cx="310896" cy="261411"/>
+            <a:off x="6208776" y="3526357"/>
+            <a:ext cx="310896" cy="239896"/>
           </a:xfrm>
           <a:prstGeom prst="rect">
             <a:avLst/>
@@ -30390,8 +30567,8 @@
         </p:nvSpPr>
         <p:spPr>
           <a:xfrm>
-            <a:off x="6565392" y="3676964"/>
-            <a:ext cx="1920240" cy="261411"/>
+            <a:off x="6565392" y="3526357"/>
+            <a:ext cx="1920240" cy="239896"/>
           </a:xfrm>
           <a:prstGeom prst="rect">
             <a:avLst/>
@@ -30429,8 +30606,8 @@
         </p:nvSpPr>
         <p:spPr>
           <a:xfrm>
-            <a:off x="9329910" y="3747545"/>
-            <a:ext cx="12802" cy="120249"/>
+            <a:off x="9329910" y="3591128"/>
+            <a:ext cx="12802" cy="110352"/>
           </a:xfrm>
           <a:prstGeom prst="rect">
             <a:avLst/>
@@ -30449,8 +30626,8 @@
         </p:nvSpPr>
         <p:spPr>
           <a:xfrm>
-            <a:off x="10168128" y="3676964"/>
-            <a:ext cx="1234440" cy="261411"/>
+            <a:off x="10168128" y="3526357"/>
+            <a:ext cx="1234440" cy="239896"/>
           </a:xfrm>
           <a:prstGeom prst="rect">
             <a:avLst/>
@@ -30488,8 +30665,8 @@
         </p:nvSpPr>
         <p:spPr>
           <a:xfrm>
-            <a:off x="6208776" y="3938375"/>
-            <a:ext cx="310896" cy="261411"/>
+            <a:off x="6208776" y="3766252"/>
+            <a:ext cx="310896" cy="239896"/>
           </a:xfrm>
           <a:prstGeom prst="rect">
             <a:avLst/>
@@ -30527,8 +30704,8 @@
         </p:nvSpPr>
         <p:spPr>
           <a:xfrm>
-            <a:off x="6565392" y="3938375"/>
-            <a:ext cx="1920240" cy="261411"/>
+            <a:off x="6565392" y="3766252"/>
+            <a:ext cx="1920240" cy="239896"/>
           </a:xfrm>
           <a:prstGeom prst="rect">
             <a:avLst/>
@@ -30566,8 +30743,8 @@
         </p:nvSpPr>
         <p:spPr>
           <a:xfrm>
-            <a:off x="9325626" y="4008956"/>
-            <a:ext cx="12802" cy="120249"/>
+            <a:off x="9325626" y="3831024"/>
+            <a:ext cx="12802" cy="110352"/>
           </a:xfrm>
           <a:prstGeom prst="rect">
             <a:avLst/>
@@ -30586,8 +30763,8 @@
         </p:nvSpPr>
         <p:spPr>
           <a:xfrm>
-            <a:off x="10168128" y="3938375"/>
-            <a:ext cx="1234440" cy="261411"/>
+            <a:off x="10168128" y="3766252"/>
+            <a:ext cx="1234440" cy="239896"/>
           </a:xfrm>
           <a:prstGeom prst="rect">
             <a:avLst/>
@@ -30625,8 +30802,8 @@
         </p:nvSpPr>
         <p:spPr>
           <a:xfrm>
-            <a:off x="6208776" y="4199785"/>
-            <a:ext cx="310896" cy="261411"/>
+            <a:off x="6208776" y="4006148"/>
+            <a:ext cx="310896" cy="239896"/>
           </a:xfrm>
           <a:prstGeom prst="rect">
             <a:avLst/>
@@ -30664,8 +30841,8 @@
         </p:nvSpPr>
         <p:spPr>
           <a:xfrm>
-            <a:off x="6565392" y="4199785"/>
-            <a:ext cx="1920240" cy="261411"/>
+            <a:off x="6565392" y="4006148"/>
+            <a:ext cx="1920240" cy="239896"/>
           </a:xfrm>
           <a:prstGeom prst="rect">
             <a:avLst/>
@@ -30703,8 +30880,8 @@
         </p:nvSpPr>
         <p:spPr>
           <a:xfrm>
-            <a:off x="9288072" y="4270366"/>
-            <a:ext cx="47952" cy="120249"/>
+            <a:off x="9288072" y="4070920"/>
+            <a:ext cx="47952" cy="110352"/>
           </a:xfrm>
           <a:prstGeom prst="rect">
             <a:avLst/>
@@ -30723,8 +30900,8 @@
         </p:nvSpPr>
         <p:spPr>
           <a:xfrm>
-            <a:off x="10168128" y="4199785"/>
-            <a:ext cx="1234440" cy="261411"/>
+            <a:off x="10168128" y="4006148"/>
+            <a:ext cx="1234440" cy="239896"/>
           </a:xfrm>
           <a:prstGeom prst="rect">
             <a:avLst/>
@@ -30762,8 +30939,8 @@
         </p:nvSpPr>
         <p:spPr>
           <a:xfrm>
-            <a:off x="6208776" y="4461196"/>
-            <a:ext cx="310896" cy="261411"/>
+            <a:off x="6208776" y="4246043"/>
+            <a:ext cx="310896" cy="239896"/>
           </a:xfrm>
           <a:prstGeom prst="rect">
             <a:avLst/>
@@ -30801,8 +30978,8 @@
         </p:nvSpPr>
         <p:spPr>
           <a:xfrm>
-            <a:off x="6565392" y="4461196"/>
-            <a:ext cx="1920240" cy="261411"/>
+            <a:off x="6565392" y="4246043"/>
+            <a:ext cx="1920240" cy="239896"/>
           </a:xfrm>
           <a:prstGeom prst="rect">
             <a:avLst/>
@@ -30840,8 +31017,8 @@
         </p:nvSpPr>
         <p:spPr>
           <a:xfrm>
-            <a:off x="9286667" y="4531777"/>
-            <a:ext cx="49357" cy="120249"/>
+            <a:off x="9286667" y="4310815"/>
+            <a:ext cx="49357" cy="110352"/>
           </a:xfrm>
           <a:prstGeom prst="rect">
             <a:avLst/>
@@ -30860,8 +31037,8 @@
         </p:nvSpPr>
         <p:spPr>
           <a:xfrm>
-            <a:off x="10168128" y="4461196"/>
-            <a:ext cx="1234440" cy="261411"/>
+            <a:off x="10168128" y="4246043"/>
+            <a:ext cx="1234440" cy="239896"/>
           </a:xfrm>
           <a:prstGeom prst="rect">
             <a:avLst/>
@@ -30899,8 +31076,8 @@
         </p:nvSpPr>
         <p:spPr>
           <a:xfrm>
-            <a:off x="6208776" y="4722607"/>
-            <a:ext cx="310896" cy="261411"/>
+            <a:off x="6208776" y="4485939"/>
+            <a:ext cx="310896" cy="239896"/>
           </a:xfrm>
           <a:prstGeom prst="rect">
             <a:avLst/>
@@ -30938,8 +31115,8 @@
         </p:nvSpPr>
         <p:spPr>
           <a:xfrm>
-            <a:off x="6565392" y="4722607"/>
-            <a:ext cx="1920240" cy="261411"/>
+            <a:off x="6565392" y="4485939"/>
+            <a:ext cx="1920240" cy="239896"/>
           </a:xfrm>
           <a:prstGeom prst="rect">
             <a:avLst/>
@@ -30977,8 +31154,8 @@
         </p:nvSpPr>
         <p:spPr>
           <a:xfrm>
-            <a:off x="9232720" y="4793188"/>
-            <a:ext cx="103304" cy="120249"/>
+            <a:off x="9232720" y="4550711"/>
+            <a:ext cx="103304" cy="110352"/>
           </a:xfrm>
           <a:prstGeom prst="rect">
             <a:avLst/>
@@ -30997,8 +31174,8 @@
         </p:nvSpPr>
         <p:spPr>
           <a:xfrm>
-            <a:off x="10168128" y="4722607"/>
-            <a:ext cx="1234440" cy="261411"/>
+            <a:off x="10168128" y="4485939"/>
+            <a:ext cx="1234440" cy="239896"/>
           </a:xfrm>
           <a:prstGeom prst="rect">
             <a:avLst/>
@@ -31036,8 +31213,8 @@
         </p:nvSpPr>
         <p:spPr>
           <a:xfrm>
-            <a:off x="6208776" y="4984018"/>
-            <a:ext cx="310896" cy="261411"/>
+            <a:off x="6208776" y="4725834"/>
+            <a:ext cx="310896" cy="239896"/>
           </a:xfrm>
           <a:prstGeom prst="rect">
             <a:avLst/>
@@ -31075,8 +31252,8 @@
         </p:nvSpPr>
         <p:spPr>
           <a:xfrm>
-            <a:off x="6565392" y="4984018"/>
-            <a:ext cx="1920240" cy="261411"/>
+            <a:off x="6565392" y="4725834"/>
+            <a:ext cx="1920240" cy="239896"/>
           </a:xfrm>
           <a:prstGeom prst="rect">
             <a:avLst/>
@@ -31114,8 +31291,8 @@
         </p:nvSpPr>
         <p:spPr>
           <a:xfrm>
-            <a:off x="9063013" y="5054599"/>
-            <a:ext cx="273011" cy="120249"/>
+            <a:off x="9063013" y="4790606"/>
+            <a:ext cx="273011" cy="110352"/>
           </a:xfrm>
           <a:prstGeom prst="rect">
             <a:avLst/>
@@ -31134,8 +31311,8 @@
         </p:nvSpPr>
         <p:spPr>
           <a:xfrm>
-            <a:off x="10168128" y="4984018"/>
-            <a:ext cx="1234440" cy="261411"/>
+            <a:off x="10168128" y="4725834"/>
+            <a:ext cx="1234440" cy="239896"/>
           </a:xfrm>
           <a:prstGeom prst="rect">
             <a:avLst/>
@@ -31173,8 +31350,8 @@
         </p:nvSpPr>
         <p:spPr>
           <a:xfrm>
-            <a:off x="6208776" y="5245429"/>
-            <a:ext cx="310896" cy="261411"/>
+            <a:off x="6208776" y="4965730"/>
+            <a:ext cx="310896" cy="239896"/>
           </a:xfrm>
           <a:prstGeom prst="rect">
             <a:avLst/>
@@ -31212,8 +31389,8 @@
         </p:nvSpPr>
         <p:spPr>
           <a:xfrm>
-            <a:off x="6565392" y="5245429"/>
-            <a:ext cx="1920240" cy="261411"/>
+            <a:off x="6565392" y="4965730"/>
+            <a:ext cx="1920240" cy="239896"/>
           </a:xfrm>
           <a:prstGeom prst="rect">
             <a:avLst/>
@@ -31251,8 +31428,8 @@
         </p:nvSpPr>
         <p:spPr>
           <a:xfrm>
-            <a:off x="8903742" y="5316010"/>
-            <a:ext cx="432282" cy="120249"/>
+            <a:off x="8903742" y="5030502"/>
+            <a:ext cx="432282" cy="110352"/>
           </a:xfrm>
           <a:prstGeom prst="rect">
             <a:avLst/>
@@ -31271,8 +31448,8 @@
         </p:nvSpPr>
         <p:spPr>
           <a:xfrm>
-            <a:off x="10168128" y="5245429"/>
-            <a:ext cx="1234440" cy="261411"/>
+            <a:off x="10168128" y="4965730"/>
+            <a:ext cx="1234440" cy="239896"/>
           </a:xfrm>
           <a:prstGeom prst="rect">
             <a:avLst/>
@@ -31310,8 +31487,8 @@
         </p:nvSpPr>
         <p:spPr>
           <a:xfrm>
-            <a:off x="6208776" y="5506840"/>
-            <a:ext cx="310896" cy="261411"/>
+            <a:off x="6208776" y="5205625"/>
+            <a:ext cx="310896" cy="239896"/>
           </a:xfrm>
           <a:prstGeom prst="rect">
             <a:avLst/>
@@ -31349,8 +31526,8 @@
         </p:nvSpPr>
         <p:spPr>
           <a:xfrm>
-            <a:off x="6565392" y="5506840"/>
-            <a:ext cx="1920240" cy="261411"/>
+            <a:off x="6565392" y="5205625"/>
+            <a:ext cx="1920240" cy="239896"/>
           </a:xfrm>
           <a:prstGeom prst="rect">
             <a:avLst/>
@@ -31388,8 +31565,8 @@
         </p:nvSpPr>
         <p:spPr>
           <a:xfrm>
-            <a:off x="8884924" y="5577420"/>
-            <a:ext cx="451100" cy="120249"/>
+            <a:off x="8884924" y="5270397"/>
+            <a:ext cx="451100" cy="110352"/>
           </a:xfrm>
           <a:prstGeom prst="rect">
             <a:avLst/>
@@ -31408,8 +31585,8 @@
         </p:nvSpPr>
         <p:spPr>
           <a:xfrm>
-            <a:off x="10168128" y="5506840"/>
-            <a:ext cx="1234440" cy="261411"/>
+            <a:off x="10168128" y="5205625"/>
+            <a:ext cx="1234440" cy="239896"/>
           </a:xfrm>
           <a:prstGeom prst="rect">
             <a:avLst/>
@@ -31447,8 +31624,8 @@
         </p:nvSpPr>
         <p:spPr>
           <a:xfrm>
-            <a:off x="6208776" y="5768250"/>
-            <a:ext cx="310896" cy="261411"/>
+            <a:off x="6208776" y="5445521"/>
+            <a:ext cx="310896" cy="239896"/>
           </a:xfrm>
           <a:prstGeom prst="rect">
             <a:avLst/>
@@ -31486,8 +31663,8 @@
         </p:nvSpPr>
         <p:spPr>
           <a:xfrm>
-            <a:off x="6565392" y="5768250"/>
-            <a:ext cx="1920240" cy="261411"/>
+            <a:off x="6565392" y="5445521"/>
+            <a:ext cx="1920240" cy="239896"/>
           </a:xfrm>
           <a:prstGeom prst="rect">
             <a:avLst/>
@@ -31525,8 +31702,8 @@
         </p:nvSpPr>
         <p:spPr>
           <a:xfrm>
-            <a:off x="8558784" y="5838831"/>
-            <a:ext cx="777240" cy="120249"/>
+            <a:off x="8558784" y="5510293"/>
+            <a:ext cx="777240" cy="110352"/>
           </a:xfrm>
           <a:prstGeom prst="rect">
             <a:avLst/>
@@ -31545,8 +31722,8 @@
         </p:nvSpPr>
         <p:spPr>
           <a:xfrm>
-            <a:off x="10168128" y="5768250"/>
-            <a:ext cx="1234440" cy="261411"/>
+            <a:off x="10168128" y="5445521"/>
+            <a:ext cx="1234440" cy="239896"/>
           </a:xfrm>
           <a:prstGeom prst="rect">
             <a:avLst/>
@@ -31585,7 +31762,7 @@
         <p:spPr>
           <a:xfrm>
             <a:off x="3780130" y="1847088"/>
-            <a:ext cx="10973" cy="4443984"/>
+            <a:ext cx="10973" cy="4078224"/>
           </a:xfrm>
           <a:prstGeom prst="rect">
             <a:avLst/>
@@ -31605,7 +31782,7 @@
         <p:spPr>
           <a:xfrm>
             <a:off x="9330538" y="1847088"/>
-            <a:ext cx="10973" cy="4443984"/>
+            <a:ext cx="10973" cy="4078224"/>
           </a:xfrm>
           <a:prstGeom prst="rect">
             <a:avLst/>
@@ -31625,7 +31802,7 @@
         <p:spPr>
           <a:xfrm>
             <a:off x="6085332" y="1847088"/>
-            <a:ext cx="10973" cy="4443984"/>
+            <a:ext cx="10973" cy="4078224"/>
           </a:xfrm>
           <a:prstGeom prst="rect">
             <a:avLst/>
@@ -31635,6 +31812,65 @@
           </a:solidFill>
           <a:ln/>
         </p:spPr>
+      </p:sp>
+      <p:sp>
+        <p:nvSpPr>
+          <p:cNvPr id="147" name="Shape 144"/>
+          <p:cNvSpPr/>
+          <p:nvPr/>
+        </p:nvSpPr>
+        <p:spPr>
+          <a:xfrm>
+            <a:off x="457200" y="6126480"/>
+            <a:ext cx="11274552" cy="371856"/>
+          </a:xfrm>
+          <a:prstGeom prst="rect">
+            <a:avLst/>
+          </a:prstGeom>
+          <a:solidFill>
+            <a:srgbClr val="E6F6EE"/>
+          </a:solidFill>
+          <a:ln/>
+        </p:spPr>
+      </p:sp>
+      <p:sp>
+        <p:nvSpPr>
+          <p:cNvPr id="148" name="Text 145"/>
+          <p:cNvSpPr txBox="1"/>
+          <p:nvPr/>
+        </p:nvSpPr>
+        <p:spPr>
+          <a:xfrm>
+            <a:off x="658368" y="6144768"/>
+            <a:ext cx="10927080" cy="335280"/>
+          </a:xfrm>
+          <a:prstGeom prst="rect">
+            <a:avLst/>
+          </a:prstGeom>
+          <a:noFill/>
+          <a:ln/>
+        </p:spPr>
+        <p:txBody>
+          <a:bodyPr wrap="square" lIns="0" tIns="0" rIns="0" bIns="0" rtlCol="0" anchor="ctr"/>
+          <a:lstStyle/>
+          <a:p>
+            <a:pPr indent="0" marL="0">
+              <a:buNone/>
+            </a:pPr>
+            <a:r>
+              <a:rPr lang="en-US" sz="1600" b="1" dirty="0">
+                <a:solidFill>
+                  <a:srgbClr val="0B7A4A"/>
+                </a:solidFill>
+                <a:latin typeface="Inter" pitchFamily="34" charset="0"/>
+                <a:ea typeface="Inter" pitchFamily="34" charset="-122"/>
+                <a:cs typeface="Inter" pitchFamily="34" charset="-120"/>
+              </a:rPr>
+              <a:t>23 of 33 stores raised absorption. 10 declined.</a:t>
+            </a:r>
+            <a:endParaRPr lang="en-US" sz="1600" dirty="0"/>
+          </a:p>
+        </p:txBody>
       </p:sp>
     </p:spTree>
   </p:cSld>
@@ -35632,7 +35868,7 @@
         <p:spPr>
           <a:xfrm>
             <a:off x="457200" y="1207008"/>
-            <a:ext cx="11274552" cy="5148072"/>
+            <a:ext cx="11274552" cy="4782312"/>
           </a:xfrm>
           <a:prstGeom prst="rect">
             <a:avLst/>
@@ -35809,7 +36045,7 @@
         <p:spPr>
           <a:xfrm>
             <a:off x="658368" y="1847088"/>
-            <a:ext cx="310896" cy="261411"/>
+            <a:ext cx="310896" cy="239896"/>
           </a:xfrm>
           <a:prstGeom prst="rect">
             <a:avLst/>
@@ -35848,7 +36084,7 @@
         <p:spPr>
           <a:xfrm>
             <a:off x="1014984" y="1847088"/>
-            <a:ext cx="1920240" cy="261411"/>
+            <a:ext cx="1920240" cy="239896"/>
           </a:xfrm>
           <a:prstGeom prst="rect">
             <a:avLst/>
@@ -35886,8 +36122,8 @@
         </p:nvSpPr>
         <p:spPr>
           <a:xfrm>
-            <a:off x="3872946" y="1912441"/>
-            <a:ext cx="827070" cy="130705"/>
+            <a:off x="3872946" y="1907062"/>
+            <a:ext cx="827070" cy="119948"/>
           </a:xfrm>
           <a:prstGeom prst="rect">
             <a:avLst/>
@@ -35907,7 +36143,7 @@
         <p:spPr>
           <a:xfrm>
             <a:off x="4754880" y="1847088"/>
-            <a:ext cx="1143000" cy="261411"/>
+            <a:ext cx="1143000" cy="239896"/>
           </a:xfrm>
           <a:prstGeom prst="rect">
             <a:avLst/>
@@ -35945,8 +36181,8 @@
         </p:nvSpPr>
         <p:spPr>
           <a:xfrm>
-            <a:off x="658368" y="2108499"/>
-            <a:ext cx="310896" cy="261411"/>
+            <a:off x="658368" y="2086984"/>
+            <a:ext cx="310896" cy="239896"/>
           </a:xfrm>
           <a:prstGeom prst="rect">
             <a:avLst/>
@@ -35984,8 +36220,8 @@
         </p:nvSpPr>
         <p:spPr>
           <a:xfrm>
-            <a:off x="1014984" y="2108499"/>
-            <a:ext cx="1920240" cy="261411"/>
+            <a:off x="1014984" y="2086984"/>
+            <a:ext cx="1920240" cy="239896"/>
           </a:xfrm>
           <a:prstGeom prst="rect">
             <a:avLst/>
@@ -36023,8 +36259,8 @@
         </p:nvSpPr>
         <p:spPr>
           <a:xfrm>
-            <a:off x="3872946" y="2173852"/>
-            <a:ext cx="741210" cy="130705"/>
+            <a:off x="3872946" y="2146957"/>
+            <a:ext cx="741210" cy="119948"/>
           </a:xfrm>
           <a:prstGeom prst="rect">
             <a:avLst/>
@@ -36043,8 +36279,8 @@
         </p:nvSpPr>
         <p:spPr>
           <a:xfrm>
-            <a:off x="4754880" y="2108499"/>
-            <a:ext cx="1143000" cy="261411"/>
+            <a:off x="4754880" y="2086984"/>
+            <a:ext cx="1143000" cy="239896"/>
           </a:xfrm>
           <a:prstGeom prst="rect">
             <a:avLst/>
@@ -36082,8 +36318,8 @@
         </p:nvSpPr>
         <p:spPr>
           <a:xfrm>
-            <a:off x="658368" y="2369910"/>
-            <a:ext cx="310896" cy="261411"/>
+            <a:off x="658368" y="2326879"/>
+            <a:ext cx="310896" cy="239896"/>
           </a:xfrm>
           <a:prstGeom prst="rect">
             <a:avLst/>
@@ -36121,8 +36357,8 @@
         </p:nvSpPr>
         <p:spPr>
           <a:xfrm>
-            <a:off x="1014984" y="2369910"/>
-            <a:ext cx="1920240" cy="261411"/>
+            <a:off x="1014984" y="2326879"/>
+            <a:ext cx="1920240" cy="239896"/>
           </a:xfrm>
           <a:prstGeom prst="rect">
             <a:avLst/>
@@ -36160,8 +36396,8 @@
         </p:nvSpPr>
         <p:spPr>
           <a:xfrm>
-            <a:off x="3872946" y="2435262"/>
-            <a:ext cx="733821" cy="130705"/>
+            <a:off x="3872946" y="2386853"/>
+            <a:ext cx="733821" cy="119948"/>
           </a:xfrm>
           <a:prstGeom prst="rect">
             <a:avLst/>
@@ -36180,8 +36416,8 @@
         </p:nvSpPr>
         <p:spPr>
           <a:xfrm>
-            <a:off x="4754880" y="2369910"/>
-            <a:ext cx="1143000" cy="261411"/>
+            <a:off x="4754880" y="2326879"/>
+            <a:ext cx="1143000" cy="239896"/>
           </a:xfrm>
           <a:prstGeom prst="rect">
             <a:avLst/>
@@ -36219,8 +36455,8 @@
         </p:nvSpPr>
         <p:spPr>
           <a:xfrm>
-            <a:off x="658368" y="2631320"/>
-            <a:ext cx="310896" cy="261411"/>
+            <a:off x="658368" y="2566775"/>
+            <a:ext cx="310896" cy="239896"/>
           </a:xfrm>
           <a:prstGeom prst="rect">
             <a:avLst/>
@@ -36258,8 +36494,8 @@
         </p:nvSpPr>
         <p:spPr>
           <a:xfrm>
-            <a:off x="1014984" y="2631320"/>
-            <a:ext cx="1920240" cy="261411"/>
+            <a:off x="1014984" y="2566775"/>
+            <a:ext cx="1920240" cy="239896"/>
           </a:xfrm>
           <a:prstGeom prst="rect">
             <a:avLst/>
@@ -36297,8 +36533,8 @@
         </p:nvSpPr>
         <p:spPr>
           <a:xfrm>
-            <a:off x="3872946" y="2696673"/>
-            <a:ext cx="712087" cy="130705"/>
+            <a:off x="3872946" y="2626748"/>
+            <a:ext cx="712087" cy="119948"/>
           </a:xfrm>
           <a:prstGeom prst="rect">
             <a:avLst/>
@@ -36317,8 +36553,8 @@
         </p:nvSpPr>
         <p:spPr>
           <a:xfrm>
-            <a:off x="4754880" y="2631320"/>
-            <a:ext cx="1143000" cy="261411"/>
+            <a:off x="4754880" y="2566775"/>
+            <a:ext cx="1143000" cy="239896"/>
           </a:xfrm>
           <a:prstGeom prst="rect">
             <a:avLst/>
@@ -36356,8 +36592,8 @@
         </p:nvSpPr>
         <p:spPr>
           <a:xfrm>
-            <a:off x="658368" y="2892731"/>
-            <a:ext cx="310896" cy="261411"/>
+            <a:off x="658368" y="2806670"/>
+            <a:ext cx="310896" cy="239896"/>
           </a:xfrm>
           <a:prstGeom prst="rect">
             <a:avLst/>
@@ -36395,8 +36631,8 @@
         </p:nvSpPr>
         <p:spPr>
           <a:xfrm>
-            <a:off x="1014984" y="2892731"/>
-            <a:ext cx="1920240" cy="261411"/>
+            <a:off x="1014984" y="2806670"/>
+            <a:ext cx="1920240" cy="239896"/>
           </a:xfrm>
           <a:prstGeom prst="rect">
             <a:avLst/>
@@ -36434,8 +36670,8 @@
         </p:nvSpPr>
         <p:spPr>
           <a:xfrm>
-            <a:off x="3872946" y="2958084"/>
-            <a:ext cx="655726" cy="130705"/>
+            <a:off x="3872946" y="2866644"/>
+            <a:ext cx="655726" cy="119948"/>
           </a:xfrm>
           <a:prstGeom prst="rect">
             <a:avLst/>
@@ -36454,8 +36690,8 @@
         </p:nvSpPr>
         <p:spPr>
           <a:xfrm>
-            <a:off x="4754880" y="2892731"/>
-            <a:ext cx="1143000" cy="261411"/>
+            <a:off x="4754880" y="2806670"/>
+            <a:ext cx="1143000" cy="239896"/>
           </a:xfrm>
           <a:prstGeom prst="rect">
             <a:avLst/>
@@ -36493,8 +36729,8 @@
         </p:nvSpPr>
         <p:spPr>
           <a:xfrm>
-            <a:off x="658368" y="3154142"/>
-            <a:ext cx="310896" cy="261411"/>
+            <a:off x="658368" y="3046566"/>
+            <a:ext cx="310896" cy="239896"/>
           </a:xfrm>
           <a:prstGeom prst="rect">
             <a:avLst/>
@@ -36532,8 +36768,8 @@
         </p:nvSpPr>
         <p:spPr>
           <a:xfrm>
-            <a:off x="1014984" y="3154142"/>
-            <a:ext cx="1920240" cy="261411"/>
+            <a:off x="1014984" y="3046566"/>
+            <a:ext cx="1920240" cy="239896"/>
           </a:xfrm>
           <a:prstGeom prst="rect">
             <a:avLst/>
@@ -36571,8 +36807,8 @@
         </p:nvSpPr>
         <p:spPr>
           <a:xfrm>
-            <a:off x="3872946" y="3219495"/>
-            <a:ext cx="566887" cy="130705"/>
+            <a:off x="3872946" y="3106540"/>
+            <a:ext cx="566887" cy="119948"/>
           </a:xfrm>
           <a:prstGeom prst="rect">
             <a:avLst/>
@@ -36591,8 +36827,8 @@
         </p:nvSpPr>
         <p:spPr>
           <a:xfrm>
-            <a:off x="4754880" y="3154142"/>
-            <a:ext cx="1143000" cy="261411"/>
+            <a:off x="4754880" y="3046566"/>
+            <a:ext cx="1143000" cy="239896"/>
           </a:xfrm>
           <a:prstGeom prst="rect">
             <a:avLst/>
@@ -36630,8 +36866,8 @@
         </p:nvSpPr>
         <p:spPr>
           <a:xfrm>
-            <a:off x="658368" y="3415553"/>
-            <a:ext cx="310896" cy="261411"/>
+            <a:off x="658368" y="3286461"/>
+            <a:ext cx="310896" cy="239896"/>
           </a:xfrm>
           <a:prstGeom prst="rect">
             <a:avLst/>
@@ -36669,8 +36905,8 @@
         </p:nvSpPr>
         <p:spPr>
           <a:xfrm>
-            <a:off x="1014984" y="3415553"/>
-            <a:ext cx="1920240" cy="261411"/>
+            <a:off x="1014984" y="3286461"/>
+            <a:ext cx="1920240" cy="239896"/>
           </a:xfrm>
           <a:prstGeom prst="rect">
             <a:avLst/>
@@ -36708,8 +36944,8 @@
         </p:nvSpPr>
         <p:spPr>
           <a:xfrm>
-            <a:off x="3872946" y="3480906"/>
-            <a:ext cx="539181" cy="130705"/>
+            <a:off x="3872946" y="3346435"/>
+            <a:ext cx="539181" cy="119948"/>
           </a:xfrm>
           <a:prstGeom prst="rect">
             <a:avLst/>
@@ -36728,8 +36964,8 @@
         </p:nvSpPr>
         <p:spPr>
           <a:xfrm>
-            <a:off x="4754880" y="3415553"/>
-            <a:ext cx="1143000" cy="261411"/>
+            <a:off x="4754880" y="3286461"/>
+            <a:ext cx="1143000" cy="239896"/>
           </a:xfrm>
           <a:prstGeom prst="rect">
             <a:avLst/>
@@ -36767,8 +37003,8 @@
         </p:nvSpPr>
         <p:spPr>
           <a:xfrm>
-            <a:off x="658368" y="3676964"/>
-            <a:ext cx="310896" cy="261411"/>
+            <a:off x="658368" y="3526357"/>
+            <a:ext cx="310896" cy="239896"/>
           </a:xfrm>
           <a:prstGeom prst="rect">
             <a:avLst/>
@@ -36806,8 +37042,8 @@
         </p:nvSpPr>
         <p:spPr>
           <a:xfrm>
-            <a:off x="1014984" y="3676964"/>
-            <a:ext cx="1920240" cy="261411"/>
+            <a:off x="1014984" y="3526357"/>
+            <a:ext cx="1920240" cy="239896"/>
           </a:xfrm>
           <a:prstGeom prst="rect">
             <a:avLst/>
@@ -36845,8 +37081,8 @@
         </p:nvSpPr>
         <p:spPr>
           <a:xfrm>
-            <a:off x="3872946" y="3742316"/>
-            <a:ext cx="521670" cy="130705"/>
+            <a:off x="3872946" y="3586331"/>
+            <a:ext cx="521670" cy="119948"/>
           </a:xfrm>
           <a:prstGeom prst="rect">
             <a:avLst/>
@@ -36865,8 +37101,8 @@
         </p:nvSpPr>
         <p:spPr>
           <a:xfrm>
-            <a:off x="4754880" y="3676964"/>
-            <a:ext cx="1143000" cy="261411"/>
+            <a:off x="4754880" y="3526357"/>
+            <a:ext cx="1143000" cy="239896"/>
           </a:xfrm>
           <a:prstGeom prst="rect">
             <a:avLst/>
@@ -36904,8 +37140,8 @@
         </p:nvSpPr>
         <p:spPr>
           <a:xfrm>
-            <a:off x="658368" y="3938375"/>
-            <a:ext cx="310896" cy="261411"/>
+            <a:off x="658368" y="3766252"/>
+            <a:ext cx="310896" cy="239896"/>
           </a:xfrm>
           <a:prstGeom prst="rect">
             <a:avLst/>
@@ -36943,8 +37179,8 @@
         </p:nvSpPr>
         <p:spPr>
           <a:xfrm>
-            <a:off x="1014984" y="3938375"/>
-            <a:ext cx="1920240" cy="261411"/>
+            <a:off x="1014984" y="3766252"/>
+            <a:ext cx="1920240" cy="239896"/>
           </a:xfrm>
           <a:prstGeom prst="rect">
             <a:avLst/>
@@ -36982,8 +37218,8 @@
         </p:nvSpPr>
         <p:spPr>
           <a:xfrm>
-            <a:off x="3872946" y="4003727"/>
-            <a:ext cx="516222" cy="130705"/>
+            <a:off x="3872946" y="3826226"/>
+            <a:ext cx="516222" cy="119948"/>
           </a:xfrm>
           <a:prstGeom prst="rect">
             <a:avLst/>
@@ -37002,8 +37238,8 @@
         </p:nvSpPr>
         <p:spPr>
           <a:xfrm>
-            <a:off x="4754880" y="3938375"/>
-            <a:ext cx="1143000" cy="261411"/>
+            <a:off x="4754880" y="3766252"/>
+            <a:ext cx="1143000" cy="239896"/>
           </a:xfrm>
           <a:prstGeom prst="rect">
             <a:avLst/>
@@ -37041,8 +37277,8 @@
         </p:nvSpPr>
         <p:spPr>
           <a:xfrm>
-            <a:off x="658368" y="4199785"/>
-            <a:ext cx="310896" cy="261411"/>
+            <a:off x="658368" y="4006148"/>
+            <a:ext cx="310896" cy="239896"/>
           </a:xfrm>
           <a:prstGeom prst="rect">
             <a:avLst/>
@@ -37080,8 +37316,8 @@
         </p:nvSpPr>
         <p:spPr>
           <a:xfrm>
-            <a:off x="1014984" y="4199785"/>
-            <a:ext cx="1920240" cy="261411"/>
+            <a:off x="1014984" y="4006148"/>
+            <a:ext cx="1920240" cy="239896"/>
           </a:xfrm>
           <a:prstGeom prst="rect">
             <a:avLst/>
@@ -37119,8 +37355,8 @@
         </p:nvSpPr>
         <p:spPr>
           <a:xfrm>
-            <a:off x="3872946" y="4265138"/>
-            <a:ext cx="486582" cy="130705"/>
+            <a:off x="3872946" y="4066122"/>
+            <a:ext cx="486582" cy="119948"/>
           </a:xfrm>
           <a:prstGeom prst="rect">
             <a:avLst/>
@@ -37139,8 +37375,8 @@
         </p:nvSpPr>
         <p:spPr>
           <a:xfrm>
-            <a:off x="4754880" y="4199785"/>
-            <a:ext cx="1143000" cy="261411"/>
+            <a:off x="4754880" y="4006148"/>
+            <a:ext cx="1143000" cy="239896"/>
           </a:xfrm>
           <a:prstGeom prst="rect">
             <a:avLst/>
@@ -37178,8 +37414,8 @@
         </p:nvSpPr>
         <p:spPr>
           <a:xfrm>
-            <a:off x="658368" y="4461196"/>
-            <a:ext cx="310896" cy="261411"/>
+            <a:off x="658368" y="4246043"/>
+            <a:ext cx="310896" cy="239896"/>
           </a:xfrm>
           <a:prstGeom prst="rect">
             <a:avLst/>
@@ -37217,8 +37453,8 @@
         </p:nvSpPr>
         <p:spPr>
           <a:xfrm>
-            <a:off x="1014984" y="4461196"/>
-            <a:ext cx="1920240" cy="261411"/>
+            <a:off x="1014984" y="4246043"/>
+            <a:ext cx="1920240" cy="239896"/>
           </a:xfrm>
           <a:prstGeom prst="rect">
             <a:avLst/>
@@ -37256,8 +37492,8 @@
         </p:nvSpPr>
         <p:spPr>
           <a:xfrm>
-            <a:off x="3872946" y="4526549"/>
-            <a:ext cx="419144" cy="130705"/>
+            <a:off x="3872946" y="4306017"/>
+            <a:ext cx="419144" cy="119948"/>
           </a:xfrm>
           <a:prstGeom prst="rect">
             <a:avLst/>
@@ -37276,8 +37512,8 @@
         </p:nvSpPr>
         <p:spPr>
           <a:xfrm>
-            <a:off x="4754880" y="4461196"/>
-            <a:ext cx="1143000" cy="261411"/>
+            <a:off x="4754880" y="4246043"/>
+            <a:ext cx="1143000" cy="239896"/>
           </a:xfrm>
           <a:prstGeom prst="rect">
             <a:avLst/>
@@ -37315,8 +37551,8 @@
         </p:nvSpPr>
         <p:spPr>
           <a:xfrm>
-            <a:off x="658368" y="4722607"/>
-            <a:ext cx="310896" cy="261411"/>
+            <a:off x="658368" y="4485939"/>
+            <a:ext cx="310896" cy="239896"/>
           </a:xfrm>
           <a:prstGeom prst="rect">
             <a:avLst/>
@@ -37354,8 +37590,8 @@
         </p:nvSpPr>
         <p:spPr>
           <a:xfrm>
-            <a:off x="1014984" y="4722607"/>
-            <a:ext cx="1920240" cy="261411"/>
+            <a:off x="1014984" y="4485939"/>
+            <a:ext cx="1920240" cy="239896"/>
           </a:xfrm>
           <a:prstGeom prst="rect">
             <a:avLst/>
@@ -37393,8 +37629,8 @@
         </p:nvSpPr>
         <p:spPr>
           <a:xfrm>
-            <a:off x="3872946" y="4787960"/>
-            <a:ext cx="413606" cy="130705"/>
+            <a:off x="3872946" y="4545913"/>
+            <a:ext cx="413606" cy="119948"/>
           </a:xfrm>
           <a:prstGeom prst="rect">
             <a:avLst/>
@@ -37413,8 +37649,8 @@
         </p:nvSpPr>
         <p:spPr>
           <a:xfrm>
-            <a:off x="4754880" y="4722607"/>
-            <a:ext cx="1143000" cy="261411"/>
+            <a:off x="4754880" y="4485939"/>
+            <a:ext cx="1143000" cy="239896"/>
           </a:xfrm>
           <a:prstGeom prst="rect">
             <a:avLst/>
@@ -37452,8 +37688,8 @@
         </p:nvSpPr>
         <p:spPr>
           <a:xfrm>
-            <a:off x="658368" y="4984018"/>
-            <a:ext cx="310896" cy="261411"/>
+            <a:off x="658368" y="4725834"/>
+            <a:ext cx="310896" cy="239896"/>
           </a:xfrm>
           <a:prstGeom prst="rect">
             <a:avLst/>
@@ -37491,8 +37727,8 @@
         </p:nvSpPr>
         <p:spPr>
           <a:xfrm>
-            <a:off x="1014984" y="4984018"/>
-            <a:ext cx="1920240" cy="261411"/>
+            <a:off x="1014984" y="4725834"/>
+            <a:ext cx="1920240" cy="239896"/>
           </a:xfrm>
           <a:prstGeom prst="rect">
             <a:avLst/>
@@ -37530,8 +37766,8 @@
         </p:nvSpPr>
         <p:spPr>
           <a:xfrm>
-            <a:off x="3872946" y="5049371"/>
-            <a:ext cx="387517" cy="130705"/>
+            <a:off x="3872946" y="4785808"/>
+            <a:ext cx="387517" cy="119948"/>
           </a:xfrm>
           <a:prstGeom prst="rect">
             <a:avLst/>
@@ -37550,8 +37786,8 @@
         </p:nvSpPr>
         <p:spPr>
           <a:xfrm>
-            <a:off x="4754880" y="4984018"/>
-            <a:ext cx="1143000" cy="261411"/>
+            <a:off x="4754880" y="4725834"/>
+            <a:ext cx="1143000" cy="239896"/>
           </a:xfrm>
           <a:prstGeom prst="rect">
             <a:avLst/>
@@ -37589,8 +37825,8 @@
         </p:nvSpPr>
         <p:spPr>
           <a:xfrm>
-            <a:off x="658368" y="5245429"/>
-            <a:ext cx="310896" cy="261411"/>
+            <a:off x="658368" y="4965730"/>
+            <a:ext cx="310896" cy="239896"/>
           </a:xfrm>
           <a:prstGeom prst="rect">
             <a:avLst/>
@@ -37628,8 +37864,8 @@
         </p:nvSpPr>
         <p:spPr>
           <a:xfrm>
-            <a:off x="1014984" y="5245429"/>
-            <a:ext cx="1920240" cy="261411"/>
+            <a:off x="1014984" y="4965730"/>
+            <a:ext cx="1920240" cy="239896"/>
           </a:xfrm>
           <a:prstGeom prst="rect">
             <a:avLst/>
@@ -37667,8 +37903,8 @@
         </p:nvSpPr>
         <p:spPr>
           <a:xfrm>
-            <a:off x="3872946" y="5310781"/>
-            <a:ext cx="372520" cy="130705"/>
+            <a:off x="3872946" y="5025704"/>
+            <a:ext cx="372520" cy="119948"/>
           </a:xfrm>
           <a:prstGeom prst="rect">
             <a:avLst/>
@@ -37687,8 +37923,8 @@
         </p:nvSpPr>
         <p:spPr>
           <a:xfrm>
-            <a:off x="4754880" y="5245429"/>
-            <a:ext cx="1143000" cy="261411"/>
+            <a:off x="4754880" y="4965730"/>
+            <a:ext cx="1143000" cy="239896"/>
           </a:xfrm>
           <a:prstGeom prst="rect">
             <a:avLst/>
@@ -37726,8 +37962,8 @@
         </p:nvSpPr>
         <p:spPr>
           <a:xfrm>
-            <a:off x="658368" y="5506840"/>
-            <a:ext cx="310896" cy="261411"/>
+            <a:off x="658368" y="5205625"/>
+            <a:ext cx="310896" cy="239896"/>
           </a:xfrm>
           <a:prstGeom prst="rect">
             <a:avLst/>
@@ -37765,8 +38001,8 @@
         </p:nvSpPr>
         <p:spPr>
           <a:xfrm>
-            <a:off x="1014984" y="5506840"/>
-            <a:ext cx="1920240" cy="261411"/>
+            <a:off x="1014984" y="5205625"/>
+            <a:ext cx="1920240" cy="239896"/>
           </a:xfrm>
           <a:prstGeom prst="rect">
             <a:avLst/>
@@ -37804,8 +38040,8 @@
         </p:nvSpPr>
         <p:spPr>
           <a:xfrm>
-            <a:off x="3872946" y="5572192"/>
-            <a:ext cx="370433" cy="130705"/>
+            <a:off x="3872946" y="5265599"/>
+            <a:ext cx="370433" cy="119948"/>
           </a:xfrm>
           <a:prstGeom prst="rect">
             <a:avLst/>
@@ -37824,8 +38060,8 @@
         </p:nvSpPr>
         <p:spPr>
           <a:xfrm>
-            <a:off x="4754880" y="5506840"/>
-            <a:ext cx="1143000" cy="261411"/>
+            <a:off x="4754880" y="5205625"/>
+            <a:ext cx="1143000" cy="239896"/>
           </a:xfrm>
           <a:prstGeom prst="rect">
             <a:avLst/>
@@ -37863,8 +38099,8 @@
         </p:nvSpPr>
         <p:spPr>
           <a:xfrm>
-            <a:off x="658368" y="5768250"/>
-            <a:ext cx="310896" cy="261411"/>
+            <a:off x="658368" y="5445521"/>
+            <a:ext cx="310896" cy="239896"/>
           </a:xfrm>
           <a:prstGeom prst="rect">
             <a:avLst/>
@@ -37902,8 +38138,8 @@
         </p:nvSpPr>
         <p:spPr>
           <a:xfrm>
-            <a:off x="1014984" y="5768250"/>
-            <a:ext cx="1920240" cy="261411"/>
+            <a:off x="1014984" y="5445521"/>
+            <a:ext cx="1920240" cy="239896"/>
           </a:xfrm>
           <a:prstGeom prst="rect">
             <a:avLst/>
@@ -37941,8 +38177,8 @@
         </p:nvSpPr>
         <p:spPr>
           <a:xfrm>
-            <a:off x="3872946" y="5833603"/>
-            <a:ext cx="362889" cy="130705"/>
+            <a:off x="3872946" y="5505495"/>
+            <a:ext cx="362889" cy="119948"/>
           </a:xfrm>
           <a:prstGeom prst="rect">
             <a:avLst/>
@@ -37961,8 +38197,8 @@
         </p:nvSpPr>
         <p:spPr>
           <a:xfrm>
-            <a:off x="4754880" y="5768250"/>
-            <a:ext cx="1143000" cy="261411"/>
+            <a:off x="4754880" y="5445521"/>
+            <a:ext cx="1143000" cy="239896"/>
           </a:xfrm>
           <a:prstGeom prst="rect">
             <a:avLst/>
@@ -38000,8 +38236,8 @@
         </p:nvSpPr>
         <p:spPr>
           <a:xfrm>
-            <a:off x="658368" y="6029661"/>
-            <a:ext cx="310896" cy="261411"/>
+            <a:off x="658368" y="5685416"/>
+            <a:ext cx="310896" cy="239896"/>
           </a:xfrm>
           <a:prstGeom prst="rect">
             <a:avLst/>
@@ -38039,8 +38275,8 @@
         </p:nvSpPr>
         <p:spPr>
           <a:xfrm>
-            <a:off x="1014984" y="6029661"/>
-            <a:ext cx="1920240" cy="261411"/>
+            <a:off x="1014984" y="5685416"/>
+            <a:ext cx="1920240" cy="239896"/>
           </a:xfrm>
           <a:prstGeom prst="rect">
             <a:avLst/>
@@ -38078,8 +38314,8 @@
         </p:nvSpPr>
         <p:spPr>
           <a:xfrm>
-            <a:off x="3872946" y="6095014"/>
-            <a:ext cx="347211" cy="130705"/>
+            <a:off x="3872946" y="5745390"/>
+            <a:ext cx="347211" cy="119948"/>
           </a:xfrm>
           <a:prstGeom prst="rect">
             <a:avLst/>
@@ -38098,8 +38334,8 @@
         </p:nvSpPr>
         <p:spPr>
           <a:xfrm>
-            <a:off x="4754880" y="6029661"/>
-            <a:ext cx="1143000" cy="261411"/>
+            <a:off x="4754880" y="5685416"/>
+            <a:ext cx="1143000" cy="239896"/>
           </a:xfrm>
           <a:prstGeom prst="rect">
             <a:avLst/>
@@ -38138,7 +38374,7 @@
         <p:spPr>
           <a:xfrm>
             <a:off x="6208776" y="1847088"/>
-            <a:ext cx="310896" cy="261411"/>
+            <a:ext cx="310896" cy="239896"/>
           </a:xfrm>
           <a:prstGeom prst="rect">
             <a:avLst/>
@@ -38177,7 +38413,7 @@
         <p:spPr>
           <a:xfrm>
             <a:off x="6565392" y="1847088"/>
-            <a:ext cx="1920240" cy="261411"/>
+            <a:ext cx="1920240" cy="239896"/>
           </a:xfrm>
           <a:prstGeom prst="rect">
             <a:avLst/>
@@ -38215,8 +38451,8 @@
         </p:nvSpPr>
         <p:spPr>
           <a:xfrm>
-            <a:off x="9423354" y="1912441"/>
-            <a:ext cx="307434" cy="130705"/>
+            <a:off x="9423354" y="1907062"/>
+            <a:ext cx="307434" cy="119948"/>
           </a:xfrm>
           <a:prstGeom prst="rect">
             <a:avLst/>
@@ -38236,7 +38472,7 @@
         <p:spPr>
           <a:xfrm>
             <a:off x="10305288" y="1847088"/>
-            <a:ext cx="1143000" cy="261411"/>
+            <a:ext cx="1143000" cy="239896"/>
           </a:xfrm>
           <a:prstGeom prst="rect">
             <a:avLst/>
@@ -38274,8 +38510,8 @@
         </p:nvSpPr>
         <p:spPr>
           <a:xfrm>
-            <a:off x="6208776" y="2108499"/>
-            <a:ext cx="310896" cy="261411"/>
+            <a:off x="6208776" y="2086984"/>
+            <a:ext cx="310896" cy="239896"/>
           </a:xfrm>
           <a:prstGeom prst="rect">
             <a:avLst/>
@@ -38313,8 +38549,8 @@
         </p:nvSpPr>
         <p:spPr>
           <a:xfrm>
-            <a:off x="6565392" y="2108499"/>
-            <a:ext cx="1920240" cy="261411"/>
+            <a:off x="6565392" y="2086984"/>
+            <a:ext cx="1920240" cy="239896"/>
           </a:xfrm>
           <a:prstGeom prst="rect">
             <a:avLst/>
@@ -38352,8 +38588,8 @@
         </p:nvSpPr>
         <p:spPr>
           <a:xfrm>
-            <a:off x="9423354" y="2173852"/>
-            <a:ext cx="299427" cy="130705"/>
+            <a:off x="9423354" y="2146957"/>
+            <a:ext cx="299427" cy="119948"/>
           </a:xfrm>
           <a:prstGeom prst="rect">
             <a:avLst/>
@@ -38372,8 +38608,8 @@
         </p:nvSpPr>
         <p:spPr>
           <a:xfrm>
-            <a:off x="10305288" y="2108499"/>
-            <a:ext cx="1143000" cy="261411"/>
+            <a:off x="10305288" y="2086984"/>
+            <a:ext cx="1143000" cy="239896"/>
           </a:xfrm>
           <a:prstGeom prst="rect">
             <a:avLst/>
@@ -38411,8 +38647,8 @@
         </p:nvSpPr>
         <p:spPr>
           <a:xfrm>
-            <a:off x="6208776" y="2369910"/>
-            <a:ext cx="310896" cy="261411"/>
+            <a:off x="6208776" y="2326879"/>
+            <a:ext cx="310896" cy="239896"/>
           </a:xfrm>
           <a:prstGeom prst="rect">
             <a:avLst/>
@@ -38450,8 +38686,8 @@
         </p:nvSpPr>
         <p:spPr>
           <a:xfrm>
-            <a:off x="6565392" y="2369910"/>
-            <a:ext cx="1920240" cy="261411"/>
+            <a:off x="6565392" y="2326879"/>
+            <a:ext cx="1920240" cy="239896"/>
           </a:xfrm>
           <a:prstGeom prst="rect">
             <a:avLst/>
@@ -38489,8 +38725,8 @@
         </p:nvSpPr>
         <p:spPr>
           <a:xfrm>
-            <a:off x="9423354" y="2435262"/>
-            <a:ext cx="228054" cy="130705"/>
+            <a:off x="9423354" y="2386853"/>
+            <a:ext cx="228054" cy="119948"/>
           </a:xfrm>
           <a:prstGeom prst="rect">
             <a:avLst/>
@@ -38509,8 +38745,8 @@
         </p:nvSpPr>
         <p:spPr>
           <a:xfrm>
-            <a:off x="10305288" y="2369910"/>
-            <a:ext cx="1143000" cy="261411"/>
+            <a:off x="10305288" y="2326879"/>
+            <a:ext cx="1143000" cy="239896"/>
           </a:xfrm>
           <a:prstGeom prst="rect">
             <a:avLst/>
@@ -38548,8 +38784,8 @@
         </p:nvSpPr>
         <p:spPr>
           <a:xfrm>
-            <a:off x="6208776" y="2631320"/>
-            <a:ext cx="310896" cy="261411"/>
+            <a:off x="6208776" y="2566775"/>
+            <a:ext cx="310896" cy="239896"/>
           </a:xfrm>
           <a:prstGeom prst="rect">
             <a:avLst/>
@@ -38587,8 +38823,8 @@
         </p:nvSpPr>
         <p:spPr>
           <a:xfrm>
-            <a:off x="6565392" y="2631320"/>
-            <a:ext cx="1920240" cy="261411"/>
+            <a:off x="6565392" y="2566775"/>
+            <a:ext cx="1920240" cy="239896"/>
           </a:xfrm>
           <a:prstGeom prst="rect">
             <a:avLst/>
@@ -38626,8 +38862,8 @@
         </p:nvSpPr>
         <p:spPr>
           <a:xfrm>
-            <a:off x="9423354" y="2696673"/>
-            <a:ext cx="226811" cy="130705"/>
+            <a:off x="9423354" y="2626748"/>
+            <a:ext cx="226811" cy="119948"/>
           </a:xfrm>
           <a:prstGeom prst="rect">
             <a:avLst/>
@@ -38646,8 +38882,8 @@
         </p:nvSpPr>
         <p:spPr>
           <a:xfrm>
-            <a:off x="10305288" y="2631320"/>
-            <a:ext cx="1143000" cy="261411"/>
+            <a:off x="10305288" y="2566775"/>
+            <a:ext cx="1143000" cy="239896"/>
           </a:xfrm>
           <a:prstGeom prst="rect">
             <a:avLst/>
@@ -38685,8 +38921,8 @@
         </p:nvSpPr>
         <p:spPr>
           <a:xfrm>
-            <a:off x="6208776" y="2892731"/>
-            <a:ext cx="310896" cy="261411"/>
+            <a:off x="6208776" y="2806670"/>
+            <a:ext cx="310896" cy="239896"/>
           </a:xfrm>
           <a:prstGeom prst="rect">
             <a:avLst/>
@@ -38724,8 +38960,8 @@
         </p:nvSpPr>
         <p:spPr>
           <a:xfrm>
-            <a:off x="6565392" y="2892731"/>
-            <a:ext cx="1920240" cy="261411"/>
+            <a:off x="6565392" y="2806670"/>
+            <a:ext cx="1920240" cy="239896"/>
           </a:xfrm>
           <a:prstGeom prst="rect">
             <a:avLst/>
@@ -38763,8 +38999,8 @@
         </p:nvSpPr>
         <p:spPr>
           <a:xfrm>
-            <a:off x="9423354" y="2958084"/>
-            <a:ext cx="150781" cy="130705"/>
+            <a:off x="9423354" y="2866644"/>
+            <a:ext cx="150781" cy="119948"/>
           </a:xfrm>
           <a:prstGeom prst="rect">
             <a:avLst/>
@@ -38783,8 +39019,8 @@
         </p:nvSpPr>
         <p:spPr>
           <a:xfrm>
-            <a:off x="10305288" y="2892731"/>
-            <a:ext cx="1143000" cy="261411"/>
+            <a:off x="10305288" y="2806670"/>
+            <a:ext cx="1143000" cy="239896"/>
           </a:xfrm>
           <a:prstGeom prst="rect">
             <a:avLst/>
@@ -38822,8 +39058,8 @@
         </p:nvSpPr>
         <p:spPr>
           <a:xfrm>
-            <a:off x="6208776" y="3154142"/>
-            <a:ext cx="310896" cy="261411"/>
+            <a:off x="6208776" y="3046566"/>
+            <a:ext cx="310896" cy="239896"/>
           </a:xfrm>
           <a:prstGeom prst="rect">
             <a:avLst/>
@@ -38861,8 +39097,8 @@
         </p:nvSpPr>
         <p:spPr>
           <a:xfrm>
-            <a:off x="6565392" y="3154142"/>
-            <a:ext cx="1920240" cy="261411"/>
+            <a:off x="6565392" y="3046566"/>
+            <a:ext cx="1920240" cy="239896"/>
           </a:xfrm>
           <a:prstGeom prst="rect">
             <a:avLst/>
@@ -38900,8 +39136,8 @@
         </p:nvSpPr>
         <p:spPr>
           <a:xfrm>
-            <a:off x="9423354" y="3219495"/>
-            <a:ext cx="98956" cy="130705"/>
+            <a:off x="9423354" y="3106540"/>
+            <a:ext cx="98956" cy="119948"/>
           </a:xfrm>
           <a:prstGeom prst="rect">
             <a:avLst/>
@@ -38920,8 +39156,8 @@
         </p:nvSpPr>
         <p:spPr>
           <a:xfrm>
-            <a:off x="10305288" y="3154142"/>
-            <a:ext cx="1143000" cy="261411"/>
+            <a:off x="10305288" y="3046566"/>
+            <a:ext cx="1143000" cy="239896"/>
           </a:xfrm>
           <a:prstGeom prst="rect">
             <a:avLst/>
@@ -38959,8 +39195,8 @@
         </p:nvSpPr>
         <p:spPr>
           <a:xfrm>
-            <a:off x="6208776" y="3415553"/>
-            <a:ext cx="310896" cy="261411"/>
+            <a:off x="6208776" y="3286461"/>
+            <a:ext cx="310896" cy="239896"/>
           </a:xfrm>
           <a:prstGeom prst="rect">
             <a:avLst/>
@@ -38998,8 +39234,8 @@
         </p:nvSpPr>
         <p:spPr>
           <a:xfrm>
-            <a:off x="6565392" y="3415553"/>
-            <a:ext cx="1920240" cy="261411"/>
+            <a:off x="6565392" y="3286461"/>
+            <a:ext cx="1920240" cy="239896"/>
           </a:xfrm>
           <a:prstGeom prst="rect">
             <a:avLst/>
@@ -39037,8 +39273,8 @@
         </p:nvSpPr>
         <p:spPr>
           <a:xfrm>
-            <a:off x="9423354" y="3480906"/>
-            <a:ext cx="92745" cy="130705"/>
+            <a:off x="9423354" y="3346435"/>
+            <a:ext cx="92745" cy="119948"/>
           </a:xfrm>
           <a:prstGeom prst="rect">
             <a:avLst/>
@@ -39057,8 +39293,8 @@
         </p:nvSpPr>
         <p:spPr>
           <a:xfrm>
-            <a:off x="10305288" y="3415553"/>
-            <a:ext cx="1143000" cy="261411"/>
+            <a:off x="10305288" y="3286461"/>
+            <a:ext cx="1143000" cy="239896"/>
           </a:xfrm>
           <a:prstGeom prst="rect">
             <a:avLst/>
@@ -39096,8 +39332,8 @@
         </p:nvSpPr>
         <p:spPr>
           <a:xfrm>
-            <a:off x="6208776" y="3676964"/>
-            <a:ext cx="310896" cy="261411"/>
+            <a:off x="6208776" y="3526357"/>
+            <a:ext cx="310896" cy="239896"/>
           </a:xfrm>
           <a:prstGeom prst="rect">
             <a:avLst/>
@@ -39135,8 +39371,8 @@
         </p:nvSpPr>
         <p:spPr>
           <a:xfrm>
-            <a:off x="6565392" y="3676964"/>
-            <a:ext cx="1920240" cy="261411"/>
+            <a:off x="6565392" y="3526357"/>
+            <a:ext cx="1920240" cy="239896"/>
           </a:xfrm>
           <a:prstGeom prst="rect">
             <a:avLst/>
@@ -39174,8 +39410,8 @@
         </p:nvSpPr>
         <p:spPr>
           <a:xfrm>
-            <a:off x="9423354" y="3742316"/>
-            <a:ext cx="72080" cy="130705"/>
+            <a:off x="9423354" y="3586331"/>
+            <a:ext cx="72080" cy="119948"/>
           </a:xfrm>
           <a:prstGeom prst="rect">
             <a:avLst/>
@@ -39194,8 +39430,8 @@
         </p:nvSpPr>
         <p:spPr>
           <a:xfrm>
-            <a:off x="10305288" y="3676964"/>
-            <a:ext cx="1143000" cy="261411"/>
+            <a:off x="10305288" y="3526357"/>
+            <a:ext cx="1143000" cy="239896"/>
           </a:xfrm>
           <a:prstGeom prst="rect">
             <a:avLst/>
@@ -39233,8 +39469,8 @@
         </p:nvSpPr>
         <p:spPr>
           <a:xfrm>
-            <a:off x="6208776" y="3938375"/>
-            <a:ext cx="310896" cy="261411"/>
+            <a:off x="6208776" y="3766252"/>
+            <a:ext cx="310896" cy="239896"/>
           </a:xfrm>
           <a:prstGeom prst="rect">
             <a:avLst/>
@@ -39272,8 +39508,8 @@
         </p:nvSpPr>
         <p:spPr>
           <a:xfrm>
-            <a:off x="6565392" y="3938375"/>
-            <a:ext cx="1920240" cy="261411"/>
+            <a:off x="6565392" y="3766252"/>
+            <a:ext cx="1920240" cy="239896"/>
           </a:xfrm>
           <a:prstGeom prst="rect">
             <a:avLst/>
@@ -39311,8 +39547,8 @@
         </p:nvSpPr>
         <p:spPr>
           <a:xfrm>
-            <a:off x="9423354" y="4003727"/>
-            <a:ext cx="68131" cy="130705"/>
+            <a:off x="9423354" y="3826226"/>
+            <a:ext cx="68131" cy="119948"/>
           </a:xfrm>
           <a:prstGeom prst="rect">
             <a:avLst/>
@@ -39331,8 +39567,8 @@
         </p:nvSpPr>
         <p:spPr>
           <a:xfrm>
-            <a:off x="10305288" y="3938375"/>
-            <a:ext cx="1143000" cy="261411"/>
+            <a:off x="10305288" y="3766252"/>
+            <a:ext cx="1143000" cy="239896"/>
           </a:xfrm>
           <a:prstGeom prst="rect">
             <a:avLst/>
@@ -39370,8 +39606,8 @@
         </p:nvSpPr>
         <p:spPr>
           <a:xfrm>
-            <a:off x="6208776" y="4199785"/>
-            <a:ext cx="310896" cy="261411"/>
+            <a:off x="6208776" y="4006148"/>
+            <a:ext cx="310896" cy="239896"/>
           </a:xfrm>
           <a:prstGeom prst="rect">
             <a:avLst/>
@@ -39409,8 +39645,8 @@
         </p:nvSpPr>
         <p:spPr>
           <a:xfrm>
-            <a:off x="6565392" y="4199785"/>
-            <a:ext cx="1920240" cy="261411"/>
+            <a:off x="6565392" y="4006148"/>
+            <a:ext cx="1920240" cy="239896"/>
           </a:xfrm>
           <a:prstGeom prst="rect">
             <a:avLst/>
@@ -39448,8 +39684,8 @@
         </p:nvSpPr>
         <p:spPr>
           <a:xfrm>
-            <a:off x="9362469" y="4265138"/>
-            <a:ext cx="60885" cy="130705"/>
+            <a:off x="9362469" y="4066122"/>
+            <a:ext cx="60885" cy="119948"/>
           </a:xfrm>
           <a:prstGeom prst="rect">
             <a:avLst/>
@@ -39468,8 +39704,8 @@
         </p:nvSpPr>
         <p:spPr>
           <a:xfrm>
-            <a:off x="10305288" y="4199785"/>
-            <a:ext cx="1143000" cy="261411"/>
+            <a:off x="10305288" y="4006148"/>
+            <a:ext cx="1143000" cy="239896"/>
           </a:xfrm>
           <a:prstGeom prst="rect">
             <a:avLst/>
@@ -39507,8 +39743,8 @@
         </p:nvSpPr>
         <p:spPr>
           <a:xfrm>
-            <a:off x="6208776" y="4461196"/>
-            <a:ext cx="310896" cy="261411"/>
+            <a:off x="6208776" y="4246043"/>
+            <a:ext cx="310896" cy="239896"/>
           </a:xfrm>
           <a:prstGeom prst="rect">
             <a:avLst/>
@@ -39546,8 +39782,8 @@
         </p:nvSpPr>
         <p:spPr>
           <a:xfrm>
-            <a:off x="6565392" y="4461196"/>
-            <a:ext cx="1920240" cy="261411"/>
+            <a:off x="6565392" y="4246043"/>
+            <a:ext cx="1920240" cy="239896"/>
           </a:xfrm>
           <a:prstGeom prst="rect">
             <a:avLst/>
@@ -39585,8 +39821,8 @@
         </p:nvSpPr>
         <p:spPr>
           <a:xfrm>
-            <a:off x="9301150" y="4526549"/>
-            <a:ext cx="122204" cy="130705"/>
+            <a:off x="9301150" y="4306017"/>
+            <a:ext cx="122204" cy="119948"/>
           </a:xfrm>
           <a:prstGeom prst="rect">
             <a:avLst/>
@@ -39605,8 +39841,8 @@
         </p:nvSpPr>
         <p:spPr>
           <a:xfrm>
-            <a:off x="10305288" y="4461196"/>
-            <a:ext cx="1143000" cy="261411"/>
+            <a:off x="10305288" y="4246043"/>
+            <a:ext cx="1143000" cy="239896"/>
           </a:xfrm>
           <a:prstGeom prst="rect">
             <a:avLst/>
@@ -39644,8 +39880,8 @@
         </p:nvSpPr>
         <p:spPr>
           <a:xfrm>
-            <a:off x="6208776" y="4722607"/>
-            <a:ext cx="310896" cy="261411"/>
+            <a:off x="6208776" y="4485939"/>
+            <a:ext cx="310896" cy="239896"/>
           </a:xfrm>
           <a:prstGeom prst="rect">
             <a:avLst/>
@@ -39683,8 +39919,8 @@
         </p:nvSpPr>
         <p:spPr>
           <a:xfrm>
-            <a:off x="6565392" y="4722607"/>
-            <a:ext cx="1920240" cy="261411"/>
+            <a:off x="6565392" y="4485939"/>
+            <a:ext cx="1920240" cy="239896"/>
           </a:xfrm>
           <a:prstGeom prst="rect">
             <a:avLst/>
@@ -39722,8 +39958,8 @@
         </p:nvSpPr>
         <p:spPr>
           <a:xfrm>
-            <a:off x="9157477" y="4787960"/>
-            <a:ext cx="265877" cy="130705"/>
+            <a:off x="9157477" y="4545913"/>
+            <a:ext cx="265877" cy="119948"/>
           </a:xfrm>
           <a:prstGeom prst="rect">
             <a:avLst/>
@@ -39742,8 +39978,8 @@
         </p:nvSpPr>
         <p:spPr>
           <a:xfrm>
-            <a:off x="10305288" y="4722607"/>
-            <a:ext cx="1143000" cy="261411"/>
+            <a:off x="10305288" y="4485939"/>
+            <a:ext cx="1143000" cy="239896"/>
           </a:xfrm>
           <a:prstGeom prst="rect">
             <a:avLst/>
@@ -39781,8 +40017,8 @@
         </p:nvSpPr>
         <p:spPr>
           <a:xfrm>
-            <a:off x="6208776" y="4984018"/>
-            <a:ext cx="310896" cy="261411"/>
+            <a:off x="6208776" y="4725834"/>
+            <a:ext cx="310896" cy="239896"/>
           </a:xfrm>
           <a:prstGeom prst="rect">
             <a:avLst/>
@@ -39820,8 +40056,8 @@
         </p:nvSpPr>
         <p:spPr>
           <a:xfrm>
-            <a:off x="6565392" y="4984018"/>
-            <a:ext cx="1920240" cy="261411"/>
+            <a:off x="6565392" y="4725834"/>
+            <a:ext cx="1920240" cy="239896"/>
           </a:xfrm>
           <a:prstGeom prst="rect">
             <a:avLst/>
@@ -39859,8 +40095,8 @@
         </p:nvSpPr>
         <p:spPr>
           <a:xfrm>
-            <a:off x="9147151" y="5049371"/>
-            <a:ext cx="276203" cy="130705"/>
+            <a:off x="9147151" y="4785808"/>
+            <a:ext cx="276203" cy="119948"/>
           </a:xfrm>
           <a:prstGeom prst="rect">
             <a:avLst/>
@@ -39879,8 +40115,8 @@
         </p:nvSpPr>
         <p:spPr>
           <a:xfrm>
-            <a:off x="10305288" y="4984018"/>
-            <a:ext cx="1143000" cy="261411"/>
+            <a:off x="10305288" y="4725834"/>
+            <a:ext cx="1143000" cy="239896"/>
           </a:xfrm>
           <a:prstGeom prst="rect">
             <a:avLst/>
@@ -39918,8 +40154,8 @@
         </p:nvSpPr>
         <p:spPr>
           <a:xfrm>
-            <a:off x="6208776" y="5245429"/>
-            <a:ext cx="310896" cy="261411"/>
+            <a:off x="6208776" y="4965730"/>
+            <a:ext cx="310896" cy="239896"/>
           </a:xfrm>
           <a:prstGeom prst="rect">
             <a:avLst/>
@@ -39957,8 +40193,8 @@
         </p:nvSpPr>
         <p:spPr>
           <a:xfrm>
-            <a:off x="6565392" y="5245429"/>
-            <a:ext cx="1920240" cy="261411"/>
+            <a:off x="6565392" y="4965730"/>
+            <a:ext cx="1920240" cy="239896"/>
           </a:xfrm>
           <a:prstGeom prst="rect">
             <a:avLst/>
@@ -39996,8 +40232,8 @@
         </p:nvSpPr>
         <p:spPr>
           <a:xfrm>
-            <a:off x="9054444" y="5310781"/>
-            <a:ext cx="368910" cy="130705"/>
+            <a:off x="9054444" y="5025704"/>
+            <a:ext cx="368910" cy="119948"/>
           </a:xfrm>
           <a:prstGeom prst="rect">
             <a:avLst/>
@@ -40016,8 +40252,8 @@
         </p:nvSpPr>
         <p:spPr>
           <a:xfrm>
-            <a:off x="10305288" y="5245429"/>
-            <a:ext cx="1143000" cy="261411"/>
+            <a:off x="10305288" y="4965730"/>
+            <a:ext cx="1143000" cy="239896"/>
           </a:xfrm>
           <a:prstGeom prst="rect">
             <a:avLst/>
@@ -40055,8 +40291,8 @@
         </p:nvSpPr>
         <p:spPr>
           <a:xfrm>
-            <a:off x="6208776" y="5506840"/>
-            <a:ext cx="310896" cy="261411"/>
+            <a:off x="6208776" y="5205625"/>
+            <a:ext cx="310896" cy="239896"/>
           </a:xfrm>
           <a:prstGeom prst="rect">
             <a:avLst/>
@@ -40094,8 +40330,8 @@
         </p:nvSpPr>
         <p:spPr>
           <a:xfrm>
-            <a:off x="6565392" y="5506840"/>
-            <a:ext cx="1920240" cy="261411"/>
+            <a:off x="6565392" y="5205625"/>
+            <a:ext cx="1920240" cy="239896"/>
           </a:xfrm>
           <a:prstGeom prst="rect">
             <a:avLst/>
@@ -40133,8 +40369,8 @@
         </p:nvSpPr>
         <p:spPr>
           <a:xfrm>
-            <a:off x="8939232" y="5572192"/>
-            <a:ext cx="484122" cy="130705"/>
+            <a:off x="8939232" y="5265599"/>
+            <a:ext cx="484122" cy="119948"/>
           </a:xfrm>
           <a:prstGeom prst="rect">
             <a:avLst/>
@@ -40153,8 +40389,8 @@
         </p:nvSpPr>
         <p:spPr>
           <a:xfrm>
-            <a:off x="10305288" y="5506840"/>
-            <a:ext cx="1143000" cy="261411"/>
+            <a:off x="10305288" y="5205625"/>
+            <a:ext cx="1143000" cy="239896"/>
           </a:xfrm>
           <a:prstGeom prst="rect">
             <a:avLst/>
@@ -40192,8 +40428,8 @@
         </p:nvSpPr>
         <p:spPr>
           <a:xfrm>
-            <a:off x="6208776" y="5768250"/>
-            <a:ext cx="310896" cy="261411"/>
+            <a:off x="6208776" y="5445521"/>
+            <a:ext cx="310896" cy="239896"/>
           </a:xfrm>
           <a:prstGeom prst="rect">
             <a:avLst/>
@@ -40231,8 +40467,8 @@
         </p:nvSpPr>
         <p:spPr>
           <a:xfrm>
-            <a:off x="6565392" y="5768250"/>
-            <a:ext cx="1920240" cy="261411"/>
+            <a:off x="6565392" y="5445521"/>
+            <a:ext cx="1920240" cy="239896"/>
           </a:xfrm>
           <a:prstGeom prst="rect">
             <a:avLst/>
@@ -40270,8 +40506,8 @@
         </p:nvSpPr>
         <p:spPr>
           <a:xfrm>
-            <a:off x="8691149" y="5833603"/>
-            <a:ext cx="732205" cy="130705"/>
+            <a:off x="8691149" y="5505495"/>
+            <a:ext cx="732205" cy="119948"/>
           </a:xfrm>
           <a:prstGeom prst="rect">
             <a:avLst/>
@@ -40290,8 +40526,8 @@
         </p:nvSpPr>
         <p:spPr>
           <a:xfrm>
-            <a:off x="10305288" y="5768250"/>
-            <a:ext cx="1143000" cy="261411"/>
+            <a:off x="10305288" y="5445521"/>
+            <a:ext cx="1143000" cy="239896"/>
           </a:xfrm>
           <a:prstGeom prst="rect">
             <a:avLst/>
@@ -40330,7 +40566,7 @@
         <p:spPr>
           <a:xfrm>
             <a:off x="3868374" y="1847088"/>
-            <a:ext cx="9144" cy="4443984"/>
+            <a:ext cx="9144" cy="4078224"/>
           </a:xfrm>
           <a:prstGeom prst="rect">
             <a:avLst/>
@@ -40350,7 +40586,7 @@
         <p:spPr>
           <a:xfrm>
             <a:off x="4285058" y="1847088"/>
-            <a:ext cx="14630" cy="4443984"/>
+            <a:ext cx="14630" cy="4078224"/>
           </a:xfrm>
           <a:prstGeom prst="rect">
             <a:avLst/>
@@ -40370,7 +40606,7 @@
         <p:spPr>
           <a:xfrm>
             <a:off x="9418782" y="1847088"/>
-            <a:ext cx="9144" cy="4443984"/>
+            <a:ext cx="9144" cy="4078224"/>
           </a:xfrm>
           <a:prstGeom prst="rect">
             <a:avLst/>
@@ -40390,7 +40626,7 @@
         <p:spPr>
           <a:xfrm>
             <a:off x="9835466" y="1847088"/>
-            <a:ext cx="14630" cy="4443984"/>
+            <a:ext cx="14630" cy="4078224"/>
           </a:xfrm>
           <a:prstGeom prst="rect">
             <a:avLst/>
@@ -40410,7 +40646,7 @@
         <p:spPr>
           <a:xfrm>
             <a:off x="6085332" y="1847088"/>
-            <a:ext cx="10973" cy="4443984"/>
+            <a:ext cx="10973" cy="4078224"/>
           </a:xfrm>
           <a:prstGeom prst="rect">
             <a:avLst/>
@@ -40420,6 +40656,65 @@
           </a:solidFill>
           <a:ln/>
         </p:spPr>
+      </p:sp>
+      <p:sp>
+        <p:nvSpPr>
+          <p:cNvPr id="149" name="Shape 146"/>
+          <p:cNvSpPr/>
+          <p:nvPr/>
+        </p:nvSpPr>
+        <p:spPr>
+          <a:xfrm>
+            <a:off x="457200" y="6126480"/>
+            <a:ext cx="11274552" cy="371856"/>
+          </a:xfrm>
+          <a:prstGeom prst="rect">
+            <a:avLst/>
+          </a:prstGeom>
+          <a:solidFill>
+            <a:srgbClr val="EDF4FA"/>
+          </a:solidFill>
+          <a:ln/>
+        </p:spPr>
+      </p:sp>
+      <p:sp>
+        <p:nvSpPr>
+          <p:cNvPr id="150" name="Text 147"/>
+          <p:cNvSpPr txBox="1"/>
+          <p:nvPr/>
+        </p:nvSpPr>
+        <p:spPr>
+          <a:xfrm>
+            <a:off x="658368" y="6144768"/>
+            <a:ext cx="10927080" cy="335280"/>
+          </a:xfrm>
+          <a:prstGeom prst="rect">
+            <a:avLst/>
+          </a:prstGeom>
+          <a:noFill/>
+          <a:ln/>
+        </p:spPr>
+        <p:txBody>
+          <a:bodyPr wrap="square" lIns="0" tIns="0" rIns="0" bIns="0" rtlCol="0" anchor="ctr"/>
+          <a:lstStyle/>
+          <a:p>
+            <a:pPr indent="0" marL="0">
+              <a:buNone/>
+            </a:pPr>
+            <a:r>
+              <a:rPr lang="en-US" sz="1600" b="1" dirty="0">
+                <a:solidFill>
+                  <a:srgbClr val="0B2C4A"/>
+                </a:solidFill>
+                <a:latin typeface="Inter" pitchFamily="34" charset="0"/>
+                <a:ea typeface="Inter" pitchFamily="34" charset="-122"/>
+                <a:cs typeface="Inter" pitchFamily="34" charset="-120"/>
+              </a:rPr>
+              <a:t>10 of 33 stores at or above the 21.8% group.</a:t>
+            </a:r>
+            <a:endParaRPr lang="en-US" sz="1600" dirty="0"/>
+          </a:p>
+        </p:txBody>
       </p:sp>
     </p:spTree>
   </p:cSld>
@@ -40560,7 +40855,7 @@
         <p:spPr>
           <a:xfrm>
             <a:off x="457200" y="1207008"/>
-            <a:ext cx="11274552" cy="5148072"/>
+            <a:ext cx="11274552" cy="4782312"/>
           </a:xfrm>
           <a:prstGeom prst="rect">
             <a:avLst/>
@@ -40737,7 +41032,7 @@
         <p:spPr>
           <a:xfrm>
             <a:off x="658368" y="1847088"/>
-            <a:ext cx="310896" cy="261411"/>
+            <a:ext cx="310896" cy="239896"/>
           </a:xfrm>
           <a:prstGeom prst="rect">
             <a:avLst/>
@@ -40776,7 +41071,7 @@
         <p:spPr>
           <a:xfrm>
             <a:off x="1014984" y="1847088"/>
-            <a:ext cx="1920240" cy="261411"/>
+            <a:ext cx="1920240" cy="239896"/>
           </a:xfrm>
           <a:prstGeom prst="rect">
             <a:avLst/>
@@ -40814,8 +41109,8 @@
         </p:nvSpPr>
         <p:spPr>
           <a:xfrm>
-            <a:off x="3785616" y="1917669"/>
-            <a:ext cx="777240" cy="120249"/>
+            <a:off x="3785616" y="1911860"/>
+            <a:ext cx="777240" cy="110352"/>
           </a:xfrm>
           <a:prstGeom prst="rect">
             <a:avLst/>
@@ -40835,7 +41130,7 @@
         <p:spPr>
           <a:xfrm>
             <a:off x="4617720" y="1847088"/>
-            <a:ext cx="1234440" cy="261411"/>
+            <a:ext cx="1234440" cy="239896"/>
           </a:xfrm>
           <a:prstGeom prst="rect">
             <a:avLst/>
@@ -40873,8 +41168,8 @@
         </p:nvSpPr>
         <p:spPr>
           <a:xfrm>
-            <a:off x="658368" y="2108499"/>
-            <a:ext cx="310896" cy="261411"/>
+            <a:off x="658368" y="2086984"/>
+            <a:ext cx="310896" cy="239896"/>
           </a:xfrm>
           <a:prstGeom prst="rect">
             <a:avLst/>
@@ -40912,8 +41207,8 @@
         </p:nvSpPr>
         <p:spPr>
           <a:xfrm>
-            <a:off x="1014984" y="2108499"/>
-            <a:ext cx="1920240" cy="261411"/>
+            <a:off x="1014984" y="2086984"/>
+            <a:ext cx="1920240" cy="239896"/>
           </a:xfrm>
           <a:prstGeom prst="rect">
             <a:avLst/>
@@ -40951,8 +41246,8 @@
         </p:nvSpPr>
         <p:spPr>
           <a:xfrm>
-            <a:off x="3785616" y="2179080"/>
-            <a:ext cx="522301" cy="120249"/>
+            <a:off x="3785616" y="2151755"/>
+            <a:ext cx="522301" cy="110352"/>
           </a:xfrm>
           <a:prstGeom prst="rect">
             <a:avLst/>
@@ -40971,8 +41266,8 @@
         </p:nvSpPr>
         <p:spPr>
           <a:xfrm>
-            <a:off x="4617720" y="2108499"/>
-            <a:ext cx="1234440" cy="261411"/>
+            <a:off x="4617720" y="2086984"/>
+            <a:ext cx="1234440" cy="239896"/>
           </a:xfrm>
           <a:prstGeom prst="rect">
             <a:avLst/>
@@ -41010,8 +41305,8 @@
         </p:nvSpPr>
         <p:spPr>
           <a:xfrm>
-            <a:off x="658368" y="2369910"/>
-            <a:ext cx="310896" cy="261411"/>
+            <a:off x="658368" y="2326879"/>
+            <a:ext cx="310896" cy="239896"/>
           </a:xfrm>
           <a:prstGeom prst="rect">
             <a:avLst/>
@@ -41049,8 +41344,8 @@
         </p:nvSpPr>
         <p:spPr>
           <a:xfrm>
-            <a:off x="1014984" y="2369910"/>
-            <a:ext cx="1920240" cy="261411"/>
+            <a:off x="1014984" y="2326879"/>
+            <a:ext cx="1920240" cy="239896"/>
           </a:xfrm>
           <a:prstGeom prst="rect">
             <a:avLst/>
@@ -41088,8 +41383,8 @@
         </p:nvSpPr>
         <p:spPr>
           <a:xfrm>
-            <a:off x="3785616" y="2440491"/>
-            <a:ext cx="466019" cy="120249"/>
+            <a:off x="3785616" y="2391651"/>
+            <a:ext cx="466019" cy="110352"/>
           </a:xfrm>
           <a:prstGeom prst="rect">
             <a:avLst/>
@@ -41108,8 +41403,8 @@
         </p:nvSpPr>
         <p:spPr>
           <a:xfrm>
-            <a:off x="4617720" y="2369910"/>
-            <a:ext cx="1234440" cy="261411"/>
+            <a:off x="4617720" y="2326879"/>
+            <a:ext cx="1234440" cy="239896"/>
           </a:xfrm>
           <a:prstGeom prst="rect">
             <a:avLst/>
@@ -41147,8 +41442,8 @@
         </p:nvSpPr>
         <p:spPr>
           <a:xfrm>
-            <a:off x="658368" y="2631320"/>
-            <a:ext cx="310896" cy="261411"/>
+            <a:off x="658368" y="2566775"/>
+            <a:ext cx="310896" cy="239896"/>
           </a:xfrm>
           <a:prstGeom prst="rect">
             <a:avLst/>
@@ -41186,8 +41481,8 @@
         </p:nvSpPr>
         <p:spPr>
           <a:xfrm>
-            <a:off x="1014984" y="2631320"/>
-            <a:ext cx="1920240" cy="261411"/>
+            <a:off x="1014984" y="2566775"/>
+            <a:ext cx="1920240" cy="239896"/>
           </a:xfrm>
           <a:prstGeom prst="rect">
             <a:avLst/>
@@ -41225,8 +41520,8 @@
         </p:nvSpPr>
         <p:spPr>
           <a:xfrm>
-            <a:off x="3785616" y="2701901"/>
-            <a:ext cx="318357" cy="120249"/>
+            <a:off x="3785616" y="2631546"/>
+            <a:ext cx="318357" cy="110352"/>
           </a:xfrm>
           <a:prstGeom prst="rect">
             <a:avLst/>
@@ -41245,8 +41540,8 @@
         </p:nvSpPr>
         <p:spPr>
           <a:xfrm>
-            <a:off x="4617720" y="2631320"/>
-            <a:ext cx="1234440" cy="261411"/>
+            <a:off x="4617720" y="2566775"/>
+            <a:ext cx="1234440" cy="239896"/>
           </a:xfrm>
           <a:prstGeom prst="rect">
             <a:avLst/>
@@ -41284,8 +41579,8 @@
         </p:nvSpPr>
         <p:spPr>
           <a:xfrm>
-            <a:off x="658368" y="2892731"/>
-            <a:ext cx="310896" cy="261411"/>
+            <a:off x="658368" y="2806670"/>
+            <a:ext cx="310896" cy="239896"/>
           </a:xfrm>
           <a:prstGeom prst="rect">
             <a:avLst/>
@@ -41323,8 +41618,8 @@
         </p:nvSpPr>
         <p:spPr>
           <a:xfrm>
-            <a:off x="1014984" y="2892731"/>
-            <a:ext cx="1920240" cy="261411"/>
+            <a:off x="1014984" y="2806670"/>
+            <a:ext cx="1920240" cy="239896"/>
           </a:xfrm>
           <a:prstGeom prst="rect">
             <a:avLst/>
@@ -41362,8 +41657,8 @@
         </p:nvSpPr>
         <p:spPr>
           <a:xfrm>
-            <a:off x="3785616" y="2963312"/>
-            <a:ext cx="277139" cy="120249"/>
+            <a:off x="3785616" y="2871442"/>
+            <a:ext cx="277139" cy="110352"/>
           </a:xfrm>
           <a:prstGeom prst="rect">
             <a:avLst/>
@@ -41382,8 +41677,8 @@
         </p:nvSpPr>
         <p:spPr>
           <a:xfrm>
-            <a:off x="4617720" y="2892731"/>
-            <a:ext cx="1234440" cy="261411"/>
+            <a:off x="4617720" y="2806670"/>
+            <a:ext cx="1234440" cy="239896"/>
           </a:xfrm>
           <a:prstGeom prst="rect">
             <a:avLst/>
@@ -41421,8 +41716,8 @@
         </p:nvSpPr>
         <p:spPr>
           <a:xfrm>
-            <a:off x="658368" y="3154142"/>
-            <a:ext cx="310896" cy="261411"/>
+            <a:off x="658368" y="3046566"/>
+            <a:ext cx="310896" cy="239896"/>
           </a:xfrm>
           <a:prstGeom prst="rect">
             <a:avLst/>
@@ -41460,8 +41755,8 @@
         </p:nvSpPr>
         <p:spPr>
           <a:xfrm>
-            <a:off x="1014984" y="3154142"/>
-            <a:ext cx="1920240" cy="261411"/>
+            <a:off x="1014984" y="3046566"/>
+            <a:ext cx="1920240" cy="239896"/>
           </a:xfrm>
           <a:prstGeom prst="rect">
             <a:avLst/>
@@ -41499,8 +41794,8 @@
         </p:nvSpPr>
         <p:spPr>
           <a:xfrm>
-            <a:off x="3785616" y="3224723"/>
-            <a:ext cx="194030" cy="120249"/>
+            <a:off x="3785616" y="3111337"/>
+            <a:ext cx="194030" cy="110352"/>
           </a:xfrm>
           <a:prstGeom prst="rect">
             <a:avLst/>
@@ -41519,8 +41814,8 @@
         </p:nvSpPr>
         <p:spPr>
           <a:xfrm>
-            <a:off x="4617720" y="3154142"/>
-            <a:ext cx="1234440" cy="261411"/>
+            <a:off x="4617720" y="3046566"/>
+            <a:ext cx="1234440" cy="239896"/>
           </a:xfrm>
           <a:prstGeom prst="rect">
             <a:avLst/>
@@ -41558,8 +41853,8 @@
         </p:nvSpPr>
         <p:spPr>
           <a:xfrm>
-            <a:off x="658368" y="3415553"/>
-            <a:ext cx="310896" cy="261411"/>
+            <a:off x="658368" y="3286461"/>
+            <a:ext cx="310896" cy="239896"/>
           </a:xfrm>
           <a:prstGeom prst="rect">
             <a:avLst/>
@@ -41597,8 +41892,8 @@
         </p:nvSpPr>
         <p:spPr>
           <a:xfrm>
-            <a:off x="1014984" y="3415553"/>
-            <a:ext cx="1920240" cy="261411"/>
+            <a:off x="1014984" y="3286461"/>
+            <a:ext cx="1920240" cy="239896"/>
           </a:xfrm>
           <a:prstGeom prst="rect">
             <a:avLst/>
@@ -41636,8 +41931,8 @@
         </p:nvSpPr>
         <p:spPr>
           <a:xfrm>
-            <a:off x="3785616" y="3486134"/>
-            <a:ext cx="183450" cy="120249"/>
+            <a:off x="3785616" y="3351233"/>
+            <a:ext cx="183450" cy="110352"/>
           </a:xfrm>
           <a:prstGeom prst="rect">
             <a:avLst/>
@@ -41656,8 +41951,8 @@
         </p:nvSpPr>
         <p:spPr>
           <a:xfrm>
-            <a:off x="4617720" y="3415553"/>
-            <a:ext cx="1234440" cy="261411"/>
+            <a:off x="4617720" y="3286461"/>
+            <a:ext cx="1234440" cy="239896"/>
           </a:xfrm>
           <a:prstGeom prst="rect">
             <a:avLst/>
@@ -41695,8 +41990,8 @@
         </p:nvSpPr>
         <p:spPr>
           <a:xfrm>
-            <a:off x="658368" y="3676964"/>
-            <a:ext cx="310896" cy="261411"/>
+            <a:off x="658368" y="3526357"/>
+            <a:ext cx="310896" cy="239896"/>
           </a:xfrm>
           <a:prstGeom prst="rect">
             <a:avLst/>
@@ -41734,8 +42029,8 @@
         </p:nvSpPr>
         <p:spPr>
           <a:xfrm>
-            <a:off x="1014984" y="3676964"/>
-            <a:ext cx="1920240" cy="261411"/>
+            <a:off x="1014984" y="3526357"/>
+            <a:ext cx="1920240" cy="239896"/>
           </a:xfrm>
           <a:prstGeom prst="rect">
             <a:avLst/>
@@ -41773,8 +42068,8 @@
         </p:nvSpPr>
         <p:spPr>
           <a:xfrm>
-            <a:off x="3785616" y="3747545"/>
-            <a:ext cx="169078" cy="120249"/>
+            <a:off x="3785616" y="3591128"/>
+            <a:ext cx="169078" cy="110352"/>
           </a:xfrm>
           <a:prstGeom prst="rect">
             <a:avLst/>
@@ -41793,8 +42088,8 @@
         </p:nvSpPr>
         <p:spPr>
           <a:xfrm>
-            <a:off x="4617720" y="3676964"/>
-            <a:ext cx="1234440" cy="261411"/>
+            <a:off x="4617720" y="3526357"/>
+            <a:ext cx="1234440" cy="239896"/>
           </a:xfrm>
           <a:prstGeom prst="rect">
             <a:avLst/>
@@ -41832,8 +42127,8 @@
         </p:nvSpPr>
         <p:spPr>
           <a:xfrm>
-            <a:off x="658368" y="3938375"/>
-            <a:ext cx="310896" cy="261411"/>
+            <a:off x="658368" y="3766252"/>
+            <a:ext cx="310896" cy="239896"/>
           </a:xfrm>
           <a:prstGeom prst="rect">
             <a:avLst/>
@@ -41871,8 +42166,8 @@
         </p:nvSpPr>
         <p:spPr>
           <a:xfrm>
-            <a:off x="1014984" y="3938375"/>
-            <a:ext cx="1920240" cy="261411"/>
+            <a:off x="1014984" y="3766252"/>
+            <a:ext cx="1920240" cy="239896"/>
           </a:xfrm>
           <a:prstGeom prst="rect">
             <a:avLst/>
@@ -41910,8 +42205,8 @@
         </p:nvSpPr>
         <p:spPr>
           <a:xfrm>
-            <a:off x="3785616" y="4008956"/>
-            <a:ext cx="164481" cy="120249"/>
+            <a:off x="3785616" y="3831024"/>
+            <a:ext cx="164481" cy="110352"/>
           </a:xfrm>
           <a:prstGeom prst="rect">
             <a:avLst/>
@@ -41930,8 +42225,8 @@
         </p:nvSpPr>
         <p:spPr>
           <a:xfrm>
-            <a:off x="4617720" y="3938375"/>
-            <a:ext cx="1234440" cy="261411"/>
+            <a:off x="4617720" y="3766252"/>
+            <a:ext cx="1234440" cy="239896"/>
           </a:xfrm>
           <a:prstGeom prst="rect">
             <a:avLst/>
@@ -41969,8 +42264,8 @@
         </p:nvSpPr>
         <p:spPr>
           <a:xfrm>
-            <a:off x="658368" y="4199785"/>
-            <a:ext cx="310896" cy="261411"/>
+            <a:off x="658368" y="4006148"/>
+            <a:ext cx="310896" cy="239896"/>
           </a:xfrm>
           <a:prstGeom prst="rect">
             <a:avLst/>
@@ -42008,8 +42303,8 @@
         </p:nvSpPr>
         <p:spPr>
           <a:xfrm>
-            <a:off x="1014984" y="4199785"/>
-            <a:ext cx="1920240" cy="261411"/>
+            <a:off x="1014984" y="4006148"/>
+            <a:ext cx="1920240" cy="239896"/>
           </a:xfrm>
           <a:prstGeom prst="rect">
             <a:avLst/>
@@ -42047,8 +42342,8 @@
         </p:nvSpPr>
         <p:spPr>
           <a:xfrm>
-            <a:off x="3785616" y="4270366"/>
-            <a:ext cx="146713" cy="120249"/>
+            <a:off x="3785616" y="4070920"/>
+            <a:ext cx="146713" cy="110352"/>
           </a:xfrm>
           <a:prstGeom prst="rect">
             <a:avLst/>
@@ -42067,8 +42362,8 @@
         </p:nvSpPr>
         <p:spPr>
           <a:xfrm>
-            <a:off x="4617720" y="4199785"/>
-            <a:ext cx="1234440" cy="261411"/>
+            <a:off x="4617720" y="4006148"/>
+            <a:ext cx="1234440" cy="239896"/>
           </a:xfrm>
           <a:prstGeom prst="rect">
             <a:avLst/>
@@ -42106,8 +42401,8 @@
         </p:nvSpPr>
         <p:spPr>
           <a:xfrm>
-            <a:off x="658368" y="4461196"/>
-            <a:ext cx="310896" cy="261411"/>
+            <a:off x="658368" y="4246043"/>
+            <a:ext cx="310896" cy="239896"/>
           </a:xfrm>
           <a:prstGeom prst="rect">
             <a:avLst/>
@@ -42145,8 +42440,8 @@
         </p:nvSpPr>
         <p:spPr>
           <a:xfrm>
-            <a:off x="1014984" y="4461196"/>
-            <a:ext cx="1920240" cy="261411"/>
+            <a:off x="1014984" y="4246043"/>
+            <a:ext cx="1920240" cy="239896"/>
           </a:xfrm>
           <a:prstGeom prst="rect">
             <a:avLst/>
@@ -42184,8 +42479,8 @@
         </p:nvSpPr>
         <p:spPr>
           <a:xfrm>
-            <a:off x="3785616" y="4531777"/>
-            <a:ext cx="143918" cy="120249"/>
+            <a:off x="3785616" y="4310815"/>
+            <a:ext cx="143918" cy="110352"/>
           </a:xfrm>
           <a:prstGeom prst="rect">
             <a:avLst/>
@@ -42204,8 +42499,8 @@
         </p:nvSpPr>
         <p:spPr>
           <a:xfrm>
-            <a:off x="4617720" y="4461196"/>
-            <a:ext cx="1234440" cy="261411"/>
+            <a:off x="4617720" y="4246043"/>
+            <a:ext cx="1234440" cy="239896"/>
           </a:xfrm>
           <a:prstGeom prst="rect">
             <a:avLst/>
@@ -42243,8 +42538,8 @@
         </p:nvSpPr>
         <p:spPr>
           <a:xfrm>
-            <a:off x="658368" y="4722607"/>
-            <a:ext cx="310896" cy="261411"/>
+            <a:off x="658368" y="4485939"/>
+            <a:ext cx="310896" cy="239896"/>
           </a:xfrm>
           <a:prstGeom prst="rect">
             <a:avLst/>
@@ -42282,8 +42577,8 @@
         </p:nvSpPr>
         <p:spPr>
           <a:xfrm>
-            <a:off x="1014984" y="4722607"/>
-            <a:ext cx="1920240" cy="261411"/>
+            <a:off x="1014984" y="4485939"/>
+            <a:ext cx="1920240" cy="239896"/>
           </a:xfrm>
           <a:prstGeom prst="rect">
             <a:avLst/>
@@ -42321,8 +42616,8 @@
         </p:nvSpPr>
         <p:spPr>
           <a:xfrm>
-            <a:off x="3785616" y="4793188"/>
-            <a:ext cx="139313" cy="120249"/>
+            <a:off x="3785616" y="4550711"/>
+            <a:ext cx="139313" cy="110352"/>
           </a:xfrm>
           <a:prstGeom prst="rect">
             <a:avLst/>
@@ -42341,8 +42636,8 @@
         </p:nvSpPr>
         <p:spPr>
           <a:xfrm>
-            <a:off x="4617720" y="4722607"/>
-            <a:ext cx="1234440" cy="261411"/>
+            <a:off x="4617720" y="4485939"/>
+            <a:ext cx="1234440" cy="239896"/>
           </a:xfrm>
           <a:prstGeom prst="rect">
             <a:avLst/>
@@ -42380,8 +42675,8 @@
         </p:nvSpPr>
         <p:spPr>
           <a:xfrm>
-            <a:off x="658368" y="4984018"/>
-            <a:ext cx="310896" cy="261411"/>
+            <a:off x="658368" y="4725834"/>
+            <a:ext cx="310896" cy="239896"/>
           </a:xfrm>
           <a:prstGeom prst="rect">
             <a:avLst/>
@@ -42419,8 +42714,8 @@
         </p:nvSpPr>
         <p:spPr>
           <a:xfrm>
-            <a:off x="1014984" y="4984018"/>
-            <a:ext cx="1920240" cy="261411"/>
+            <a:off x="1014984" y="4725834"/>
+            <a:ext cx="1920240" cy="239896"/>
           </a:xfrm>
           <a:prstGeom prst="rect">
             <a:avLst/>
@@ -42458,8 +42753,8 @@
         </p:nvSpPr>
         <p:spPr>
           <a:xfrm>
-            <a:off x="3785616" y="5054599"/>
-            <a:ext cx="111722" cy="120249"/>
+            <a:off x="3785616" y="4790606"/>
+            <a:ext cx="111722" cy="110352"/>
           </a:xfrm>
           <a:prstGeom prst="rect">
             <a:avLst/>
@@ -42478,8 +42773,8 @@
         </p:nvSpPr>
         <p:spPr>
           <a:xfrm>
-            <a:off x="4617720" y="4984018"/>
-            <a:ext cx="1234440" cy="261411"/>
+            <a:off x="4617720" y="4725834"/>
+            <a:ext cx="1234440" cy="239896"/>
           </a:xfrm>
           <a:prstGeom prst="rect">
             <a:avLst/>
@@ -42517,8 +42812,8 @@
         </p:nvSpPr>
         <p:spPr>
           <a:xfrm>
-            <a:off x="658368" y="5245429"/>
-            <a:ext cx="310896" cy="261411"/>
+            <a:off x="658368" y="4965730"/>
+            <a:ext cx="310896" cy="239896"/>
           </a:xfrm>
           <a:prstGeom prst="rect">
             <a:avLst/>
@@ -42556,8 +42851,8 @@
         </p:nvSpPr>
         <p:spPr>
           <a:xfrm>
-            <a:off x="1014984" y="5245429"/>
-            <a:ext cx="1920240" cy="261411"/>
+            <a:off x="1014984" y="4965730"/>
+            <a:ext cx="1920240" cy="239896"/>
           </a:xfrm>
           <a:prstGeom prst="rect">
             <a:avLst/>
@@ -42595,8 +42890,8 @@
         </p:nvSpPr>
         <p:spPr>
           <a:xfrm>
-            <a:off x="3785616" y="5316010"/>
-            <a:ext cx="108452" cy="120249"/>
+            <a:off x="3785616" y="5030502"/>
+            <a:ext cx="108452" cy="110352"/>
           </a:xfrm>
           <a:prstGeom prst="rect">
             <a:avLst/>
@@ -42615,8 +42910,8 @@
         </p:nvSpPr>
         <p:spPr>
           <a:xfrm>
-            <a:off x="4617720" y="5245429"/>
-            <a:ext cx="1234440" cy="261411"/>
+            <a:off x="4617720" y="4965730"/>
+            <a:ext cx="1234440" cy="239896"/>
           </a:xfrm>
           <a:prstGeom prst="rect">
             <a:avLst/>
@@ -42654,8 +42949,8 @@
         </p:nvSpPr>
         <p:spPr>
           <a:xfrm>
-            <a:off x="658368" y="5506840"/>
-            <a:ext cx="310896" cy="261411"/>
+            <a:off x="658368" y="5205625"/>
+            <a:ext cx="310896" cy="239896"/>
           </a:xfrm>
           <a:prstGeom prst="rect">
             <a:avLst/>
@@ -42693,8 +42988,8 @@
         </p:nvSpPr>
         <p:spPr>
           <a:xfrm>
-            <a:off x="1014984" y="5506840"/>
-            <a:ext cx="1920240" cy="261411"/>
+            <a:off x="1014984" y="5205625"/>
+            <a:ext cx="1920240" cy="239896"/>
           </a:xfrm>
           <a:prstGeom prst="rect">
             <a:avLst/>
@@ -42732,8 +43027,8 @@
         </p:nvSpPr>
         <p:spPr>
           <a:xfrm>
-            <a:off x="3785616" y="5577420"/>
-            <a:ext cx="104888" cy="120249"/>
+            <a:off x="3785616" y="5270397"/>
+            <a:ext cx="104888" cy="110352"/>
           </a:xfrm>
           <a:prstGeom prst="rect">
             <a:avLst/>
@@ -42752,8 +43047,8 @@
         </p:nvSpPr>
         <p:spPr>
           <a:xfrm>
-            <a:off x="4617720" y="5506840"/>
-            <a:ext cx="1234440" cy="261411"/>
+            <a:off x="4617720" y="5205625"/>
+            <a:ext cx="1234440" cy="239896"/>
           </a:xfrm>
           <a:prstGeom prst="rect">
             <a:avLst/>
@@ -42791,8 +43086,8 @@
         </p:nvSpPr>
         <p:spPr>
           <a:xfrm>
-            <a:off x="658368" y="5768250"/>
-            <a:ext cx="310896" cy="261411"/>
+            <a:off x="658368" y="5445521"/>
+            <a:ext cx="310896" cy="239896"/>
           </a:xfrm>
           <a:prstGeom prst="rect">
             <a:avLst/>
@@ -42830,8 +43125,8 @@
         </p:nvSpPr>
         <p:spPr>
           <a:xfrm>
-            <a:off x="1014984" y="5768250"/>
-            <a:ext cx="1920240" cy="261411"/>
+            <a:off x="1014984" y="5445521"/>
+            <a:ext cx="1920240" cy="239896"/>
           </a:xfrm>
           <a:prstGeom prst="rect">
             <a:avLst/>
@@ -42869,8 +43164,8 @@
         </p:nvSpPr>
         <p:spPr>
           <a:xfrm>
-            <a:off x="3785616" y="5838831"/>
-            <a:ext cx="95711" cy="120249"/>
+            <a:off x="3785616" y="5510293"/>
+            <a:ext cx="95711" cy="110352"/>
           </a:xfrm>
           <a:prstGeom prst="rect">
             <a:avLst/>
@@ -42889,8 +43184,8 @@
         </p:nvSpPr>
         <p:spPr>
           <a:xfrm>
-            <a:off x="4617720" y="5768250"/>
-            <a:ext cx="1234440" cy="261411"/>
+            <a:off x="4617720" y="5445521"/>
+            <a:ext cx="1234440" cy="239896"/>
           </a:xfrm>
           <a:prstGeom prst="rect">
             <a:avLst/>
@@ -42928,8 +43223,8 @@
         </p:nvSpPr>
         <p:spPr>
           <a:xfrm>
-            <a:off x="658368" y="6029661"/>
-            <a:ext cx="310896" cy="261411"/>
+            <a:off x="658368" y="5685416"/>
+            <a:ext cx="310896" cy="239896"/>
           </a:xfrm>
           <a:prstGeom prst="rect">
             <a:avLst/>
@@ -42967,8 +43262,8 @@
         </p:nvSpPr>
         <p:spPr>
           <a:xfrm>
-            <a:off x="1014984" y="6029661"/>
-            <a:ext cx="1920240" cy="261411"/>
+            <a:off x="1014984" y="5685416"/>
+            <a:ext cx="1920240" cy="239896"/>
           </a:xfrm>
           <a:prstGeom prst="rect">
             <a:avLst/>
@@ -43006,8 +43301,8 @@
         </p:nvSpPr>
         <p:spPr>
           <a:xfrm>
-            <a:off x="3785616" y="6100242"/>
-            <a:ext cx="95177" cy="120249"/>
+            <a:off x="3785616" y="5750188"/>
+            <a:ext cx="95177" cy="110352"/>
           </a:xfrm>
           <a:prstGeom prst="rect">
             <a:avLst/>
@@ -43026,8 +43321,8 @@
         </p:nvSpPr>
         <p:spPr>
           <a:xfrm>
-            <a:off x="4617720" y="6029661"/>
-            <a:ext cx="1234440" cy="261411"/>
+            <a:off x="4617720" y="5685416"/>
+            <a:ext cx="1234440" cy="239896"/>
           </a:xfrm>
           <a:prstGeom prst="rect">
             <a:avLst/>
@@ -43066,7 +43361,7 @@
         <p:spPr>
           <a:xfrm>
             <a:off x="6208776" y="1847088"/>
-            <a:ext cx="310896" cy="261411"/>
+            <a:ext cx="310896" cy="239896"/>
           </a:xfrm>
           <a:prstGeom prst="rect">
             <a:avLst/>
@@ -43105,7 +43400,7 @@
         <p:spPr>
           <a:xfrm>
             <a:off x="6565392" y="1847088"/>
-            <a:ext cx="1920240" cy="261411"/>
+            <a:ext cx="1920240" cy="239896"/>
           </a:xfrm>
           <a:prstGeom prst="rect">
             <a:avLst/>
@@ -43143,8 +43438,8 @@
         </p:nvSpPr>
         <p:spPr>
           <a:xfrm>
-            <a:off x="9336024" y="1917669"/>
-            <a:ext cx="90237" cy="120249"/>
+            <a:off x="9336024" y="1911860"/>
+            <a:ext cx="90237" cy="110352"/>
           </a:xfrm>
           <a:prstGeom prst="rect">
             <a:avLst/>
@@ -43164,7 +43459,7 @@
         <p:spPr>
           <a:xfrm>
             <a:off x="10168128" y="1847088"/>
-            <a:ext cx="1234440" cy="261411"/>
+            <a:ext cx="1234440" cy="239896"/>
           </a:xfrm>
           <a:prstGeom prst="rect">
             <a:avLst/>
@@ -43202,8 +43497,8 @@
         </p:nvSpPr>
         <p:spPr>
           <a:xfrm>
-            <a:off x="6208776" y="2108499"/>
-            <a:ext cx="310896" cy="261411"/>
+            <a:off x="6208776" y="2086984"/>
+            <a:ext cx="310896" cy="239896"/>
           </a:xfrm>
           <a:prstGeom prst="rect">
             <a:avLst/>
@@ -43241,8 +43536,8 @@
         </p:nvSpPr>
         <p:spPr>
           <a:xfrm>
-            <a:off x="6565392" y="2108499"/>
-            <a:ext cx="1920240" cy="261411"/>
+            <a:off x="6565392" y="2086984"/>
+            <a:ext cx="1920240" cy="239896"/>
           </a:xfrm>
           <a:prstGeom prst="rect">
             <a:avLst/>
@@ -43280,8 +43575,8 @@
         </p:nvSpPr>
         <p:spPr>
           <a:xfrm>
-            <a:off x="9336024" y="2179080"/>
-            <a:ext cx="87077" cy="120249"/>
+            <a:off x="9336024" y="2151755"/>
+            <a:ext cx="87077" cy="110352"/>
           </a:xfrm>
           <a:prstGeom prst="rect">
             <a:avLst/>
@@ -43300,8 +43595,8 @@
         </p:nvSpPr>
         <p:spPr>
           <a:xfrm>
-            <a:off x="10168128" y="2108499"/>
-            <a:ext cx="1234440" cy="261411"/>
+            <a:off x="10168128" y="2086984"/>
+            <a:ext cx="1234440" cy="239896"/>
           </a:xfrm>
           <a:prstGeom prst="rect">
             <a:avLst/>
@@ -43339,8 +43634,8 @@
         </p:nvSpPr>
         <p:spPr>
           <a:xfrm>
-            <a:off x="6208776" y="2369910"/>
-            <a:ext cx="310896" cy="261411"/>
+            <a:off x="6208776" y="2326879"/>
+            <a:ext cx="310896" cy="239896"/>
           </a:xfrm>
           <a:prstGeom prst="rect">
             <a:avLst/>
@@ -43378,8 +43673,8 @@
         </p:nvSpPr>
         <p:spPr>
           <a:xfrm>
-            <a:off x="6565392" y="2369910"/>
-            <a:ext cx="1920240" cy="261411"/>
+            <a:off x="6565392" y="2326879"/>
+            <a:ext cx="1920240" cy="239896"/>
           </a:xfrm>
           <a:prstGeom prst="rect">
             <a:avLst/>
@@ -43417,8 +43712,8 @@
         </p:nvSpPr>
         <p:spPr>
           <a:xfrm>
-            <a:off x="9336024" y="2440491"/>
-            <a:ext cx="54978" cy="120249"/>
+            <a:off x="9336024" y="2391651"/>
+            <a:ext cx="54978" cy="110352"/>
           </a:xfrm>
           <a:prstGeom prst="rect">
             <a:avLst/>
@@ -43437,8 +43732,8 @@
         </p:nvSpPr>
         <p:spPr>
           <a:xfrm>
-            <a:off x="10168128" y="2369910"/>
-            <a:ext cx="1234440" cy="261411"/>
+            <a:off x="10168128" y="2326879"/>
+            <a:ext cx="1234440" cy="239896"/>
           </a:xfrm>
           <a:prstGeom prst="rect">
             <a:avLst/>
@@ -43476,8 +43771,8 @@
         </p:nvSpPr>
         <p:spPr>
           <a:xfrm>
-            <a:off x="6208776" y="2631320"/>
-            <a:ext cx="310896" cy="261411"/>
+            <a:off x="6208776" y="2566775"/>
+            <a:ext cx="310896" cy="239896"/>
           </a:xfrm>
           <a:prstGeom prst="rect">
             <a:avLst/>
@@ -43515,8 +43810,8 @@
         </p:nvSpPr>
         <p:spPr>
           <a:xfrm>
-            <a:off x="6565392" y="2631320"/>
-            <a:ext cx="1920240" cy="261411"/>
+            <a:off x="6565392" y="2566775"/>
+            <a:ext cx="1920240" cy="239896"/>
           </a:xfrm>
           <a:prstGeom prst="rect">
             <a:avLst/>
@@ -43554,8 +43849,8 @@
         </p:nvSpPr>
         <p:spPr>
           <a:xfrm>
-            <a:off x="9336024" y="2701901"/>
-            <a:ext cx="52170" cy="120249"/>
+            <a:off x="9336024" y="2631546"/>
+            <a:ext cx="52170" cy="110352"/>
           </a:xfrm>
           <a:prstGeom prst="rect">
             <a:avLst/>
@@ -43574,8 +43869,8 @@
         </p:nvSpPr>
         <p:spPr>
           <a:xfrm>
-            <a:off x="10168128" y="2631320"/>
-            <a:ext cx="1234440" cy="261411"/>
+            <a:off x="10168128" y="2566775"/>
+            <a:ext cx="1234440" cy="239896"/>
           </a:xfrm>
           <a:prstGeom prst="rect">
             <a:avLst/>
@@ -43613,8 +43908,8 @@
         </p:nvSpPr>
         <p:spPr>
           <a:xfrm>
-            <a:off x="6208776" y="2892731"/>
-            <a:ext cx="310896" cy="261411"/>
+            <a:off x="6208776" y="2806670"/>
+            <a:ext cx="310896" cy="239896"/>
           </a:xfrm>
           <a:prstGeom prst="rect">
             <a:avLst/>
@@ -43652,8 +43947,8 @@
         </p:nvSpPr>
         <p:spPr>
           <a:xfrm>
-            <a:off x="6565392" y="2892731"/>
-            <a:ext cx="1920240" cy="261411"/>
+            <a:off x="6565392" y="2806670"/>
+            <a:ext cx="1920240" cy="239896"/>
           </a:xfrm>
           <a:prstGeom prst="rect">
             <a:avLst/>
@@ -43691,8 +43986,8 @@
         </p:nvSpPr>
         <p:spPr>
           <a:xfrm>
-            <a:off x="9336024" y="2963312"/>
-            <a:ext cx="24496" cy="120249"/>
+            <a:off x="9336024" y="2871442"/>
+            <a:ext cx="24496" cy="110352"/>
           </a:xfrm>
           <a:prstGeom prst="rect">
             <a:avLst/>
@@ -43711,8 +44006,8 @@
         </p:nvSpPr>
         <p:spPr>
           <a:xfrm>
-            <a:off x="10168128" y="2892731"/>
-            <a:ext cx="1234440" cy="261411"/>
+            <a:off x="10168128" y="2806670"/>
+            <a:ext cx="1234440" cy="239896"/>
           </a:xfrm>
           <a:prstGeom prst="rect">
             <a:avLst/>
@@ -43750,8 +44045,8 @@
         </p:nvSpPr>
         <p:spPr>
           <a:xfrm>
-            <a:off x="6208776" y="3154142"/>
-            <a:ext cx="310896" cy="261411"/>
+            <a:off x="6208776" y="3046566"/>
+            <a:ext cx="310896" cy="239896"/>
           </a:xfrm>
           <a:prstGeom prst="rect">
             <a:avLst/>
@@ -43789,8 +44084,8 @@
         </p:nvSpPr>
         <p:spPr>
           <a:xfrm>
-            <a:off x="6565392" y="3154142"/>
-            <a:ext cx="1920240" cy="261411"/>
+            <a:off x="6565392" y="3046566"/>
+            <a:ext cx="1920240" cy="239896"/>
           </a:xfrm>
           <a:prstGeom prst="rect">
             <a:avLst/>
@@ -43828,8 +44123,8 @@
         </p:nvSpPr>
         <p:spPr>
           <a:xfrm>
-            <a:off x="9336024" y="3224723"/>
-            <a:ext cx="12802" cy="120249"/>
+            <a:off x="9336024" y="3111337"/>
+            <a:ext cx="12802" cy="110352"/>
           </a:xfrm>
           <a:prstGeom prst="rect">
             <a:avLst/>
@@ -43848,8 +44143,8 @@
         </p:nvSpPr>
         <p:spPr>
           <a:xfrm>
-            <a:off x="10168128" y="3154142"/>
-            <a:ext cx="1234440" cy="261411"/>
+            <a:off x="10168128" y="3046566"/>
+            <a:ext cx="1234440" cy="239896"/>
           </a:xfrm>
           <a:prstGeom prst="rect">
             <a:avLst/>
@@ -43887,8 +44182,8 @@
         </p:nvSpPr>
         <p:spPr>
           <a:xfrm>
-            <a:off x="6208776" y="3415553"/>
-            <a:ext cx="310896" cy="261411"/>
+            <a:off x="6208776" y="3286461"/>
+            <a:ext cx="310896" cy="239896"/>
           </a:xfrm>
           <a:prstGeom prst="rect">
             <a:avLst/>
@@ -43926,8 +44221,8 @@
         </p:nvSpPr>
         <p:spPr>
           <a:xfrm>
-            <a:off x="6565392" y="3415553"/>
-            <a:ext cx="1920240" cy="261411"/>
+            <a:off x="6565392" y="3286461"/>
+            <a:ext cx="1920240" cy="239896"/>
           </a:xfrm>
           <a:prstGeom prst="rect">
             <a:avLst/>
@@ -43965,8 +44260,8 @@
         </p:nvSpPr>
         <p:spPr>
           <a:xfrm>
-            <a:off x="9336024" y="3486134"/>
-            <a:ext cx="12802" cy="120249"/>
+            <a:off x="9336024" y="3351233"/>
+            <a:ext cx="12802" cy="110352"/>
           </a:xfrm>
           <a:prstGeom prst="rect">
             <a:avLst/>
@@ -43985,8 +44280,8 @@
         </p:nvSpPr>
         <p:spPr>
           <a:xfrm>
-            <a:off x="10168128" y="3415553"/>
-            <a:ext cx="1234440" cy="261411"/>
+            <a:off x="10168128" y="3286461"/>
+            <a:ext cx="1234440" cy="239896"/>
           </a:xfrm>
           <a:prstGeom prst="rect">
             <a:avLst/>
@@ -44024,8 +44319,8 @@
         </p:nvSpPr>
         <p:spPr>
           <a:xfrm>
-            <a:off x="6208776" y="3676964"/>
-            <a:ext cx="310896" cy="261411"/>
+            <a:off x="6208776" y="3526357"/>
+            <a:ext cx="310896" cy="239896"/>
           </a:xfrm>
           <a:prstGeom prst="rect">
             <a:avLst/>
@@ -44063,8 +44358,8 @@
         </p:nvSpPr>
         <p:spPr>
           <a:xfrm>
-            <a:off x="6565392" y="3676964"/>
-            <a:ext cx="1920240" cy="261411"/>
+            <a:off x="6565392" y="3526357"/>
+            <a:ext cx="1920240" cy="239896"/>
           </a:xfrm>
           <a:prstGeom prst="rect">
             <a:avLst/>
@@ -44102,8 +44397,8 @@
         </p:nvSpPr>
         <p:spPr>
           <a:xfrm>
-            <a:off x="9326258" y="3747545"/>
-            <a:ext cx="12802" cy="120249"/>
+            <a:off x="9326258" y="3591128"/>
+            <a:ext cx="12802" cy="110352"/>
           </a:xfrm>
           <a:prstGeom prst="rect">
             <a:avLst/>
@@ -44122,8 +44417,8 @@
         </p:nvSpPr>
         <p:spPr>
           <a:xfrm>
-            <a:off x="10168128" y="3676964"/>
-            <a:ext cx="1234440" cy="261411"/>
+            <a:off x="10168128" y="3526357"/>
+            <a:ext cx="1234440" cy="239896"/>
           </a:xfrm>
           <a:prstGeom prst="rect">
             <a:avLst/>
@@ -44161,8 +44456,8 @@
         </p:nvSpPr>
         <p:spPr>
           <a:xfrm>
-            <a:off x="6208776" y="3938375"/>
-            <a:ext cx="310896" cy="261411"/>
+            <a:off x="6208776" y="3766252"/>
+            <a:ext cx="310896" cy="239896"/>
           </a:xfrm>
           <a:prstGeom prst="rect">
             <a:avLst/>
@@ -44200,8 +44495,8 @@
         </p:nvSpPr>
         <p:spPr>
           <a:xfrm>
-            <a:off x="6565392" y="3938375"/>
-            <a:ext cx="1920240" cy="261411"/>
+            <a:off x="6565392" y="3766252"/>
+            <a:ext cx="1920240" cy="239896"/>
           </a:xfrm>
           <a:prstGeom prst="rect">
             <a:avLst/>
@@ -44239,8 +44534,8 @@
         </p:nvSpPr>
         <p:spPr>
           <a:xfrm>
-            <a:off x="9301116" y="4008956"/>
-            <a:ext cx="34908" cy="120249"/>
+            <a:off x="9301116" y="3831024"/>
+            <a:ext cx="34908" cy="110352"/>
           </a:xfrm>
           <a:prstGeom prst="rect">
             <a:avLst/>
@@ -44259,8 +44554,8 @@
         </p:nvSpPr>
         <p:spPr>
           <a:xfrm>
-            <a:off x="10168128" y="3938375"/>
-            <a:ext cx="1234440" cy="261411"/>
+            <a:off x="10168128" y="3766252"/>
+            <a:ext cx="1234440" cy="239896"/>
           </a:xfrm>
           <a:prstGeom prst="rect">
             <a:avLst/>
@@ -44298,8 +44593,8 @@
         </p:nvSpPr>
         <p:spPr>
           <a:xfrm>
-            <a:off x="6208776" y="4199785"/>
-            <a:ext cx="310896" cy="261411"/>
+            <a:off x="6208776" y="4006148"/>
+            <a:ext cx="310896" cy="239896"/>
           </a:xfrm>
           <a:prstGeom prst="rect">
             <a:avLst/>
@@ -44337,8 +44632,8 @@
         </p:nvSpPr>
         <p:spPr>
           <a:xfrm>
-            <a:off x="6565392" y="4199785"/>
-            <a:ext cx="1920240" cy="261411"/>
+            <a:off x="6565392" y="4006148"/>
+            <a:ext cx="1920240" cy="239896"/>
           </a:xfrm>
           <a:prstGeom prst="rect">
             <a:avLst/>
@@ -44376,8 +44671,8 @@
         </p:nvSpPr>
         <p:spPr>
           <a:xfrm>
-            <a:off x="9283123" y="4270366"/>
-            <a:ext cx="52901" cy="120249"/>
+            <a:off x="9283123" y="4070920"/>
+            <a:ext cx="52901" cy="110352"/>
           </a:xfrm>
           <a:prstGeom prst="rect">
             <a:avLst/>
@@ -44396,8 +44691,8 @@
         </p:nvSpPr>
         <p:spPr>
           <a:xfrm>
-            <a:off x="10168128" y="4199785"/>
-            <a:ext cx="1234440" cy="261411"/>
+            <a:off x="10168128" y="4006148"/>
+            <a:ext cx="1234440" cy="239896"/>
           </a:xfrm>
           <a:prstGeom prst="rect">
             <a:avLst/>
@@ -44435,8 +44730,8 @@
         </p:nvSpPr>
         <p:spPr>
           <a:xfrm>
-            <a:off x="6208776" y="4461196"/>
-            <a:ext cx="310896" cy="261411"/>
+            <a:off x="6208776" y="4246043"/>
+            <a:ext cx="310896" cy="239896"/>
           </a:xfrm>
           <a:prstGeom prst="rect">
             <a:avLst/>
@@ -44474,8 +44769,8 @@
         </p:nvSpPr>
         <p:spPr>
           <a:xfrm>
-            <a:off x="6565392" y="4461196"/>
-            <a:ext cx="1920240" cy="261411"/>
+            <a:off x="6565392" y="4246043"/>
+            <a:ext cx="1920240" cy="239896"/>
           </a:xfrm>
           <a:prstGeom prst="rect">
             <a:avLst/>
@@ -44513,8 +44808,8 @@
         </p:nvSpPr>
         <p:spPr>
           <a:xfrm>
-            <a:off x="9263086" y="4531777"/>
-            <a:ext cx="72938" cy="120249"/>
+            <a:off x="9263086" y="4310815"/>
+            <a:ext cx="72938" cy="110352"/>
           </a:xfrm>
           <a:prstGeom prst="rect">
             <a:avLst/>
@@ -44533,8 +44828,8 @@
         </p:nvSpPr>
         <p:spPr>
           <a:xfrm>
-            <a:off x="10168128" y="4461196"/>
-            <a:ext cx="1234440" cy="261411"/>
+            <a:off x="10168128" y="4246043"/>
+            <a:ext cx="1234440" cy="239896"/>
           </a:xfrm>
           <a:prstGeom prst="rect">
             <a:avLst/>
@@ -44572,8 +44867,8 @@
         </p:nvSpPr>
         <p:spPr>
           <a:xfrm>
-            <a:off x="6208776" y="4722607"/>
-            <a:ext cx="310896" cy="261411"/>
+            <a:off x="6208776" y="4485939"/>
+            <a:ext cx="310896" cy="239896"/>
           </a:xfrm>
           <a:prstGeom prst="rect">
             <a:avLst/>
@@ -44611,8 +44906,8 @@
         </p:nvSpPr>
         <p:spPr>
           <a:xfrm>
-            <a:off x="6565392" y="4722607"/>
-            <a:ext cx="1920240" cy="261411"/>
+            <a:off x="6565392" y="4485939"/>
+            <a:ext cx="1920240" cy="239896"/>
           </a:xfrm>
           <a:prstGeom prst="rect">
             <a:avLst/>
@@ -44650,8 +44945,8 @@
         </p:nvSpPr>
         <p:spPr>
           <a:xfrm>
-            <a:off x="9244126" y="4793188"/>
-            <a:ext cx="91898" cy="120249"/>
+            <a:off x="9244126" y="4550711"/>
+            <a:ext cx="91898" cy="110352"/>
           </a:xfrm>
           <a:prstGeom prst="rect">
             <a:avLst/>
@@ -44670,8 +44965,8 @@
         </p:nvSpPr>
         <p:spPr>
           <a:xfrm>
-            <a:off x="10168128" y="4722607"/>
-            <a:ext cx="1234440" cy="261411"/>
+            <a:off x="10168128" y="4485939"/>
+            <a:ext cx="1234440" cy="239896"/>
           </a:xfrm>
           <a:prstGeom prst="rect">
             <a:avLst/>
@@ -44709,8 +45004,8 @@
         </p:nvSpPr>
         <p:spPr>
           <a:xfrm>
-            <a:off x="6208776" y="4984018"/>
-            <a:ext cx="310896" cy="261411"/>
+            <a:off x="6208776" y="4725834"/>
+            <a:ext cx="310896" cy="239896"/>
           </a:xfrm>
           <a:prstGeom prst="rect">
             <a:avLst/>
@@ -44748,8 +45043,8 @@
         </p:nvSpPr>
         <p:spPr>
           <a:xfrm>
-            <a:off x="6565392" y="4984018"/>
-            <a:ext cx="1920240" cy="261411"/>
+            <a:off x="6565392" y="4725834"/>
+            <a:ext cx="1920240" cy="239896"/>
           </a:xfrm>
           <a:prstGeom prst="rect">
             <a:avLst/>
@@ -44787,8 +45082,8 @@
         </p:nvSpPr>
         <p:spPr>
           <a:xfrm>
-            <a:off x="9216373" y="5054599"/>
-            <a:ext cx="119651" cy="120249"/>
+            <a:off x="9216373" y="4790606"/>
+            <a:ext cx="119651" cy="110352"/>
           </a:xfrm>
           <a:prstGeom prst="rect">
             <a:avLst/>
@@ -44807,8 +45102,8 @@
         </p:nvSpPr>
         <p:spPr>
           <a:xfrm>
-            <a:off x="10168128" y="4984018"/>
-            <a:ext cx="1234440" cy="261411"/>
+            <a:off x="10168128" y="4725834"/>
+            <a:ext cx="1234440" cy="239896"/>
           </a:xfrm>
           <a:prstGeom prst="rect">
             <a:avLst/>
@@ -44846,8 +45141,8 @@
         </p:nvSpPr>
         <p:spPr>
           <a:xfrm>
-            <a:off x="6208776" y="5245429"/>
-            <a:ext cx="310896" cy="261411"/>
+            <a:off x="6208776" y="4965730"/>
+            <a:ext cx="310896" cy="239896"/>
           </a:xfrm>
           <a:prstGeom prst="rect">
             <a:avLst/>
@@ -44885,8 +45180,8 @@
         </p:nvSpPr>
         <p:spPr>
           <a:xfrm>
-            <a:off x="6565392" y="5245429"/>
-            <a:ext cx="1920240" cy="261411"/>
+            <a:off x="6565392" y="4965730"/>
+            <a:ext cx="1920240" cy="239896"/>
           </a:xfrm>
           <a:prstGeom prst="rect">
             <a:avLst/>
@@ -44924,8 +45219,8 @@
         </p:nvSpPr>
         <p:spPr>
           <a:xfrm>
-            <a:off x="9139860" y="5316010"/>
-            <a:ext cx="196164" cy="120249"/>
+            <a:off x="9139860" y="5030502"/>
+            <a:ext cx="196164" cy="110352"/>
           </a:xfrm>
           <a:prstGeom prst="rect">
             <a:avLst/>
@@ -44944,8 +45239,8 @@
         </p:nvSpPr>
         <p:spPr>
           <a:xfrm>
-            <a:off x="10168128" y="5245429"/>
-            <a:ext cx="1234440" cy="261411"/>
+            <a:off x="10168128" y="4965730"/>
+            <a:ext cx="1234440" cy="239896"/>
           </a:xfrm>
           <a:prstGeom prst="rect">
             <a:avLst/>
@@ -44983,8 +45278,8 @@
         </p:nvSpPr>
         <p:spPr>
           <a:xfrm>
-            <a:off x="6208776" y="5506840"/>
-            <a:ext cx="310896" cy="261411"/>
+            <a:off x="6208776" y="5205625"/>
+            <a:ext cx="310896" cy="239896"/>
           </a:xfrm>
           <a:prstGeom prst="rect">
             <a:avLst/>
@@ -45022,8 +45317,8 @@
         </p:nvSpPr>
         <p:spPr>
           <a:xfrm>
-            <a:off x="6565392" y="5506840"/>
-            <a:ext cx="1920240" cy="261411"/>
+            <a:off x="6565392" y="5205625"/>
+            <a:ext cx="1920240" cy="239896"/>
           </a:xfrm>
           <a:prstGeom prst="rect">
             <a:avLst/>
@@ -45061,8 +45356,8 @@
         </p:nvSpPr>
         <p:spPr>
           <a:xfrm>
-            <a:off x="9081728" y="5577420"/>
-            <a:ext cx="254296" cy="120249"/>
+            <a:off x="9081728" y="5270397"/>
+            <a:ext cx="254296" cy="110352"/>
           </a:xfrm>
           <a:prstGeom prst="rect">
             <a:avLst/>
@@ -45081,8 +45376,8 @@
         </p:nvSpPr>
         <p:spPr>
           <a:xfrm>
-            <a:off x="10168128" y="5506840"/>
-            <a:ext cx="1234440" cy="261411"/>
+            <a:off x="10168128" y="5205625"/>
+            <a:ext cx="1234440" cy="239896"/>
           </a:xfrm>
           <a:prstGeom prst="rect">
             <a:avLst/>
@@ -45120,8 +45415,8 @@
         </p:nvSpPr>
         <p:spPr>
           <a:xfrm>
-            <a:off x="6208776" y="5768250"/>
-            <a:ext cx="310896" cy="261411"/>
+            <a:off x="6208776" y="5445521"/>
+            <a:ext cx="310896" cy="239896"/>
           </a:xfrm>
           <a:prstGeom prst="rect">
             <a:avLst/>
@@ -45159,8 +45454,8 @@
         </p:nvSpPr>
         <p:spPr>
           <a:xfrm>
-            <a:off x="6565392" y="5768250"/>
-            <a:ext cx="1920240" cy="261411"/>
+            <a:off x="6565392" y="5445521"/>
+            <a:ext cx="1920240" cy="239896"/>
           </a:xfrm>
           <a:prstGeom prst="rect">
             <a:avLst/>
@@ -45198,8 +45493,8 @@
         </p:nvSpPr>
         <p:spPr>
           <a:xfrm>
-            <a:off x="8713274" y="5838831"/>
-            <a:ext cx="622750" cy="120249"/>
+            <a:off x="8713274" y="5510293"/>
+            <a:ext cx="622750" cy="110352"/>
           </a:xfrm>
           <a:prstGeom prst="rect">
             <a:avLst/>
@@ -45218,8 +45513,8 @@
         </p:nvSpPr>
         <p:spPr>
           <a:xfrm>
-            <a:off x="10168128" y="5768250"/>
-            <a:ext cx="1234440" cy="261411"/>
+            <a:off x="10168128" y="5445521"/>
+            <a:ext cx="1234440" cy="239896"/>
           </a:xfrm>
           <a:prstGeom prst="rect">
             <a:avLst/>
@@ -45258,7 +45553,7 @@
         <p:spPr>
           <a:xfrm>
             <a:off x="3780130" y="1847088"/>
-            <a:ext cx="10973" cy="4443984"/>
+            <a:ext cx="10973" cy="4078224"/>
           </a:xfrm>
           <a:prstGeom prst="rect">
             <a:avLst/>
@@ -45278,7 +45573,7 @@
         <p:spPr>
           <a:xfrm>
             <a:off x="9330538" y="1847088"/>
-            <a:ext cx="10973" cy="4443984"/>
+            <a:ext cx="10973" cy="4078224"/>
           </a:xfrm>
           <a:prstGeom prst="rect">
             <a:avLst/>
@@ -45298,7 +45593,7 @@
         <p:spPr>
           <a:xfrm>
             <a:off x="6085332" y="1847088"/>
-            <a:ext cx="10973" cy="4443984"/>
+            <a:ext cx="10973" cy="4078224"/>
           </a:xfrm>
           <a:prstGeom prst="rect">
             <a:avLst/>
@@ -45308,6 +45603,65 @@
           </a:solidFill>
           <a:ln/>
         </p:spPr>
+      </p:sp>
+      <p:sp>
+        <p:nvSpPr>
+          <p:cNvPr id="147" name="Shape 144"/>
+          <p:cNvSpPr/>
+          <p:nvPr/>
+        </p:nvSpPr>
+        <p:spPr>
+          <a:xfrm>
+            <a:off x="457200" y="6126480"/>
+            <a:ext cx="11274552" cy="371856"/>
+          </a:xfrm>
+          <a:prstGeom prst="rect">
+            <a:avLst/>
+          </a:prstGeom>
+          <a:solidFill>
+            <a:srgbClr val="E6F6EE"/>
+          </a:solidFill>
+          <a:ln/>
+        </p:spPr>
+      </p:sp>
+      <p:sp>
+        <p:nvSpPr>
+          <p:cNvPr id="148" name="Text 145"/>
+          <p:cNvSpPr txBox="1"/>
+          <p:nvPr/>
+        </p:nvSpPr>
+        <p:spPr>
+          <a:xfrm>
+            <a:off x="658368" y="6144768"/>
+            <a:ext cx="10927080" cy="335280"/>
+          </a:xfrm>
+          <a:prstGeom prst="rect">
+            <a:avLst/>
+          </a:prstGeom>
+          <a:noFill/>
+          <a:ln/>
+        </p:spPr>
+        <p:txBody>
+          <a:bodyPr wrap="square" lIns="0" tIns="0" rIns="0" bIns="0" rtlCol="0" anchor="ctr"/>
+          <a:lstStyle/>
+          <a:p>
+            <a:pPr indent="0" marL="0">
+              <a:buNone/>
+            </a:pPr>
+            <a:r>
+              <a:rPr lang="en-US" sz="1600" b="1" dirty="0">
+                <a:solidFill>
+                  <a:srgbClr val="0B7A4A"/>
+                </a:solidFill>
+                <a:latin typeface="Inter" pitchFamily="34" charset="0"/>
+                <a:ea typeface="Inter" pitchFamily="34" charset="-122"/>
+                <a:cs typeface="Inter" pitchFamily="34" charset="-120"/>
+              </a:rPr>
+              <a:t>24 of 33 stores raised service net to gross. 9 declined.</a:t>
+            </a:r>
+            <a:endParaRPr lang="en-US" sz="1600" dirty="0"/>
+          </a:p>
+        </p:txBody>
       </p:sp>
     </p:spTree>
   </p:cSld>

--- a/day2-deck/decks/Fixed Ops Profitability - House Style.pptx
+++ b/day2-deck/decks/Fixed Ops Profitability - House Style.pptx
@@ -19672,7 +19672,27 @@
       </p:sp>
       <p:sp>
         <p:nvSpPr>
-          <p:cNvPr id="39" name="Text 37"/>
+          <p:cNvPr id="39" name="Shape 37"/>
+          <p:cNvSpPr/>
+          <p:nvPr/>
+        </p:nvSpPr>
+        <p:spPr>
+          <a:xfrm>
+            <a:off x="7775448" y="3796589"/>
+            <a:ext cx="64008" cy="755294"/>
+          </a:xfrm>
+          <a:prstGeom prst="rect">
+            <a:avLst/>
+          </a:prstGeom>
+          <a:solidFill>
+            <a:srgbClr val="2587C5"/>
+          </a:solidFill>
+          <a:ln/>
+        </p:spPr>
+      </p:sp>
+      <p:sp>
+        <p:nvSpPr>
+          <p:cNvPr id="40" name="Text 38"/>
           <p:cNvSpPr txBox="1"/>
           <p:nvPr/>
         </p:nvSpPr>
@@ -19711,7 +19731,7 @@
       </p:sp>
       <p:sp>
         <p:nvSpPr>
-          <p:cNvPr id="40" name="Text 38"/>
+          <p:cNvPr id="41" name="Text 39"/>
           <p:cNvSpPr txBox="1"/>
           <p:nvPr/>
         </p:nvSpPr>
@@ -19790,7 +19810,7 @@
       </p:sp>
       <p:sp>
         <p:nvSpPr>
-          <p:cNvPr id="41" name="Text 39"/>
+          <p:cNvPr id="42" name="Text 40"/>
           <p:cNvSpPr txBox="1"/>
           <p:nvPr/>
         </p:nvSpPr>
@@ -19829,7 +19849,7 @@
       </p:sp>
       <p:sp>
         <p:nvSpPr>
-          <p:cNvPr id="42" name="Text 40"/>
+          <p:cNvPr id="43" name="Text 41"/>
           <p:cNvSpPr txBox="1"/>
           <p:nvPr/>
         </p:nvSpPr>
@@ -19868,7 +19888,7 @@
       </p:sp>
       <p:sp>
         <p:nvSpPr>
-          <p:cNvPr id="43" name="Text 41"/>
+          <p:cNvPr id="44" name="Text 42"/>
           <p:cNvSpPr txBox="1"/>
           <p:nvPr/>
         </p:nvSpPr>
@@ -19947,7 +19967,7 @@
       </p:sp>
       <p:sp>
         <p:nvSpPr>
-          <p:cNvPr id="44" name="Text 42"/>
+          <p:cNvPr id="45" name="Text 43"/>
           <p:cNvSpPr txBox="1"/>
           <p:nvPr/>
         </p:nvSpPr>
@@ -19986,7 +20006,7 @@
       </p:sp>
       <p:sp>
         <p:nvSpPr>
-          <p:cNvPr id="45" name="Shape 43"/>
+          <p:cNvPr id="46" name="Shape 44"/>
           <p:cNvSpPr/>
           <p:nvPr/>
         </p:nvSpPr>
@@ -20006,7 +20026,27 @@
       </p:sp>
       <p:sp>
         <p:nvSpPr>
-          <p:cNvPr id="46" name="Text 44"/>
+          <p:cNvPr id="47" name="Shape 45"/>
+          <p:cNvSpPr/>
+          <p:nvPr/>
+        </p:nvSpPr>
+        <p:spPr>
+          <a:xfrm>
+            <a:off x="7775448" y="5453482"/>
+            <a:ext cx="64008" cy="755294"/>
+          </a:xfrm>
+          <a:prstGeom prst="rect">
+            <a:avLst/>
+          </a:prstGeom>
+          <a:solidFill>
+            <a:srgbClr val="2587C5"/>
+          </a:solidFill>
+          <a:ln/>
+        </p:spPr>
+      </p:sp>
+      <p:sp>
+        <p:nvSpPr>
+          <p:cNvPr id="48" name="Text 46"/>
           <p:cNvSpPr txBox="1"/>
           <p:nvPr/>
         </p:nvSpPr>
@@ -20045,7 +20085,7 @@
       </p:sp>
       <p:sp>
         <p:nvSpPr>
-          <p:cNvPr id="47" name="Text 45"/>
+          <p:cNvPr id="49" name="Text 47"/>
           <p:cNvSpPr txBox="1"/>
           <p:nvPr/>
         </p:nvSpPr>
@@ -20124,7 +20164,7 @@
       </p:sp>
       <p:sp>
         <p:nvSpPr>
-          <p:cNvPr id="48" name="Text 46"/>
+          <p:cNvPr id="50" name="Text 48"/>
           <p:cNvSpPr txBox="1"/>
           <p:nvPr/>
         </p:nvSpPr>
@@ -20163,7 +20203,7 @@
       </p:sp>
       <p:sp>
         <p:nvSpPr>
-          <p:cNvPr id="49" name="Shape 47"/>
+          <p:cNvPr id="51" name="Shape 49"/>
           <p:cNvSpPr/>
           <p:nvPr/>
         </p:nvSpPr>
@@ -20183,7 +20223,7 @@
       </p:sp>
       <p:sp>
         <p:nvSpPr>
-          <p:cNvPr id="50" name="Text 48"/>
+          <p:cNvPr id="52" name="Text 50"/>
           <p:cNvSpPr txBox="1"/>
           <p:nvPr/>
         </p:nvSpPr>
@@ -20222,7 +20262,7 @@
       </p:sp>
       <p:sp>
         <p:nvSpPr>
-          <p:cNvPr id="51" name="Text 49"/>
+          <p:cNvPr id="53" name="Text 51"/>
           <p:cNvSpPr txBox="1"/>
           <p:nvPr/>
         </p:nvSpPr>
@@ -20261,7 +20301,7 @@
       </p:sp>
       <p:sp>
         <p:nvSpPr>
-          <p:cNvPr id="52" name="Shape 50"/>
+          <p:cNvPr id="54" name="Shape 52"/>
           <p:cNvSpPr/>
           <p:nvPr/>
         </p:nvSpPr>
@@ -20281,7 +20321,7 @@
       </p:sp>
       <p:sp>
         <p:nvSpPr>
-          <p:cNvPr id="53" name="Text 51"/>
+          <p:cNvPr id="55" name="Text 53"/>
           <p:cNvSpPr txBox="1"/>
           <p:nvPr/>
         </p:nvSpPr>
@@ -20320,7 +20360,7 @@
       </p:sp>
       <p:sp>
         <p:nvSpPr>
-          <p:cNvPr id="54" name="Text 52"/>
+          <p:cNvPr id="56" name="Text 54"/>
           <p:cNvSpPr txBox="1"/>
           <p:nvPr/>
         </p:nvSpPr>
@@ -20399,7 +20439,7 @@
       </p:sp>
       <p:sp>
         <p:nvSpPr>
-          <p:cNvPr id="55" name="Text 53"/>
+          <p:cNvPr id="57" name="Text 55"/>
           <p:cNvSpPr txBox="1"/>
           <p:nvPr/>
         </p:nvSpPr>
@@ -20438,7 +20478,27 @@
       </p:sp>
       <p:sp>
         <p:nvSpPr>
-          <p:cNvPr id="56" name="Text 54"/>
+          <p:cNvPr id="58" name="Shape 56"/>
+          <p:cNvSpPr/>
+          <p:nvPr/>
+        </p:nvSpPr>
+        <p:spPr>
+          <a:xfrm>
+            <a:off x="11466576" y="2968142"/>
+            <a:ext cx="64008" cy="755294"/>
+          </a:xfrm>
+          <a:prstGeom prst="rect">
+            <a:avLst/>
+          </a:prstGeom>
+          <a:solidFill>
+            <a:srgbClr val="2587C5"/>
+          </a:solidFill>
+          <a:ln/>
+        </p:spPr>
+      </p:sp>
+      <p:sp>
+        <p:nvSpPr>
+          <p:cNvPr id="59" name="Text 57"/>
           <p:cNvSpPr txBox="1"/>
           <p:nvPr/>
         </p:nvSpPr>
@@ -20477,7 +20537,7 @@
       </p:sp>
       <p:sp>
         <p:nvSpPr>
-          <p:cNvPr id="57" name="Text 55"/>
+          <p:cNvPr id="60" name="Text 58"/>
           <p:cNvSpPr txBox="1"/>
           <p:nvPr/>
         </p:nvSpPr>
@@ -20556,7 +20616,7 @@
       </p:sp>
       <p:sp>
         <p:nvSpPr>
-          <p:cNvPr id="58" name="Text 56"/>
+          <p:cNvPr id="61" name="Text 59"/>
           <p:cNvSpPr txBox="1"/>
           <p:nvPr/>
         </p:nvSpPr>
@@ -20595,7 +20655,7 @@
       </p:sp>
       <p:sp>
         <p:nvSpPr>
-          <p:cNvPr id="59" name="Shape 57"/>
+          <p:cNvPr id="62" name="Shape 60"/>
           <p:cNvSpPr/>
           <p:nvPr/>
         </p:nvSpPr>
@@ -20615,7 +20675,7 @@
       </p:sp>
       <p:sp>
         <p:nvSpPr>
-          <p:cNvPr id="60" name="Text 58"/>
+          <p:cNvPr id="63" name="Text 61"/>
           <p:cNvSpPr txBox="1"/>
           <p:nvPr/>
         </p:nvSpPr>
@@ -20654,7 +20714,7 @@
       </p:sp>
       <p:sp>
         <p:nvSpPr>
-          <p:cNvPr id="61" name="Text 59"/>
+          <p:cNvPr id="64" name="Text 62"/>
           <p:cNvSpPr txBox="1"/>
           <p:nvPr/>
         </p:nvSpPr>
@@ -20733,7 +20793,7 @@
       </p:sp>
       <p:sp>
         <p:nvSpPr>
-          <p:cNvPr id="62" name="Text 60"/>
+          <p:cNvPr id="65" name="Text 63"/>
           <p:cNvSpPr txBox="1"/>
           <p:nvPr/>
         </p:nvSpPr>
@@ -20772,7 +20832,7 @@
       </p:sp>
       <p:sp>
         <p:nvSpPr>
-          <p:cNvPr id="63" name="Shape 61"/>
+          <p:cNvPr id="66" name="Shape 64"/>
           <p:cNvSpPr/>
           <p:nvPr/>
         </p:nvSpPr>
@@ -20792,7 +20852,7 @@
       </p:sp>
       <p:sp>
         <p:nvSpPr>
-          <p:cNvPr id="64" name="Text 62"/>
+          <p:cNvPr id="67" name="Text 65"/>
           <p:cNvSpPr txBox="1"/>
           <p:nvPr/>
         </p:nvSpPr>
@@ -20831,7 +20891,7 @@
       </p:sp>
       <p:sp>
         <p:nvSpPr>
-          <p:cNvPr id="65" name="Text 63"/>
+          <p:cNvPr id="68" name="Text 66"/>
           <p:cNvSpPr txBox="1"/>
           <p:nvPr/>
         </p:nvSpPr>
@@ -20910,7 +20970,7 @@
       </p:sp>
       <p:sp>
         <p:nvSpPr>
-          <p:cNvPr id="66" name="Text 64"/>
+          <p:cNvPr id="69" name="Text 67"/>
           <p:cNvSpPr txBox="1"/>
           <p:nvPr/>
         </p:nvSpPr>
@@ -20949,7 +21009,7 @@
       </p:sp>
       <p:sp>
         <p:nvSpPr>
-          <p:cNvPr id="67" name="Shape 65"/>
+          <p:cNvPr id="70" name="Shape 68"/>
           <p:cNvSpPr/>
           <p:nvPr/>
         </p:nvSpPr>
@@ -20969,7 +21029,27 @@
       </p:sp>
       <p:sp>
         <p:nvSpPr>
-          <p:cNvPr id="68" name="Text 66"/>
+          <p:cNvPr id="71" name="Shape 69"/>
+          <p:cNvSpPr/>
+          <p:nvPr/>
+        </p:nvSpPr>
+        <p:spPr>
+          <a:xfrm>
+            <a:off x="11466576" y="5453482"/>
+            <a:ext cx="64008" cy="755294"/>
+          </a:xfrm>
+          <a:prstGeom prst="rect">
+            <a:avLst/>
+          </a:prstGeom>
+          <a:solidFill>
+            <a:srgbClr val="2587C5"/>
+          </a:solidFill>
+          <a:ln/>
+        </p:spPr>
+      </p:sp>
+      <p:sp>
+        <p:nvSpPr>
+          <p:cNvPr id="72" name="Text 70"/>
           <p:cNvSpPr txBox="1"/>
           <p:nvPr/>
         </p:nvSpPr>
@@ -21008,7 +21088,7 @@
       </p:sp>
       <p:sp>
         <p:nvSpPr>
-          <p:cNvPr id="69" name="Text 67"/>
+          <p:cNvPr id="73" name="Text 71"/>
           <p:cNvSpPr txBox="1"/>
           <p:nvPr/>
         </p:nvSpPr>
@@ -21087,7 +21167,7 @@
       </p:sp>
       <p:sp>
         <p:nvSpPr>
-          <p:cNvPr id="70" name="Text 68"/>
+          <p:cNvPr id="74" name="Text 72"/>
           <p:cNvSpPr txBox="1"/>
           <p:nvPr/>
         </p:nvSpPr>
@@ -33262,7 +33342,27 @@
       </p:sp>
       <p:sp>
         <p:nvSpPr>
-          <p:cNvPr id="35" name="Text 33"/>
+          <p:cNvPr id="35" name="Shape 33"/>
+          <p:cNvSpPr/>
+          <p:nvPr/>
+        </p:nvSpPr>
+        <p:spPr>
+          <a:xfrm>
+            <a:off x="7775448" y="2968142"/>
+            <a:ext cx="64008" cy="755294"/>
+          </a:xfrm>
+          <a:prstGeom prst="rect">
+            <a:avLst/>
+          </a:prstGeom>
+          <a:solidFill>
+            <a:srgbClr val="2587C5"/>
+          </a:solidFill>
+          <a:ln/>
+        </p:spPr>
+      </p:sp>
+      <p:sp>
+        <p:nvSpPr>
+          <p:cNvPr id="36" name="Text 34"/>
           <p:cNvSpPr txBox="1"/>
           <p:nvPr/>
         </p:nvSpPr>
@@ -33301,7 +33401,7 @@
       </p:sp>
       <p:sp>
         <p:nvSpPr>
-          <p:cNvPr id="36" name="Text 34"/>
+          <p:cNvPr id="37" name="Text 35"/>
           <p:cNvSpPr txBox="1"/>
           <p:nvPr/>
         </p:nvSpPr>
@@ -33380,7 +33480,7 @@
       </p:sp>
       <p:sp>
         <p:nvSpPr>
-          <p:cNvPr id="37" name="Text 35"/>
+          <p:cNvPr id="38" name="Text 36"/>
           <p:cNvSpPr txBox="1"/>
           <p:nvPr/>
         </p:nvSpPr>
@@ -33419,7 +33519,7 @@
       </p:sp>
       <p:sp>
         <p:nvSpPr>
-          <p:cNvPr id="38" name="Shape 36"/>
+          <p:cNvPr id="39" name="Shape 37"/>
           <p:cNvSpPr/>
           <p:nvPr/>
         </p:nvSpPr>
@@ -33439,7 +33539,7 @@
       </p:sp>
       <p:sp>
         <p:nvSpPr>
-          <p:cNvPr id="39" name="Text 37"/>
+          <p:cNvPr id="40" name="Text 38"/>
           <p:cNvSpPr txBox="1"/>
           <p:nvPr/>
         </p:nvSpPr>
@@ -33478,7 +33578,7 @@
       </p:sp>
       <p:sp>
         <p:nvSpPr>
-          <p:cNvPr id="40" name="Text 38"/>
+          <p:cNvPr id="41" name="Text 39"/>
           <p:cNvSpPr txBox="1"/>
           <p:nvPr/>
         </p:nvSpPr>
@@ -33557,7 +33657,7 @@
       </p:sp>
       <p:sp>
         <p:nvSpPr>
-          <p:cNvPr id="41" name="Text 39"/>
+          <p:cNvPr id="42" name="Text 40"/>
           <p:cNvSpPr txBox="1"/>
           <p:nvPr/>
         </p:nvSpPr>
@@ -33596,7 +33696,7 @@
       </p:sp>
       <p:sp>
         <p:nvSpPr>
-          <p:cNvPr id="42" name="Text 40"/>
+          <p:cNvPr id="43" name="Text 41"/>
           <p:cNvSpPr txBox="1"/>
           <p:nvPr/>
         </p:nvSpPr>
@@ -33635,7 +33735,7 @@
       </p:sp>
       <p:sp>
         <p:nvSpPr>
-          <p:cNvPr id="43" name="Text 41"/>
+          <p:cNvPr id="44" name="Text 42"/>
           <p:cNvSpPr txBox="1"/>
           <p:nvPr/>
         </p:nvSpPr>
@@ -33714,7 +33814,7 @@
       </p:sp>
       <p:sp>
         <p:nvSpPr>
-          <p:cNvPr id="44" name="Text 42"/>
+          <p:cNvPr id="45" name="Text 43"/>
           <p:cNvSpPr txBox="1"/>
           <p:nvPr/>
         </p:nvSpPr>
@@ -33753,7 +33853,7 @@
       </p:sp>
       <p:sp>
         <p:nvSpPr>
-          <p:cNvPr id="45" name="Shape 43"/>
+          <p:cNvPr id="46" name="Shape 44"/>
           <p:cNvSpPr/>
           <p:nvPr/>
         </p:nvSpPr>
@@ -33773,7 +33873,7 @@
       </p:sp>
       <p:sp>
         <p:nvSpPr>
-          <p:cNvPr id="46" name="Text 44"/>
+          <p:cNvPr id="47" name="Text 45"/>
           <p:cNvSpPr txBox="1"/>
           <p:nvPr/>
         </p:nvSpPr>
@@ -33812,7 +33912,7 @@
       </p:sp>
       <p:sp>
         <p:nvSpPr>
-          <p:cNvPr id="47" name="Text 45"/>
+          <p:cNvPr id="48" name="Text 46"/>
           <p:cNvSpPr txBox="1"/>
           <p:nvPr/>
         </p:nvSpPr>
@@ -33891,7 +33991,7 @@
       </p:sp>
       <p:sp>
         <p:nvSpPr>
-          <p:cNvPr id="48" name="Text 46"/>
+          <p:cNvPr id="49" name="Text 47"/>
           <p:cNvSpPr txBox="1"/>
           <p:nvPr/>
         </p:nvSpPr>
@@ -33930,7 +34030,7 @@
       </p:sp>
       <p:sp>
         <p:nvSpPr>
-          <p:cNvPr id="49" name="Shape 47"/>
+          <p:cNvPr id="50" name="Shape 48"/>
           <p:cNvSpPr/>
           <p:nvPr/>
         </p:nvSpPr>
@@ -33950,7 +34050,7 @@
       </p:sp>
       <p:sp>
         <p:nvSpPr>
-          <p:cNvPr id="50" name="Text 48"/>
+          <p:cNvPr id="51" name="Text 49"/>
           <p:cNvSpPr txBox="1"/>
           <p:nvPr/>
         </p:nvSpPr>
@@ -33989,7 +34089,7 @@
       </p:sp>
       <p:sp>
         <p:nvSpPr>
-          <p:cNvPr id="51" name="Text 49"/>
+          <p:cNvPr id="52" name="Text 50"/>
           <p:cNvSpPr txBox="1"/>
           <p:nvPr/>
         </p:nvSpPr>
@@ -34028,7 +34128,7 @@
       </p:sp>
       <p:sp>
         <p:nvSpPr>
-          <p:cNvPr id="52" name="Shape 50"/>
+          <p:cNvPr id="53" name="Shape 51"/>
           <p:cNvSpPr/>
           <p:nvPr/>
         </p:nvSpPr>
@@ -34048,7 +34148,7 @@
       </p:sp>
       <p:sp>
         <p:nvSpPr>
-          <p:cNvPr id="53" name="Text 51"/>
+          <p:cNvPr id="54" name="Text 52"/>
           <p:cNvSpPr txBox="1"/>
           <p:nvPr/>
         </p:nvSpPr>
@@ -34087,7 +34187,7 @@
       </p:sp>
       <p:sp>
         <p:nvSpPr>
-          <p:cNvPr id="54" name="Text 52"/>
+          <p:cNvPr id="55" name="Text 53"/>
           <p:cNvSpPr txBox="1"/>
           <p:nvPr/>
         </p:nvSpPr>
@@ -34166,7 +34266,7 @@
       </p:sp>
       <p:sp>
         <p:nvSpPr>
-          <p:cNvPr id="55" name="Text 53"/>
+          <p:cNvPr id="56" name="Text 54"/>
           <p:cNvSpPr txBox="1"/>
           <p:nvPr/>
         </p:nvSpPr>
@@ -34205,7 +34305,7 @@
       </p:sp>
       <p:sp>
         <p:nvSpPr>
-          <p:cNvPr id="56" name="Shape 54"/>
+          <p:cNvPr id="57" name="Shape 55"/>
           <p:cNvSpPr/>
           <p:nvPr/>
         </p:nvSpPr>
@@ -34225,7 +34325,7 @@
       </p:sp>
       <p:sp>
         <p:nvSpPr>
-          <p:cNvPr id="57" name="Text 55"/>
+          <p:cNvPr id="58" name="Text 56"/>
           <p:cNvSpPr txBox="1"/>
           <p:nvPr/>
         </p:nvSpPr>
@@ -34264,7 +34364,7 @@
       </p:sp>
       <p:sp>
         <p:nvSpPr>
-          <p:cNvPr id="58" name="Text 56"/>
+          <p:cNvPr id="59" name="Text 57"/>
           <p:cNvSpPr txBox="1"/>
           <p:nvPr/>
         </p:nvSpPr>
@@ -34343,7 +34443,7 @@
       </p:sp>
       <p:sp>
         <p:nvSpPr>
-          <p:cNvPr id="59" name="Text 57"/>
+          <p:cNvPr id="60" name="Text 58"/>
           <p:cNvSpPr txBox="1"/>
           <p:nvPr/>
         </p:nvSpPr>
@@ -34382,7 +34482,7 @@
       </p:sp>
       <p:sp>
         <p:nvSpPr>
-          <p:cNvPr id="60" name="Shape 58"/>
+          <p:cNvPr id="61" name="Shape 59"/>
           <p:cNvSpPr/>
           <p:nvPr/>
         </p:nvSpPr>
@@ -34402,7 +34502,27 @@
       </p:sp>
       <p:sp>
         <p:nvSpPr>
-          <p:cNvPr id="61" name="Text 59"/>
+          <p:cNvPr id="62" name="Shape 60"/>
+          <p:cNvSpPr/>
+          <p:nvPr/>
+        </p:nvSpPr>
+        <p:spPr>
+          <a:xfrm>
+            <a:off x="11466576" y="3796589"/>
+            <a:ext cx="64008" cy="755294"/>
+          </a:xfrm>
+          <a:prstGeom prst="rect">
+            <a:avLst/>
+          </a:prstGeom>
+          <a:solidFill>
+            <a:srgbClr val="2587C5"/>
+          </a:solidFill>
+          <a:ln/>
+        </p:spPr>
+      </p:sp>
+      <p:sp>
+        <p:nvSpPr>
+          <p:cNvPr id="63" name="Text 61"/>
           <p:cNvSpPr txBox="1"/>
           <p:nvPr/>
         </p:nvSpPr>
@@ -34441,7 +34561,7 @@
       </p:sp>
       <p:sp>
         <p:nvSpPr>
-          <p:cNvPr id="62" name="Text 60"/>
+          <p:cNvPr id="64" name="Text 62"/>
           <p:cNvSpPr txBox="1"/>
           <p:nvPr/>
         </p:nvSpPr>
@@ -34520,7 +34640,7 @@
       </p:sp>
       <p:sp>
         <p:nvSpPr>
-          <p:cNvPr id="63" name="Text 61"/>
+          <p:cNvPr id="65" name="Text 63"/>
           <p:cNvSpPr txBox="1"/>
           <p:nvPr/>
         </p:nvSpPr>
@@ -34559,7 +34679,7 @@
       </p:sp>
       <p:sp>
         <p:nvSpPr>
-          <p:cNvPr id="64" name="Text 62"/>
+          <p:cNvPr id="66" name="Text 64"/>
           <p:cNvSpPr txBox="1"/>
           <p:nvPr/>
         </p:nvSpPr>
@@ -34598,7 +34718,7 @@
       </p:sp>
       <p:sp>
         <p:nvSpPr>
-          <p:cNvPr id="65" name="Text 63"/>
+          <p:cNvPr id="67" name="Text 65"/>
           <p:cNvSpPr txBox="1"/>
           <p:nvPr/>
         </p:nvSpPr>
@@ -34677,7 +34797,7 @@
       </p:sp>
       <p:sp>
         <p:nvSpPr>
-          <p:cNvPr id="66" name="Text 64"/>
+          <p:cNvPr id="68" name="Text 66"/>
           <p:cNvSpPr txBox="1"/>
           <p:nvPr/>
         </p:nvSpPr>
@@ -34716,7 +34836,7 @@
       </p:sp>
       <p:sp>
         <p:nvSpPr>
-          <p:cNvPr id="67" name="Shape 65"/>
+          <p:cNvPr id="69" name="Shape 67"/>
           <p:cNvSpPr/>
           <p:nvPr/>
         </p:nvSpPr>
@@ -34736,7 +34856,7 @@
       </p:sp>
       <p:sp>
         <p:nvSpPr>
-          <p:cNvPr id="68" name="Text 66"/>
+          <p:cNvPr id="70" name="Text 68"/>
           <p:cNvSpPr txBox="1"/>
           <p:nvPr/>
         </p:nvSpPr>
@@ -34775,7 +34895,7 @@
       </p:sp>
       <p:sp>
         <p:nvSpPr>
-          <p:cNvPr id="69" name="Text 67"/>
+          <p:cNvPr id="71" name="Text 69"/>
           <p:cNvSpPr txBox="1"/>
           <p:nvPr/>
         </p:nvSpPr>
@@ -34854,7 +34974,7 @@
       </p:sp>
       <p:sp>
         <p:nvSpPr>
-          <p:cNvPr id="70" name="Text 68"/>
+          <p:cNvPr id="72" name="Text 70"/>
           <p:cNvSpPr txBox="1"/>
           <p:nvPr/>
         </p:nvSpPr>
@@ -47270,7 +47390,27 @@
       </p:sp>
       <p:sp>
         <p:nvSpPr>
-          <p:cNvPr id="41" name="Text 39"/>
+          <p:cNvPr id="41" name="Shape 39"/>
+          <p:cNvSpPr/>
+          <p:nvPr/>
+        </p:nvSpPr>
+        <p:spPr>
+          <a:xfrm>
+            <a:off x="7775448" y="3796589"/>
+            <a:ext cx="64008" cy="755294"/>
+          </a:xfrm>
+          <a:prstGeom prst="rect">
+            <a:avLst/>
+          </a:prstGeom>
+          <a:solidFill>
+            <a:srgbClr val="2587C5"/>
+          </a:solidFill>
+          <a:ln/>
+        </p:spPr>
+      </p:sp>
+      <p:sp>
+        <p:nvSpPr>
+          <p:cNvPr id="42" name="Text 40"/>
           <p:cNvSpPr txBox="1"/>
           <p:nvPr/>
         </p:nvSpPr>
@@ -47309,7 +47449,7 @@
       </p:sp>
       <p:sp>
         <p:nvSpPr>
-          <p:cNvPr id="42" name="Text 40"/>
+          <p:cNvPr id="43" name="Text 41"/>
           <p:cNvSpPr txBox="1"/>
           <p:nvPr/>
         </p:nvSpPr>
@@ -47388,7 +47528,7 @@
       </p:sp>
       <p:sp>
         <p:nvSpPr>
-          <p:cNvPr id="43" name="Text 41"/>
+          <p:cNvPr id="44" name="Text 42"/>
           <p:cNvSpPr txBox="1"/>
           <p:nvPr/>
         </p:nvSpPr>
@@ -47427,7 +47567,7 @@
       </p:sp>
       <p:sp>
         <p:nvSpPr>
-          <p:cNvPr id="44" name="Text 42"/>
+          <p:cNvPr id="45" name="Text 43"/>
           <p:cNvSpPr txBox="1"/>
           <p:nvPr/>
         </p:nvSpPr>
@@ -47466,7 +47606,7 @@
       </p:sp>
       <p:sp>
         <p:nvSpPr>
-          <p:cNvPr id="45" name="Text 43"/>
+          <p:cNvPr id="46" name="Text 44"/>
           <p:cNvSpPr txBox="1"/>
           <p:nvPr/>
         </p:nvSpPr>
@@ -47545,7 +47685,7 @@
       </p:sp>
       <p:sp>
         <p:nvSpPr>
-          <p:cNvPr id="46" name="Text 44"/>
+          <p:cNvPr id="47" name="Text 45"/>
           <p:cNvSpPr txBox="1"/>
           <p:nvPr/>
         </p:nvSpPr>
@@ -47584,7 +47724,7 @@
       </p:sp>
       <p:sp>
         <p:nvSpPr>
-          <p:cNvPr id="47" name="Shape 45"/>
+          <p:cNvPr id="48" name="Shape 46"/>
           <p:cNvSpPr/>
           <p:nvPr/>
         </p:nvSpPr>
@@ -47604,7 +47744,7 @@
       </p:sp>
       <p:sp>
         <p:nvSpPr>
-          <p:cNvPr id="48" name="Text 46"/>
+          <p:cNvPr id="49" name="Text 47"/>
           <p:cNvSpPr txBox="1"/>
           <p:nvPr/>
         </p:nvSpPr>
@@ -47643,7 +47783,7 @@
       </p:sp>
       <p:sp>
         <p:nvSpPr>
-          <p:cNvPr id="49" name="Text 47"/>
+          <p:cNvPr id="50" name="Text 48"/>
           <p:cNvSpPr txBox="1"/>
           <p:nvPr/>
         </p:nvSpPr>
@@ -47722,7 +47862,7 @@
       </p:sp>
       <p:sp>
         <p:nvSpPr>
-          <p:cNvPr id="50" name="Text 48"/>
+          <p:cNvPr id="51" name="Text 49"/>
           <p:cNvSpPr txBox="1"/>
           <p:nvPr/>
         </p:nvSpPr>
@@ -47761,7 +47901,7 @@
       </p:sp>
       <p:sp>
         <p:nvSpPr>
-          <p:cNvPr id="51" name="Shape 49"/>
+          <p:cNvPr id="52" name="Shape 50"/>
           <p:cNvSpPr/>
           <p:nvPr/>
         </p:nvSpPr>
@@ -47781,7 +47921,7 @@
       </p:sp>
       <p:sp>
         <p:nvSpPr>
-          <p:cNvPr id="52" name="Text 50"/>
+          <p:cNvPr id="53" name="Text 51"/>
           <p:cNvSpPr txBox="1"/>
           <p:nvPr/>
         </p:nvSpPr>
@@ -47820,7 +47960,7 @@
       </p:sp>
       <p:sp>
         <p:nvSpPr>
-          <p:cNvPr id="53" name="Text 51"/>
+          <p:cNvPr id="54" name="Text 52"/>
           <p:cNvSpPr txBox="1"/>
           <p:nvPr/>
         </p:nvSpPr>
@@ -47859,7 +47999,7 @@
       </p:sp>
       <p:sp>
         <p:nvSpPr>
-          <p:cNvPr id="54" name="Shape 52"/>
+          <p:cNvPr id="55" name="Shape 53"/>
           <p:cNvSpPr/>
           <p:nvPr/>
         </p:nvSpPr>
@@ -47879,7 +48019,7 @@
       </p:sp>
       <p:sp>
         <p:nvSpPr>
-          <p:cNvPr id="55" name="Shape 53"/>
+          <p:cNvPr id="56" name="Shape 54"/>
           <p:cNvSpPr/>
           <p:nvPr/>
         </p:nvSpPr>
@@ -47899,7 +48039,7 @@
       </p:sp>
       <p:sp>
         <p:nvSpPr>
-          <p:cNvPr id="56" name="Text 54"/>
+          <p:cNvPr id="57" name="Text 55"/>
           <p:cNvSpPr txBox="1"/>
           <p:nvPr/>
         </p:nvSpPr>
@@ -47938,7 +48078,7 @@
       </p:sp>
       <p:sp>
         <p:nvSpPr>
-          <p:cNvPr id="57" name="Text 55"/>
+          <p:cNvPr id="58" name="Text 56"/>
           <p:cNvSpPr txBox="1"/>
           <p:nvPr/>
         </p:nvSpPr>
@@ -48017,7 +48157,7 @@
       </p:sp>
       <p:sp>
         <p:nvSpPr>
-          <p:cNvPr id="58" name="Text 56"/>
+          <p:cNvPr id="59" name="Text 57"/>
           <p:cNvSpPr txBox="1"/>
           <p:nvPr/>
         </p:nvSpPr>
@@ -48056,7 +48196,7 @@
       </p:sp>
       <p:sp>
         <p:nvSpPr>
-          <p:cNvPr id="59" name="Text 57"/>
+          <p:cNvPr id="60" name="Text 58"/>
           <p:cNvSpPr txBox="1"/>
           <p:nvPr/>
         </p:nvSpPr>
@@ -48095,7 +48235,7 @@
       </p:sp>
       <p:sp>
         <p:nvSpPr>
-          <p:cNvPr id="60" name="Text 58"/>
+          <p:cNvPr id="61" name="Text 59"/>
           <p:cNvSpPr txBox="1"/>
           <p:nvPr/>
         </p:nvSpPr>
@@ -48174,7 +48314,7 @@
       </p:sp>
       <p:sp>
         <p:nvSpPr>
-          <p:cNvPr id="61" name="Text 59"/>
+          <p:cNvPr id="62" name="Text 60"/>
           <p:cNvSpPr txBox="1"/>
           <p:nvPr/>
         </p:nvSpPr>
@@ -48213,7 +48353,7 @@
       </p:sp>
       <p:sp>
         <p:nvSpPr>
-          <p:cNvPr id="62" name="Shape 60"/>
+          <p:cNvPr id="63" name="Shape 61"/>
           <p:cNvSpPr/>
           <p:nvPr/>
         </p:nvSpPr>
@@ -48233,7 +48373,7 @@
       </p:sp>
       <p:sp>
         <p:nvSpPr>
-          <p:cNvPr id="63" name="Shape 61"/>
+          <p:cNvPr id="64" name="Shape 62"/>
           <p:cNvSpPr/>
           <p:nvPr/>
         </p:nvSpPr>
@@ -48253,7 +48393,7 @@
       </p:sp>
       <p:sp>
         <p:nvSpPr>
-          <p:cNvPr id="64" name="Text 62"/>
+          <p:cNvPr id="65" name="Text 63"/>
           <p:cNvSpPr txBox="1"/>
           <p:nvPr/>
         </p:nvSpPr>
@@ -48292,7 +48432,7 @@
       </p:sp>
       <p:sp>
         <p:nvSpPr>
-          <p:cNvPr id="65" name="Text 63"/>
+          <p:cNvPr id="66" name="Text 64"/>
           <p:cNvSpPr txBox="1"/>
           <p:nvPr/>
         </p:nvSpPr>
@@ -48371,7 +48511,7 @@
       </p:sp>
       <p:sp>
         <p:nvSpPr>
-          <p:cNvPr id="66" name="Text 64"/>
+          <p:cNvPr id="67" name="Text 65"/>
           <p:cNvSpPr txBox="1"/>
           <p:nvPr/>
         </p:nvSpPr>
@@ -48410,7 +48550,27 @@
       </p:sp>
       <p:sp>
         <p:nvSpPr>
-          <p:cNvPr id="67" name="Text 65"/>
+          <p:cNvPr id="68" name="Shape 66"/>
+          <p:cNvSpPr/>
+          <p:nvPr/>
+        </p:nvSpPr>
+        <p:spPr>
+          <a:xfrm>
+            <a:off x="11466576" y="4625035"/>
+            <a:ext cx="64008" cy="755294"/>
+          </a:xfrm>
+          <a:prstGeom prst="rect">
+            <a:avLst/>
+          </a:prstGeom>
+          <a:solidFill>
+            <a:srgbClr val="2587C5"/>
+          </a:solidFill>
+          <a:ln/>
+        </p:spPr>
+      </p:sp>
+      <p:sp>
+        <p:nvSpPr>
+          <p:cNvPr id="69" name="Text 67"/>
           <p:cNvSpPr txBox="1"/>
           <p:nvPr/>
         </p:nvSpPr>
@@ -48449,7 +48609,7 @@
       </p:sp>
       <p:sp>
         <p:nvSpPr>
-          <p:cNvPr id="68" name="Text 66"/>
+          <p:cNvPr id="70" name="Text 68"/>
           <p:cNvSpPr txBox="1"/>
           <p:nvPr/>
         </p:nvSpPr>
@@ -48528,7 +48688,7 @@
       </p:sp>
       <p:sp>
         <p:nvSpPr>
-          <p:cNvPr id="69" name="Text 67"/>
+          <p:cNvPr id="71" name="Text 69"/>
           <p:cNvSpPr txBox="1"/>
           <p:nvPr/>
         </p:nvSpPr>
@@ -48567,7 +48727,7 @@
       </p:sp>
       <p:sp>
         <p:nvSpPr>
-          <p:cNvPr id="70" name="Shape 68"/>
+          <p:cNvPr id="72" name="Shape 70"/>
           <p:cNvSpPr/>
           <p:nvPr/>
         </p:nvSpPr>
@@ -48587,7 +48747,7 @@
       </p:sp>
       <p:sp>
         <p:nvSpPr>
-          <p:cNvPr id="71" name="Shape 69"/>
+          <p:cNvPr id="73" name="Shape 71"/>
           <p:cNvSpPr/>
           <p:nvPr/>
         </p:nvSpPr>
@@ -48607,7 +48767,7 @@
       </p:sp>
       <p:sp>
         <p:nvSpPr>
-          <p:cNvPr id="72" name="Text 70"/>
+          <p:cNvPr id="74" name="Text 72"/>
           <p:cNvSpPr txBox="1"/>
           <p:nvPr/>
         </p:nvSpPr>
@@ -48646,7 +48806,7 @@
       </p:sp>
       <p:sp>
         <p:nvSpPr>
-          <p:cNvPr id="73" name="Text 71"/>
+          <p:cNvPr id="75" name="Text 73"/>
           <p:cNvSpPr txBox="1"/>
           <p:nvPr/>
         </p:nvSpPr>
@@ -48725,7 +48885,7 @@
       </p:sp>
       <p:sp>
         <p:nvSpPr>
-          <p:cNvPr id="74" name="Text 72"/>
+          <p:cNvPr id="76" name="Text 74"/>
           <p:cNvSpPr txBox="1"/>
           <p:nvPr/>
         </p:nvSpPr>

--- a/day2-deck/decks/Fixed Ops Profitability - House Style.pptx
+++ b/day2-deck/decks/Fixed Ops Profitability - House Style.pptx
@@ -20293,7 +20293,7 @@
                 <a:ea typeface="Inter" pitchFamily="34" charset="-122"/>
                 <a:cs typeface="Inter" pitchFamily="34" charset="-120"/>
               </a:rPr>
-              <a:t>Jul–Sep vs Jan–Mar this year</a:t>
+              <a:t>Q3 vs Q1, this year</a:t>
             </a:r>
             <a:endParaRPr lang="en-US" sz="1200" dirty="0"/>
           </a:p>
@@ -34120,7 +34120,7 @@
                 <a:ea typeface="Inter" pitchFamily="34" charset="-122"/>
                 <a:cs typeface="Inter" pitchFamily="34" charset="-120"/>
               </a:rPr>
-              <a:t>Jul–Sep vs Jan–Mar this year</a:t>
+              <a:t>Q3 vs Q1, this year</a:t>
             </a:r>
             <a:endParaRPr lang="en-US" sz="1200" dirty="0"/>
           </a:p>
@@ -47991,7 +47991,7 @@
                 <a:ea typeface="Inter" pitchFamily="34" charset="-122"/>
                 <a:cs typeface="Inter" pitchFamily="34" charset="-120"/>
               </a:rPr>
-              <a:t>Jul–Sep vs Jan–Mar this year</a:t>
+              <a:t>Q3 vs Q1, this year</a:t>
             </a:r>
             <a:endParaRPr lang="en-US" sz="1200" dirty="0"/>
           </a:p>

--- a/day2-deck/decks/Fixed Ops Profitability - House Style.pptx
+++ b/day2-deck/decks/Fixed Ops Profitability - House Style.pptx
@@ -251,31 +251,31 @@
                 <c:formatCode>General</c:formatCode>
                 <c:ptCount val="12"/>
                 <c:pt idx="0">
-                  <c:v>74.8</c:v>
+                  <c:v>74.5</c:v>
                 </c:pt>
                 <c:pt idx="1">
-                  <c:v>74.5</c:v>
+                  <c:v>74.2</c:v>
                 </c:pt>
                 <c:pt idx="2">
-                  <c:v>78.5</c:v>
+                  <c:v>78.2</c:v>
                 </c:pt>
                 <c:pt idx="3">
-                  <c:v>79.6</c:v>
+                  <c:v>79.2</c:v>
                 </c:pt>
                 <c:pt idx="4">
-                  <c:v>75.4</c:v>
+                  <c:v>75.2</c:v>
                 </c:pt>
                 <c:pt idx="5">
-                  <c:v>79.2</c:v>
+                  <c:v>79</c:v>
                 </c:pt>
                 <c:pt idx="6">
-                  <c:v>83</c:v>
+                  <c:v>82.9</c:v>
                 </c:pt>
                 <c:pt idx="7">
-                  <c:v>79.9</c:v>
+                  <c:v>79.8</c:v>
                 </c:pt>
                 <c:pt idx="8">
-                  <c:v>77.6</c:v>
+                  <c:v>77.5</c:v>
                 </c:pt>
                 <c:pt idx="9">
                   <c:v/>
@@ -3062,25 +3062,25 @@
                   <c:v/>
                 </c:pt>
                 <c:pt idx="2">
-                  <c:v>78.5</c:v>
+                  <c:v>78.2</c:v>
                 </c:pt>
                 <c:pt idx="3">
-                  <c:v>79.6</c:v>
+                  <c:v>79.2</c:v>
                 </c:pt>
                 <c:pt idx="4">
                   <c:v/>
                 </c:pt>
                 <c:pt idx="5">
-                  <c:v>79.2</c:v>
+                  <c:v>79</c:v>
                 </c:pt>
                 <c:pt idx="6">
-                  <c:v>83</c:v>
+                  <c:v>82.9</c:v>
                 </c:pt>
                 <c:pt idx="7">
-                  <c:v>79.9</c:v>
+                  <c:v>79.8</c:v>
                 </c:pt>
                 <c:pt idx="8">
-                  <c:v>77.6</c:v>
+                  <c:v>77.5</c:v>
                 </c:pt>
                 <c:pt idx="9">
                   <c:v/>
@@ -3366,10 +3366,10 @@
                 <c:formatCode>General</c:formatCode>
                 <c:ptCount val="12"/>
                 <c:pt idx="0">
-                  <c:v>74.8</c:v>
+                  <c:v>74.5</c:v>
                 </c:pt>
                 <c:pt idx="1">
-                  <c:v>74.5</c:v>
+                  <c:v>74.2</c:v>
                 </c:pt>
                 <c:pt idx="2">
                   <c:v/>
@@ -3378,7 +3378,7 @@
                   <c:v/>
                 </c:pt>
                 <c:pt idx="4">
-                  <c:v>75.4</c:v>
+                  <c:v>75.2</c:v>
                 </c:pt>
                 <c:pt idx="5">
                   <c:v/>
@@ -3676,10 +3676,10 @@
                 <c:formatCode>General</c:formatCode>
                 <c:ptCount val="12"/>
                 <c:pt idx="0">
-                  <c:v>77</c:v>
+                  <c:v>76.9</c:v>
                 </c:pt>
                 <c:pt idx="1">
-                  <c:v>75.1</c:v>
+                  <c:v>74.9</c:v>
                 </c:pt>
                 <c:pt idx="2">
                   <c:v/>
@@ -3688,7 +3688,7 @@
                   <c:v/>
                 </c:pt>
                 <c:pt idx="4">
-                  <c:v>76.9</c:v>
+                  <c:v>76.7</c:v>
                 </c:pt>
                 <c:pt idx="5">
                   <c:v/>
@@ -3703,13 +3703,13 @@
                   <c:v/>
                 </c:pt>
                 <c:pt idx="9">
-                  <c:v>82</c:v>
+                  <c:v>81.6</c:v>
                 </c:pt>
                 <c:pt idx="10">
                   <c:v/>
                 </c:pt>
                 <c:pt idx="11">
-                  <c:v>74.6</c:v>
+                  <c:v>74.5</c:v>
                 </c:pt>
               </c:numCache>
             </c:numRef>
@@ -3992,31 +3992,31 @@
                   <c:v/>
                 </c:pt>
                 <c:pt idx="2">
-                  <c:v>74.1</c:v>
+                  <c:v>74</c:v>
                 </c:pt>
                 <c:pt idx="3">
-                  <c:v>76.3</c:v>
+                  <c:v>76</c:v>
                 </c:pt>
                 <c:pt idx="4">
                   <c:v/>
                 </c:pt>
                 <c:pt idx="5">
-                  <c:v>77.8</c:v>
+                  <c:v>77.6</c:v>
                 </c:pt>
                 <c:pt idx="6">
-                  <c:v>78.4</c:v>
+                  <c:v>78.2</c:v>
                 </c:pt>
                 <c:pt idx="7">
-                  <c:v>75.9</c:v>
+                  <c:v>75.6</c:v>
                 </c:pt>
                 <c:pt idx="8">
-                  <c:v>72.7</c:v>
+                  <c:v>72.4</c:v>
                 </c:pt>
                 <c:pt idx="9">
                   <c:v/>
                 </c:pt>
                 <c:pt idx="10">
-                  <c:v>73.4</c:v>
+                  <c:v>73.1</c:v>
                 </c:pt>
                 <c:pt idx="11">
                   <c:v/>
@@ -4299,40 +4299,40 @@
                 <c:formatCode>General</c:formatCode>
                 <c:ptCount val="12"/>
                 <c:pt idx="0">
-                  <c:v>77</c:v>
+                  <c:v>76.9</c:v>
                 </c:pt>
                 <c:pt idx="1">
-                  <c:v>75.1</c:v>
+                  <c:v>74.9</c:v>
                 </c:pt>
                 <c:pt idx="2">
-                  <c:v>74.1</c:v>
+                  <c:v>74</c:v>
                 </c:pt>
                 <c:pt idx="3">
-                  <c:v>76.3</c:v>
+                  <c:v>76</c:v>
                 </c:pt>
                 <c:pt idx="4">
-                  <c:v>76.9</c:v>
+                  <c:v>76.7</c:v>
                 </c:pt>
                 <c:pt idx="5">
-                  <c:v>77.8</c:v>
+                  <c:v>77.6</c:v>
                 </c:pt>
                 <c:pt idx="6">
-                  <c:v>78.4</c:v>
+                  <c:v>78.2</c:v>
                 </c:pt>
                 <c:pt idx="7">
-                  <c:v>75.9</c:v>
+                  <c:v>75.6</c:v>
                 </c:pt>
                 <c:pt idx="8">
-                  <c:v>72.7</c:v>
+                  <c:v>72.4</c:v>
                 </c:pt>
                 <c:pt idx="9">
-                  <c:v>82</c:v>
+                  <c:v>81.6</c:v>
                 </c:pt>
                 <c:pt idx="10">
-                  <c:v>73.4</c:v>
+                  <c:v>73.1</c:v>
                 </c:pt>
                 <c:pt idx="11">
-                  <c:v>74.6</c:v>
+                  <c:v>74.5</c:v>
                 </c:pt>
               </c:numCache>
             </c:numRef>
@@ -6251,7 +6251,7 @@
           <a:p>
             <a:r>
               <a:rPr lang="en-US" dirty="0"/>
-              <a:t>Source: Qlik - Profit &amp; Loss. Jan-Sep. Same-store, INEOS excluded (opened 2026). P&amp;L line Fixed Ops Absorption % = Total Gross Profit - Fixed Ops / Fixed Expenses. GMC Prescott includes its body shop, as on the P&amp;L. YTD from YTD totals, not the mean of months. Store rows reconcile to the group on every input, both years. 2025 shown January-December; October-December pulled Oct 22 on the same basis (chart only).</a:t>
+              <a:t>Source: Qlik - Profit &amp; Loss. Jan-Sep. Same-store, INEOS excluded (opened 2026). P&amp;L line Fixed Ops Absorption % = Total Gross Profit - Fixed Ops / Fixed Expenses. GMC Prescott body shop taken out (its gross and its body shop fixed expenses), as everywhere in the deck (Noah, Oct 28). YTD from YTD totals, not the mean of months. Store rows reconcile to the group on every input, both years. 2025 shown January-December; October-December pulled Oct 22 on the same basis (chart only).</a:t>
             </a:r>
             <a:endParaRPr lang="en-US" dirty="0"/>
           </a:p>
@@ -6339,7 +6339,7 @@
           <a:p>
             <a:r>
               <a:rPr lang="en-US" dirty="0"/>
-              <a:t>Takeaway with the store call-outs (off the slide): 15 of 33 stores at or above the 78.1% group, led by Audi Henderson at 106.6%. Hyundai Prescott is lowest at 46.2%.Source: Qlik - Profit &amp; Loss. Jan-Sep. Same-store, INEOS excluded (opened 2026). P&amp;L line Fixed Ops Absorption % = Total Gross Profit - Fixed Ops / Fixed Expenses. GMC Prescott includes its body shop, as on the P&amp;L. Jan-Sep 2026 YTD. Green at or above the group, red below. Bars start at 30.0% so differences are visible.</a:t>
+              <a:t>Takeaway with the store call-outs (off the slide): 15 of 33 stores at or above the 77.9% group, led by Audi Henderson at 106.6%. Hyundai Prescott is lowest at 46.2%.Source: Qlik - Profit &amp; Loss. Jan-Sep. Same-store, INEOS excluded (opened 2026). P&amp;L line Fixed Ops Absorption % = Total Gross Profit - Fixed Ops / Fixed Expenses. GMC Prescott body shop taken out (its gross and its body shop fixed expenses), as everywhere in the deck (Noah, Oct 28). Jan-Sep 2026 YTD. Green at or above the group, red below. Bars start at 30.0% so differences are visible.</a:t>
             </a:r>
             <a:endParaRPr lang="en-US" dirty="0"/>
           </a:p>
@@ -6515,7 +6515,7 @@
           <a:p>
             <a:r>
               <a:rPr lang="en-US" dirty="0"/>
-              <a:t>Takeaway with the store call-outs (off the slide): Ask Lincoln, Cadillac and LR Reno what changed. Ask VW St George, Kia St George and VW Henderson what got in the way. Ask LR Henderson, LR Reno and Kia St George what they started this year.Source: Qlik - Profit &amp; Loss. Jan-Sep. Same-store, INEOS excluded (opened 2026). P&amp;L line Fixed Ops Absorption % = Total Gross Profit - Fixed Ops / Fixed Expenses. GMC Prescott includes its body shop, as on the P&amp;L. Top and bottom five stores by change in Fixed Ops Absorption %, Jan-Sep 2026 vs 2025. Moving now: Jul-Sep 2026 vs Jan-Mar 2026, each store against itself; the group moved +4.2 pts on the same basis, so part of every store's change is seasonal. Green bar at the right of a row: the store is on both the top five vs last year and the top five moving now.Conversation starter: each top store says one thing they started doing; each bottom store says what got in the way and what they would try. The room trades ideas. Moving now: ask the top three what they started this year.</a:t>
+              <a:t>Takeaway with the store call-outs (off the slide): Ask Lincoln, Cadillac and LR Reno what changed. Ask VW St George, Kia St George and VW Henderson what got in the way. Ask LR Henderson, LR Reno and Kia St George what they started this year.Source: Qlik - Profit &amp; Loss. Jan-Sep. Same-store, INEOS excluded (opened 2026). P&amp;L line Fixed Ops Absorption % = Total Gross Profit - Fixed Ops / Fixed Expenses. GMC Prescott body shop taken out (its gross and its body shop fixed expenses), as everywhere in the deck (Noah, Oct 28). Top and bottom five stores by change in Fixed Ops Absorption %, Jan-Sep 2026 vs 2025. Moving now: Jul-Sep 2026 vs Jan-Mar 2026, each store against itself; the group moved +4.4 pts on the same basis, so part of every store's change is seasonal. Green bar at the right of a row: the store is on both the top five vs last year and the top five moving now.Conversation starter: each top store says one thing they started doing; each bottom store says what got in the way and what they would try. The room trades ideas. Moving now: ask the top three what they started this year.</a:t>
             </a:r>
             <a:endParaRPr lang="en-US" dirty="0"/>
           </a:p>
@@ -13689,7 +13689,7 @@
         <p:spPr>
           <a:xfrm>
             <a:off x="3785616" y="2151755"/>
-            <a:ext cx="712549" cy="110352"/>
+            <a:ext cx="717031" cy="110352"/>
           </a:xfrm>
           <a:prstGeom prst="rect">
             <a:avLst/>
@@ -13826,7 +13826,7 @@
         <p:spPr>
           <a:xfrm>
             <a:off x="3785616" y="2391651"/>
-            <a:ext cx="579309" cy="110352"/>
+            <a:ext cx="585667" cy="110352"/>
           </a:xfrm>
           <a:prstGeom prst="rect">
             <a:avLst/>
@@ -13870,7 +13870,7 @@
                 <a:ea typeface="Inter" pitchFamily="34" charset="-122"/>
                 <a:cs typeface="Inter" pitchFamily="34" charset="-120"/>
               </a:rPr>
-              <a:t>+10.6 pts</a:t>
+              <a:t>+10.7 pts</a:t>
             </a:r>
             <a:endParaRPr lang="en-US" sz="1200" dirty="0"/>
           </a:p>
@@ -13963,7 +13963,7 @@
         <p:spPr>
           <a:xfrm>
             <a:off x="3785616" y="2631546"/>
-            <a:ext cx="412524" cy="110352"/>
+            <a:ext cx="410514" cy="110352"/>
           </a:xfrm>
           <a:prstGeom prst="rect">
             <a:avLst/>
@@ -14007,7 +14007,7 @@
                 <a:ea typeface="Inter" pitchFamily="34" charset="-122"/>
                 <a:cs typeface="Inter" pitchFamily="34" charset="-120"/>
               </a:rPr>
-              <a:t>+7.6 pts</a:t>
+              <a:t>+7.5 pts</a:t>
             </a:r>
             <a:endParaRPr lang="en-US" sz="1200" dirty="0"/>
           </a:p>
@@ -14100,7 +14100,7 @@
         <p:spPr>
           <a:xfrm>
             <a:off x="3785616" y="2871442"/>
-            <a:ext cx="384335" cy="110352"/>
+            <a:ext cx="388620" cy="110352"/>
           </a:xfrm>
           <a:prstGeom prst="rect">
             <a:avLst/>
@@ -14144,7 +14144,7 @@
                 <a:ea typeface="Inter" pitchFamily="34" charset="-122"/>
                 <a:cs typeface="Inter" pitchFamily="34" charset="-120"/>
               </a:rPr>
-              <a:t>+7.0 pts</a:t>
+              <a:t>+7.1 pts</a:t>
             </a:r>
             <a:endParaRPr lang="en-US" sz="1200" dirty="0"/>
           </a:p>
@@ -14237,7 +14237,7 @@
         <p:spPr>
           <a:xfrm>
             <a:off x="3785616" y="3111337"/>
-            <a:ext cx="345136" cy="110352"/>
+            <a:ext cx="344832" cy="110352"/>
           </a:xfrm>
           <a:prstGeom prst="rect">
             <a:avLst/>
@@ -14374,7 +14374,7 @@
         <p:spPr>
           <a:xfrm>
             <a:off x="3785616" y="3351233"/>
-            <a:ext cx="344254" cy="110352"/>
+            <a:ext cx="344832" cy="110352"/>
           </a:xfrm>
           <a:prstGeom prst="rect">
             <a:avLst/>
@@ -14511,7 +14511,7 @@
         <p:spPr>
           <a:xfrm>
             <a:off x="3785616" y="3591128"/>
-            <a:ext cx="326556" cy="110352"/>
+            <a:ext cx="328411" cy="110352"/>
           </a:xfrm>
           <a:prstGeom prst="rect">
             <a:avLst/>
@@ -14648,7 +14648,7 @@
         <p:spPr>
           <a:xfrm>
             <a:off x="3785616" y="3831024"/>
-            <a:ext cx="248228" cy="110352"/>
+            <a:ext cx="246308" cy="110352"/>
           </a:xfrm>
           <a:prstGeom prst="rect">
             <a:avLst/>
@@ -14785,7 +14785,7 @@
         <p:spPr>
           <a:xfrm>
             <a:off x="3785616" y="4070920"/>
-            <a:ext cx="176703" cy="110352"/>
+            <a:ext cx="175153" cy="110352"/>
           </a:xfrm>
           <a:prstGeom prst="rect">
             <a:avLst/>
@@ -14922,7 +14922,7 @@
         <p:spPr>
           <a:xfrm>
             <a:off x="3785616" y="4310815"/>
-            <a:ext cx="172791" cy="110352"/>
+            <a:ext cx="169679" cy="110352"/>
           </a:xfrm>
           <a:prstGeom prst="rect">
             <a:avLst/>
@@ -14966,7 +14966,7 @@
                 <a:ea typeface="Inter" pitchFamily="34" charset="-122"/>
                 <a:cs typeface="Inter" pitchFamily="34" charset="-120"/>
               </a:rPr>
-              <a:t>+3.2 pts</a:t>
+              <a:t>+3.1 pts</a:t>
             </a:r>
             <a:endParaRPr lang="en-US" sz="1200" dirty="0"/>
           </a:p>
@@ -15059,7 +15059,7 @@
         <p:spPr>
           <a:xfrm>
             <a:off x="3785616" y="4550711"/>
-            <a:ext cx="120839" cy="110352"/>
+            <a:ext cx="120417" cy="110352"/>
           </a:xfrm>
           <a:prstGeom prst="rect">
             <a:avLst/>
@@ -15196,7 +15196,7 @@
         <p:spPr>
           <a:xfrm>
             <a:off x="3785616" y="4790606"/>
-            <a:ext cx="109670" cy="110352"/>
+            <a:ext cx="109470" cy="110352"/>
           </a:xfrm>
           <a:prstGeom prst="rect">
             <a:avLst/>
@@ -15333,7 +15333,7 @@
         <p:spPr>
           <a:xfrm>
             <a:off x="3785616" y="5030502"/>
-            <a:ext cx="81021" cy="110352"/>
+            <a:ext cx="82103" cy="110352"/>
           </a:xfrm>
           <a:prstGeom prst="rect">
             <a:avLst/>
@@ -15470,7 +15470,7 @@
         <p:spPr>
           <a:xfrm>
             <a:off x="3785616" y="5270397"/>
-            <a:ext cx="69580" cy="110352"/>
+            <a:ext cx="71156" cy="110352"/>
           </a:xfrm>
           <a:prstGeom prst="rect">
             <a:avLst/>
@@ -15592,7 +15592,7 @@
                 <a:ea typeface="Inter" pitchFamily="34" charset="-122"/>
                 <a:cs typeface="Inter" pitchFamily="34" charset="-120"/>
               </a:rPr>
-              <a:t>SUBARU PRESCOTT</a:t>
+              <a:t>LR LV</a:t>
             </a:r>
             <a:endParaRPr lang="en-US" sz="1200" dirty="0"/>
           </a:p>
@@ -15606,7 +15606,144 @@
         </p:nvSpPr>
         <p:spPr>
           <a:xfrm>
-            <a:off x="3783808" y="5510293"/>
+            <a:off x="3785616" y="5510293"/>
+            <a:ext cx="12802" cy="110352"/>
+          </a:xfrm>
+          <a:prstGeom prst="rect">
+            <a:avLst/>
+          </a:prstGeom>
+          <a:solidFill>
+            <a:srgbClr val="12A566"/>
+          </a:solidFill>
+          <a:ln/>
+        </p:spPr>
+      </p:sp>
+      <p:sp>
+        <p:nvSpPr>
+          <p:cNvPr id="74" name="Text 72"/>
+          <p:cNvSpPr txBox="1"/>
+          <p:nvPr/>
+        </p:nvSpPr>
+        <p:spPr>
+          <a:xfrm>
+            <a:off x="4617720" y="5445521"/>
+            <a:ext cx="1234440" cy="239896"/>
+          </a:xfrm>
+          <a:prstGeom prst="rect">
+            <a:avLst/>
+          </a:prstGeom>
+          <a:noFill/>
+          <a:ln/>
+        </p:spPr>
+        <p:txBody>
+          <a:bodyPr wrap="square" lIns="0" tIns="0" rIns="0" bIns="0" rtlCol="0" anchor="ctr"/>
+          <a:lstStyle/>
+          <a:p>
+            <a:pPr algn="r" indent="0" marL="0">
+              <a:buNone/>
+            </a:pPr>
+            <a:r>
+              <a:rPr lang="en-US" sz="1200" b="1" dirty="0">
+                <a:solidFill>
+                  <a:srgbClr val="0B7A4A"/>
+                </a:solidFill>
+                <a:latin typeface="Inter" pitchFamily="34" charset="0"/>
+                <a:ea typeface="Inter" pitchFamily="34" charset="-122"/>
+                <a:cs typeface="Inter" pitchFamily="34" charset="-120"/>
+              </a:rPr>
+              <a:t>+0.0 pts</a:t>
+            </a:r>
+            <a:endParaRPr lang="en-US" sz="1200" dirty="0"/>
+          </a:p>
+        </p:txBody>
+      </p:sp>
+      <p:sp>
+        <p:nvSpPr>
+          <p:cNvPr id="75" name="Text 73"/>
+          <p:cNvSpPr txBox="1"/>
+          <p:nvPr/>
+        </p:nvSpPr>
+        <p:spPr>
+          <a:xfrm>
+            <a:off x="658368" y="5685416"/>
+            <a:ext cx="310896" cy="239896"/>
+          </a:xfrm>
+          <a:prstGeom prst="rect">
+            <a:avLst/>
+          </a:prstGeom>
+          <a:noFill/>
+          <a:ln/>
+        </p:spPr>
+        <p:txBody>
+          <a:bodyPr wrap="square" lIns="0" tIns="0" rIns="0" bIns="0" rtlCol="0" anchor="ctr"/>
+          <a:lstStyle/>
+          <a:p>
+            <a:pPr algn="r" indent="0" marL="0">
+              <a:buNone/>
+            </a:pPr>
+            <a:r>
+              <a:rPr lang="en-US" sz="1200" dirty="0">
+                <a:solidFill>
+                  <a:srgbClr val="9AA3AD"/>
+                </a:solidFill>
+                <a:latin typeface="Inter" pitchFamily="34" charset="0"/>
+                <a:ea typeface="Inter" pitchFamily="34" charset="-122"/>
+                <a:cs typeface="Inter" pitchFamily="34" charset="-120"/>
+              </a:rPr>
+              <a:t>17</a:t>
+            </a:r>
+            <a:endParaRPr lang="en-US" sz="1200" dirty="0"/>
+          </a:p>
+        </p:txBody>
+      </p:sp>
+      <p:sp>
+        <p:nvSpPr>
+          <p:cNvPr id="76" name="Text 74"/>
+          <p:cNvSpPr txBox="1"/>
+          <p:nvPr/>
+        </p:nvSpPr>
+        <p:spPr>
+          <a:xfrm>
+            <a:off x="1014984" y="5685416"/>
+            <a:ext cx="1920240" cy="239896"/>
+          </a:xfrm>
+          <a:prstGeom prst="rect">
+            <a:avLst/>
+          </a:prstGeom>
+          <a:noFill/>
+          <a:ln/>
+        </p:spPr>
+        <p:txBody>
+          <a:bodyPr wrap="square" lIns="0" tIns="0" rIns="0" bIns="0" rtlCol="0" anchor="ctr"/>
+          <a:lstStyle/>
+          <a:p>
+            <a:pPr indent="0" marL="0">
+              <a:buNone/>
+            </a:pPr>
+            <a:r>
+              <a:rPr lang="en-US" sz="1200" dirty="0">
+                <a:solidFill>
+                  <a:srgbClr val="1A1A1A"/>
+                </a:solidFill>
+                <a:latin typeface="Inter" pitchFamily="34" charset="0"/>
+                <a:ea typeface="Inter" pitchFamily="34" charset="-122"/>
+                <a:cs typeface="Inter" pitchFamily="34" charset="-120"/>
+              </a:rPr>
+              <a:t>SUBARU PRESCOTT</a:t>
+            </a:r>
+            <a:endParaRPr lang="en-US" sz="1200" dirty="0"/>
+          </a:p>
+        </p:txBody>
+      </p:sp>
+      <p:sp>
+        <p:nvSpPr>
+          <p:cNvPr id="77" name="Shape 75"/>
+          <p:cNvSpPr/>
+          <p:nvPr/>
+        </p:nvSpPr>
+        <p:spPr>
+          <a:xfrm>
+            <a:off x="3780142" y="5750188"/>
             <a:ext cx="12802" cy="110352"/>
           </a:xfrm>
           <a:prstGeom prst="rect">
@@ -15620,13 +15757,13 @@
       </p:sp>
       <p:sp>
         <p:nvSpPr>
-          <p:cNvPr id="74" name="Text 72"/>
-          <p:cNvSpPr txBox="1"/>
-          <p:nvPr/>
-        </p:nvSpPr>
-        <p:spPr>
-          <a:xfrm>
-            <a:off x="4617720" y="5445521"/>
+          <p:cNvPr id="78" name="Text 76"/>
+          <p:cNvSpPr txBox="1"/>
+          <p:nvPr/>
+        </p:nvSpPr>
+        <p:spPr>
+          <a:xfrm>
+            <a:off x="4617720" y="5685416"/>
             <a:ext cx="1234440" cy="239896"/>
           </a:xfrm>
           <a:prstGeom prst="rect">
@@ -15651,21 +15788,21 @@
                 <a:ea typeface="Inter" pitchFamily="34" charset="-122"/>
                 <a:cs typeface="Inter" pitchFamily="34" charset="-120"/>
               </a:rPr>
-              <a:t>−0.0 pts</a:t>
-            </a:r>
-            <a:endParaRPr lang="en-US" sz="1200" dirty="0"/>
-          </a:p>
-        </p:txBody>
-      </p:sp>
-      <p:sp>
-        <p:nvSpPr>
-          <p:cNvPr id="75" name="Text 73"/>
-          <p:cNvSpPr txBox="1"/>
-          <p:nvPr/>
-        </p:nvSpPr>
-        <p:spPr>
-          <a:xfrm>
-            <a:off x="658368" y="5685416"/>
+              <a:t>−0.1 pts</a:t>
+            </a:r>
+            <a:endParaRPr lang="en-US" sz="1200" dirty="0"/>
+          </a:p>
+        </p:txBody>
+      </p:sp>
+      <p:sp>
+        <p:nvSpPr>
+          <p:cNvPr id="79" name="Text 77"/>
+          <p:cNvSpPr txBox="1"/>
+          <p:nvPr/>
+        </p:nvSpPr>
+        <p:spPr>
+          <a:xfrm>
+            <a:off x="6208776" y="1847088"/>
             <a:ext cx="310896" cy="239896"/>
           </a:xfrm>
           <a:prstGeom prst="rect">
@@ -15690,21 +15827,21 @@
                 <a:ea typeface="Inter" pitchFamily="34" charset="-122"/>
                 <a:cs typeface="Inter" pitchFamily="34" charset="-120"/>
               </a:rPr>
-              <a:t>17</a:t>
-            </a:r>
-            <a:endParaRPr lang="en-US" sz="1200" dirty="0"/>
-          </a:p>
-        </p:txBody>
-      </p:sp>
-      <p:sp>
-        <p:nvSpPr>
-          <p:cNvPr id="76" name="Text 74"/>
-          <p:cNvSpPr txBox="1"/>
-          <p:nvPr/>
-        </p:nvSpPr>
-        <p:spPr>
-          <a:xfrm>
-            <a:off x="1014984" y="5685416"/>
+              <a:t>18</a:t>
+            </a:r>
+            <a:endParaRPr lang="en-US" sz="1200" dirty="0"/>
+          </a:p>
+        </p:txBody>
+      </p:sp>
+      <p:sp>
+        <p:nvSpPr>
+          <p:cNvPr id="80" name="Text 78"/>
+          <p:cNvSpPr txBox="1"/>
+          <p:nvPr/>
+        </p:nvSpPr>
+        <p:spPr>
+          <a:xfrm>
+            <a:off x="6565392" y="1847088"/>
             <a:ext cx="1920240" cy="239896"/>
           </a:xfrm>
           <a:prstGeom prst="rect">
@@ -15729,22 +15866,22 @@
                 <a:ea typeface="Inter" pitchFamily="34" charset="-122"/>
                 <a:cs typeface="Inter" pitchFamily="34" charset="-120"/>
               </a:rPr>
-              <a:t>LR LV</a:t>
-            </a:r>
-            <a:endParaRPr lang="en-US" sz="1200" dirty="0"/>
-          </a:p>
-        </p:txBody>
-      </p:sp>
-      <p:sp>
-        <p:nvSpPr>
-          <p:cNvPr id="77" name="Shape 75"/>
+              <a:t>VOLVO</a:t>
+            </a:r>
+            <a:endParaRPr lang="en-US" sz="1200" dirty="0"/>
+          </a:p>
+        </p:txBody>
+      </p:sp>
+      <p:sp>
+        <p:nvSpPr>
+          <p:cNvPr id="81" name="Shape 79"/>
           <p:cNvSpPr/>
           <p:nvPr/>
         </p:nvSpPr>
         <p:spPr>
           <a:xfrm>
-            <a:off x="3782938" y="5750188"/>
-            <a:ext cx="12802" cy="110352"/>
+            <a:off x="9275815" y="1911860"/>
+            <a:ext cx="60209" cy="110352"/>
           </a:xfrm>
           <a:prstGeom prst="rect">
             <a:avLst/>
@@ -15757,13 +15894,13 @@
       </p:sp>
       <p:sp>
         <p:nvSpPr>
-          <p:cNvPr id="78" name="Text 76"/>
-          <p:cNvSpPr txBox="1"/>
-          <p:nvPr/>
-        </p:nvSpPr>
-        <p:spPr>
-          <a:xfrm>
-            <a:off x="4617720" y="5685416"/>
+          <p:cNvPr id="82" name="Text 80"/>
+          <p:cNvSpPr txBox="1"/>
+          <p:nvPr/>
+        </p:nvSpPr>
+        <p:spPr>
+          <a:xfrm>
+            <a:off x="10168128" y="1847088"/>
             <a:ext cx="1234440" cy="239896"/>
           </a:xfrm>
           <a:prstGeom prst="rect">
@@ -15788,21 +15925,21 @@
                 <a:ea typeface="Inter" pitchFamily="34" charset="-122"/>
                 <a:cs typeface="Inter" pitchFamily="34" charset="-120"/>
               </a:rPr>
-              <a:t>−0.0 pts</a:t>
-            </a:r>
-            <a:endParaRPr lang="en-US" sz="1200" dirty="0"/>
-          </a:p>
-        </p:txBody>
-      </p:sp>
-      <p:sp>
-        <p:nvSpPr>
-          <p:cNvPr id="79" name="Text 77"/>
-          <p:cNvSpPr txBox="1"/>
-          <p:nvPr/>
-        </p:nvSpPr>
-        <p:spPr>
-          <a:xfrm>
-            <a:off x="6208776" y="1847088"/>
+              <a:t>−1.1 pts</a:t>
+            </a:r>
+            <a:endParaRPr lang="en-US" sz="1200" dirty="0"/>
+          </a:p>
+        </p:txBody>
+      </p:sp>
+      <p:sp>
+        <p:nvSpPr>
+          <p:cNvPr id="83" name="Text 81"/>
+          <p:cNvSpPr txBox="1"/>
+          <p:nvPr/>
+        </p:nvSpPr>
+        <p:spPr>
+          <a:xfrm>
+            <a:off x="6208776" y="2086984"/>
             <a:ext cx="310896" cy="239896"/>
           </a:xfrm>
           <a:prstGeom prst="rect">
@@ -15827,21 +15964,21 @@
                 <a:ea typeface="Inter" pitchFamily="34" charset="-122"/>
                 <a:cs typeface="Inter" pitchFamily="34" charset="-120"/>
               </a:rPr>
-              <a:t>18</a:t>
-            </a:r>
-            <a:endParaRPr lang="en-US" sz="1200" dirty="0"/>
-          </a:p>
-        </p:txBody>
-      </p:sp>
-      <p:sp>
-        <p:nvSpPr>
-          <p:cNvPr id="80" name="Text 78"/>
-          <p:cNvSpPr txBox="1"/>
-          <p:nvPr/>
-        </p:nvSpPr>
-        <p:spPr>
-          <a:xfrm>
-            <a:off x="6565392" y="1847088"/>
+              <a:t>19</a:t>
+            </a:r>
+            <a:endParaRPr lang="en-US" sz="1200" dirty="0"/>
+          </a:p>
+        </p:txBody>
+      </p:sp>
+      <p:sp>
+        <p:nvSpPr>
+          <p:cNvPr id="84" name="Text 82"/>
+          <p:cNvSpPr txBox="1"/>
+          <p:nvPr/>
+        </p:nvSpPr>
+        <p:spPr>
+          <a:xfrm>
+            <a:off x="6565392" y="2086984"/>
             <a:ext cx="1920240" cy="239896"/>
           </a:xfrm>
           <a:prstGeom prst="rect">
@@ -15866,22 +16003,22 @@
                 <a:ea typeface="Inter" pitchFamily="34" charset="-122"/>
                 <a:cs typeface="Inter" pitchFamily="34" charset="-120"/>
               </a:rPr>
-              <a:t>VOLVO</a:t>
-            </a:r>
-            <a:endParaRPr lang="en-US" sz="1200" dirty="0"/>
-          </a:p>
-        </p:txBody>
-      </p:sp>
-      <p:sp>
-        <p:nvSpPr>
-          <p:cNvPr id="81" name="Shape 79"/>
+              <a:t>CDJR POST FALLS</a:t>
+            </a:r>
+            <a:endParaRPr lang="en-US" sz="1200" dirty="0"/>
+          </a:p>
+        </p:txBody>
+      </p:sp>
+      <p:sp>
+        <p:nvSpPr>
+          <p:cNvPr id="85" name="Shape 83"/>
           <p:cNvSpPr/>
           <p:nvPr/>
         </p:nvSpPr>
         <p:spPr>
           <a:xfrm>
-            <a:off x="9279706" y="1911860"/>
-            <a:ext cx="56318" cy="110352"/>
+            <a:off x="9264868" y="2151755"/>
+            <a:ext cx="71156" cy="110352"/>
           </a:xfrm>
           <a:prstGeom prst="rect">
             <a:avLst/>
@@ -15894,13 +16031,13 @@
       </p:sp>
       <p:sp>
         <p:nvSpPr>
-          <p:cNvPr id="82" name="Text 80"/>
-          <p:cNvSpPr txBox="1"/>
-          <p:nvPr/>
-        </p:nvSpPr>
-        <p:spPr>
-          <a:xfrm>
-            <a:off x="10168128" y="1847088"/>
+          <p:cNvPr id="86" name="Text 84"/>
+          <p:cNvSpPr txBox="1"/>
+          <p:nvPr/>
+        </p:nvSpPr>
+        <p:spPr>
+          <a:xfrm>
+            <a:off x="10168128" y="2086984"/>
             <a:ext cx="1234440" cy="239896"/>
           </a:xfrm>
           <a:prstGeom prst="rect">
@@ -15925,21 +16062,21 @@
                 <a:ea typeface="Inter" pitchFamily="34" charset="-122"/>
                 <a:cs typeface="Inter" pitchFamily="34" charset="-120"/>
               </a:rPr>
-              <a:t>−1.0 pts</a:t>
-            </a:r>
-            <a:endParaRPr lang="en-US" sz="1200" dirty="0"/>
-          </a:p>
-        </p:txBody>
-      </p:sp>
-      <p:sp>
-        <p:nvSpPr>
-          <p:cNvPr id="83" name="Text 81"/>
-          <p:cNvSpPr txBox="1"/>
-          <p:nvPr/>
-        </p:nvSpPr>
-        <p:spPr>
-          <a:xfrm>
-            <a:off x="6208776" y="2086984"/>
+              <a:t>−1.3 pts</a:t>
+            </a:r>
+            <a:endParaRPr lang="en-US" sz="1200" dirty="0"/>
+          </a:p>
+        </p:txBody>
+      </p:sp>
+      <p:sp>
+        <p:nvSpPr>
+          <p:cNvPr id="87" name="Text 85"/>
+          <p:cNvSpPr txBox="1"/>
+          <p:nvPr/>
+        </p:nvSpPr>
+        <p:spPr>
+          <a:xfrm>
+            <a:off x="6208776" y="2326879"/>
             <a:ext cx="310896" cy="239896"/>
           </a:xfrm>
           <a:prstGeom prst="rect">
@@ -15964,21 +16101,21 @@
                 <a:ea typeface="Inter" pitchFamily="34" charset="-122"/>
                 <a:cs typeface="Inter" pitchFamily="34" charset="-120"/>
               </a:rPr>
-              <a:t>19</a:t>
-            </a:r>
-            <a:endParaRPr lang="en-US" sz="1200" dirty="0"/>
-          </a:p>
-        </p:txBody>
-      </p:sp>
-      <p:sp>
-        <p:nvSpPr>
-          <p:cNvPr id="84" name="Text 82"/>
-          <p:cNvSpPr txBox="1"/>
-          <p:nvPr/>
-        </p:nvSpPr>
-        <p:spPr>
-          <a:xfrm>
-            <a:off x="6565392" y="2086984"/>
+              <a:t>20</a:t>
+            </a:r>
+            <a:endParaRPr lang="en-US" sz="1200" dirty="0"/>
+          </a:p>
+        </p:txBody>
+      </p:sp>
+      <p:sp>
+        <p:nvSpPr>
+          <p:cNvPr id="88" name="Text 86"/>
+          <p:cNvSpPr txBox="1"/>
+          <p:nvPr/>
+        </p:nvSpPr>
+        <p:spPr>
+          <a:xfrm>
+            <a:off x="6565392" y="2326879"/>
             <a:ext cx="1920240" cy="239896"/>
           </a:xfrm>
           <a:prstGeom prst="rect">
@@ -16003,22 +16140,22 @@
                 <a:ea typeface="Inter" pitchFamily="34" charset="-122"/>
                 <a:cs typeface="Inter" pitchFamily="34" charset="-120"/>
               </a:rPr>
-              <a:t>CDJR POST FALLS</a:t>
-            </a:r>
-            <a:endParaRPr lang="en-US" sz="1200" dirty="0"/>
-          </a:p>
-        </p:txBody>
-      </p:sp>
-      <p:sp>
-        <p:nvSpPr>
-          <p:cNvPr id="85" name="Shape 83"/>
+              <a:t>SUBARU LV</a:t>
+            </a:r>
+            <a:endParaRPr lang="en-US" sz="1200" dirty="0"/>
+          </a:p>
+        </p:txBody>
+      </p:sp>
+      <p:sp>
+        <p:nvSpPr>
+          <p:cNvPr id="89" name="Shape 87"/>
           <p:cNvSpPr/>
           <p:nvPr/>
         </p:nvSpPr>
         <p:spPr>
           <a:xfrm>
-            <a:off x="9261209" y="2151755"/>
-            <a:ext cx="74815" cy="110352"/>
+            <a:off x="9182765" y="2391651"/>
+            <a:ext cx="153259" cy="110352"/>
           </a:xfrm>
           <a:prstGeom prst="rect">
             <a:avLst/>
@@ -16031,13 +16168,13 @@
       </p:sp>
       <p:sp>
         <p:nvSpPr>
-          <p:cNvPr id="86" name="Text 84"/>
-          <p:cNvSpPr txBox="1"/>
-          <p:nvPr/>
-        </p:nvSpPr>
-        <p:spPr>
-          <a:xfrm>
-            <a:off x="10168128" y="2086984"/>
+          <p:cNvPr id="90" name="Text 88"/>
+          <p:cNvSpPr txBox="1"/>
+          <p:nvPr/>
+        </p:nvSpPr>
+        <p:spPr>
+          <a:xfrm>
+            <a:off x="10168128" y="2326879"/>
             <a:ext cx="1234440" cy="239896"/>
           </a:xfrm>
           <a:prstGeom prst="rect">
@@ -16062,21 +16199,21 @@
                 <a:ea typeface="Inter" pitchFamily="34" charset="-122"/>
                 <a:cs typeface="Inter" pitchFamily="34" charset="-120"/>
               </a:rPr>
-              <a:t>−1.4 pts</a:t>
-            </a:r>
-            <a:endParaRPr lang="en-US" sz="1200" dirty="0"/>
-          </a:p>
-        </p:txBody>
-      </p:sp>
-      <p:sp>
-        <p:nvSpPr>
-          <p:cNvPr id="87" name="Text 85"/>
-          <p:cNvSpPr txBox="1"/>
-          <p:nvPr/>
-        </p:nvSpPr>
-        <p:spPr>
-          <a:xfrm>
-            <a:off x="6208776" y="2326879"/>
+              <a:t>−2.8 pts</a:t>
+            </a:r>
+            <a:endParaRPr lang="en-US" sz="1200" dirty="0"/>
+          </a:p>
+        </p:txBody>
+      </p:sp>
+      <p:sp>
+        <p:nvSpPr>
+          <p:cNvPr id="91" name="Text 89"/>
+          <p:cNvSpPr txBox="1"/>
+          <p:nvPr/>
+        </p:nvSpPr>
+        <p:spPr>
+          <a:xfrm>
+            <a:off x="6208776" y="2566775"/>
             <a:ext cx="310896" cy="239896"/>
           </a:xfrm>
           <a:prstGeom prst="rect">
@@ -16101,21 +16238,21 @@
                 <a:ea typeface="Inter" pitchFamily="34" charset="-122"/>
                 <a:cs typeface="Inter" pitchFamily="34" charset="-120"/>
               </a:rPr>
-              <a:t>20</a:t>
-            </a:r>
-            <a:endParaRPr lang="en-US" sz="1200" dirty="0"/>
-          </a:p>
-        </p:txBody>
-      </p:sp>
-      <p:sp>
-        <p:nvSpPr>
-          <p:cNvPr id="88" name="Text 86"/>
-          <p:cNvSpPr txBox="1"/>
-          <p:nvPr/>
-        </p:nvSpPr>
-        <p:spPr>
-          <a:xfrm>
-            <a:off x="6565392" y="2326879"/>
+              <a:t>21</a:t>
+            </a:r>
+            <a:endParaRPr lang="en-US" sz="1200" dirty="0"/>
+          </a:p>
+        </p:txBody>
+      </p:sp>
+      <p:sp>
+        <p:nvSpPr>
+          <p:cNvPr id="92" name="Text 90"/>
+          <p:cNvSpPr txBox="1"/>
+          <p:nvPr/>
+        </p:nvSpPr>
+        <p:spPr>
+          <a:xfrm>
+            <a:off x="6565392" y="2566775"/>
             <a:ext cx="1920240" cy="239896"/>
           </a:xfrm>
           <a:prstGeom prst="rect">
@@ -16140,22 +16277,22 @@
                 <a:ea typeface="Inter" pitchFamily="34" charset="-122"/>
                 <a:cs typeface="Inter" pitchFamily="34" charset="-120"/>
               </a:rPr>
-              <a:t>SUBARU LV</a:t>
-            </a:r>
-            <a:endParaRPr lang="en-US" sz="1200" dirty="0"/>
-          </a:p>
-        </p:txBody>
-      </p:sp>
-      <p:sp>
-        <p:nvSpPr>
-          <p:cNvPr id="89" name="Shape 87"/>
+              <a:t>LEXUS</a:t>
+            </a:r>
+            <a:endParaRPr lang="en-US" sz="1200" dirty="0"/>
+          </a:p>
+        </p:txBody>
+      </p:sp>
+      <p:sp>
+        <p:nvSpPr>
+          <p:cNvPr id="93" name="Shape 91"/>
           <p:cNvSpPr/>
           <p:nvPr/>
         </p:nvSpPr>
         <p:spPr>
           <a:xfrm>
-            <a:off x="9182825" y="2391651"/>
-            <a:ext cx="153199" cy="110352"/>
+            <a:off x="9149924" y="2631546"/>
+            <a:ext cx="186100" cy="110352"/>
           </a:xfrm>
           <a:prstGeom prst="rect">
             <a:avLst/>
@@ -16168,13 +16305,13 @@
       </p:sp>
       <p:sp>
         <p:nvSpPr>
-          <p:cNvPr id="90" name="Text 88"/>
-          <p:cNvSpPr txBox="1"/>
-          <p:nvPr/>
-        </p:nvSpPr>
-        <p:spPr>
-          <a:xfrm>
-            <a:off x="10168128" y="2326879"/>
+          <p:cNvPr id="94" name="Text 92"/>
+          <p:cNvSpPr txBox="1"/>
+          <p:nvPr/>
+        </p:nvSpPr>
+        <p:spPr>
+          <a:xfrm>
+            <a:off x="10168128" y="2566775"/>
             <a:ext cx="1234440" cy="239896"/>
           </a:xfrm>
           <a:prstGeom prst="rect">
@@ -16199,21 +16336,21 @@
                 <a:ea typeface="Inter" pitchFamily="34" charset="-122"/>
                 <a:cs typeface="Inter" pitchFamily="34" charset="-120"/>
               </a:rPr>
-              <a:t>−2.8 pts</a:t>
-            </a:r>
-            <a:endParaRPr lang="en-US" sz="1200" dirty="0"/>
-          </a:p>
-        </p:txBody>
-      </p:sp>
-      <p:sp>
-        <p:nvSpPr>
-          <p:cNvPr id="91" name="Text 89"/>
-          <p:cNvSpPr txBox="1"/>
-          <p:nvPr/>
-        </p:nvSpPr>
-        <p:spPr>
-          <a:xfrm>
-            <a:off x="6208776" y="2566775"/>
+              <a:t>−3.4 pts</a:t>
+            </a:r>
+            <a:endParaRPr lang="en-US" sz="1200" dirty="0"/>
+          </a:p>
+        </p:txBody>
+      </p:sp>
+      <p:sp>
+        <p:nvSpPr>
+          <p:cNvPr id="95" name="Text 93"/>
+          <p:cNvSpPr txBox="1"/>
+          <p:nvPr/>
+        </p:nvSpPr>
+        <p:spPr>
+          <a:xfrm>
+            <a:off x="6208776" y="2806670"/>
             <a:ext cx="310896" cy="239896"/>
           </a:xfrm>
           <a:prstGeom prst="rect">
@@ -16238,21 +16375,21 @@
                 <a:ea typeface="Inter" pitchFamily="34" charset="-122"/>
                 <a:cs typeface="Inter" pitchFamily="34" charset="-120"/>
               </a:rPr>
-              <a:t>21</a:t>
-            </a:r>
-            <a:endParaRPr lang="en-US" sz="1200" dirty="0"/>
-          </a:p>
-        </p:txBody>
-      </p:sp>
-      <p:sp>
-        <p:nvSpPr>
-          <p:cNvPr id="92" name="Text 90"/>
-          <p:cNvSpPr txBox="1"/>
-          <p:nvPr/>
-        </p:nvSpPr>
-        <p:spPr>
-          <a:xfrm>
-            <a:off x="6565392" y="2566775"/>
+              <a:t>22</a:t>
+            </a:r>
+            <a:endParaRPr lang="en-US" sz="1200" dirty="0"/>
+          </a:p>
+        </p:txBody>
+      </p:sp>
+      <p:sp>
+        <p:nvSpPr>
+          <p:cNvPr id="96" name="Text 94"/>
+          <p:cNvSpPr txBox="1"/>
+          <p:nvPr/>
+        </p:nvSpPr>
+        <p:spPr>
+          <a:xfrm>
+            <a:off x="6565392" y="2806670"/>
             <a:ext cx="1920240" cy="239896"/>
           </a:xfrm>
           <a:prstGeom prst="rect">
@@ -16277,22 +16414,22 @@
                 <a:ea typeface="Inter" pitchFamily="34" charset="-122"/>
                 <a:cs typeface="Inter" pitchFamily="34" charset="-120"/>
               </a:rPr>
-              <a:t>LEXUS</a:t>
-            </a:r>
-            <a:endParaRPr lang="en-US" sz="1200" dirty="0"/>
-          </a:p>
-        </p:txBody>
-      </p:sp>
-      <p:sp>
-        <p:nvSpPr>
-          <p:cNvPr id="93" name="Shape 91"/>
+              <a:t>AUDI HENDERSON</a:t>
+            </a:r>
+            <a:endParaRPr lang="en-US" sz="1200" dirty="0"/>
+          </a:p>
+        </p:txBody>
+      </p:sp>
+      <p:sp>
+        <p:nvSpPr>
+          <p:cNvPr id="97" name="Shape 95"/>
           <p:cNvSpPr/>
           <p:nvPr/>
         </p:nvSpPr>
         <p:spPr>
           <a:xfrm>
-            <a:off x="9150574" y="2631546"/>
-            <a:ext cx="185450" cy="110352"/>
+            <a:off x="9106136" y="2871442"/>
+            <a:ext cx="229888" cy="110352"/>
           </a:xfrm>
           <a:prstGeom prst="rect">
             <a:avLst/>
@@ -16305,13 +16442,13 @@
       </p:sp>
       <p:sp>
         <p:nvSpPr>
-          <p:cNvPr id="94" name="Text 92"/>
-          <p:cNvSpPr txBox="1"/>
-          <p:nvPr/>
-        </p:nvSpPr>
-        <p:spPr>
-          <a:xfrm>
-            <a:off x="10168128" y="2566775"/>
+          <p:cNvPr id="98" name="Text 96"/>
+          <p:cNvSpPr txBox="1"/>
+          <p:nvPr/>
+        </p:nvSpPr>
+        <p:spPr>
+          <a:xfrm>
+            <a:off x="10168128" y="2806670"/>
             <a:ext cx="1234440" cy="239896"/>
           </a:xfrm>
           <a:prstGeom prst="rect">
@@ -16336,21 +16473,21 @@
                 <a:ea typeface="Inter" pitchFamily="34" charset="-122"/>
                 <a:cs typeface="Inter" pitchFamily="34" charset="-120"/>
               </a:rPr>
-              <a:t>−3.4 pts</a:t>
-            </a:r>
-            <a:endParaRPr lang="en-US" sz="1200" dirty="0"/>
-          </a:p>
-        </p:txBody>
-      </p:sp>
-      <p:sp>
-        <p:nvSpPr>
-          <p:cNvPr id="95" name="Text 93"/>
-          <p:cNvSpPr txBox="1"/>
-          <p:nvPr/>
-        </p:nvSpPr>
-        <p:spPr>
-          <a:xfrm>
-            <a:off x="6208776" y="2806670"/>
+              <a:t>−4.2 pts</a:t>
+            </a:r>
+            <a:endParaRPr lang="en-US" sz="1200" dirty="0"/>
+          </a:p>
+        </p:txBody>
+      </p:sp>
+      <p:sp>
+        <p:nvSpPr>
+          <p:cNvPr id="99" name="Text 97"/>
+          <p:cNvSpPr txBox="1"/>
+          <p:nvPr/>
+        </p:nvSpPr>
+        <p:spPr>
+          <a:xfrm>
+            <a:off x="6208776" y="3046566"/>
             <a:ext cx="310896" cy="239896"/>
           </a:xfrm>
           <a:prstGeom prst="rect">
@@ -16375,21 +16512,21 @@
                 <a:ea typeface="Inter" pitchFamily="34" charset="-122"/>
                 <a:cs typeface="Inter" pitchFamily="34" charset="-120"/>
               </a:rPr>
-              <a:t>22</a:t>
-            </a:r>
-            <a:endParaRPr lang="en-US" sz="1200" dirty="0"/>
-          </a:p>
-        </p:txBody>
-      </p:sp>
-      <p:sp>
-        <p:nvSpPr>
-          <p:cNvPr id="96" name="Text 94"/>
-          <p:cNvSpPr txBox="1"/>
-          <p:nvPr/>
-        </p:nvSpPr>
-        <p:spPr>
-          <a:xfrm>
-            <a:off x="6565392" y="2806670"/>
+              <a:t>23</a:t>
+            </a:r>
+            <a:endParaRPr lang="en-US" sz="1200" dirty="0"/>
+          </a:p>
+        </p:txBody>
+      </p:sp>
+      <p:sp>
+        <p:nvSpPr>
+          <p:cNvPr id="100" name="Text 98"/>
+          <p:cNvSpPr txBox="1"/>
+          <p:nvPr/>
+        </p:nvSpPr>
+        <p:spPr>
+          <a:xfrm>
+            <a:off x="6565392" y="3046566"/>
             <a:ext cx="1920240" cy="239896"/>
           </a:xfrm>
           <a:prstGeom prst="rect">
@@ -16422,14 +16559,14 @@
       </p:sp>
       <p:sp>
         <p:nvSpPr>
-          <p:cNvPr id="97" name="Shape 95"/>
+          <p:cNvPr id="101" name="Shape 99"/>
           <p:cNvSpPr/>
           <p:nvPr/>
         </p:nvSpPr>
         <p:spPr>
           <a:xfrm>
-            <a:off x="9107949" y="2871442"/>
-            <a:ext cx="228075" cy="110352"/>
+            <a:off x="9106136" y="3111337"/>
+            <a:ext cx="229888" cy="110352"/>
           </a:xfrm>
           <a:prstGeom prst="rect">
             <a:avLst/>
@@ -16442,13 +16579,13 @@
       </p:sp>
       <p:sp>
         <p:nvSpPr>
-          <p:cNvPr id="98" name="Text 96"/>
-          <p:cNvSpPr txBox="1"/>
-          <p:nvPr/>
-        </p:nvSpPr>
-        <p:spPr>
-          <a:xfrm>
-            <a:off x="10168128" y="2806670"/>
+          <p:cNvPr id="102" name="Text 100"/>
+          <p:cNvSpPr txBox="1"/>
+          <p:nvPr/>
+        </p:nvSpPr>
+        <p:spPr>
+          <a:xfrm>
+            <a:off x="10168128" y="3046566"/>
             <a:ext cx="1234440" cy="239896"/>
           </a:xfrm>
           <a:prstGeom prst="rect">
@@ -16481,13 +16618,13 @@
       </p:sp>
       <p:sp>
         <p:nvSpPr>
-          <p:cNvPr id="99" name="Text 97"/>
-          <p:cNvSpPr txBox="1"/>
-          <p:nvPr/>
-        </p:nvSpPr>
-        <p:spPr>
-          <a:xfrm>
-            <a:off x="6208776" y="3046566"/>
+          <p:cNvPr id="103" name="Text 101"/>
+          <p:cNvSpPr txBox="1"/>
+          <p:nvPr/>
+        </p:nvSpPr>
+        <p:spPr>
+          <a:xfrm>
+            <a:off x="6208776" y="3286461"/>
             <a:ext cx="310896" cy="239896"/>
           </a:xfrm>
           <a:prstGeom prst="rect">
@@ -16512,21 +16649,21 @@
                 <a:ea typeface="Inter" pitchFamily="34" charset="-122"/>
                 <a:cs typeface="Inter" pitchFamily="34" charset="-120"/>
               </a:rPr>
-              <a:t>23</a:t>
-            </a:r>
-            <a:endParaRPr lang="en-US" sz="1200" dirty="0"/>
-          </a:p>
-        </p:txBody>
-      </p:sp>
-      <p:sp>
-        <p:nvSpPr>
-          <p:cNvPr id="100" name="Text 98"/>
-          <p:cNvSpPr txBox="1"/>
-          <p:nvPr/>
-        </p:nvSpPr>
-        <p:spPr>
-          <a:xfrm>
-            <a:off x="6565392" y="3046566"/>
+              <a:t>24</a:t>
+            </a:r>
+            <a:endParaRPr lang="en-US" sz="1200" dirty="0"/>
+          </a:p>
+        </p:txBody>
+      </p:sp>
+      <p:sp>
+        <p:nvSpPr>
+          <p:cNvPr id="104" name="Text 102"/>
+          <p:cNvSpPr txBox="1"/>
+          <p:nvPr/>
+        </p:nvSpPr>
+        <p:spPr>
+          <a:xfrm>
+            <a:off x="6565392" y="3286461"/>
             <a:ext cx="1920240" cy="239896"/>
           </a:xfrm>
           <a:prstGeom prst="rect">
@@ -16551,22 +16688,22 @@
                 <a:ea typeface="Inter" pitchFamily="34" charset="-122"/>
                 <a:cs typeface="Inter" pitchFamily="34" charset="-120"/>
               </a:rPr>
-              <a:t>AUDI HENDERSON</a:t>
-            </a:r>
-            <a:endParaRPr lang="en-US" sz="1200" dirty="0"/>
-          </a:p>
-        </p:txBody>
-      </p:sp>
-      <p:sp>
-        <p:nvSpPr>
-          <p:cNvPr id="101" name="Shape 99"/>
+              <a:t>KIA ST GEORGE</a:t>
+            </a:r>
+            <a:endParaRPr lang="en-US" sz="1200" dirty="0"/>
+          </a:p>
+        </p:txBody>
+      </p:sp>
+      <p:sp>
+        <p:nvSpPr>
+          <p:cNvPr id="105" name="Shape 103"/>
           <p:cNvSpPr/>
           <p:nvPr/>
         </p:nvSpPr>
         <p:spPr>
           <a:xfrm>
-            <a:off x="9106168" y="3111337"/>
-            <a:ext cx="229856" cy="110352"/>
+            <a:off x="9073295" y="3351233"/>
+            <a:ext cx="262729" cy="110352"/>
           </a:xfrm>
           <a:prstGeom prst="rect">
             <a:avLst/>
@@ -16579,13 +16716,13 @@
       </p:sp>
       <p:sp>
         <p:nvSpPr>
-          <p:cNvPr id="102" name="Text 100"/>
-          <p:cNvSpPr txBox="1"/>
-          <p:nvPr/>
-        </p:nvSpPr>
-        <p:spPr>
-          <a:xfrm>
-            <a:off x="10168128" y="3046566"/>
+          <p:cNvPr id="106" name="Text 104"/>
+          <p:cNvSpPr txBox="1"/>
+          <p:nvPr/>
+        </p:nvSpPr>
+        <p:spPr>
+          <a:xfrm>
+            <a:off x="10168128" y="3286461"/>
             <a:ext cx="1234440" cy="239896"/>
           </a:xfrm>
           <a:prstGeom prst="rect">
@@ -16610,21 +16747,21 @@
                 <a:ea typeface="Inter" pitchFamily="34" charset="-122"/>
                 <a:cs typeface="Inter" pitchFamily="34" charset="-120"/>
               </a:rPr>
-              <a:t>−4.2 pts</a:t>
-            </a:r>
-            <a:endParaRPr lang="en-US" sz="1200" dirty="0"/>
-          </a:p>
-        </p:txBody>
-      </p:sp>
-      <p:sp>
-        <p:nvSpPr>
-          <p:cNvPr id="103" name="Text 101"/>
-          <p:cNvSpPr txBox="1"/>
-          <p:nvPr/>
-        </p:nvSpPr>
-        <p:spPr>
-          <a:xfrm>
-            <a:off x="6208776" y="3286461"/>
+              <a:t>−4.8 pts</a:t>
+            </a:r>
+            <a:endParaRPr lang="en-US" sz="1200" dirty="0"/>
+          </a:p>
+        </p:txBody>
+      </p:sp>
+      <p:sp>
+        <p:nvSpPr>
+          <p:cNvPr id="107" name="Text 105"/>
+          <p:cNvSpPr txBox="1"/>
+          <p:nvPr/>
+        </p:nvSpPr>
+        <p:spPr>
+          <a:xfrm>
+            <a:off x="6208776" y="3526357"/>
             <a:ext cx="310896" cy="239896"/>
           </a:xfrm>
           <a:prstGeom prst="rect">
@@ -16649,21 +16786,21 @@
                 <a:ea typeface="Inter" pitchFamily="34" charset="-122"/>
                 <a:cs typeface="Inter" pitchFamily="34" charset="-120"/>
               </a:rPr>
-              <a:t>24</a:t>
-            </a:r>
-            <a:endParaRPr lang="en-US" sz="1200" dirty="0"/>
-          </a:p>
-        </p:txBody>
-      </p:sp>
-      <p:sp>
-        <p:nvSpPr>
-          <p:cNvPr id="104" name="Text 102"/>
-          <p:cNvSpPr txBox="1"/>
-          <p:nvPr/>
-        </p:nvSpPr>
-        <p:spPr>
-          <a:xfrm>
-            <a:off x="6565392" y="3286461"/>
+              <a:t>25</a:t>
+            </a:r>
+            <a:endParaRPr lang="en-US" sz="1200" dirty="0"/>
+          </a:p>
+        </p:txBody>
+      </p:sp>
+      <p:sp>
+        <p:nvSpPr>
+          <p:cNvPr id="108" name="Text 106"/>
+          <p:cNvSpPr txBox="1"/>
+          <p:nvPr/>
+        </p:nvSpPr>
+        <p:spPr>
+          <a:xfrm>
+            <a:off x="6565392" y="3526357"/>
             <a:ext cx="1920240" cy="239896"/>
           </a:xfrm>
           <a:prstGeom prst="rect">
@@ -16688,22 +16825,22 @@
                 <a:ea typeface="Inter" pitchFamily="34" charset="-122"/>
                 <a:cs typeface="Inter" pitchFamily="34" charset="-120"/>
               </a:rPr>
-              <a:t>KIA ST GEORGE</a:t>
-            </a:r>
-            <a:endParaRPr lang="en-US" sz="1200" dirty="0"/>
-          </a:p>
-        </p:txBody>
-      </p:sp>
-      <p:sp>
-        <p:nvSpPr>
-          <p:cNvPr id="105" name="Shape 103"/>
+              <a:t>TOYOTA FLAGSTAFF</a:t>
+            </a:r>
+            <a:endParaRPr lang="en-US" sz="1200" dirty="0"/>
+          </a:p>
+        </p:txBody>
+      </p:sp>
+      <p:sp>
+        <p:nvSpPr>
+          <p:cNvPr id="109" name="Shape 107"/>
           <p:cNvSpPr/>
           <p:nvPr/>
         </p:nvSpPr>
         <p:spPr>
           <a:xfrm>
-            <a:off x="9076473" y="3351233"/>
-            <a:ext cx="259551" cy="110352"/>
+            <a:off x="9040454" y="3591128"/>
+            <a:ext cx="295570" cy="110352"/>
           </a:xfrm>
           <a:prstGeom prst="rect">
             <a:avLst/>
@@ -16716,13 +16853,13 @@
       </p:sp>
       <p:sp>
         <p:nvSpPr>
-          <p:cNvPr id="106" name="Text 104"/>
-          <p:cNvSpPr txBox="1"/>
-          <p:nvPr/>
-        </p:nvSpPr>
-        <p:spPr>
-          <a:xfrm>
-            <a:off x="10168128" y="3286461"/>
+          <p:cNvPr id="110" name="Text 108"/>
+          <p:cNvSpPr txBox="1"/>
+          <p:nvPr/>
+        </p:nvSpPr>
+        <p:spPr>
+          <a:xfrm>
+            <a:off x="10168128" y="3526357"/>
             <a:ext cx="1234440" cy="239896"/>
           </a:xfrm>
           <a:prstGeom prst="rect">
@@ -16747,21 +16884,21 @@
                 <a:ea typeface="Inter" pitchFamily="34" charset="-122"/>
                 <a:cs typeface="Inter" pitchFamily="34" charset="-120"/>
               </a:rPr>
-              <a:t>−4.8 pts</a:t>
-            </a:r>
-            <a:endParaRPr lang="en-US" sz="1200" dirty="0"/>
-          </a:p>
-        </p:txBody>
-      </p:sp>
-      <p:sp>
-        <p:nvSpPr>
-          <p:cNvPr id="107" name="Text 105"/>
-          <p:cNvSpPr txBox="1"/>
-          <p:nvPr/>
-        </p:nvSpPr>
-        <p:spPr>
-          <a:xfrm>
-            <a:off x="6208776" y="3526357"/>
+              <a:t>−5.4 pts</a:t>
+            </a:r>
+            <a:endParaRPr lang="en-US" sz="1200" dirty="0"/>
+          </a:p>
+        </p:txBody>
+      </p:sp>
+      <p:sp>
+        <p:nvSpPr>
+          <p:cNvPr id="111" name="Text 109"/>
+          <p:cNvSpPr txBox="1"/>
+          <p:nvPr/>
+        </p:nvSpPr>
+        <p:spPr>
+          <a:xfrm>
+            <a:off x="6208776" y="3766252"/>
             <a:ext cx="310896" cy="239896"/>
           </a:xfrm>
           <a:prstGeom prst="rect">
@@ -16786,21 +16923,21 @@
                 <a:ea typeface="Inter" pitchFamily="34" charset="-122"/>
                 <a:cs typeface="Inter" pitchFamily="34" charset="-120"/>
               </a:rPr>
-              <a:t>25</a:t>
-            </a:r>
-            <a:endParaRPr lang="en-US" sz="1200" dirty="0"/>
-          </a:p>
-        </p:txBody>
-      </p:sp>
-      <p:sp>
-        <p:nvSpPr>
-          <p:cNvPr id="108" name="Text 106"/>
-          <p:cNvSpPr txBox="1"/>
-          <p:nvPr/>
-        </p:nvSpPr>
-        <p:spPr>
-          <a:xfrm>
-            <a:off x="6565392" y="3526357"/>
+              <a:t>26</a:t>
+            </a:r>
+            <a:endParaRPr lang="en-US" sz="1200" dirty="0"/>
+          </a:p>
+        </p:txBody>
+      </p:sp>
+      <p:sp>
+        <p:nvSpPr>
+          <p:cNvPr id="112" name="Text 110"/>
+          <p:cNvSpPr txBox="1"/>
+          <p:nvPr/>
+        </p:nvSpPr>
+        <p:spPr>
+          <a:xfrm>
+            <a:off x="6565392" y="3766252"/>
             <a:ext cx="1920240" cy="239896"/>
           </a:xfrm>
           <a:prstGeom prst="rect">
@@ -16825,22 +16962,22 @@
                 <a:ea typeface="Inter" pitchFamily="34" charset="-122"/>
                 <a:cs typeface="Inter" pitchFamily="34" charset="-120"/>
               </a:rPr>
-              <a:t>TOYOTA FLAGSTAFF</a:t>
-            </a:r>
-            <a:endParaRPr lang="en-US" sz="1200" dirty="0"/>
-          </a:p>
-        </p:txBody>
-      </p:sp>
-      <p:sp>
-        <p:nvSpPr>
-          <p:cNvPr id="109" name="Shape 107"/>
+              <a:t>TOYOTA PRESCOTT</a:t>
+            </a:r>
+            <a:endParaRPr lang="en-US" sz="1200" dirty="0"/>
+          </a:p>
+        </p:txBody>
+      </p:sp>
+      <p:sp>
+        <p:nvSpPr>
+          <p:cNvPr id="113" name="Shape 111"/>
           <p:cNvSpPr/>
           <p:nvPr/>
         </p:nvSpPr>
         <p:spPr>
           <a:xfrm>
-            <a:off x="9037703" y="3591128"/>
-            <a:ext cx="298321" cy="110352"/>
+            <a:off x="9034980" y="3831024"/>
+            <a:ext cx="301044" cy="110352"/>
           </a:xfrm>
           <a:prstGeom prst="rect">
             <a:avLst/>
@@ -16853,13 +16990,13 @@
       </p:sp>
       <p:sp>
         <p:nvSpPr>
-          <p:cNvPr id="110" name="Text 108"/>
-          <p:cNvSpPr txBox="1"/>
-          <p:nvPr/>
-        </p:nvSpPr>
-        <p:spPr>
-          <a:xfrm>
-            <a:off x="10168128" y="3526357"/>
+          <p:cNvPr id="114" name="Text 112"/>
+          <p:cNvSpPr txBox="1"/>
+          <p:nvPr/>
+        </p:nvSpPr>
+        <p:spPr>
+          <a:xfrm>
+            <a:off x="10168128" y="3766252"/>
             <a:ext cx="1234440" cy="239896"/>
           </a:xfrm>
           <a:prstGeom prst="rect">
@@ -16892,13 +17029,13 @@
       </p:sp>
       <p:sp>
         <p:nvSpPr>
-          <p:cNvPr id="111" name="Text 109"/>
-          <p:cNvSpPr txBox="1"/>
-          <p:nvPr/>
-        </p:nvSpPr>
-        <p:spPr>
-          <a:xfrm>
-            <a:off x="6208776" y="3766252"/>
+          <p:cNvPr id="115" name="Text 113"/>
+          <p:cNvSpPr txBox="1"/>
+          <p:nvPr/>
+        </p:nvSpPr>
+        <p:spPr>
+          <a:xfrm>
+            <a:off x="6208776" y="4006148"/>
             <a:ext cx="310896" cy="239896"/>
           </a:xfrm>
           <a:prstGeom prst="rect">
@@ -16923,21 +17060,21 @@
                 <a:ea typeface="Inter" pitchFamily="34" charset="-122"/>
                 <a:cs typeface="Inter" pitchFamily="34" charset="-120"/>
               </a:rPr>
-              <a:t>26</a:t>
-            </a:r>
-            <a:endParaRPr lang="en-US" sz="1200" dirty="0"/>
-          </a:p>
-        </p:txBody>
-      </p:sp>
-      <p:sp>
-        <p:nvSpPr>
-          <p:cNvPr id="112" name="Text 110"/>
-          <p:cNvSpPr txBox="1"/>
-          <p:nvPr/>
-        </p:nvSpPr>
-        <p:spPr>
-          <a:xfrm>
-            <a:off x="6565392" y="3766252"/>
+              <a:t>27</a:t>
+            </a:r>
+            <a:endParaRPr lang="en-US" sz="1200" dirty="0"/>
+          </a:p>
+        </p:txBody>
+      </p:sp>
+      <p:sp>
+        <p:nvSpPr>
+          <p:cNvPr id="116" name="Text 114"/>
+          <p:cNvSpPr txBox="1"/>
+          <p:nvPr/>
+        </p:nvSpPr>
+        <p:spPr>
+          <a:xfrm>
+            <a:off x="6565392" y="4006148"/>
             <a:ext cx="1920240" cy="239896"/>
           </a:xfrm>
           <a:prstGeom prst="rect">
@@ -16962,22 +17099,22 @@
                 <a:ea typeface="Inter" pitchFamily="34" charset="-122"/>
                 <a:cs typeface="Inter" pitchFamily="34" charset="-120"/>
               </a:rPr>
-              <a:t>TOYOTA PRESCOTT</a:t>
-            </a:r>
-            <a:endParaRPr lang="en-US" sz="1200" dirty="0"/>
-          </a:p>
-        </p:txBody>
-      </p:sp>
-      <p:sp>
-        <p:nvSpPr>
-          <p:cNvPr id="113" name="Shape 111"/>
+              <a:t>CHEVY LV</a:t>
+            </a:r>
+            <a:endParaRPr lang="en-US" sz="1200" dirty="0"/>
+          </a:p>
+        </p:txBody>
+      </p:sp>
+      <p:sp>
+        <p:nvSpPr>
+          <p:cNvPr id="117" name="Shape 115"/>
           <p:cNvSpPr/>
           <p:nvPr/>
         </p:nvSpPr>
         <p:spPr>
           <a:xfrm>
-            <a:off x="9035179" y="3831024"/>
-            <a:ext cx="300845" cy="110352"/>
+            <a:off x="9018560" y="4070920"/>
+            <a:ext cx="317464" cy="110352"/>
           </a:xfrm>
           <a:prstGeom prst="rect">
             <a:avLst/>
@@ -16990,13 +17127,13 @@
       </p:sp>
       <p:sp>
         <p:nvSpPr>
-          <p:cNvPr id="114" name="Text 112"/>
-          <p:cNvSpPr txBox="1"/>
-          <p:nvPr/>
-        </p:nvSpPr>
-        <p:spPr>
-          <a:xfrm>
-            <a:off x="10168128" y="3766252"/>
+          <p:cNvPr id="118" name="Text 116"/>
+          <p:cNvSpPr txBox="1"/>
+          <p:nvPr/>
+        </p:nvSpPr>
+        <p:spPr>
+          <a:xfrm>
+            <a:off x="10168128" y="4006148"/>
             <a:ext cx="1234440" cy="239896"/>
           </a:xfrm>
           <a:prstGeom prst="rect">
@@ -17021,21 +17158,21 @@
                 <a:ea typeface="Inter" pitchFamily="34" charset="-122"/>
                 <a:cs typeface="Inter" pitchFamily="34" charset="-120"/>
               </a:rPr>
-              <a:t>−5.5 pts</a:t>
-            </a:r>
-            <a:endParaRPr lang="en-US" sz="1200" dirty="0"/>
-          </a:p>
-        </p:txBody>
-      </p:sp>
-      <p:sp>
-        <p:nvSpPr>
-          <p:cNvPr id="115" name="Text 113"/>
-          <p:cNvSpPr txBox="1"/>
-          <p:nvPr/>
-        </p:nvSpPr>
-        <p:spPr>
-          <a:xfrm>
-            <a:off x="6208776" y="4006148"/>
+              <a:t>−5.8 pts</a:t>
+            </a:r>
+            <a:endParaRPr lang="en-US" sz="1200" dirty="0"/>
+          </a:p>
+        </p:txBody>
+      </p:sp>
+      <p:sp>
+        <p:nvSpPr>
+          <p:cNvPr id="119" name="Text 117"/>
+          <p:cNvSpPr txBox="1"/>
+          <p:nvPr/>
+        </p:nvSpPr>
+        <p:spPr>
+          <a:xfrm>
+            <a:off x="6208776" y="4246043"/>
             <a:ext cx="310896" cy="239896"/>
           </a:xfrm>
           <a:prstGeom prst="rect">
@@ -17060,21 +17197,21 @@
                 <a:ea typeface="Inter" pitchFamily="34" charset="-122"/>
                 <a:cs typeface="Inter" pitchFamily="34" charset="-120"/>
               </a:rPr>
-              <a:t>27</a:t>
-            </a:r>
-            <a:endParaRPr lang="en-US" sz="1200" dirty="0"/>
-          </a:p>
-        </p:txBody>
-      </p:sp>
-      <p:sp>
-        <p:nvSpPr>
-          <p:cNvPr id="116" name="Text 114"/>
-          <p:cNvSpPr txBox="1"/>
-          <p:nvPr/>
-        </p:nvSpPr>
-        <p:spPr>
-          <a:xfrm>
-            <a:off x="6565392" y="4006148"/>
+              <a:t>28</a:t>
+            </a:r>
+            <a:endParaRPr lang="en-US" sz="1200" dirty="0"/>
+          </a:p>
+        </p:txBody>
+      </p:sp>
+      <p:sp>
+        <p:nvSpPr>
+          <p:cNvPr id="120" name="Text 118"/>
+          <p:cNvSpPr txBox="1"/>
+          <p:nvPr/>
+        </p:nvSpPr>
+        <p:spPr>
+          <a:xfrm>
+            <a:off x="6565392" y="4246043"/>
             <a:ext cx="1920240" cy="239896"/>
           </a:xfrm>
           <a:prstGeom prst="rect">
@@ -17099,22 +17236,22 @@
                 <a:ea typeface="Inter" pitchFamily="34" charset="-122"/>
                 <a:cs typeface="Inter" pitchFamily="34" charset="-120"/>
               </a:rPr>
-              <a:t>CHEVY LV</a:t>
-            </a:r>
-            <a:endParaRPr lang="en-US" sz="1200" dirty="0"/>
-          </a:p>
-        </p:txBody>
-      </p:sp>
-      <p:sp>
-        <p:nvSpPr>
-          <p:cNvPr id="117" name="Shape 115"/>
+              <a:t>HONDA SPOKANE</a:t>
+            </a:r>
+            <a:endParaRPr lang="en-US" sz="1200" dirty="0"/>
+          </a:p>
+        </p:txBody>
+      </p:sp>
+      <p:sp>
+        <p:nvSpPr>
+          <p:cNvPr id="121" name="Shape 119"/>
           <p:cNvSpPr/>
           <p:nvPr/>
         </p:nvSpPr>
         <p:spPr>
           <a:xfrm>
-            <a:off x="9018589" y="4070920"/>
-            <a:ext cx="317435" cy="110352"/>
+            <a:off x="8963825" y="4310815"/>
+            <a:ext cx="372199" cy="110352"/>
           </a:xfrm>
           <a:prstGeom prst="rect">
             <a:avLst/>
@@ -17127,13 +17264,13 @@
       </p:sp>
       <p:sp>
         <p:nvSpPr>
-          <p:cNvPr id="118" name="Text 116"/>
-          <p:cNvSpPr txBox="1"/>
-          <p:nvPr/>
-        </p:nvSpPr>
-        <p:spPr>
-          <a:xfrm>
-            <a:off x="10168128" y="4006148"/>
+          <p:cNvPr id="122" name="Text 120"/>
+          <p:cNvSpPr txBox="1"/>
+          <p:nvPr/>
+        </p:nvSpPr>
+        <p:spPr>
+          <a:xfrm>
+            <a:off x="10168128" y="4246043"/>
             <a:ext cx="1234440" cy="239896"/>
           </a:xfrm>
           <a:prstGeom prst="rect">
@@ -17158,21 +17295,21 @@
                 <a:ea typeface="Inter" pitchFamily="34" charset="-122"/>
                 <a:cs typeface="Inter" pitchFamily="34" charset="-120"/>
               </a:rPr>
-              <a:t>−5.8 pts</a:t>
-            </a:r>
-            <a:endParaRPr lang="en-US" sz="1200" dirty="0"/>
-          </a:p>
-        </p:txBody>
-      </p:sp>
-      <p:sp>
-        <p:nvSpPr>
-          <p:cNvPr id="119" name="Text 117"/>
-          <p:cNvSpPr txBox="1"/>
-          <p:nvPr/>
-        </p:nvSpPr>
-        <p:spPr>
-          <a:xfrm>
-            <a:off x="6208776" y="4246043"/>
+              <a:t>−6.8 pts</a:t>
+            </a:r>
+            <a:endParaRPr lang="en-US" sz="1200" dirty="0"/>
+          </a:p>
+        </p:txBody>
+      </p:sp>
+      <p:sp>
+        <p:nvSpPr>
+          <p:cNvPr id="123" name="Text 121"/>
+          <p:cNvSpPr txBox="1"/>
+          <p:nvPr/>
+        </p:nvSpPr>
+        <p:spPr>
+          <a:xfrm>
+            <a:off x="6208776" y="4485939"/>
             <a:ext cx="310896" cy="239896"/>
           </a:xfrm>
           <a:prstGeom prst="rect">
@@ -17197,21 +17334,21 @@
                 <a:ea typeface="Inter" pitchFamily="34" charset="-122"/>
                 <a:cs typeface="Inter" pitchFamily="34" charset="-120"/>
               </a:rPr>
-              <a:t>28</a:t>
-            </a:r>
-            <a:endParaRPr lang="en-US" sz="1200" dirty="0"/>
-          </a:p>
-        </p:txBody>
-      </p:sp>
-      <p:sp>
-        <p:nvSpPr>
-          <p:cNvPr id="120" name="Text 118"/>
-          <p:cNvSpPr txBox="1"/>
-          <p:nvPr/>
-        </p:nvSpPr>
-        <p:spPr>
-          <a:xfrm>
-            <a:off x="6565392" y="4246043"/>
+              <a:t>29</a:t>
+            </a:r>
+            <a:endParaRPr lang="en-US" sz="1200" dirty="0"/>
+          </a:p>
+        </p:txBody>
+      </p:sp>
+      <p:sp>
+        <p:nvSpPr>
+          <p:cNvPr id="124" name="Text 122"/>
+          <p:cNvSpPr txBox="1"/>
+          <p:nvPr/>
+        </p:nvSpPr>
+        <p:spPr>
+          <a:xfrm>
+            <a:off x="6565392" y="4485939"/>
             <a:ext cx="1920240" cy="239896"/>
           </a:xfrm>
           <a:prstGeom prst="rect">
@@ -17236,22 +17373,22 @@
                 <a:ea typeface="Inter" pitchFamily="34" charset="-122"/>
                 <a:cs typeface="Inter" pitchFamily="34" charset="-120"/>
               </a:rPr>
-              <a:t>HONDA SPOKANE</a:t>
-            </a:r>
-            <a:endParaRPr lang="en-US" sz="1200" dirty="0"/>
-          </a:p>
-        </p:txBody>
-      </p:sp>
-      <p:sp>
-        <p:nvSpPr>
-          <p:cNvPr id="121" name="Shape 119"/>
+              <a:t>VW HENDERSON</a:t>
+            </a:r>
+            <a:endParaRPr lang="en-US" sz="1200" dirty="0"/>
+          </a:p>
+        </p:txBody>
+      </p:sp>
+      <p:sp>
+        <p:nvSpPr>
+          <p:cNvPr id="125" name="Shape 123"/>
           <p:cNvSpPr/>
           <p:nvPr/>
         </p:nvSpPr>
         <p:spPr>
           <a:xfrm>
-            <a:off x="8963304" y="4310815"/>
-            <a:ext cx="372720" cy="110352"/>
+            <a:off x="8881722" y="4550711"/>
+            <a:ext cx="454302" cy="110352"/>
           </a:xfrm>
           <a:prstGeom prst="rect">
             <a:avLst/>
@@ -17264,13 +17401,13 @@
       </p:sp>
       <p:sp>
         <p:nvSpPr>
-          <p:cNvPr id="122" name="Text 120"/>
-          <p:cNvSpPr txBox="1"/>
-          <p:nvPr/>
-        </p:nvSpPr>
-        <p:spPr>
-          <a:xfrm>
-            <a:off x="10168128" y="4246043"/>
+          <p:cNvPr id="126" name="Text 124"/>
+          <p:cNvSpPr txBox="1"/>
+          <p:nvPr/>
+        </p:nvSpPr>
+        <p:spPr>
+          <a:xfrm>
+            <a:off x="10168128" y="4485939"/>
             <a:ext cx="1234440" cy="239896"/>
           </a:xfrm>
           <a:prstGeom prst="rect">
@@ -17295,21 +17432,21 @@
                 <a:ea typeface="Inter" pitchFamily="34" charset="-122"/>
                 <a:cs typeface="Inter" pitchFamily="34" charset="-120"/>
               </a:rPr>
-              <a:t>−6.8 pts</a:t>
-            </a:r>
-            <a:endParaRPr lang="en-US" sz="1200" dirty="0"/>
-          </a:p>
-        </p:txBody>
-      </p:sp>
-      <p:sp>
-        <p:nvSpPr>
-          <p:cNvPr id="123" name="Text 121"/>
-          <p:cNvSpPr txBox="1"/>
-          <p:nvPr/>
-        </p:nvSpPr>
-        <p:spPr>
-          <a:xfrm>
-            <a:off x="6208776" y="4485939"/>
+              <a:t>−8.3 pts</a:t>
+            </a:r>
+            <a:endParaRPr lang="en-US" sz="1200" dirty="0"/>
+          </a:p>
+        </p:txBody>
+      </p:sp>
+      <p:sp>
+        <p:nvSpPr>
+          <p:cNvPr id="127" name="Text 125"/>
+          <p:cNvSpPr txBox="1"/>
+          <p:nvPr/>
+        </p:nvSpPr>
+        <p:spPr>
+          <a:xfrm>
+            <a:off x="6208776" y="4725834"/>
             <a:ext cx="310896" cy="239896"/>
           </a:xfrm>
           <a:prstGeom prst="rect">
@@ -17334,21 +17471,21 @@
                 <a:ea typeface="Inter" pitchFamily="34" charset="-122"/>
                 <a:cs typeface="Inter" pitchFamily="34" charset="-120"/>
               </a:rPr>
-              <a:t>29</a:t>
-            </a:r>
-            <a:endParaRPr lang="en-US" sz="1200" dirty="0"/>
-          </a:p>
-        </p:txBody>
-      </p:sp>
-      <p:sp>
-        <p:nvSpPr>
-          <p:cNvPr id="124" name="Text 122"/>
-          <p:cNvSpPr txBox="1"/>
-          <p:nvPr/>
-        </p:nvSpPr>
-        <p:spPr>
-          <a:xfrm>
-            <a:off x="6565392" y="4485939"/>
+              <a:t>30</a:t>
+            </a:r>
+            <a:endParaRPr lang="en-US" sz="1200" dirty="0"/>
+          </a:p>
+        </p:txBody>
+      </p:sp>
+      <p:sp>
+        <p:nvSpPr>
+          <p:cNvPr id="128" name="Text 126"/>
+          <p:cNvSpPr txBox="1"/>
+          <p:nvPr/>
+        </p:nvSpPr>
+        <p:spPr>
+          <a:xfrm>
+            <a:off x="6565392" y="4725834"/>
             <a:ext cx="1920240" cy="239896"/>
           </a:xfrm>
           <a:prstGeom prst="rect">
@@ -17373,22 +17510,22 @@
                 <a:ea typeface="Inter" pitchFamily="34" charset="-122"/>
                 <a:cs typeface="Inter" pitchFamily="34" charset="-120"/>
               </a:rPr>
-              <a:t>VW HENDERSON</a:t>
-            </a:r>
-            <a:endParaRPr lang="en-US" sz="1200" dirty="0"/>
-          </a:p>
-        </p:txBody>
-      </p:sp>
-      <p:sp>
-        <p:nvSpPr>
-          <p:cNvPr id="125" name="Shape 123"/>
+              <a:t>TOYOTA SPOKANE</a:t>
+            </a:r>
+            <a:endParaRPr lang="en-US" sz="1200" dirty="0"/>
+          </a:p>
+        </p:txBody>
+      </p:sp>
+      <p:sp>
+        <p:nvSpPr>
+          <p:cNvPr id="129" name="Shape 127"/>
           <p:cNvSpPr/>
           <p:nvPr/>
         </p:nvSpPr>
         <p:spPr>
           <a:xfrm>
-            <a:off x="8882230" y="4550711"/>
-            <a:ext cx="453794" cy="110352"/>
+            <a:off x="8794145" y="4790606"/>
+            <a:ext cx="541879" cy="110352"/>
           </a:xfrm>
           <a:prstGeom prst="rect">
             <a:avLst/>
@@ -17401,13 +17538,13 @@
       </p:sp>
       <p:sp>
         <p:nvSpPr>
-          <p:cNvPr id="126" name="Text 124"/>
-          <p:cNvSpPr txBox="1"/>
-          <p:nvPr/>
-        </p:nvSpPr>
-        <p:spPr>
-          <a:xfrm>
-            <a:off x="10168128" y="4485939"/>
+          <p:cNvPr id="130" name="Text 128"/>
+          <p:cNvSpPr txBox="1"/>
+          <p:nvPr/>
+        </p:nvSpPr>
+        <p:spPr>
+          <a:xfrm>
+            <a:off x="10168128" y="4725834"/>
             <a:ext cx="1234440" cy="239896"/>
           </a:xfrm>
           <a:prstGeom prst="rect">
@@ -17432,21 +17569,21 @@
                 <a:ea typeface="Inter" pitchFamily="34" charset="-122"/>
                 <a:cs typeface="Inter" pitchFamily="34" charset="-120"/>
               </a:rPr>
-              <a:t>−8.3 pts</a:t>
-            </a:r>
-            <a:endParaRPr lang="en-US" sz="1200" dirty="0"/>
-          </a:p>
-        </p:txBody>
-      </p:sp>
-      <p:sp>
-        <p:nvSpPr>
-          <p:cNvPr id="127" name="Text 125"/>
-          <p:cNvSpPr txBox="1"/>
-          <p:nvPr/>
-        </p:nvSpPr>
-        <p:spPr>
-          <a:xfrm>
-            <a:off x="6208776" y="4725834"/>
+              <a:t>−9.9 pts</a:t>
+            </a:r>
+            <a:endParaRPr lang="en-US" sz="1200" dirty="0"/>
+          </a:p>
+        </p:txBody>
+      </p:sp>
+      <p:sp>
+        <p:nvSpPr>
+          <p:cNvPr id="131" name="Text 129"/>
+          <p:cNvSpPr txBox="1"/>
+          <p:nvPr/>
+        </p:nvSpPr>
+        <p:spPr>
+          <a:xfrm>
+            <a:off x="6208776" y="4965730"/>
             <a:ext cx="310896" cy="239896"/>
           </a:xfrm>
           <a:prstGeom prst="rect">
@@ -17471,21 +17608,21 @@
                 <a:ea typeface="Inter" pitchFamily="34" charset="-122"/>
                 <a:cs typeface="Inter" pitchFamily="34" charset="-120"/>
               </a:rPr>
-              <a:t>30</a:t>
-            </a:r>
-            <a:endParaRPr lang="en-US" sz="1200" dirty="0"/>
-          </a:p>
-        </p:txBody>
-      </p:sp>
-      <p:sp>
-        <p:nvSpPr>
-          <p:cNvPr id="128" name="Text 126"/>
-          <p:cNvSpPr txBox="1"/>
-          <p:nvPr/>
-        </p:nvSpPr>
-        <p:spPr>
-          <a:xfrm>
-            <a:off x="6565392" y="4725834"/>
+              <a:t>31</a:t>
+            </a:r>
+            <a:endParaRPr lang="en-US" sz="1200" dirty="0"/>
+          </a:p>
+        </p:txBody>
+      </p:sp>
+      <p:sp>
+        <p:nvSpPr>
+          <p:cNvPr id="132" name="Text 130"/>
+          <p:cNvSpPr txBox="1"/>
+          <p:nvPr/>
+        </p:nvSpPr>
+        <p:spPr>
+          <a:xfrm>
+            <a:off x="6565392" y="4965730"/>
             <a:ext cx="1920240" cy="239896"/>
           </a:xfrm>
           <a:prstGeom prst="rect">
@@ -17510,22 +17647,22 @@
                 <a:ea typeface="Inter" pitchFamily="34" charset="-122"/>
                 <a:cs typeface="Inter" pitchFamily="34" charset="-120"/>
               </a:rPr>
-              <a:t>TOYOTA SPOKANE</a:t>
-            </a:r>
-            <a:endParaRPr lang="en-US" sz="1200" dirty="0"/>
-          </a:p>
-        </p:txBody>
-      </p:sp>
-      <p:sp>
-        <p:nvSpPr>
-          <p:cNvPr id="129" name="Shape 127"/>
+              <a:t>VW ST GEORGE</a:t>
+            </a:r>
+            <a:endParaRPr lang="en-US" sz="1200" dirty="0"/>
+          </a:p>
+        </p:txBody>
+      </p:sp>
+      <p:sp>
+        <p:nvSpPr>
+          <p:cNvPr id="133" name="Shape 131"/>
           <p:cNvSpPr/>
           <p:nvPr/>
         </p:nvSpPr>
         <p:spPr>
           <a:xfrm>
-            <a:off x="8795705" y="4790606"/>
-            <a:ext cx="540319" cy="110352"/>
+            <a:off x="8722990" y="5030502"/>
+            <a:ext cx="613034" cy="110352"/>
           </a:xfrm>
           <a:prstGeom prst="rect">
             <a:avLst/>
@@ -17538,13 +17675,13 @@
       </p:sp>
       <p:sp>
         <p:nvSpPr>
-          <p:cNvPr id="130" name="Text 128"/>
-          <p:cNvSpPr txBox="1"/>
-          <p:nvPr/>
-        </p:nvSpPr>
-        <p:spPr>
-          <a:xfrm>
-            <a:off x="10168128" y="4725834"/>
+          <p:cNvPr id="134" name="Text 132"/>
+          <p:cNvSpPr txBox="1"/>
+          <p:nvPr/>
+        </p:nvSpPr>
+        <p:spPr>
+          <a:xfrm>
+            <a:off x="10168128" y="4965730"/>
             <a:ext cx="1234440" cy="239896"/>
           </a:xfrm>
           <a:prstGeom prst="rect">
@@ -17569,21 +17706,21 @@
                 <a:ea typeface="Inter" pitchFamily="34" charset="-122"/>
                 <a:cs typeface="Inter" pitchFamily="34" charset="-120"/>
               </a:rPr>
-              <a:t>−9.9 pts</a:t>
-            </a:r>
-            <a:endParaRPr lang="en-US" sz="1200" dirty="0"/>
-          </a:p>
-        </p:txBody>
-      </p:sp>
-      <p:sp>
-        <p:nvSpPr>
-          <p:cNvPr id="131" name="Text 129"/>
-          <p:cNvSpPr txBox="1"/>
-          <p:nvPr/>
-        </p:nvSpPr>
-        <p:spPr>
-          <a:xfrm>
-            <a:off x="6208776" y="4965730"/>
+              <a:t>−11.2 pts</a:t>
+            </a:r>
+            <a:endParaRPr lang="en-US" sz="1200" dirty="0"/>
+          </a:p>
+        </p:txBody>
+      </p:sp>
+      <p:sp>
+        <p:nvSpPr>
+          <p:cNvPr id="135" name="Text 133"/>
+          <p:cNvSpPr txBox="1"/>
+          <p:nvPr/>
+        </p:nvSpPr>
+        <p:spPr>
+          <a:xfrm>
+            <a:off x="6208776" y="5205625"/>
             <a:ext cx="310896" cy="239896"/>
           </a:xfrm>
           <a:prstGeom prst="rect">
@@ -17608,21 +17745,21 @@
                 <a:ea typeface="Inter" pitchFamily="34" charset="-122"/>
                 <a:cs typeface="Inter" pitchFamily="34" charset="-120"/>
               </a:rPr>
-              <a:t>31</a:t>
-            </a:r>
-            <a:endParaRPr lang="en-US" sz="1200" dirty="0"/>
-          </a:p>
-        </p:txBody>
-      </p:sp>
-      <p:sp>
-        <p:nvSpPr>
-          <p:cNvPr id="132" name="Text 130"/>
-          <p:cNvSpPr txBox="1"/>
-          <p:nvPr/>
-        </p:nvSpPr>
-        <p:spPr>
-          <a:xfrm>
-            <a:off x="6565392" y="4965730"/>
+              <a:t>32</a:t>
+            </a:r>
+            <a:endParaRPr lang="en-US" sz="1200" dirty="0"/>
+          </a:p>
+        </p:txBody>
+      </p:sp>
+      <p:sp>
+        <p:nvSpPr>
+          <p:cNvPr id="136" name="Text 134"/>
+          <p:cNvSpPr txBox="1"/>
+          <p:nvPr/>
+        </p:nvSpPr>
+        <p:spPr>
+          <a:xfrm>
+            <a:off x="6565392" y="5205625"/>
             <a:ext cx="1920240" cy="239896"/>
           </a:xfrm>
           <a:prstGeom prst="rect">
@@ -17647,22 +17784,22 @@
                 <a:ea typeface="Inter" pitchFamily="34" charset="-122"/>
                 <a:cs typeface="Inter" pitchFamily="34" charset="-120"/>
               </a:rPr>
-              <a:t>VW ST GEORGE</a:t>
-            </a:r>
-            <a:endParaRPr lang="en-US" sz="1200" dirty="0"/>
-          </a:p>
-        </p:txBody>
-      </p:sp>
-      <p:sp>
-        <p:nvSpPr>
-          <p:cNvPr id="133" name="Shape 131"/>
+              <a:t>HYUNDAI ST GEORGE</a:t>
+            </a:r>
+            <a:endParaRPr lang="en-US" sz="1200" dirty="0"/>
+          </a:p>
+        </p:txBody>
+      </p:sp>
+      <p:sp>
+        <p:nvSpPr>
+          <p:cNvPr id="137" name="Shape 135"/>
           <p:cNvSpPr/>
           <p:nvPr/>
         </p:nvSpPr>
         <p:spPr>
           <a:xfrm>
-            <a:off x="8725604" y="5030502"/>
-            <a:ext cx="610420" cy="110352"/>
+            <a:off x="8690149" y="5270397"/>
+            <a:ext cx="645875" cy="110352"/>
           </a:xfrm>
           <a:prstGeom prst="rect">
             <a:avLst/>
@@ -17675,143 +17812,6 @@
       </p:sp>
       <p:sp>
         <p:nvSpPr>
-          <p:cNvPr id="134" name="Text 132"/>
-          <p:cNvSpPr txBox="1"/>
-          <p:nvPr/>
-        </p:nvSpPr>
-        <p:spPr>
-          <a:xfrm>
-            <a:off x="10168128" y="4965730"/>
-            <a:ext cx="1234440" cy="239896"/>
-          </a:xfrm>
-          <a:prstGeom prst="rect">
-            <a:avLst/>
-          </a:prstGeom>
-          <a:noFill/>
-          <a:ln/>
-        </p:spPr>
-        <p:txBody>
-          <a:bodyPr wrap="square" lIns="0" tIns="0" rIns="0" bIns="0" rtlCol="0" anchor="ctr"/>
-          <a:lstStyle/>
-          <a:p>
-            <a:pPr algn="r" indent="0" marL="0">
-              <a:buNone/>
-            </a:pPr>
-            <a:r>
-              <a:rPr lang="en-US" sz="1200" b="1" dirty="0">
-                <a:solidFill>
-                  <a:srgbClr val="A82B26"/>
-                </a:solidFill>
-                <a:latin typeface="Inter" pitchFamily="34" charset="0"/>
-                <a:ea typeface="Inter" pitchFamily="34" charset="-122"/>
-                <a:cs typeface="Inter" pitchFamily="34" charset="-120"/>
-              </a:rPr>
-              <a:t>−11.2 pts</a:t>
-            </a:r>
-            <a:endParaRPr lang="en-US" sz="1200" dirty="0"/>
-          </a:p>
-        </p:txBody>
-      </p:sp>
-      <p:sp>
-        <p:nvSpPr>
-          <p:cNvPr id="135" name="Text 133"/>
-          <p:cNvSpPr txBox="1"/>
-          <p:nvPr/>
-        </p:nvSpPr>
-        <p:spPr>
-          <a:xfrm>
-            <a:off x="6208776" y="5205625"/>
-            <a:ext cx="310896" cy="239896"/>
-          </a:xfrm>
-          <a:prstGeom prst="rect">
-            <a:avLst/>
-          </a:prstGeom>
-          <a:noFill/>
-          <a:ln/>
-        </p:spPr>
-        <p:txBody>
-          <a:bodyPr wrap="square" lIns="0" tIns="0" rIns="0" bIns="0" rtlCol="0" anchor="ctr"/>
-          <a:lstStyle/>
-          <a:p>
-            <a:pPr algn="r" indent="0" marL="0">
-              <a:buNone/>
-            </a:pPr>
-            <a:r>
-              <a:rPr lang="en-US" sz="1200" dirty="0">
-                <a:solidFill>
-                  <a:srgbClr val="9AA3AD"/>
-                </a:solidFill>
-                <a:latin typeface="Inter" pitchFamily="34" charset="0"/>
-                <a:ea typeface="Inter" pitchFamily="34" charset="-122"/>
-                <a:cs typeface="Inter" pitchFamily="34" charset="-120"/>
-              </a:rPr>
-              <a:t>32</a:t>
-            </a:r>
-            <a:endParaRPr lang="en-US" sz="1200" dirty="0"/>
-          </a:p>
-        </p:txBody>
-      </p:sp>
-      <p:sp>
-        <p:nvSpPr>
-          <p:cNvPr id="136" name="Text 134"/>
-          <p:cNvSpPr txBox="1"/>
-          <p:nvPr/>
-        </p:nvSpPr>
-        <p:spPr>
-          <a:xfrm>
-            <a:off x="6565392" y="5205625"/>
-            <a:ext cx="1920240" cy="239896"/>
-          </a:xfrm>
-          <a:prstGeom prst="rect">
-            <a:avLst/>
-          </a:prstGeom>
-          <a:noFill/>
-          <a:ln/>
-        </p:spPr>
-        <p:txBody>
-          <a:bodyPr wrap="square" lIns="0" tIns="0" rIns="0" bIns="0" rtlCol="0" anchor="ctr"/>
-          <a:lstStyle/>
-          <a:p>
-            <a:pPr indent="0" marL="0">
-              <a:buNone/>
-            </a:pPr>
-            <a:r>
-              <a:rPr lang="en-US" sz="1200" dirty="0">
-                <a:solidFill>
-                  <a:srgbClr val="1A1A1A"/>
-                </a:solidFill>
-                <a:latin typeface="Inter" pitchFamily="34" charset="0"/>
-                <a:ea typeface="Inter" pitchFamily="34" charset="-122"/>
-                <a:cs typeface="Inter" pitchFamily="34" charset="-120"/>
-              </a:rPr>
-              <a:t>HYUNDAI ST GEORGE</a:t>
-            </a:r>
-            <a:endParaRPr lang="en-US" sz="1200" dirty="0"/>
-          </a:p>
-        </p:txBody>
-      </p:sp>
-      <p:sp>
-        <p:nvSpPr>
-          <p:cNvPr id="137" name="Shape 135"/>
-          <p:cNvSpPr/>
-          <p:nvPr/>
-        </p:nvSpPr>
-        <p:spPr>
-          <a:xfrm>
-            <a:off x="8691636" y="5270397"/>
-            <a:ext cx="644388" cy="110352"/>
-          </a:xfrm>
-          <a:prstGeom prst="rect">
-            <a:avLst/>
-          </a:prstGeom>
-          <a:solidFill>
-            <a:srgbClr val="C2352F"/>
-          </a:solidFill>
-          <a:ln/>
-        </p:spPr>
-      </p:sp>
-      <p:sp>
-        <p:nvSpPr>
           <p:cNvPr id="138" name="Text 136"/>
           <p:cNvSpPr txBox="1"/>
           <p:nvPr/>
@@ -17935,8 +17935,8 @@
         </p:nvSpPr>
         <p:spPr>
           <a:xfrm>
-            <a:off x="8652415" y="5510293"/>
-            <a:ext cx="683609" cy="110352"/>
+            <a:off x="8651834" y="5510293"/>
+            <a:ext cx="684190" cy="110352"/>
           </a:xfrm>
           <a:prstGeom prst="rect">
             <a:avLst/>
@@ -18878,7 +18878,7 @@
                 <a:ea typeface="Inter" pitchFamily="34" charset="-122"/>
                 <a:cs typeface="Inter" pitchFamily="34" charset="-120"/>
               </a:rPr>
-              <a:t>+10.6 pts</a:t>
+              <a:t>+10.7 pts</a:t>
             </a:r>
             <a:endParaRPr lang="en-US" sz="1600" dirty="0"/>
           </a:p>
@@ -19035,7 +19035,7 @@
                 <a:ea typeface="Inter" pitchFamily="34" charset="-122"/>
                 <a:cs typeface="Inter" pitchFamily="34" charset="-120"/>
               </a:rPr>
-              <a:t>+7.6 pts</a:t>
+              <a:t>+7.5 pts</a:t>
             </a:r>
             <a:endParaRPr lang="en-US" sz="1600" dirty="0"/>
           </a:p>
@@ -19212,7 +19212,7 @@
                 <a:ea typeface="Inter" pitchFamily="34" charset="-122"/>
                 <a:cs typeface="Inter" pitchFamily="34" charset="-120"/>
               </a:rPr>
-              <a:t>+7.0 pts</a:t>
+              <a:t>+7.1 pts</a:t>
             </a:r>
             <a:endParaRPr lang="en-US" sz="1600" dirty="0"/>
           </a:p>
@@ -20824,7 +20824,7 @@
                 <a:ea typeface="Inter" pitchFamily="34" charset="-122"/>
                 <a:cs typeface="Inter" pitchFamily="34" charset="-120"/>
               </a:rPr>
-              <a:t>+16.5 pts</a:t>
+              <a:t>+16.4 pts</a:t>
             </a:r>
             <a:endParaRPr lang="en-US" sz="1600" dirty="0"/>
           </a:p>
@@ -21426,7 +21426,7 @@
                 <a:ea typeface="Inter" pitchFamily="34" charset="-122"/>
                 <a:cs typeface="Inter" pitchFamily="34" charset="-120"/>
               </a:rPr>
-              <a:t>76.0%</a:t>
+              <a:t>75.8%</a:t>
             </a:r>
             <a:endParaRPr lang="en-US" sz="3000" dirty="0"/>
           </a:p>
@@ -21504,7 +21504,7 @@
                 <a:ea typeface="Inter" pitchFamily="34" charset="-122"/>
                 <a:cs typeface="Inter" pitchFamily="34" charset="-120"/>
               </a:rPr>
-              <a:t>78.1%</a:t>
+              <a:t>77.9%</a:t>
             </a:r>
             <a:endParaRPr lang="en-US" sz="3000" dirty="0"/>
           </a:p>
@@ -22052,7 +22052,7 @@
                 <a:ea typeface="Inter" pitchFamily="34" charset="-122"/>
                 <a:cs typeface="Inter" pitchFamily="34" charset="-120"/>
               </a:rPr>
-              <a:t>Up 2.1 pts to 78.1%, ahead of 2025 in six of nine months. Fixed gross grew 4.1%; fixed expenses 1.3%.</a:t>
+              <a:t>Up 2.1 pts to 77.9%, ahead of 2025 in six of nine months. Fixed gross grew 4.1%; fixed expenses 1.4%.</a:t>
             </a:r>
             <a:endParaRPr lang="en-US" sz="1550" dirty="0"/>
           </a:p>
@@ -22359,7 +22359,7 @@
                 <a:ea typeface="Inter" pitchFamily="34" charset="-122"/>
                 <a:cs typeface="Inter" pitchFamily="34" charset="-120"/>
               </a:rPr>
-              <a:t>78.1%</a:t>
+              <a:t>77.9%</a:t>
             </a:r>
             <a:endParaRPr lang="en-US" sz="2000" dirty="0"/>
           </a:p>
@@ -24629,7 +24629,7 @@
                 <a:ea typeface="Inter" pitchFamily="34" charset="-122"/>
                 <a:cs typeface="Inter" pitchFamily="34" charset="-120"/>
               </a:rPr>
-              <a:t>GMC PRESCOTT</a:t>
+              <a:t>LEXUS</a:t>
             </a:r>
             <a:endParaRPr lang="en-US" sz="1200" dirty="0"/>
           </a:p>
@@ -24644,7 +24644,7 @@
         <p:spPr>
           <a:xfrm>
             <a:off x="3008376" y="5745390"/>
-            <a:ext cx="1007984" cy="119948"/>
+            <a:ext cx="1007915" cy="119948"/>
           </a:xfrm>
           <a:prstGeom prst="rect">
             <a:avLst/>
@@ -24766,7 +24766,7 @@
                 <a:ea typeface="Inter" pitchFamily="34" charset="-122"/>
                 <a:cs typeface="Inter" pitchFamily="34" charset="-120"/>
               </a:rPr>
-              <a:t>LEXUS</a:t>
+              <a:t>LR HENDERSON</a:t>
             </a:r>
             <a:endParaRPr lang="en-US" sz="1200" dirty="0"/>
           </a:p>
@@ -24781,7 +24781,7 @@
         <p:spPr>
           <a:xfrm>
             <a:off x="8558784" y="1907062"/>
-            <a:ext cx="1007915" cy="119948"/>
+            <a:ext cx="979751" cy="119948"/>
           </a:xfrm>
           <a:prstGeom prst="rect">
             <a:avLst/>
@@ -24825,7 +24825,7 @@
                 <a:ea typeface="Inter" pitchFamily="34" charset="-122"/>
                 <a:cs typeface="Inter" pitchFamily="34" charset="-120"/>
               </a:rPr>
-              <a:t>75.6%</a:t>
+              <a:t>74.4%</a:t>
             </a:r>
             <a:endParaRPr lang="en-US" sz="1200" dirty="0"/>
           </a:p>
@@ -24903,7 +24903,7 @@
                 <a:ea typeface="Inter" pitchFamily="34" charset="-122"/>
                 <a:cs typeface="Inter" pitchFamily="34" charset="-120"/>
               </a:rPr>
-              <a:t>LR HENDERSON</a:t>
+              <a:t>TOYOTA SPOKANE</a:t>
             </a:r>
             <a:endParaRPr lang="en-US" sz="1200" dirty="0"/>
           </a:p>
@@ -24918,7 +24918,7 @@
         <p:spPr>
           <a:xfrm>
             <a:off x="8558784" y="2146957"/>
-            <a:ext cx="979751" cy="119948"/>
+            <a:ext cx="956432" cy="119948"/>
           </a:xfrm>
           <a:prstGeom prst="rect">
             <a:avLst/>
@@ -24962,7 +24962,7 @@
                 <a:ea typeface="Inter" pitchFamily="34" charset="-122"/>
                 <a:cs typeface="Inter" pitchFamily="34" charset="-120"/>
               </a:rPr>
-              <a:t>74.4%</a:t>
+              <a:t>73.3%</a:t>
             </a:r>
             <a:endParaRPr lang="en-US" sz="1200" dirty="0"/>
           </a:p>
@@ -25040,7 +25040,7 @@
                 <a:ea typeface="Inter" pitchFamily="34" charset="-122"/>
                 <a:cs typeface="Inter" pitchFamily="34" charset="-120"/>
               </a:rPr>
-              <a:t>TOYOTA SPOKANE</a:t>
+              <a:t>NISSAN</a:t>
             </a:r>
             <a:endParaRPr lang="en-US" sz="1200" dirty="0"/>
           </a:p>
@@ -25055,7 +25055,7 @@
         <p:spPr>
           <a:xfrm>
             <a:off x="8558784" y="2386853"/>
-            <a:ext cx="956432" cy="119948"/>
+            <a:ext cx="897553" cy="119948"/>
           </a:xfrm>
           <a:prstGeom prst="rect">
             <a:avLst/>
@@ -25099,7 +25099,7 @@
                 <a:ea typeface="Inter" pitchFamily="34" charset="-122"/>
                 <a:cs typeface="Inter" pitchFamily="34" charset="-120"/>
               </a:rPr>
-              <a:t>73.3%</a:t>
+              <a:t>70.6%</a:t>
             </a:r>
             <a:endParaRPr lang="en-US" sz="1200" dirty="0"/>
           </a:p>
@@ -25177,7 +25177,7 @@
                 <a:ea typeface="Inter" pitchFamily="34" charset="-122"/>
                 <a:cs typeface="Inter" pitchFamily="34" charset="-120"/>
               </a:rPr>
-              <a:t>NISSAN</a:t>
+              <a:t>TOYOTA PRESCOTT</a:t>
             </a:r>
             <a:endParaRPr lang="en-US" sz="1200" dirty="0"/>
           </a:p>
@@ -25192,7 +25192,7 @@
         <p:spPr>
           <a:xfrm>
             <a:off x="8558784" y="2626748"/>
-            <a:ext cx="897553" cy="119948"/>
+            <a:ext cx="890311" cy="119948"/>
           </a:xfrm>
           <a:prstGeom prst="rect">
             <a:avLst/>
@@ -25236,7 +25236,7 @@
                 <a:ea typeface="Inter" pitchFamily="34" charset="-122"/>
                 <a:cs typeface="Inter" pitchFamily="34" charset="-120"/>
               </a:rPr>
-              <a:t>70.6%</a:t>
+              <a:t>70.3%</a:t>
             </a:r>
             <a:endParaRPr lang="en-US" sz="1200" dirty="0"/>
           </a:p>
@@ -25314,7 +25314,7 @@
                 <a:ea typeface="Inter" pitchFamily="34" charset="-122"/>
                 <a:cs typeface="Inter" pitchFamily="34" charset="-120"/>
               </a:rPr>
-              <a:t>TOYOTA PRESCOTT</a:t>
+              <a:t>TOYOTA FLAGSTAFF</a:t>
             </a:r>
             <a:endParaRPr lang="en-US" sz="1200" dirty="0"/>
           </a:p>
@@ -25329,7 +25329,7 @@
         <p:spPr>
           <a:xfrm>
             <a:off x="8558784" y="2866644"/>
-            <a:ext cx="890311" cy="119948"/>
+            <a:ext cx="883510" cy="119948"/>
           </a:xfrm>
           <a:prstGeom prst="rect">
             <a:avLst/>
@@ -25373,7 +25373,7 @@
                 <a:ea typeface="Inter" pitchFamily="34" charset="-122"/>
                 <a:cs typeface="Inter" pitchFamily="34" charset="-120"/>
               </a:rPr>
-              <a:t>70.3%</a:t>
+              <a:t>70.0%</a:t>
             </a:r>
             <a:endParaRPr lang="en-US" sz="1200" dirty="0"/>
           </a:p>
@@ -25451,7 +25451,7 @@
                 <a:ea typeface="Inter" pitchFamily="34" charset="-122"/>
                 <a:cs typeface="Inter" pitchFamily="34" charset="-120"/>
               </a:rPr>
-              <a:t>TOYOTA FLAGSTAFF</a:t>
+              <a:t>CHEVY LV</a:t>
             </a:r>
             <a:endParaRPr lang="en-US" sz="1200" dirty="0"/>
           </a:p>
@@ -25466,7 +25466,7 @@
         <p:spPr>
           <a:xfrm>
             <a:off x="8558784" y="3106540"/>
-            <a:ext cx="883510" cy="119948"/>
+            <a:ext cx="860120" cy="119948"/>
           </a:xfrm>
           <a:prstGeom prst="rect">
             <a:avLst/>
@@ -25510,7 +25510,7 @@
                 <a:ea typeface="Inter" pitchFamily="34" charset="-122"/>
                 <a:cs typeface="Inter" pitchFamily="34" charset="-120"/>
               </a:rPr>
-              <a:t>70.0%</a:t>
+              <a:t>68.9%</a:t>
             </a:r>
             <a:endParaRPr lang="en-US" sz="1200" dirty="0"/>
           </a:p>
@@ -25588,7 +25588,7 @@
                 <a:ea typeface="Inter" pitchFamily="34" charset="-122"/>
                 <a:cs typeface="Inter" pitchFamily="34" charset="-120"/>
               </a:rPr>
-              <a:t>CHEVY LV</a:t>
+              <a:t>KIA ST GEORGE</a:t>
             </a:r>
             <a:endParaRPr lang="en-US" sz="1200" dirty="0"/>
           </a:p>
@@ -25603,7 +25603,7 @@
         <p:spPr>
           <a:xfrm>
             <a:off x="8558784" y="3346435"/>
-            <a:ext cx="860120" cy="119948"/>
+            <a:ext cx="791399" cy="119948"/>
           </a:xfrm>
           <a:prstGeom prst="rect">
             <a:avLst/>
@@ -25647,7 +25647,7 @@
                 <a:ea typeface="Inter" pitchFamily="34" charset="-122"/>
                 <a:cs typeface="Inter" pitchFamily="34" charset="-120"/>
               </a:rPr>
-              <a:t>68.9%</a:t>
+              <a:t>65.8%</a:t>
             </a:r>
             <a:endParaRPr lang="en-US" sz="1200" dirty="0"/>
           </a:p>
@@ -25725,7 +25725,7 @@
                 <a:ea typeface="Inter" pitchFamily="34" charset="-122"/>
                 <a:cs typeface="Inter" pitchFamily="34" charset="-120"/>
               </a:rPr>
-              <a:t>KIA ST GEORGE</a:t>
+              <a:t>CHEVY GMC BULLHEAD</a:t>
             </a:r>
             <a:endParaRPr lang="en-US" sz="1200" dirty="0"/>
           </a:p>
@@ -25740,7 +25740,7 @@
         <p:spPr>
           <a:xfrm>
             <a:off x="8558784" y="3586331"/>
-            <a:ext cx="791399" cy="119948"/>
+            <a:ext cx="774373" cy="119948"/>
           </a:xfrm>
           <a:prstGeom prst="rect">
             <a:avLst/>
@@ -25784,7 +25784,7 @@
                 <a:ea typeface="Inter" pitchFamily="34" charset="-122"/>
                 <a:cs typeface="Inter" pitchFamily="34" charset="-120"/>
               </a:rPr>
-              <a:t>65.8%</a:t>
+              <a:t>65.1%</a:t>
             </a:r>
             <a:endParaRPr lang="en-US" sz="1200" dirty="0"/>
           </a:p>
@@ -25862,7 +25862,7 @@
                 <a:ea typeface="Inter" pitchFamily="34" charset="-122"/>
                 <a:cs typeface="Inter" pitchFamily="34" charset="-120"/>
               </a:rPr>
-              <a:t>CHEVY GMC BULLHEAD</a:t>
+              <a:t>HONDA FLAGSTAFF</a:t>
             </a:r>
             <a:endParaRPr lang="en-US" sz="1200" dirty="0"/>
           </a:p>
@@ -25877,7 +25877,7 @@
         <p:spPr>
           <a:xfrm>
             <a:off x="8558784" y="3826226"/>
-            <a:ext cx="774373" cy="119948"/>
+            <a:ext cx="743729" cy="119948"/>
           </a:xfrm>
           <a:prstGeom prst="rect">
             <a:avLst/>
@@ -25921,7 +25921,7 @@
                 <a:ea typeface="Inter" pitchFamily="34" charset="-122"/>
                 <a:cs typeface="Inter" pitchFamily="34" charset="-120"/>
               </a:rPr>
-              <a:t>65.1%</a:t>
+              <a:t>63.7%</a:t>
             </a:r>
             <a:endParaRPr lang="en-US" sz="1200" dirty="0"/>
           </a:p>
@@ -25999,7 +25999,7 @@
                 <a:ea typeface="Inter" pitchFamily="34" charset="-122"/>
                 <a:cs typeface="Inter" pitchFamily="34" charset="-120"/>
               </a:rPr>
-              <a:t>HONDA FLAGSTAFF</a:t>
+              <a:t>ACURA</a:t>
             </a:r>
             <a:endParaRPr lang="en-US" sz="1200" dirty="0"/>
           </a:p>
@@ -26014,7 +26014,7 @@
         <p:spPr>
           <a:xfrm>
             <a:off x="8558784" y="4066122"/>
-            <a:ext cx="743729" cy="119948"/>
+            <a:ext cx="730224" cy="119948"/>
           </a:xfrm>
           <a:prstGeom prst="rect">
             <a:avLst/>
@@ -26058,7 +26058,7 @@
                 <a:ea typeface="Inter" pitchFamily="34" charset="-122"/>
                 <a:cs typeface="Inter" pitchFamily="34" charset="-120"/>
               </a:rPr>
-              <a:t>63.7%</a:t>
+              <a:t>63.1%</a:t>
             </a:r>
             <a:endParaRPr lang="en-US" sz="1200" dirty="0"/>
           </a:p>
@@ -26136,7 +26136,7 @@
                 <a:ea typeface="Inter" pitchFamily="34" charset="-122"/>
                 <a:cs typeface="Inter" pitchFamily="34" charset="-120"/>
               </a:rPr>
-              <a:t>ACURA</a:t>
+              <a:t>GMC PRESCOTT</a:t>
             </a:r>
             <a:endParaRPr lang="en-US" sz="1200" dirty="0"/>
           </a:p>
@@ -26151,7 +26151,7 @@
         <p:spPr>
           <a:xfrm>
             <a:off x="8558784" y="4306017"/>
-            <a:ext cx="730224" cy="119948"/>
+            <a:ext cx="698295" cy="119948"/>
           </a:xfrm>
           <a:prstGeom prst="rect">
             <a:avLst/>
@@ -26195,7 +26195,7 @@
                 <a:ea typeface="Inter" pitchFamily="34" charset="-122"/>
                 <a:cs typeface="Inter" pitchFamily="34" charset="-120"/>
               </a:rPr>
-              <a:t>63.1%</a:t>
+              <a:t>61.6%</a:t>
             </a:r>
             <a:endParaRPr lang="en-US" sz="1200" dirty="0"/>
           </a:p>
@@ -26894,7 +26894,7 @@
         </p:nvSpPr>
         <p:spPr>
           <a:xfrm>
-            <a:off x="4063635" y="1847088"/>
+            <a:off x="4059032" y="1847088"/>
             <a:ext cx="14630" cy="4078224"/>
           </a:xfrm>
           <a:prstGeom prst="rect">
@@ -26914,7 +26914,7 @@
         </p:nvSpPr>
         <p:spPr>
           <a:xfrm>
-            <a:off x="9614043" y="1847088"/>
+            <a:off x="9609440" y="1847088"/>
             <a:ext cx="14630" cy="4078224"/>
           </a:xfrm>
           <a:prstGeom prst="rect">
@@ -26999,7 +26999,7 @@
                 <a:ea typeface="Inter" pitchFamily="34" charset="-122"/>
                 <a:cs typeface="Inter" pitchFamily="34" charset="-120"/>
               </a:rPr>
-              <a:t>15 of 33 stores at or above the 78.1% group.</a:t>
+              <a:t>15 of 33 stores at or above the 77.9% group.</a:t>
             </a:r>
             <a:endParaRPr lang="en-US" sz="1600" dirty="0"/>
           </a:p>
@@ -27399,7 +27399,7 @@
         <p:spPr>
           <a:xfrm>
             <a:off x="3785616" y="1911860"/>
-            <a:ext cx="716268" cy="110352"/>
+            <a:ext cx="719170" cy="110352"/>
           </a:xfrm>
           <a:prstGeom prst="rect">
             <a:avLst/>
@@ -27536,7 +27536,7 @@
         <p:spPr>
           <a:xfrm>
             <a:off x="3785616" y="2151755"/>
-            <a:ext cx="425726" cy="110352"/>
+            <a:ext cx="428822" cy="110352"/>
           </a:xfrm>
           <a:prstGeom prst="rect">
             <a:avLst/>
@@ -27580,7 +27580,7 @@
                 <a:ea typeface="Inter" pitchFamily="34" charset="-122"/>
                 <a:cs typeface="Inter" pitchFamily="34" charset="-120"/>
               </a:rPr>
-              <a:t>+9.5 pts</a:t>
+              <a:t>+9.6 pts</a:t>
             </a:r>
             <a:endParaRPr lang="en-US" sz="1200" dirty="0"/>
           </a:p>
@@ -27673,7 +27673,7 @@
         <p:spPr>
           <a:xfrm>
             <a:off x="3785616" y="2391651"/>
-            <a:ext cx="423929" cy="110352"/>
+            <a:ext cx="424355" cy="110352"/>
           </a:xfrm>
           <a:prstGeom prst="rect">
             <a:avLst/>
@@ -27810,7 +27810,7 @@
         <p:spPr>
           <a:xfrm>
             <a:off x="3785616" y="2631546"/>
-            <a:ext cx="249780" cy="110352"/>
+            <a:ext cx="250146" cy="110352"/>
           </a:xfrm>
           <a:prstGeom prst="rect">
             <a:avLst/>
@@ -27947,7 +27947,7 @@
         <p:spPr>
           <a:xfrm>
             <a:off x="3785616" y="2871442"/>
-            <a:ext cx="241902" cy="110352"/>
+            <a:ext cx="245679" cy="110352"/>
           </a:xfrm>
           <a:prstGeom prst="rect">
             <a:avLst/>
@@ -27991,7 +27991,7 @@
                 <a:ea typeface="Inter" pitchFamily="34" charset="-122"/>
                 <a:cs typeface="Inter" pitchFamily="34" charset="-120"/>
               </a:rPr>
-              <a:t>+5.4 pts</a:t>
+              <a:t>+5.5 pts</a:t>
             </a:r>
             <a:endParaRPr lang="en-US" sz="1200" dirty="0"/>
           </a:p>
@@ -28069,7 +28069,7 @@
                 <a:ea typeface="Inter" pitchFamily="34" charset="-122"/>
                 <a:cs typeface="Inter" pitchFamily="34" charset="-120"/>
               </a:rPr>
-              <a:t>KIA LV</a:t>
+              <a:t>SUBARU ST GEORGE</a:t>
             </a:r>
             <a:endParaRPr lang="en-US" sz="1200" dirty="0"/>
           </a:p>
@@ -28084,7 +28084,7 @@
         <p:spPr>
           <a:xfrm>
             <a:off x="3785616" y="3111337"/>
-            <a:ext cx="234433" cy="110352"/>
+            <a:ext cx="236746" cy="110352"/>
           </a:xfrm>
           <a:prstGeom prst="rect">
             <a:avLst/>
@@ -28206,7 +28206,7 @@
                 <a:ea typeface="Inter" pitchFamily="34" charset="-122"/>
                 <a:cs typeface="Inter" pitchFamily="34" charset="-120"/>
               </a:rPr>
-              <a:t>SUBARU ST GEORGE</a:t>
+              <a:t>KIA LV</a:t>
             </a:r>
             <a:endParaRPr lang="en-US" sz="1200" dirty="0"/>
           </a:p>
@@ -28221,7 +28221,7 @@
         <p:spPr>
           <a:xfrm>
             <a:off x="3785616" y="3351233"/>
-            <a:ext cx="234127" cy="110352"/>
+            <a:ext cx="232279" cy="110352"/>
           </a:xfrm>
           <a:prstGeom prst="rect">
             <a:avLst/>
@@ -28358,7 +28358,7 @@
         <p:spPr>
           <a:xfrm>
             <a:off x="3785616" y="3591128"/>
-            <a:ext cx="230514" cy="110352"/>
+            <a:ext cx="232279" cy="110352"/>
           </a:xfrm>
           <a:prstGeom prst="rect">
             <a:avLst/>
@@ -28495,7 +28495,7 @@
         <p:spPr>
           <a:xfrm>
             <a:off x="3785616" y="3831024"/>
-            <a:ext cx="227415" cy="110352"/>
+            <a:ext cx="227812" cy="110352"/>
           </a:xfrm>
           <a:prstGeom prst="rect">
             <a:avLst/>
@@ -28632,7 +28632,7 @@
         <p:spPr>
           <a:xfrm>
             <a:off x="3785616" y="4070920"/>
-            <a:ext cx="222558" cy="110352"/>
+            <a:ext cx="223345" cy="110352"/>
           </a:xfrm>
           <a:prstGeom prst="rect">
             <a:avLst/>
@@ -28769,7 +28769,7 @@
         <p:spPr>
           <a:xfrm>
             <a:off x="3785616" y="4310815"/>
-            <a:ext cx="220801" cy="110352"/>
+            <a:ext cx="218878" cy="110352"/>
           </a:xfrm>
           <a:prstGeom prst="rect">
             <a:avLst/>
@@ -28906,7 +28906,7 @@
         <p:spPr>
           <a:xfrm>
             <a:off x="3785616" y="4550711"/>
-            <a:ext cx="212368" cy="110352"/>
+            <a:ext cx="214411" cy="110352"/>
           </a:xfrm>
           <a:prstGeom prst="rect">
             <a:avLst/>
@@ -29043,7 +29043,7 @@
         <p:spPr>
           <a:xfrm>
             <a:off x="3785616" y="4790606"/>
-            <a:ext cx="178083" cy="110352"/>
+            <a:ext cx="178676" cy="110352"/>
           </a:xfrm>
           <a:prstGeom prst="rect">
             <a:avLst/>
@@ -29165,7 +29165,7 @@
                 <a:ea typeface="Inter" pitchFamily="34" charset="-122"/>
                 <a:cs typeface="Inter" pitchFamily="34" charset="-120"/>
               </a:rPr>
-              <a:t>HONDA SPOKANE</a:t>
+              <a:t>HONDA FLAGSTAFF</a:t>
             </a:r>
             <a:endParaRPr lang="en-US" sz="1200" dirty="0"/>
           </a:p>
@@ -29180,7 +29180,7 @@
         <p:spPr>
           <a:xfrm>
             <a:off x="3785616" y="5030502"/>
-            <a:ext cx="171975" cy="110352"/>
+            <a:ext cx="174209" cy="110352"/>
           </a:xfrm>
           <a:prstGeom prst="rect">
             <a:avLst/>
@@ -29302,7 +29302,7 @@
                 <a:ea typeface="Inter" pitchFamily="34" charset="-122"/>
                 <a:cs typeface="Inter" pitchFamily="34" charset="-120"/>
               </a:rPr>
-              <a:t>HONDA FLAGSTAFF</a:t>
+              <a:t>HONDA SPOKANE</a:t>
             </a:r>
             <a:endParaRPr lang="en-US" sz="1200" dirty="0"/>
           </a:p>
@@ -29317,7 +29317,7 @@
         <p:spPr>
           <a:xfrm>
             <a:off x="3785616" y="5270397"/>
-            <a:ext cx="170724" cy="110352"/>
+            <a:ext cx="174209" cy="110352"/>
           </a:xfrm>
           <a:prstGeom prst="rect">
             <a:avLst/>
@@ -29361,7 +29361,7 @@
                 <a:ea typeface="Inter" pitchFamily="34" charset="-122"/>
                 <a:cs typeface="Inter" pitchFamily="34" charset="-120"/>
               </a:rPr>
-              <a:t>+3.8 pts</a:t>
+              <a:t>+3.9 pts</a:t>
             </a:r>
             <a:endParaRPr lang="en-US" sz="1200" dirty="0"/>
           </a:p>
@@ -29454,7 +29454,7 @@
         <p:spPr>
           <a:xfrm>
             <a:off x="3785616" y="5510293"/>
-            <a:ext cx="145782" cy="110352"/>
+            <a:ext cx="147408" cy="110352"/>
           </a:xfrm>
           <a:prstGeom prst="rect">
             <a:avLst/>
@@ -29591,7 +29591,7 @@
         <p:spPr>
           <a:xfrm>
             <a:off x="3785616" y="5750188"/>
-            <a:ext cx="144022" cy="110352"/>
+            <a:ext cx="142941" cy="110352"/>
           </a:xfrm>
           <a:prstGeom prst="rect">
             <a:avLst/>
@@ -29728,7 +29728,7 @@
         <p:spPr>
           <a:xfrm>
             <a:off x="9336024" y="1911860"/>
-            <a:ext cx="111949" cy="110352"/>
+            <a:ext cx="111672" cy="110352"/>
           </a:xfrm>
           <a:prstGeom prst="rect">
             <a:avLst/>
@@ -29865,7 +29865,7 @@
         <p:spPr>
           <a:xfrm>
             <a:off x="9336024" y="2151755"/>
-            <a:ext cx="76399" cy="110352"/>
+            <a:ext cx="75937" cy="110352"/>
           </a:xfrm>
           <a:prstGeom prst="rect">
             <a:avLst/>
@@ -30002,7 +30002,7 @@
         <p:spPr>
           <a:xfrm>
             <a:off x="9336024" y="2391651"/>
-            <a:ext cx="71229" cy="110352"/>
+            <a:ext cx="71470" cy="110352"/>
           </a:xfrm>
           <a:prstGeom prst="rect">
             <a:avLst/>
@@ -30139,7 +30139,7 @@
         <p:spPr>
           <a:xfrm>
             <a:off x="9336024" y="2631546"/>
-            <a:ext cx="27863" cy="110352"/>
+            <a:ext cx="26801" cy="110352"/>
           </a:xfrm>
           <a:prstGeom prst="rect">
             <a:avLst/>
@@ -30276,7 +30276,7 @@
         <p:spPr>
           <a:xfrm>
             <a:off x="9336024" y="2871442"/>
-            <a:ext cx="13338" cy="110352"/>
+            <a:ext cx="13401" cy="110352"/>
           </a:xfrm>
           <a:prstGeom prst="rect">
             <a:avLst/>
@@ -30457,7 +30457,7 @@
                 <a:ea typeface="Inter" pitchFamily="34" charset="-122"/>
                 <a:cs typeface="Inter" pitchFamily="34" charset="-120"/>
               </a:rPr>
-              <a:t>+0.0 pts</a:t>
+              <a:t>+0.1 pts</a:t>
             </a:r>
             <a:endParaRPr lang="en-US" sz="1200" dirty="0"/>
           </a:p>
@@ -30535,7 +30535,7 @@
                 <a:ea typeface="Inter" pitchFamily="34" charset="-122"/>
                 <a:cs typeface="Inter" pitchFamily="34" charset="-120"/>
               </a:rPr>
-              <a:t>HYUNDAI ST GEORGE</a:t>
+              <a:t>HYUNDAI PRESCOTT</a:t>
             </a:r>
             <a:endParaRPr lang="en-US" sz="1200" dirty="0"/>
           </a:p>
@@ -30549,7 +30549,7 @@
         </p:nvSpPr>
         <p:spPr>
           <a:xfrm>
-            <a:off x="9330933" y="3351233"/>
+            <a:off x="9331557" y="3351233"/>
             <a:ext cx="12802" cy="110352"/>
           </a:xfrm>
           <a:prstGeom prst="rect">
@@ -30672,7 +30672,7 @@
                 <a:ea typeface="Inter" pitchFamily="34" charset="-122"/>
                 <a:cs typeface="Inter" pitchFamily="34" charset="-120"/>
               </a:rPr>
-              <a:t>HYUNDAI PRESCOTT</a:t>
+              <a:t>HYUNDAI ST GEORGE</a:t>
             </a:r>
             <a:endParaRPr lang="en-US" sz="1200" dirty="0"/>
           </a:p>
@@ -30686,7 +30686,7 @@
         </p:nvSpPr>
         <p:spPr>
           <a:xfrm>
-            <a:off x="9329910" y="3591128"/>
+            <a:off x="9331557" y="3591128"/>
             <a:ext cx="12802" cy="110352"/>
           </a:xfrm>
           <a:prstGeom prst="rect">
@@ -30823,7 +30823,7 @@
         </p:nvSpPr>
         <p:spPr>
           <a:xfrm>
-            <a:off x="9325626" y="3831024"/>
+            <a:off x="9327090" y="3831024"/>
             <a:ext cx="12802" cy="110352"/>
           </a:xfrm>
           <a:prstGeom prst="rect">
@@ -30960,8 +30960,8 @@
         </p:nvSpPr>
         <p:spPr>
           <a:xfrm>
-            <a:off x="9288072" y="4070920"/>
-            <a:ext cx="47952" cy="110352"/>
+            <a:off x="9286888" y="4070920"/>
+            <a:ext cx="49136" cy="110352"/>
           </a:xfrm>
           <a:prstGeom prst="rect">
             <a:avLst/>
@@ -31097,8 +31097,8 @@
         </p:nvSpPr>
         <p:spPr>
           <a:xfrm>
-            <a:off x="9286667" y="4310815"/>
-            <a:ext cx="49357" cy="110352"/>
+            <a:off x="9286888" y="4310815"/>
+            <a:ext cx="49136" cy="110352"/>
           </a:xfrm>
           <a:prstGeom prst="rect">
             <a:avLst/>
@@ -31234,8 +31234,8 @@
         </p:nvSpPr>
         <p:spPr>
           <a:xfrm>
-            <a:off x="9232720" y="4550711"/>
-            <a:ext cx="103304" cy="110352"/>
+            <a:off x="9233285" y="4550711"/>
+            <a:ext cx="102739" cy="110352"/>
           </a:xfrm>
           <a:prstGeom prst="rect">
             <a:avLst/>
@@ -31371,8 +31371,8 @@
         </p:nvSpPr>
         <p:spPr>
           <a:xfrm>
-            <a:off x="9063013" y="4790606"/>
-            <a:ext cx="273011" cy="110352"/>
+            <a:off x="9063543" y="4790606"/>
+            <a:ext cx="272481" cy="110352"/>
           </a:xfrm>
           <a:prstGeom prst="rect">
             <a:avLst/>
@@ -31508,8 +31508,8 @@
         </p:nvSpPr>
         <p:spPr>
           <a:xfrm>
-            <a:off x="8903742" y="5030502"/>
-            <a:ext cx="432282" cy="110352"/>
+            <a:off x="8902735" y="5030502"/>
+            <a:ext cx="433289" cy="110352"/>
           </a:xfrm>
           <a:prstGeom prst="rect">
             <a:avLst/>
@@ -31645,8 +31645,8 @@
         </p:nvSpPr>
         <p:spPr>
           <a:xfrm>
-            <a:off x="8884924" y="5270397"/>
-            <a:ext cx="451100" cy="110352"/>
+            <a:off x="8884867" y="5270397"/>
+            <a:ext cx="451157" cy="110352"/>
           </a:xfrm>
           <a:prstGeom prst="rect">
             <a:avLst/>
@@ -32528,7 +32528,7 @@
                 <a:ea typeface="Inter" pitchFamily="34" charset="-122"/>
                 <a:cs typeface="Inter" pitchFamily="34" charset="-120"/>
               </a:rPr>
-              <a:t>+9.5 pts</a:t>
+              <a:t>+9.6 pts</a:t>
             </a:r>
             <a:endParaRPr lang="en-US" sz="1600" dirty="0"/>
           </a:p>
@@ -33003,7 +33003,7 @@
                 <a:ea typeface="Inter" pitchFamily="34" charset="-122"/>
                 <a:cs typeface="Inter" pitchFamily="34" charset="-120"/>
               </a:rPr>
-              <a:t>70.2%  →  </a:t>
+              <a:t>56.1%  →  </a:t>
             </a:r>
             <a:pPr indent="0" marL="0">
               <a:spcAft>
@@ -33020,7 +33020,7 @@
                 <a:ea typeface="Inter" pitchFamily="34" charset="-122"/>
                 <a:cs typeface="Inter" pitchFamily="34" charset="-120"/>
               </a:rPr>
-              <a:t>75.6%</a:t>
+              <a:t>61.6%</a:t>
             </a:r>
             <a:endParaRPr lang="en-US" sz="1400" dirty="0"/>
           </a:p>
@@ -33059,7 +33059,7 @@
                 <a:ea typeface="Inter" pitchFamily="34" charset="-122"/>
                 <a:cs typeface="Inter" pitchFamily="34" charset="-120"/>
               </a:rPr>
-              <a:t>+5.4 pts</a:t>
+              <a:t>+5.5 pts</a:t>
             </a:r>
             <a:endParaRPr lang="en-US" sz="1600" dirty="0"/>
           </a:p>
@@ -34297,7 +34297,7 @@
                 <a:ea typeface="Inter" pitchFamily="34" charset="-122"/>
                 <a:cs typeface="Inter" pitchFamily="34" charset="-120"/>
               </a:rPr>
-              <a:t>+16.3 pts</a:t>
+              <a:t>+16.2 pts</a:t>
             </a:r>
             <a:endParaRPr lang="en-US" sz="1600" dirty="0"/>
           </a:p>
@@ -34828,7 +34828,7 @@
                 <a:ea typeface="Inter" pitchFamily="34" charset="-122"/>
                 <a:cs typeface="Inter" pitchFamily="34" charset="-120"/>
               </a:rPr>
-              <a:t>+10.7 pts</a:t>
+              <a:t>+10.8 pts</a:t>
             </a:r>
             <a:endParaRPr lang="en-US" sz="1600" dirty="0"/>
           </a:p>
@@ -41367,7 +41367,7 @@
         <p:spPr>
           <a:xfrm>
             <a:off x="3785616" y="2151755"/>
-            <a:ext cx="522301" cy="110352"/>
+            <a:ext cx="522027" cy="110352"/>
           </a:xfrm>
           <a:prstGeom prst="rect">
             <a:avLst/>
@@ -41504,7 +41504,7 @@
         <p:spPr>
           <a:xfrm>
             <a:off x="3785616" y="2391651"/>
-            <a:ext cx="466019" cy="110352"/>
+            <a:ext cx="466344" cy="110352"/>
           </a:xfrm>
           <a:prstGeom prst="rect">
             <a:avLst/>
@@ -41641,7 +41641,7 @@
         <p:spPr>
           <a:xfrm>
             <a:off x="3785616" y="2631546"/>
-            <a:ext cx="318357" cy="110352"/>
+            <a:ext cx="317856" cy="110352"/>
           </a:xfrm>
           <a:prstGeom prst="rect">
             <a:avLst/>
@@ -41778,7 +41778,7 @@
         <p:spPr>
           <a:xfrm>
             <a:off x="3785616" y="2871442"/>
-            <a:ext cx="277139" cy="110352"/>
+            <a:ext cx="276094" cy="110352"/>
           </a:xfrm>
           <a:prstGeom prst="rect">
             <a:avLst/>
@@ -41915,7 +41915,7 @@
         <p:spPr>
           <a:xfrm>
             <a:off x="3785616" y="3111337"/>
-            <a:ext cx="194030" cy="110352"/>
+            <a:ext cx="194890" cy="110352"/>
           </a:xfrm>
           <a:prstGeom prst="rect">
             <a:avLst/>
@@ -42052,7 +42052,7 @@
         <p:spPr>
           <a:xfrm>
             <a:off x="3785616" y="3351233"/>
-            <a:ext cx="183450" cy="110352"/>
+            <a:ext cx="183289" cy="110352"/>
           </a:xfrm>
           <a:prstGeom prst="rect">
             <a:avLst/>
@@ -42189,7 +42189,7 @@
         <p:spPr>
           <a:xfrm>
             <a:off x="3785616" y="3591128"/>
-            <a:ext cx="169078" cy="110352"/>
+            <a:ext cx="169369" cy="110352"/>
           </a:xfrm>
           <a:prstGeom prst="rect">
             <a:avLst/>
@@ -42326,7 +42326,7 @@
         <p:spPr>
           <a:xfrm>
             <a:off x="3785616" y="3831024"/>
-            <a:ext cx="164481" cy="110352"/>
+            <a:ext cx="164728" cy="110352"/>
           </a:xfrm>
           <a:prstGeom prst="rect">
             <a:avLst/>
@@ -42463,7 +42463,7 @@
         <p:spPr>
           <a:xfrm>
             <a:off x="3785616" y="4070920"/>
-            <a:ext cx="146713" cy="110352"/>
+            <a:ext cx="146168" cy="110352"/>
           </a:xfrm>
           <a:prstGeom prst="rect">
             <a:avLst/>
@@ -42600,7 +42600,7 @@
         <p:spPr>
           <a:xfrm>
             <a:off x="3785616" y="4310815"/>
-            <a:ext cx="143918" cy="110352"/>
+            <a:ext cx="143847" cy="110352"/>
           </a:xfrm>
           <a:prstGeom prst="rect">
             <a:avLst/>
@@ -42737,7 +42737,7 @@
         <p:spPr>
           <a:xfrm>
             <a:off x="3785616" y="4550711"/>
-            <a:ext cx="139313" cy="110352"/>
+            <a:ext cx="139207" cy="110352"/>
           </a:xfrm>
           <a:prstGeom prst="rect">
             <a:avLst/>
@@ -42874,7 +42874,7 @@
         <p:spPr>
           <a:xfrm>
             <a:off x="3785616" y="4790606"/>
-            <a:ext cx="111722" cy="110352"/>
+            <a:ext cx="111366" cy="110352"/>
           </a:xfrm>
           <a:prstGeom prst="rect">
             <a:avLst/>
@@ -43011,7 +43011,7 @@
         <p:spPr>
           <a:xfrm>
             <a:off x="3785616" y="5030502"/>
-            <a:ext cx="108452" cy="110352"/>
+            <a:ext cx="109046" cy="110352"/>
           </a:xfrm>
           <a:prstGeom prst="rect">
             <a:avLst/>
@@ -43148,7 +43148,7 @@
         <p:spPr>
           <a:xfrm>
             <a:off x="3785616" y="5270397"/>
-            <a:ext cx="104888" cy="110352"/>
+            <a:ext cx="104405" cy="110352"/>
           </a:xfrm>
           <a:prstGeom prst="rect">
             <a:avLst/>
@@ -43270,7 +43270,7 @@
                 <a:ea typeface="Inter" pitchFamily="34" charset="-122"/>
                 <a:cs typeface="Inter" pitchFamily="34" charset="-120"/>
               </a:rPr>
-              <a:t>TOYOTA HENDERSON</a:t>
+              <a:t>AUDI HENDERSON</a:t>
             </a:r>
             <a:endParaRPr lang="en-US" sz="1200" dirty="0"/>
           </a:p>
@@ -43285,7 +43285,7 @@
         <p:spPr>
           <a:xfrm>
             <a:off x="3785616" y="5510293"/>
-            <a:ext cx="95711" cy="110352"/>
+            <a:ext cx="95125" cy="110352"/>
           </a:xfrm>
           <a:prstGeom prst="rect">
             <a:avLst/>
@@ -43407,7 +43407,7 @@
                 <a:ea typeface="Inter" pitchFamily="34" charset="-122"/>
                 <a:cs typeface="Inter" pitchFamily="34" charset="-120"/>
               </a:rPr>
-              <a:t>AUDI HENDERSON</a:t>
+              <a:t>TOYOTA HENDERSON</a:t>
             </a:r>
             <a:endParaRPr lang="en-US" sz="1200" dirty="0"/>
           </a:p>
@@ -43422,7 +43422,7 @@
         <p:spPr>
           <a:xfrm>
             <a:off x="3785616" y="5750188"/>
-            <a:ext cx="95177" cy="110352"/>
+            <a:ext cx="95125" cy="110352"/>
           </a:xfrm>
           <a:prstGeom prst="rect">
             <a:avLst/>
@@ -43559,7 +43559,7 @@
         <p:spPr>
           <a:xfrm>
             <a:off x="9336024" y="1911860"/>
-            <a:ext cx="90237" cy="110352"/>
+            <a:ext cx="90485" cy="110352"/>
           </a:xfrm>
           <a:prstGeom prst="rect">
             <a:avLst/>
@@ -43696,7 +43696,7 @@
         <p:spPr>
           <a:xfrm>
             <a:off x="9336024" y="2151755"/>
-            <a:ext cx="87077" cy="110352"/>
+            <a:ext cx="88165" cy="110352"/>
           </a:xfrm>
           <a:prstGeom prst="rect">
             <a:avLst/>
@@ -43740,7 +43740,7 @@
                 <a:ea typeface="Inter" pitchFamily="34" charset="-122"/>
                 <a:cs typeface="Inter" pitchFamily="34" charset="-120"/>
               </a:rPr>
-              <a:t>+3.7 pts</a:t>
+              <a:t>+3.8 pts</a:t>
             </a:r>
             <a:endParaRPr lang="en-US" sz="1200" dirty="0"/>
           </a:p>
@@ -43833,7 +43833,7 @@
         <p:spPr>
           <a:xfrm>
             <a:off x="9336024" y="2391651"/>
-            <a:ext cx="54978" cy="110352"/>
+            <a:ext cx="55683" cy="110352"/>
           </a:xfrm>
           <a:prstGeom prst="rect">
             <a:avLst/>
@@ -43970,7 +43970,7 @@
         <p:spPr>
           <a:xfrm>
             <a:off x="9336024" y="2631546"/>
-            <a:ext cx="52170" cy="110352"/>
+            <a:ext cx="51043" cy="110352"/>
           </a:xfrm>
           <a:prstGeom prst="rect">
             <a:avLst/>
@@ -44107,7 +44107,7 @@
         <p:spPr>
           <a:xfrm>
             <a:off x="9336024" y="2871442"/>
-            <a:ext cx="24496" cy="110352"/>
+            <a:ext cx="25521" cy="110352"/>
           </a:xfrm>
           <a:prstGeom prst="rect">
             <a:avLst/>
@@ -44517,7 +44517,7 @@
         </p:nvSpPr>
         <p:spPr>
           <a:xfrm>
-            <a:off x="9326258" y="3591128"/>
+            <a:off x="9326744" y="3591128"/>
             <a:ext cx="12802" cy="110352"/>
           </a:xfrm>
           <a:prstGeom prst="rect">
@@ -44654,8 +44654,8 @@
         </p:nvSpPr>
         <p:spPr>
           <a:xfrm>
-            <a:off x="9301116" y="3831024"/>
-            <a:ext cx="34908" cy="110352"/>
+            <a:off x="9301222" y="3831024"/>
+            <a:ext cx="34802" cy="110352"/>
           </a:xfrm>
           <a:prstGeom prst="rect">
             <a:avLst/>
@@ -44791,8 +44791,8 @@
         </p:nvSpPr>
         <p:spPr>
           <a:xfrm>
-            <a:off x="9283123" y="4070920"/>
-            <a:ext cx="52901" cy="110352"/>
+            <a:off x="9282661" y="4070920"/>
+            <a:ext cx="53363" cy="110352"/>
           </a:xfrm>
           <a:prstGeom prst="rect">
             <a:avLst/>
@@ -44928,8 +44928,8 @@
         </p:nvSpPr>
         <p:spPr>
           <a:xfrm>
-            <a:off x="9263086" y="4310815"/>
-            <a:ext cx="72938" cy="110352"/>
+            <a:off x="9261780" y="4310815"/>
+            <a:ext cx="74244" cy="110352"/>
           </a:xfrm>
           <a:prstGeom prst="rect">
             <a:avLst/>
@@ -44973,7 +44973,7 @@
                 <a:ea typeface="Inter" pitchFamily="34" charset="-122"/>
                 <a:cs typeface="Inter" pitchFamily="34" charset="-120"/>
               </a:rPr>
-              <a:t>−3.1 pts</a:t>
+              <a:t>−3.2 pts</a:t>
             </a:r>
             <a:endParaRPr lang="en-US" sz="1200" dirty="0"/>
           </a:p>
@@ -45065,8 +45065,8 @@
         </p:nvSpPr>
         <p:spPr>
           <a:xfrm>
-            <a:off x="9244126" y="4550711"/>
-            <a:ext cx="91898" cy="110352"/>
+            <a:off x="9243219" y="4550711"/>
+            <a:ext cx="92805" cy="110352"/>
           </a:xfrm>
           <a:prstGeom prst="rect">
             <a:avLst/>
@@ -45202,8 +45202,8 @@
         </p:nvSpPr>
         <p:spPr>
           <a:xfrm>
-            <a:off x="9216373" y="4790606"/>
-            <a:ext cx="119651" cy="110352"/>
+            <a:off x="9217698" y="4790606"/>
+            <a:ext cx="118326" cy="110352"/>
           </a:xfrm>
           <a:prstGeom prst="rect">
             <a:avLst/>
@@ -45247,7 +45247,7 @@
                 <a:ea typeface="Inter" pitchFamily="34" charset="-122"/>
                 <a:cs typeface="Inter" pitchFamily="34" charset="-120"/>
               </a:rPr>
-              <a:t>−5.2 pts</a:t>
+              <a:t>−5.1 pts</a:t>
             </a:r>
             <a:endParaRPr lang="en-US" sz="1200" dirty="0"/>
           </a:p>
@@ -45339,8 +45339,8 @@
         </p:nvSpPr>
         <p:spPr>
           <a:xfrm>
-            <a:off x="9139860" y="5030502"/>
-            <a:ext cx="196164" cy="110352"/>
+            <a:off x="9141134" y="5030502"/>
+            <a:ext cx="194890" cy="110352"/>
           </a:xfrm>
           <a:prstGeom prst="rect">
             <a:avLst/>
@@ -45476,8 +45476,8 @@
         </p:nvSpPr>
         <p:spPr>
           <a:xfrm>
-            <a:off x="9081728" y="5270397"/>
-            <a:ext cx="254296" cy="110352"/>
+            <a:off x="9083131" y="5270397"/>
+            <a:ext cx="252893" cy="110352"/>
           </a:xfrm>
           <a:prstGeom prst="rect">
             <a:avLst/>
@@ -45613,8 +45613,8 @@
         </p:nvSpPr>
         <p:spPr>
           <a:xfrm>
-            <a:off x="8713274" y="5510293"/>
-            <a:ext cx="622750" cy="110352"/>
+            <a:off x="8714232" y="5510293"/>
+            <a:ext cx="621792" cy="110352"/>
           </a:xfrm>
           <a:prstGeom prst="rect">
             <a:avLst/>
@@ -47716,7 +47716,7 @@
                 <a:ea typeface="Inter" pitchFamily="34" charset="-122"/>
                 <a:cs typeface="Inter" pitchFamily="34" charset="-120"/>
               </a:rPr>
-              <a:t>−5.2 pts</a:t>
+              <a:t>−5.1 pts</a:t>
             </a:r>
             <a:endParaRPr lang="en-US" sz="1600" dirty="0"/>
           </a:p>
@@ -48188,7 +48188,7 @@
                 <a:ea typeface="Inter" pitchFamily="34" charset="-122"/>
                 <a:cs typeface="Inter" pitchFamily="34" charset="-120"/>
               </a:rPr>
-              <a:t>+23.6 pts</a:t>
+              <a:t>+23.7 pts</a:t>
             </a:r>
             <a:endParaRPr lang="en-US" sz="1600" dirty="0"/>
           </a:p>
@@ -48542,7 +48542,7 @@
                 <a:ea typeface="Inter" pitchFamily="34" charset="-122"/>
                 <a:cs typeface="Inter" pitchFamily="34" charset="-120"/>
               </a:rPr>
-              <a:t>+16.9 pts</a:t>
+              <a:t>+16.8 pts</a:t>
             </a:r>
             <a:endParaRPr lang="en-US" sz="1600" dirty="0"/>
           </a:p>

--- a/day2-deck/decks/Fixed Ops Profitability - House Style.pptx
+++ b/day2-deck/decks/Fixed Ops Profitability - House Style.pptx
@@ -6163,7 +6163,7 @@
           <a:p>
             <a:r>
               <a:rPr lang="en-US" dirty="0"/>
-              <a:t>Takeaway with the store call-outs (off the slide): Ask Lincoln, Acura and Nissan what changed. Ask Hyundai Prescott, Hyundai St George and VW St George what got in the way. Ask LR Reno, VW St George and Mazda what they started this year.Source: Qlik - Profit &amp; Loss. Jan-Sep. Same-store, INEOS excluded (opened 2026). P&amp;A department profit / P&amp;A department gross (P&amp;L Detail statement). Top and bottom five stores by change in Parts Net to Gross %, Jan-Sep 2026 vs 2025. Moving now: Jul-Sep 2026 vs Jan-Mar 2026, each store against itself; the group moved +5.3 pts on the same basis, so part of every store's change is seasonal. Green bar at the right of a row: the store is on both the top five vs last year and the top five moving now.Conversation starter: each top store says one thing they started doing; each bottom store says what got in the way and what they would try. The room trades ideas. Moving now: ask the top three what they started this year.</a:t>
+              <a:t>Takeaway with the store call-outs (off the slide): Ask Lincoln, Acura and Nissan what changed. Ask Hyundai Prescott, Hyundai St George and VW St George what got in the way. Ask LR Reno, VW St George and Mazda what they started this year.Source: Qlik - Profit &amp; Loss. Jan-Sep. Same-store, INEOS excluded (opened 2026). P&amp;A department profit / P&amp;A department gross (P&amp;L Detail statement). Top and bottom five stores by change in Parts Net to Gross %, Jan-Sep 2026 vs 2025. Moving now: Jul-Sep 2026 vs Jan-Mar 2026, each store against itself; the group moved +5.3 pts on the same basis, so part of every store's change is seasonal. Green bar at the right of a row: the store is on both the top five vs last year and the top five moving now. Blue bar: a turnaround, on the bottom five vs last year and the top five moving now.Conversation starter: each top store says one thing they started doing; each bottom store says what got in the way and what they would try. The room trades ideas. Moving now: ask the top three what they started this year.</a:t>
             </a:r>
             <a:endParaRPr lang="en-US" dirty="0"/>
           </a:p>
@@ -6515,7 +6515,7 @@
           <a:p>
             <a:r>
               <a:rPr lang="en-US" dirty="0"/>
-              <a:t>Takeaway with the store call-outs (off the slide): Ask Lincoln, Cadillac and LR Reno what changed. Ask VW St George, Kia St George and VW Henderson what got in the way. Ask LR Henderson, LR Reno and Kia St George what they started this year.Source: Qlik - Profit &amp; Loss. Jan-Sep. Same-store, INEOS excluded (opened 2026). P&amp;L line Fixed Ops Absorption % = Total Gross Profit - Fixed Ops / Fixed Expenses. GMC Prescott body shop taken out (its gross and its body shop fixed expenses), as everywhere in the deck (Noah, Oct 28). Top and bottom five stores by change in Fixed Ops Absorption %, Jan-Sep 2026 vs 2025. Moving now: Jul-Sep 2026 vs Jan-Mar 2026, each store against itself; the group moved +4.4 pts on the same basis, so part of every store's change is seasonal. Green bar at the right of a row: the store is on both the top five vs last year and the top five moving now.Conversation starter: each top store says one thing they started doing; each bottom store says what got in the way and what they would try. The room trades ideas. Moving now: ask the top three what they started this year.</a:t>
+              <a:t>Takeaway with the store call-outs (off the slide): Ask Lincoln, Cadillac and LR Reno what changed. Ask VW St George, Kia St George and VW Henderson what got in the way. Ask LR Henderson, LR Reno and Kia St George what they started this year.Source: Qlik - Profit &amp; Loss. Jan-Sep. Same-store, INEOS excluded (opened 2026). P&amp;L line Fixed Ops Absorption % = Total Gross Profit - Fixed Ops / Fixed Expenses. GMC Prescott body shop taken out (its gross and its body shop fixed expenses), as everywhere in the deck (Noah, Oct 28). Top and bottom five stores by change in Fixed Ops Absorption %, Jan-Sep 2026 vs 2025. Moving now: Jul-Sep 2026 vs Jan-Mar 2026, each store against itself; the group moved +4.4 pts on the same basis, so part of every store's change is seasonal. Green bar at the right of a row: the store is on both the top five vs last year and the top five moving now. Blue bar: a turnaround, on the bottom five vs last year and the top five moving now.Conversation starter: each top store says one thing they started doing; each bottom store says what got in the way and what they would try. The room trades ideas. Moving now: ask the top three what they started this year.</a:t>
             </a:r>
             <a:endParaRPr lang="en-US" dirty="0"/>
           </a:p>
@@ -6867,7 +6867,7 @@
           <a:p>
             <a:r>
               <a:rPr lang="en-US" dirty="0"/>
-              <a:t>Takeaway with the store call-outs (off the slide): Ask Hyundai Prescott, Lincoln and LR Reno what changed. Ask VW St George, Kia St George and Mazda what got in the way. Ask Hyundai Prescott, LR Henderson and LR Reno what they started this year.Source: Qlik - Profit &amp; Loss. Jan-Sep. Same-store, INEOS excluded (opened 2026). Mechanical department profit / mechanical department gross (P&amp;L Detail statement). Body shop is its own department and is not included. Top and bottom five stores by change in Service Net to Gross %, Jan-Sep 2026 vs 2025. Moving now: Jul-Sep 2026 vs Jan-Mar 2026, each store against itself; the group moved +1.0 pts on the same basis, so part of every store's change is seasonal. Green bar at the right of a row: the store is on both the top five vs last year and the top five moving now.Conversation starter: each top store says one thing they started doing; each bottom store says what got in the way and what they would try. The room trades ideas. Moving now: ask the top three what they started this year.</a:t>
+              <a:t>Takeaway with the store call-outs (off the slide): Ask Hyundai Prescott, Lincoln and LR Reno what changed. Ask VW St George, Kia St George and Mazda what got in the way. Ask Hyundai Prescott, LR Henderson and LR Reno what they started this year.Source: Qlik - Profit &amp; Loss. Jan-Sep. Same-store, INEOS excluded (opened 2026). Mechanical department profit / mechanical department gross (P&amp;L Detail statement). Body shop is its own department and is not included. Top and bottom five stores by change in Service Net to Gross %, Jan-Sep 2026 vs 2025. Moving now: Jul-Sep 2026 vs Jan-Mar 2026, each store against itself; the group moved +1.0 pts on the same basis, so part of every store's change is seasonal. Green bar at the right of a row: the store is on both the top five vs last year and the top five moving now. Blue bar: a turnaround, on the bottom five vs last year and the top five moving now.Conversation starter: each top store says one thing they started doing; each bottom store says what got in the way and what they would try. The room trades ideas. Moving now: ask the top three what they started this year.</a:t>
             </a:r>
             <a:endParaRPr lang="en-US" dirty="0"/>
           </a:p>

--- a/day2-deck/decks/Fixed Ops Profitability - House Style.pptx
+++ b/day2-deck/decks/Fixed Ops Profitability - House Style.pptx
@@ -251,31 +251,31 @@
                 <c:formatCode>General</c:formatCode>
                 <c:ptCount val="12"/>
                 <c:pt idx="0">
+                  <c:v>74.8</c:v>
+                </c:pt>
+                <c:pt idx="1">
                   <c:v>74.5</c:v>
                 </c:pt>
-                <c:pt idx="1">
-                  <c:v>74.2</c:v>
-                </c:pt>
                 <c:pt idx="2">
-                  <c:v>78.2</c:v>
+                  <c:v>78.5</c:v>
                 </c:pt>
                 <c:pt idx="3">
+                  <c:v>79.6</c:v>
+                </c:pt>
+                <c:pt idx="4">
+                  <c:v>75.4</c:v>
+                </c:pt>
+                <c:pt idx="5">
                   <c:v>79.2</c:v>
                 </c:pt>
-                <c:pt idx="4">
-                  <c:v>75.2</c:v>
-                </c:pt>
-                <c:pt idx="5">
-                  <c:v>79</c:v>
-                </c:pt>
                 <c:pt idx="6">
-                  <c:v>82.9</c:v>
+                  <c:v>83</c:v>
                 </c:pt>
                 <c:pt idx="7">
-                  <c:v>79.8</c:v>
+                  <c:v>79.9</c:v>
                 </c:pt>
                 <c:pt idx="8">
-                  <c:v>77.5</c:v>
+                  <c:v>77.6</c:v>
                 </c:pt>
                 <c:pt idx="9">
                   <c:v/>
@@ -3062,25 +3062,25 @@
                   <c:v/>
                 </c:pt>
                 <c:pt idx="2">
-                  <c:v>78.2</c:v>
+                  <c:v>78.5</c:v>
                 </c:pt>
                 <c:pt idx="3">
-                  <c:v>79.2</c:v>
+                  <c:v>79.6</c:v>
                 </c:pt>
                 <c:pt idx="4">
                   <c:v/>
                 </c:pt>
                 <c:pt idx="5">
-                  <c:v>79</c:v>
+                  <c:v>79.2</c:v>
                 </c:pt>
                 <c:pt idx="6">
-                  <c:v>82.9</c:v>
+                  <c:v>83</c:v>
                 </c:pt>
                 <c:pt idx="7">
-                  <c:v>79.8</c:v>
+                  <c:v>79.9</c:v>
                 </c:pt>
                 <c:pt idx="8">
-                  <c:v>77.5</c:v>
+                  <c:v>77.6</c:v>
                 </c:pt>
                 <c:pt idx="9">
                   <c:v/>
@@ -3366,10 +3366,10 @@
                 <c:formatCode>General</c:formatCode>
                 <c:ptCount val="12"/>
                 <c:pt idx="0">
-                  <c:v>74.5</c:v>
+                  <c:v>74.8</c:v>
                 </c:pt>
                 <c:pt idx="1">
-                  <c:v>74.2</c:v>
+                  <c:v>74.5</c:v>
                 </c:pt>
                 <c:pt idx="2">
                   <c:v/>
@@ -3378,7 +3378,7 @@
                   <c:v/>
                 </c:pt>
                 <c:pt idx="4">
-                  <c:v>75.2</c:v>
+                  <c:v>75.4</c:v>
                 </c:pt>
                 <c:pt idx="5">
                   <c:v/>
@@ -3676,10 +3676,10 @@
                 <c:formatCode>General</c:formatCode>
                 <c:ptCount val="12"/>
                 <c:pt idx="0">
-                  <c:v>76.9</c:v>
+                  <c:v>77</c:v>
                 </c:pt>
                 <c:pt idx="1">
-                  <c:v>74.9</c:v>
+                  <c:v>75.1</c:v>
                 </c:pt>
                 <c:pt idx="2">
                   <c:v/>
@@ -3688,7 +3688,7 @@
                   <c:v/>
                 </c:pt>
                 <c:pt idx="4">
-                  <c:v>76.7</c:v>
+                  <c:v>76.9</c:v>
                 </c:pt>
                 <c:pt idx="5">
                   <c:v/>
@@ -3703,13 +3703,13 @@
                   <c:v/>
                 </c:pt>
                 <c:pt idx="9">
-                  <c:v>81.6</c:v>
+                  <c:v>82</c:v>
                 </c:pt>
                 <c:pt idx="10">
                   <c:v/>
                 </c:pt>
                 <c:pt idx="11">
-                  <c:v>74.5</c:v>
+                  <c:v>74.6</c:v>
                 </c:pt>
               </c:numCache>
             </c:numRef>
@@ -3992,31 +3992,31 @@
                   <c:v/>
                 </c:pt>
                 <c:pt idx="2">
-                  <c:v>74</c:v>
+                  <c:v>74.1</c:v>
                 </c:pt>
                 <c:pt idx="3">
-                  <c:v>76</c:v>
+                  <c:v>76.3</c:v>
                 </c:pt>
                 <c:pt idx="4">
                   <c:v/>
                 </c:pt>
                 <c:pt idx="5">
-                  <c:v>77.6</c:v>
+                  <c:v>77.8</c:v>
                 </c:pt>
                 <c:pt idx="6">
-                  <c:v>78.2</c:v>
+                  <c:v>78.4</c:v>
                 </c:pt>
                 <c:pt idx="7">
-                  <c:v>75.6</c:v>
+                  <c:v>75.9</c:v>
                 </c:pt>
                 <c:pt idx="8">
-                  <c:v>72.4</c:v>
+                  <c:v>72.7</c:v>
                 </c:pt>
                 <c:pt idx="9">
                   <c:v/>
                 </c:pt>
                 <c:pt idx="10">
-                  <c:v>73.1</c:v>
+                  <c:v>73.4</c:v>
                 </c:pt>
                 <c:pt idx="11">
                   <c:v/>
@@ -4299,40 +4299,40 @@
                 <c:formatCode>General</c:formatCode>
                 <c:ptCount val="12"/>
                 <c:pt idx="0">
+                  <c:v>77</c:v>
+                </c:pt>
+                <c:pt idx="1">
+                  <c:v>75.1</c:v>
+                </c:pt>
+                <c:pt idx="2">
+                  <c:v>74.1</c:v>
+                </c:pt>
+                <c:pt idx="3">
+                  <c:v>76.3</c:v>
+                </c:pt>
+                <c:pt idx="4">
                   <c:v>76.9</c:v>
                 </c:pt>
-                <c:pt idx="1">
-                  <c:v>74.9</c:v>
-                </c:pt>
-                <c:pt idx="2">
-                  <c:v>74</c:v>
-                </c:pt>
-                <c:pt idx="3">
-                  <c:v>76</c:v>
-                </c:pt>
-                <c:pt idx="4">
-                  <c:v>76.7</c:v>
-                </c:pt>
                 <c:pt idx="5">
-                  <c:v>77.6</c:v>
+                  <c:v>77.8</c:v>
                 </c:pt>
                 <c:pt idx="6">
-                  <c:v>78.2</c:v>
+                  <c:v>78.4</c:v>
                 </c:pt>
                 <c:pt idx="7">
-                  <c:v>75.6</c:v>
+                  <c:v>75.9</c:v>
                 </c:pt>
                 <c:pt idx="8">
-                  <c:v>72.4</c:v>
+                  <c:v>72.7</c:v>
                 </c:pt>
                 <c:pt idx="9">
-                  <c:v>81.6</c:v>
+                  <c:v>82</c:v>
                 </c:pt>
                 <c:pt idx="10">
-                  <c:v>73.1</c:v>
+                  <c:v>73.4</c:v>
                 </c:pt>
                 <c:pt idx="11">
-                  <c:v>74.5</c:v>
+                  <c:v>74.6</c:v>
                 </c:pt>
               </c:numCache>
             </c:numRef>
@@ -6251,7 +6251,7 @@
           <a:p>
             <a:r>
               <a:rPr lang="en-US" dirty="0"/>
-              <a:t>Source: Qlik - Profit &amp; Loss. Jan-Sep. Same-store, INEOS excluded (opened 2026). P&amp;L line Fixed Ops Absorption % = Total Gross Profit - Fixed Ops / Fixed Expenses. GMC Prescott body shop taken out (its gross and its body shop fixed expenses), as everywhere in the deck (Noah, Oct 28). YTD from YTD totals, not the mean of months. Store rows reconcile to the group on every input, both years. 2025 shown January-December; October-December pulled Oct 22 on the same basis (chart only).</a:t>
+              <a:t>Source: Qlik - Profit &amp; Loss. Jan-Sep. Same-store, INEOS excluded (opened 2026). P&amp;L line Fixed Ops Absorption % = Total Gross Profit - Fixed Ops / Fixed Expenses. GMC Prescott includes its body shop, as on the P&amp;L (Noah, Oct 28: kept in). YTD from YTD totals, not the mean of months. Store rows reconcile to the group on every input, both years. 2025 shown January-December; October-December pulled Oct 22 on the same basis (chart only).</a:t>
             </a:r>
             <a:endParaRPr lang="en-US" dirty="0"/>
           </a:p>
@@ -6339,7 +6339,7 @@
           <a:p>
             <a:r>
               <a:rPr lang="en-US" dirty="0"/>
-              <a:t>Takeaway with the store call-outs (off the slide): 15 of 33 stores at or above the 77.9% group, led by Audi Henderson at 106.6%. Hyundai Prescott is lowest at 46.2%.Source: Qlik - Profit &amp; Loss. Jan-Sep. Same-store, INEOS excluded (opened 2026). P&amp;L line Fixed Ops Absorption % = Total Gross Profit - Fixed Ops / Fixed Expenses. GMC Prescott body shop taken out (its gross and its body shop fixed expenses), as everywhere in the deck (Noah, Oct 28). Jan-Sep 2026 YTD. Green at or above the group, red below. Bars start at 30.0% so differences are visible.</a:t>
+              <a:t>Takeaway with the store call-outs (off the slide): 15 of 33 stores at or above the 78.1% group, led by Audi Henderson at 106.6%. Hyundai Prescott is lowest at 46.2%.Source: Qlik - Profit &amp; Loss. Jan-Sep. Same-store, INEOS excluded (opened 2026). P&amp;L line Fixed Ops Absorption % = Total Gross Profit - Fixed Ops / Fixed Expenses. GMC Prescott includes its body shop, as on the P&amp;L (Noah, Oct 28: kept in). Jan-Sep 2026 YTD. Green at or above the group, red below. Bars start at 30.0% so differences are visible.</a:t>
             </a:r>
             <a:endParaRPr lang="en-US" dirty="0"/>
           </a:p>
@@ -6515,7 +6515,7 @@
           <a:p>
             <a:r>
               <a:rPr lang="en-US" dirty="0"/>
-              <a:t>Takeaway with the store call-outs (off the slide): Ask Lincoln, Cadillac and LR Reno what changed. Ask VW St George, Kia St George and VW Henderson what got in the way. Ask LR Henderson, LR Reno and Kia St George what they started this year.Source: Qlik - Profit &amp; Loss. Jan-Sep. Same-store, INEOS excluded (opened 2026). P&amp;L line Fixed Ops Absorption % = Total Gross Profit - Fixed Ops / Fixed Expenses. GMC Prescott body shop taken out (its gross and its body shop fixed expenses), as everywhere in the deck (Noah, Oct 28). Top and bottom five stores by change in Fixed Ops Absorption %, Jan-Sep 2026 vs 2025. Moving now: Jul-Sep 2026 vs Jan-Mar 2026, each store against itself; the group moved +4.4 pts on the same basis, so part of every store's change is seasonal. Green bar at the right of a row: the store is on both the top five vs last year and the top five moving now. Blue bar: a turnaround, on the bottom five vs last year and the top five moving now.Conversation starter: each top store says one thing they started doing; each bottom store says what got in the way and what they would try. The room trades ideas. Moving now: ask the top three what they started this year.</a:t>
+              <a:t>Takeaway with the store call-outs (off the slide): Ask Lincoln, Cadillac and LR Reno what changed. Ask VW St George, Kia St George and VW Henderson what got in the way. Ask LR Henderson, LR Reno and Kia St George what they started this year.Source: Qlik - Profit &amp; Loss. Jan-Sep. Same-store, INEOS excluded (opened 2026). P&amp;L line Fixed Ops Absorption % = Total Gross Profit - Fixed Ops / Fixed Expenses. GMC Prescott includes its body shop, as on the P&amp;L (Noah, Oct 28: kept in). Top and bottom five stores by change in Fixed Ops Absorption %, Jan-Sep 2026 vs 2025. Moving now: Jul-Sep 2026 vs Jan-Mar 2026, each store against itself; the group moved +4.2 pts on the same basis, so part of every store's change is seasonal. Green bar at the right of a row: the store is on both the top five vs last year and the top five moving now. Blue bar: a turnaround, on the bottom five vs last year and the top five moving now.Conversation starter: each top store says one thing they started doing; each bottom store says what got in the way and what they would try. The room trades ideas. Moving now: ask the top three what they started this year.</a:t>
             </a:r>
             <a:endParaRPr lang="en-US" dirty="0"/>
           </a:p>
@@ -21426,7 +21426,7 @@
                 <a:ea typeface="Inter" pitchFamily="34" charset="-122"/>
                 <a:cs typeface="Inter" pitchFamily="34" charset="-120"/>
               </a:rPr>
-              <a:t>75.8%</a:t>
+              <a:t>76.0%</a:t>
             </a:r>
             <a:endParaRPr lang="en-US" sz="3000" dirty="0"/>
           </a:p>
@@ -21504,7 +21504,7 @@
                 <a:ea typeface="Inter" pitchFamily="34" charset="-122"/>
                 <a:cs typeface="Inter" pitchFamily="34" charset="-120"/>
               </a:rPr>
-              <a:t>77.9%</a:t>
+              <a:t>78.1%</a:t>
             </a:r>
             <a:endParaRPr lang="en-US" sz="3000" dirty="0"/>
           </a:p>
@@ -22052,7 +22052,7 @@
                 <a:ea typeface="Inter" pitchFamily="34" charset="-122"/>
                 <a:cs typeface="Inter" pitchFamily="34" charset="-120"/>
               </a:rPr>
-              <a:t>Up 2.1 pts to 77.9%, ahead of 2025 in six of nine months. Fixed gross grew 4.1%; fixed expenses 1.4%.</a:t>
+              <a:t>Up 2.1 pts to 78.1%, ahead of 2025 in six of nine months. Fixed gross grew 4.1%; fixed expenses 1.3%.</a:t>
             </a:r>
             <a:endParaRPr lang="en-US" sz="1550" dirty="0"/>
           </a:p>
@@ -22359,7 +22359,7 @@
                 <a:ea typeface="Inter" pitchFamily="34" charset="-122"/>
                 <a:cs typeface="Inter" pitchFamily="34" charset="-120"/>
               </a:rPr>
-              <a:t>77.9%</a:t>
+              <a:t>78.1%</a:t>
             </a:r>
             <a:endParaRPr lang="en-US" sz="2000" dirty="0"/>
           </a:p>
@@ -24629,7 +24629,7 @@
                 <a:ea typeface="Inter" pitchFamily="34" charset="-122"/>
                 <a:cs typeface="Inter" pitchFamily="34" charset="-120"/>
               </a:rPr>
-              <a:t>LEXUS</a:t>
+              <a:t>GMC PRESCOTT</a:t>
             </a:r>
             <a:endParaRPr lang="en-US" sz="1200" dirty="0"/>
           </a:p>
@@ -24644,7 +24644,7 @@
         <p:spPr>
           <a:xfrm>
             <a:off x="3008376" y="5745390"/>
-            <a:ext cx="1007915" cy="119948"/>
+            <a:ext cx="1007984" cy="119948"/>
           </a:xfrm>
           <a:prstGeom prst="rect">
             <a:avLst/>
@@ -24766,7 +24766,7 @@
                 <a:ea typeface="Inter" pitchFamily="34" charset="-122"/>
                 <a:cs typeface="Inter" pitchFamily="34" charset="-120"/>
               </a:rPr>
-              <a:t>LR HENDERSON</a:t>
+              <a:t>LEXUS</a:t>
             </a:r>
             <a:endParaRPr lang="en-US" sz="1200" dirty="0"/>
           </a:p>
@@ -24781,7 +24781,7 @@
         <p:spPr>
           <a:xfrm>
             <a:off x="8558784" y="1907062"/>
-            <a:ext cx="979751" cy="119948"/>
+            <a:ext cx="1007915" cy="119948"/>
           </a:xfrm>
           <a:prstGeom prst="rect">
             <a:avLst/>
@@ -24825,7 +24825,7 @@
                 <a:ea typeface="Inter" pitchFamily="34" charset="-122"/>
                 <a:cs typeface="Inter" pitchFamily="34" charset="-120"/>
               </a:rPr>
-              <a:t>74.4%</a:t>
+              <a:t>75.6%</a:t>
             </a:r>
             <a:endParaRPr lang="en-US" sz="1200" dirty="0"/>
           </a:p>
@@ -24903,7 +24903,7 @@
                 <a:ea typeface="Inter" pitchFamily="34" charset="-122"/>
                 <a:cs typeface="Inter" pitchFamily="34" charset="-120"/>
               </a:rPr>
-              <a:t>TOYOTA SPOKANE</a:t>
+              <a:t>LR HENDERSON</a:t>
             </a:r>
             <a:endParaRPr lang="en-US" sz="1200" dirty="0"/>
           </a:p>
@@ -24918,7 +24918,7 @@
         <p:spPr>
           <a:xfrm>
             <a:off x="8558784" y="2146957"/>
-            <a:ext cx="956432" cy="119948"/>
+            <a:ext cx="979751" cy="119948"/>
           </a:xfrm>
           <a:prstGeom prst="rect">
             <a:avLst/>
@@ -24962,7 +24962,7 @@
                 <a:ea typeface="Inter" pitchFamily="34" charset="-122"/>
                 <a:cs typeface="Inter" pitchFamily="34" charset="-120"/>
               </a:rPr>
-              <a:t>73.3%</a:t>
+              <a:t>74.4%</a:t>
             </a:r>
             <a:endParaRPr lang="en-US" sz="1200" dirty="0"/>
           </a:p>
@@ -25040,7 +25040,7 @@
                 <a:ea typeface="Inter" pitchFamily="34" charset="-122"/>
                 <a:cs typeface="Inter" pitchFamily="34" charset="-120"/>
               </a:rPr>
-              <a:t>NISSAN</a:t>
+              <a:t>TOYOTA SPOKANE</a:t>
             </a:r>
             <a:endParaRPr lang="en-US" sz="1200" dirty="0"/>
           </a:p>
@@ -25055,7 +25055,7 @@
         <p:spPr>
           <a:xfrm>
             <a:off x="8558784" y="2386853"/>
-            <a:ext cx="897553" cy="119948"/>
+            <a:ext cx="956432" cy="119948"/>
           </a:xfrm>
           <a:prstGeom prst="rect">
             <a:avLst/>
@@ -25099,7 +25099,7 @@
                 <a:ea typeface="Inter" pitchFamily="34" charset="-122"/>
                 <a:cs typeface="Inter" pitchFamily="34" charset="-120"/>
               </a:rPr>
-              <a:t>70.6%</a:t>
+              <a:t>73.3%</a:t>
             </a:r>
             <a:endParaRPr lang="en-US" sz="1200" dirty="0"/>
           </a:p>
@@ -25177,7 +25177,7 @@
                 <a:ea typeface="Inter" pitchFamily="34" charset="-122"/>
                 <a:cs typeface="Inter" pitchFamily="34" charset="-120"/>
               </a:rPr>
-              <a:t>TOYOTA PRESCOTT</a:t>
+              <a:t>NISSAN</a:t>
             </a:r>
             <a:endParaRPr lang="en-US" sz="1200" dirty="0"/>
           </a:p>
@@ -25192,7 +25192,7 @@
         <p:spPr>
           <a:xfrm>
             <a:off x="8558784" y="2626748"/>
-            <a:ext cx="890311" cy="119948"/>
+            <a:ext cx="897553" cy="119948"/>
           </a:xfrm>
           <a:prstGeom prst="rect">
             <a:avLst/>
@@ -25236,7 +25236,7 @@
                 <a:ea typeface="Inter" pitchFamily="34" charset="-122"/>
                 <a:cs typeface="Inter" pitchFamily="34" charset="-120"/>
               </a:rPr>
-              <a:t>70.3%</a:t>
+              <a:t>70.6%</a:t>
             </a:r>
             <a:endParaRPr lang="en-US" sz="1200" dirty="0"/>
           </a:p>
@@ -25314,7 +25314,7 @@
                 <a:ea typeface="Inter" pitchFamily="34" charset="-122"/>
                 <a:cs typeface="Inter" pitchFamily="34" charset="-120"/>
               </a:rPr>
-              <a:t>TOYOTA FLAGSTAFF</a:t>
+              <a:t>TOYOTA PRESCOTT</a:t>
             </a:r>
             <a:endParaRPr lang="en-US" sz="1200" dirty="0"/>
           </a:p>
@@ -25329,7 +25329,7 @@
         <p:spPr>
           <a:xfrm>
             <a:off x="8558784" y="2866644"/>
-            <a:ext cx="883510" cy="119948"/>
+            <a:ext cx="890311" cy="119948"/>
           </a:xfrm>
           <a:prstGeom prst="rect">
             <a:avLst/>
@@ -25373,7 +25373,7 @@
                 <a:ea typeface="Inter" pitchFamily="34" charset="-122"/>
                 <a:cs typeface="Inter" pitchFamily="34" charset="-120"/>
               </a:rPr>
-              <a:t>70.0%</a:t>
+              <a:t>70.3%</a:t>
             </a:r>
             <a:endParaRPr lang="en-US" sz="1200" dirty="0"/>
           </a:p>
@@ -25451,7 +25451,7 @@
                 <a:ea typeface="Inter" pitchFamily="34" charset="-122"/>
                 <a:cs typeface="Inter" pitchFamily="34" charset="-120"/>
               </a:rPr>
-              <a:t>CHEVY LV</a:t>
+              <a:t>TOYOTA FLAGSTAFF</a:t>
             </a:r>
             <a:endParaRPr lang="en-US" sz="1200" dirty="0"/>
           </a:p>
@@ -25466,7 +25466,7 @@
         <p:spPr>
           <a:xfrm>
             <a:off x="8558784" y="3106540"/>
-            <a:ext cx="860120" cy="119948"/>
+            <a:ext cx="883510" cy="119948"/>
           </a:xfrm>
           <a:prstGeom prst="rect">
             <a:avLst/>
@@ -25510,7 +25510,7 @@
                 <a:ea typeface="Inter" pitchFamily="34" charset="-122"/>
                 <a:cs typeface="Inter" pitchFamily="34" charset="-120"/>
               </a:rPr>
-              <a:t>68.9%</a:t>
+              <a:t>70.0%</a:t>
             </a:r>
             <a:endParaRPr lang="en-US" sz="1200" dirty="0"/>
           </a:p>
@@ -25588,7 +25588,7 @@
                 <a:ea typeface="Inter" pitchFamily="34" charset="-122"/>
                 <a:cs typeface="Inter" pitchFamily="34" charset="-120"/>
               </a:rPr>
-              <a:t>KIA ST GEORGE</a:t>
+              <a:t>CHEVY LV</a:t>
             </a:r>
             <a:endParaRPr lang="en-US" sz="1200" dirty="0"/>
           </a:p>
@@ -25603,7 +25603,7 @@
         <p:spPr>
           <a:xfrm>
             <a:off x="8558784" y="3346435"/>
-            <a:ext cx="791399" cy="119948"/>
+            <a:ext cx="860120" cy="119948"/>
           </a:xfrm>
           <a:prstGeom prst="rect">
             <a:avLst/>
@@ -25647,7 +25647,7 @@
                 <a:ea typeface="Inter" pitchFamily="34" charset="-122"/>
                 <a:cs typeface="Inter" pitchFamily="34" charset="-120"/>
               </a:rPr>
-              <a:t>65.8%</a:t>
+              <a:t>68.9%</a:t>
             </a:r>
             <a:endParaRPr lang="en-US" sz="1200" dirty="0"/>
           </a:p>
@@ -25725,7 +25725,7 @@
                 <a:ea typeface="Inter" pitchFamily="34" charset="-122"/>
                 <a:cs typeface="Inter" pitchFamily="34" charset="-120"/>
               </a:rPr>
-              <a:t>CHEVY GMC BULLHEAD</a:t>
+              <a:t>KIA ST GEORGE</a:t>
             </a:r>
             <a:endParaRPr lang="en-US" sz="1200" dirty="0"/>
           </a:p>
@@ -25740,7 +25740,7 @@
         <p:spPr>
           <a:xfrm>
             <a:off x="8558784" y="3586331"/>
-            <a:ext cx="774373" cy="119948"/>
+            <a:ext cx="791399" cy="119948"/>
           </a:xfrm>
           <a:prstGeom prst="rect">
             <a:avLst/>
@@ -25784,7 +25784,7 @@
                 <a:ea typeface="Inter" pitchFamily="34" charset="-122"/>
                 <a:cs typeface="Inter" pitchFamily="34" charset="-120"/>
               </a:rPr>
-              <a:t>65.1%</a:t>
+              <a:t>65.8%</a:t>
             </a:r>
             <a:endParaRPr lang="en-US" sz="1200" dirty="0"/>
           </a:p>
@@ -25862,7 +25862,7 @@
                 <a:ea typeface="Inter" pitchFamily="34" charset="-122"/>
                 <a:cs typeface="Inter" pitchFamily="34" charset="-120"/>
               </a:rPr>
-              <a:t>HONDA FLAGSTAFF</a:t>
+              <a:t>CHEVY GMC BULLHEAD</a:t>
             </a:r>
             <a:endParaRPr lang="en-US" sz="1200" dirty="0"/>
           </a:p>
@@ -25877,7 +25877,7 @@
         <p:spPr>
           <a:xfrm>
             <a:off x="8558784" y="3826226"/>
-            <a:ext cx="743729" cy="119948"/>
+            <a:ext cx="774373" cy="119948"/>
           </a:xfrm>
           <a:prstGeom prst="rect">
             <a:avLst/>
@@ -25921,7 +25921,7 @@
                 <a:ea typeface="Inter" pitchFamily="34" charset="-122"/>
                 <a:cs typeface="Inter" pitchFamily="34" charset="-120"/>
               </a:rPr>
-              <a:t>63.7%</a:t>
+              <a:t>65.1%</a:t>
             </a:r>
             <a:endParaRPr lang="en-US" sz="1200" dirty="0"/>
           </a:p>
@@ -25999,7 +25999,7 @@
                 <a:ea typeface="Inter" pitchFamily="34" charset="-122"/>
                 <a:cs typeface="Inter" pitchFamily="34" charset="-120"/>
               </a:rPr>
-              <a:t>ACURA</a:t>
+              <a:t>HONDA FLAGSTAFF</a:t>
             </a:r>
             <a:endParaRPr lang="en-US" sz="1200" dirty="0"/>
           </a:p>
@@ -26014,7 +26014,7 @@
         <p:spPr>
           <a:xfrm>
             <a:off x="8558784" y="4066122"/>
-            <a:ext cx="730224" cy="119948"/>
+            <a:ext cx="743729" cy="119948"/>
           </a:xfrm>
           <a:prstGeom prst="rect">
             <a:avLst/>
@@ -26058,7 +26058,7 @@
                 <a:ea typeface="Inter" pitchFamily="34" charset="-122"/>
                 <a:cs typeface="Inter" pitchFamily="34" charset="-120"/>
               </a:rPr>
-              <a:t>63.1%</a:t>
+              <a:t>63.7%</a:t>
             </a:r>
             <a:endParaRPr lang="en-US" sz="1200" dirty="0"/>
           </a:p>
@@ -26136,7 +26136,7 @@
                 <a:ea typeface="Inter" pitchFamily="34" charset="-122"/>
                 <a:cs typeface="Inter" pitchFamily="34" charset="-120"/>
               </a:rPr>
-              <a:t>GMC PRESCOTT</a:t>
+              <a:t>ACURA</a:t>
             </a:r>
             <a:endParaRPr lang="en-US" sz="1200" dirty="0"/>
           </a:p>
@@ -26151,7 +26151,7 @@
         <p:spPr>
           <a:xfrm>
             <a:off x="8558784" y="4306017"/>
-            <a:ext cx="698295" cy="119948"/>
+            <a:ext cx="730224" cy="119948"/>
           </a:xfrm>
           <a:prstGeom prst="rect">
             <a:avLst/>
@@ -26195,7 +26195,7 @@
                 <a:ea typeface="Inter" pitchFamily="34" charset="-122"/>
                 <a:cs typeface="Inter" pitchFamily="34" charset="-120"/>
               </a:rPr>
-              <a:t>61.6%</a:t>
+              <a:t>63.1%</a:t>
             </a:r>
             <a:endParaRPr lang="en-US" sz="1200" dirty="0"/>
           </a:p>
@@ -26894,7 +26894,7 @@
         </p:nvSpPr>
         <p:spPr>
           <a:xfrm>
-            <a:off x="4059032" y="1847088"/>
+            <a:off x="4063635" y="1847088"/>
             <a:ext cx="14630" cy="4078224"/>
           </a:xfrm>
           <a:prstGeom prst="rect">
@@ -26914,7 +26914,7 @@
         </p:nvSpPr>
         <p:spPr>
           <a:xfrm>
-            <a:off x="9609440" y="1847088"/>
+            <a:off x="9614043" y="1847088"/>
             <a:ext cx="14630" cy="4078224"/>
           </a:xfrm>
           <a:prstGeom prst="rect">
@@ -26999,7 +26999,7 @@
                 <a:ea typeface="Inter" pitchFamily="34" charset="-122"/>
                 <a:cs typeface="Inter" pitchFamily="34" charset="-120"/>
               </a:rPr>
-              <a:t>15 of 33 stores at or above the 77.9% group.</a:t>
+              <a:t>15 of 33 stores at or above the 78.1% group.</a:t>
             </a:r>
             <a:endParaRPr lang="en-US" sz="1600" dirty="0"/>
           </a:p>
@@ -27947,7 +27947,7 @@
         <p:spPr>
           <a:xfrm>
             <a:off x="3785616" y="2871442"/>
-            <a:ext cx="245679" cy="110352"/>
+            <a:ext cx="241212" cy="110352"/>
           </a:xfrm>
           <a:prstGeom prst="rect">
             <a:avLst/>
@@ -27991,7 +27991,7 @@
                 <a:ea typeface="Inter" pitchFamily="34" charset="-122"/>
                 <a:cs typeface="Inter" pitchFamily="34" charset="-120"/>
               </a:rPr>
-              <a:t>+5.5 pts</a:t>
+              <a:t>+5.4 pts</a:t>
             </a:r>
             <a:endParaRPr lang="en-US" sz="1200" dirty="0"/>
           </a:p>
@@ -33003,7 +33003,7 @@
                 <a:ea typeface="Inter" pitchFamily="34" charset="-122"/>
                 <a:cs typeface="Inter" pitchFamily="34" charset="-120"/>
               </a:rPr>
-              <a:t>56.1%  →  </a:t>
+              <a:t>70.2%  →  </a:t>
             </a:r>
             <a:pPr indent="0" marL="0">
               <a:spcAft>
@@ -33020,7 +33020,7 @@
                 <a:ea typeface="Inter" pitchFamily="34" charset="-122"/>
                 <a:cs typeface="Inter" pitchFamily="34" charset="-120"/>
               </a:rPr>
-              <a:t>61.6%</a:t>
+              <a:t>75.6%</a:t>
             </a:r>
             <a:endParaRPr lang="en-US" sz="1400" dirty="0"/>
           </a:p>
@@ -33059,7 +33059,7 @@
                 <a:ea typeface="Inter" pitchFamily="34" charset="-122"/>
                 <a:cs typeface="Inter" pitchFamily="34" charset="-120"/>
               </a:rPr>
-              <a:t>+5.5 pts</a:t>
+              <a:t>+5.4 pts</a:t>
             </a:r>
             <a:endParaRPr lang="en-US" sz="1600" dirty="0"/>
           </a:p>
